--- a/Final/Figures/MoS2_band_structure.pptx
+++ b/Final/Figures/MoS2_band_structure.pptx
@@ -2,18 +2,18 @@
 <file path=ppt/presentation.xml><?xml version="1.0" encoding="utf-8"?>
 <p:presentation xmlns:a="http://schemas.openxmlformats.org/drawingml/2006/main" xmlns:r="http://schemas.openxmlformats.org/officeDocument/2006/relationships" xmlns:p="http://schemas.openxmlformats.org/presentationml/2006/main" saveSubsetFonts="1">
   <p:sldMasterIdLst>
-    <p:sldMasterId id="2147483648" r:id="rId1"/>
+    <p:sldMasterId id="2147483660" r:id="rId1"/>
   </p:sldMasterIdLst>
   <p:sldIdLst>
     <p:sldId id="256" r:id="rId2"/>
   </p:sldIdLst>
-  <p:sldSz cx="12192000" cy="6858000"/>
+  <p:sldSz cx="12192000" cy="5940425"/>
   <p:notesSz cx="6858000" cy="9144000"/>
   <p:defaultTextStyle>
     <a:defPPr>
-      <a:defRPr lang="zh-TW"/>
+      <a:defRPr lang="en-US"/>
     </a:defPPr>
-    <a:lvl1pPr marL="0" algn="l" defTabSz="914400" rtl="0" eaLnBrk="1" latinLnBrk="0" hangingPunct="1">
+    <a:lvl1pPr marL="0" algn="l" defTabSz="457200" rtl="0" eaLnBrk="1" latinLnBrk="0" hangingPunct="1">
       <a:defRPr sz="1800" kern="1200">
         <a:solidFill>
           <a:schemeClr val="tx1"/>
@@ -23,7 +23,7 @@
         <a:cs typeface="+mn-cs"/>
       </a:defRPr>
     </a:lvl1pPr>
-    <a:lvl2pPr marL="457200" algn="l" defTabSz="914400" rtl="0" eaLnBrk="1" latinLnBrk="0" hangingPunct="1">
+    <a:lvl2pPr marL="457200" algn="l" defTabSz="457200" rtl="0" eaLnBrk="1" latinLnBrk="0" hangingPunct="1">
       <a:defRPr sz="1800" kern="1200">
         <a:solidFill>
           <a:schemeClr val="tx1"/>
@@ -33,7 +33,7 @@
         <a:cs typeface="+mn-cs"/>
       </a:defRPr>
     </a:lvl2pPr>
-    <a:lvl3pPr marL="914400" algn="l" defTabSz="914400" rtl="0" eaLnBrk="1" latinLnBrk="0" hangingPunct="1">
+    <a:lvl3pPr marL="914400" algn="l" defTabSz="457200" rtl="0" eaLnBrk="1" latinLnBrk="0" hangingPunct="1">
       <a:defRPr sz="1800" kern="1200">
         <a:solidFill>
           <a:schemeClr val="tx1"/>
@@ -43,7 +43,7 @@
         <a:cs typeface="+mn-cs"/>
       </a:defRPr>
     </a:lvl3pPr>
-    <a:lvl4pPr marL="1371600" algn="l" defTabSz="914400" rtl="0" eaLnBrk="1" latinLnBrk="0" hangingPunct="1">
+    <a:lvl4pPr marL="1371600" algn="l" defTabSz="457200" rtl="0" eaLnBrk="1" latinLnBrk="0" hangingPunct="1">
       <a:defRPr sz="1800" kern="1200">
         <a:solidFill>
           <a:schemeClr val="tx1"/>
@@ -53,7 +53,7 @@
         <a:cs typeface="+mn-cs"/>
       </a:defRPr>
     </a:lvl4pPr>
-    <a:lvl5pPr marL="1828800" algn="l" defTabSz="914400" rtl="0" eaLnBrk="1" latinLnBrk="0" hangingPunct="1">
+    <a:lvl5pPr marL="1828800" algn="l" defTabSz="457200" rtl="0" eaLnBrk="1" latinLnBrk="0" hangingPunct="1">
       <a:defRPr sz="1800" kern="1200">
         <a:solidFill>
           <a:schemeClr val="tx1"/>
@@ -63,7 +63,7 @@
         <a:cs typeface="+mn-cs"/>
       </a:defRPr>
     </a:lvl5pPr>
-    <a:lvl6pPr marL="2286000" algn="l" defTabSz="914400" rtl="0" eaLnBrk="1" latinLnBrk="0" hangingPunct="1">
+    <a:lvl6pPr marL="2286000" algn="l" defTabSz="457200" rtl="0" eaLnBrk="1" latinLnBrk="0" hangingPunct="1">
       <a:defRPr sz="1800" kern="1200">
         <a:solidFill>
           <a:schemeClr val="tx1"/>
@@ -73,7 +73,7 @@
         <a:cs typeface="+mn-cs"/>
       </a:defRPr>
     </a:lvl6pPr>
-    <a:lvl7pPr marL="2743200" algn="l" defTabSz="914400" rtl="0" eaLnBrk="1" latinLnBrk="0" hangingPunct="1">
+    <a:lvl7pPr marL="2743200" algn="l" defTabSz="457200" rtl="0" eaLnBrk="1" latinLnBrk="0" hangingPunct="1">
       <a:defRPr sz="1800" kern="1200">
         <a:solidFill>
           <a:schemeClr val="tx1"/>
@@ -83,7 +83,7 @@
         <a:cs typeface="+mn-cs"/>
       </a:defRPr>
     </a:lvl7pPr>
-    <a:lvl8pPr marL="3200400" algn="l" defTabSz="914400" rtl="0" eaLnBrk="1" latinLnBrk="0" hangingPunct="1">
+    <a:lvl8pPr marL="3200400" algn="l" defTabSz="457200" rtl="0" eaLnBrk="1" latinLnBrk="0" hangingPunct="1">
       <a:defRPr sz="1800" kern="1200">
         <a:solidFill>
           <a:schemeClr val="tx1"/>
@@ -93,7 +93,7 @@
         <a:cs typeface="+mn-cs"/>
       </a:defRPr>
     </a:lvl8pPr>
-    <a:lvl9pPr marL="3657600" algn="l" defTabSz="914400" rtl="0" eaLnBrk="1" latinLnBrk="0" hangingPunct="1">
+    <a:lvl9pPr marL="3657600" algn="l" defTabSz="457200" rtl="0" eaLnBrk="1" latinLnBrk="0" hangingPunct="1">
       <a:defRPr sz="1800" kern="1200">
         <a:solidFill>
           <a:schemeClr val="tx1"/>
@@ -104,6 +104,11 @@
       </a:defRPr>
     </a:lvl9pPr>
   </p:defaultTextStyle>
+  <p:extLst>
+    <p:ext uri="{EFAFB233-063F-42B5-8137-9DF3F51BA10A}">
+      <p15:sldGuideLst xmlns:p15="http://schemas.microsoft.com/office/powerpoint/2012/main"/>
+    </p:ext>
+  </p:extLst>
 </p:presentation>
 </file>
 
@@ -126,13 +131,7 @@
       </p:grpSpPr>
       <p:sp>
         <p:nvSpPr>
-          <p:cNvPr id="2" name="標題 1">
-            <a:extLst>
-              <a:ext uri="{FF2B5EF4-FFF2-40B4-BE49-F238E27FC236}">
-                <a16:creationId xmlns:a16="http://schemas.microsoft.com/office/drawing/2014/main" id="{AA749189-71A2-488C-AF08-F0955153FBEE}"/>
-              </a:ext>
-            </a:extLst>
-          </p:cNvPr>
+          <p:cNvPr id="2" name="Title 1"/>
           <p:cNvSpPr>
             <a:spLocks noGrp="1"/>
           </p:cNvSpPr>
@@ -142,15 +141,15 @@
         </p:nvSpPr>
         <p:spPr>
           <a:xfrm>
-            <a:off x="1524000" y="1122363"/>
-            <a:ext cx="9144000" cy="2387600"/>
+            <a:off x="1524000" y="972195"/>
+            <a:ext cx="9144000" cy="2068148"/>
           </a:xfrm>
         </p:spPr>
         <p:txBody>
           <a:bodyPr anchor="b"/>
           <a:lstStyle>
             <a:lvl1pPr algn="ctr">
-              <a:defRPr sz="6000"/>
+              <a:defRPr sz="5197"/>
             </a:lvl1pPr>
           </a:lstStyle>
           <a:p>
@@ -158,18 +157,13 @@
               <a:rPr lang="zh-TW" altLang="en-US"/>
               <a:t>按一下以編輯母片標題樣式</a:t>
             </a:r>
+            <a:endParaRPr lang="en-US" dirty="0"/>
           </a:p>
         </p:txBody>
       </p:sp>
       <p:sp>
         <p:nvSpPr>
-          <p:cNvPr id="3" name="副標題 2">
-            <a:extLst>
-              <a:ext uri="{FF2B5EF4-FFF2-40B4-BE49-F238E27FC236}">
-                <a16:creationId xmlns:a16="http://schemas.microsoft.com/office/drawing/2014/main" id="{3B30AC7F-A4B9-451A-8E56-D7B8A990C8F2}"/>
-              </a:ext>
-            </a:extLst>
-          </p:cNvPr>
+          <p:cNvPr id="3" name="Subtitle 2"/>
           <p:cNvSpPr>
             <a:spLocks noGrp="1"/>
           </p:cNvSpPr>
@@ -179,8 +173,8 @@
         </p:nvSpPr>
         <p:spPr>
           <a:xfrm>
-            <a:off x="1524000" y="3602038"/>
-            <a:ext cx="9144000" cy="1655762"/>
+            <a:off x="1524000" y="3120099"/>
+            <a:ext cx="9144000" cy="1434227"/>
           </a:xfrm>
         </p:spPr>
         <p:txBody>
@@ -188,39 +182,39 @@
           <a:lstStyle>
             <a:lvl1pPr marL="0" indent="0" algn="ctr">
               <a:buNone/>
-              <a:defRPr sz="2400"/>
+              <a:defRPr sz="2079"/>
             </a:lvl1pPr>
-            <a:lvl2pPr marL="457200" indent="0" algn="ctr">
+            <a:lvl2pPr marL="396027" indent="0" algn="ctr">
               <a:buNone/>
-              <a:defRPr sz="2000"/>
+              <a:defRPr sz="1732"/>
             </a:lvl2pPr>
-            <a:lvl3pPr marL="914400" indent="0" algn="ctr">
+            <a:lvl3pPr marL="792053" indent="0" algn="ctr">
               <a:buNone/>
-              <a:defRPr sz="1800"/>
+              <a:defRPr sz="1559"/>
             </a:lvl3pPr>
-            <a:lvl4pPr marL="1371600" indent="0" algn="ctr">
+            <a:lvl4pPr marL="1188080" indent="0" algn="ctr">
               <a:buNone/>
-              <a:defRPr sz="1600"/>
+              <a:defRPr sz="1386"/>
             </a:lvl4pPr>
-            <a:lvl5pPr marL="1828800" indent="0" algn="ctr">
+            <a:lvl5pPr marL="1584107" indent="0" algn="ctr">
               <a:buNone/>
-              <a:defRPr sz="1600"/>
+              <a:defRPr sz="1386"/>
             </a:lvl5pPr>
-            <a:lvl6pPr marL="2286000" indent="0" algn="ctr">
+            <a:lvl6pPr marL="1980133" indent="0" algn="ctr">
               <a:buNone/>
-              <a:defRPr sz="1600"/>
+              <a:defRPr sz="1386"/>
             </a:lvl6pPr>
-            <a:lvl7pPr marL="2743200" indent="0" algn="ctr">
+            <a:lvl7pPr marL="2376160" indent="0" algn="ctr">
               <a:buNone/>
-              <a:defRPr sz="1600"/>
+              <a:defRPr sz="1386"/>
             </a:lvl7pPr>
-            <a:lvl8pPr marL="3200400" indent="0" algn="ctr">
+            <a:lvl8pPr marL="2772186" indent="0" algn="ctr">
               <a:buNone/>
-              <a:defRPr sz="1600"/>
+              <a:defRPr sz="1386"/>
             </a:lvl8pPr>
-            <a:lvl9pPr marL="3657600" indent="0" algn="ctr">
+            <a:lvl9pPr marL="3168213" indent="0" algn="ctr">
               <a:buNone/>
-              <a:defRPr sz="1600"/>
+              <a:defRPr sz="1386"/>
             </a:lvl9pPr>
           </a:lstStyle>
           <a:p>
@@ -228,18 +222,13 @@
               <a:rPr lang="zh-TW" altLang="en-US"/>
               <a:t>按一下以編輯母片子標題樣式</a:t>
             </a:r>
+            <a:endParaRPr lang="en-US" dirty="0"/>
           </a:p>
         </p:txBody>
       </p:sp>
       <p:sp>
         <p:nvSpPr>
-          <p:cNvPr id="4" name="日期版面配置區 3">
-            <a:extLst>
-              <a:ext uri="{FF2B5EF4-FFF2-40B4-BE49-F238E27FC236}">
-                <a16:creationId xmlns:a16="http://schemas.microsoft.com/office/drawing/2014/main" id="{4697B2DD-0DA9-44F3-9C60-14AD348FF3CE}"/>
-              </a:ext>
-            </a:extLst>
-          </p:cNvPr>
+          <p:cNvPr id="4" name="Date Placeholder 3"/>
           <p:cNvSpPr>
             <a:spLocks noGrp="1"/>
           </p:cNvSpPr>
@@ -254,7 +243,7 @@
           <a:p>
             <a:fld id="{0C4F21BF-7999-4603-8982-00A319506255}" type="datetimeFigureOut">
               <a:rPr lang="zh-TW" altLang="en-US" smtClean="0"/>
-              <a:t>2026/3/17</a:t>
+              <a:t>2026/3/31</a:t>
             </a:fld>
             <a:endParaRPr lang="zh-TW" altLang="en-US"/>
           </a:p>
@@ -262,13 +251,7 @@
       </p:sp>
       <p:sp>
         <p:nvSpPr>
-          <p:cNvPr id="5" name="頁尾版面配置區 4">
-            <a:extLst>
-              <a:ext uri="{FF2B5EF4-FFF2-40B4-BE49-F238E27FC236}">
-                <a16:creationId xmlns:a16="http://schemas.microsoft.com/office/drawing/2014/main" id="{261F5FB5-809A-431B-B14C-08CD931A5C00}"/>
-              </a:ext>
-            </a:extLst>
-          </p:cNvPr>
+          <p:cNvPr id="5" name="Footer Placeholder 4"/>
           <p:cNvSpPr>
             <a:spLocks noGrp="1"/>
           </p:cNvSpPr>
@@ -287,13 +270,7 @@
       </p:sp>
       <p:sp>
         <p:nvSpPr>
-          <p:cNvPr id="6" name="投影片編號版面配置區 5">
-            <a:extLst>
-              <a:ext uri="{FF2B5EF4-FFF2-40B4-BE49-F238E27FC236}">
-                <a16:creationId xmlns:a16="http://schemas.microsoft.com/office/drawing/2014/main" id="{1E9E784F-5755-4BF8-8481-0253A10F5249}"/>
-              </a:ext>
-            </a:extLst>
-          </p:cNvPr>
+          <p:cNvPr id="6" name="Slide Number Placeholder 5"/>
           <p:cNvSpPr>
             <a:spLocks noGrp="1"/>
           </p:cNvSpPr>
@@ -317,7 +294,7 @@
     </p:spTree>
     <p:extLst>
       <p:ext uri="{BB962C8B-B14F-4D97-AF65-F5344CB8AC3E}">
-        <p14:creationId xmlns:p14="http://schemas.microsoft.com/office/powerpoint/2010/main" val="353077097"/>
+        <p14:creationId xmlns:p14="http://schemas.microsoft.com/office/powerpoint/2010/main" val="3063796479"/>
       </p:ext>
     </p:extLst>
   </p:cSld>
@@ -346,13 +323,7 @@
       </p:grpSpPr>
       <p:sp>
         <p:nvSpPr>
-          <p:cNvPr id="2" name="標題 1">
-            <a:extLst>
-              <a:ext uri="{FF2B5EF4-FFF2-40B4-BE49-F238E27FC236}">
-                <a16:creationId xmlns:a16="http://schemas.microsoft.com/office/drawing/2014/main" id="{915D80FD-7D8F-4B15-935C-1DC9C755FB66}"/>
-              </a:ext>
-            </a:extLst>
-          </p:cNvPr>
+          <p:cNvPr id="2" name="Title 1"/>
           <p:cNvSpPr>
             <a:spLocks noGrp="1"/>
           </p:cNvSpPr>
@@ -369,18 +340,13 @@
               <a:rPr lang="zh-TW" altLang="en-US"/>
               <a:t>按一下以編輯母片標題樣式</a:t>
             </a:r>
+            <a:endParaRPr lang="en-US" dirty="0"/>
           </a:p>
         </p:txBody>
       </p:sp>
       <p:sp>
         <p:nvSpPr>
-          <p:cNvPr id="3" name="直排文字版面配置區 2">
-            <a:extLst>
-              <a:ext uri="{FF2B5EF4-FFF2-40B4-BE49-F238E27FC236}">
-                <a16:creationId xmlns:a16="http://schemas.microsoft.com/office/drawing/2014/main" id="{E2FFD612-9D17-4529-88A7-1CBD55B572EC}"/>
-              </a:ext>
-            </a:extLst>
-          </p:cNvPr>
+          <p:cNvPr id="3" name="Vertical Text Placeholder 2"/>
           <p:cNvSpPr>
             <a:spLocks noGrp="1"/>
           </p:cNvSpPr>
@@ -426,18 +392,13 @@
               <a:rPr lang="zh-TW" altLang="en-US"/>
               <a:t>第五層</a:t>
             </a:r>
+            <a:endParaRPr lang="en-US" dirty="0"/>
           </a:p>
         </p:txBody>
       </p:sp>
       <p:sp>
         <p:nvSpPr>
-          <p:cNvPr id="4" name="日期版面配置區 3">
-            <a:extLst>
-              <a:ext uri="{FF2B5EF4-FFF2-40B4-BE49-F238E27FC236}">
-                <a16:creationId xmlns:a16="http://schemas.microsoft.com/office/drawing/2014/main" id="{8CC945A7-22D4-4C84-966B-DDD64726AFEA}"/>
-              </a:ext>
-            </a:extLst>
-          </p:cNvPr>
+          <p:cNvPr id="4" name="Date Placeholder 3"/>
           <p:cNvSpPr>
             <a:spLocks noGrp="1"/>
           </p:cNvSpPr>
@@ -452,7 +413,7 @@
           <a:p>
             <a:fld id="{0C4F21BF-7999-4603-8982-00A319506255}" type="datetimeFigureOut">
               <a:rPr lang="zh-TW" altLang="en-US" smtClean="0"/>
-              <a:t>2026/3/17</a:t>
+              <a:t>2026/3/31</a:t>
             </a:fld>
             <a:endParaRPr lang="zh-TW" altLang="en-US"/>
           </a:p>
@@ -460,13 +421,7 @@
       </p:sp>
       <p:sp>
         <p:nvSpPr>
-          <p:cNvPr id="5" name="頁尾版面配置區 4">
-            <a:extLst>
-              <a:ext uri="{FF2B5EF4-FFF2-40B4-BE49-F238E27FC236}">
-                <a16:creationId xmlns:a16="http://schemas.microsoft.com/office/drawing/2014/main" id="{CCC237B5-2C5F-44E7-9EE6-135045868D44}"/>
-              </a:ext>
-            </a:extLst>
-          </p:cNvPr>
+          <p:cNvPr id="5" name="Footer Placeholder 4"/>
           <p:cNvSpPr>
             <a:spLocks noGrp="1"/>
           </p:cNvSpPr>
@@ -485,13 +440,7 @@
       </p:sp>
       <p:sp>
         <p:nvSpPr>
-          <p:cNvPr id="6" name="投影片編號版面配置區 5">
-            <a:extLst>
-              <a:ext uri="{FF2B5EF4-FFF2-40B4-BE49-F238E27FC236}">
-                <a16:creationId xmlns:a16="http://schemas.microsoft.com/office/drawing/2014/main" id="{C406B630-E6E2-49BD-A1AF-75DF04142356}"/>
-              </a:ext>
-            </a:extLst>
-          </p:cNvPr>
+          <p:cNvPr id="6" name="Slide Number Placeholder 5"/>
           <p:cNvSpPr>
             <a:spLocks noGrp="1"/>
           </p:cNvSpPr>
@@ -515,7 +464,7 @@
     </p:spTree>
     <p:extLst>
       <p:ext uri="{BB962C8B-B14F-4D97-AF65-F5344CB8AC3E}">
-        <p14:creationId xmlns:p14="http://schemas.microsoft.com/office/powerpoint/2010/main" val="801307323"/>
+        <p14:creationId xmlns:p14="http://schemas.microsoft.com/office/powerpoint/2010/main" val="2025252021"/>
       </p:ext>
     </p:extLst>
   </p:cSld>
@@ -544,13 +493,7 @@
       </p:grpSpPr>
       <p:sp>
         <p:nvSpPr>
-          <p:cNvPr id="2" name="直排標題 1">
-            <a:extLst>
-              <a:ext uri="{FF2B5EF4-FFF2-40B4-BE49-F238E27FC236}">
-                <a16:creationId xmlns:a16="http://schemas.microsoft.com/office/drawing/2014/main" id="{BE59816B-21DD-496E-9982-50C89084BE1E}"/>
-              </a:ext>
-            </a:extLst>
-          </p:cNvPr>
+          <p:cNvPr id="2" name="Vertical Title 1"/>
           <p:cNvSpPr>
             <a:spLocks noGrp="1"/>
           </p:cNvSpPr>
@@ -560,8 +503,8 @@
         </p:nvSpPr>
         <p:spPr>
           <a:xfrm>
-            <a:off x="8724900" y="365125"/>
-            <a:ext cx="2628900" cy="5811838"/>
+            <a:off x="8724900" y="316272"/>
+            <a:ext cx="2628900" cy="5034236"/>
           </a:xfrm>
         </p:spPr>
         <p:txBody>
@@ -572,18 +515,13 @@
               <a:rPr lang="zh-TW" altLang="en-US"/>
               <a:t>按一下以編輯母片標題樣式</a:t>
             </a:r>
+            <a:endParaRPr lang="en-US" dirty="0"/>
           </a:p>
         </p:txBody>
       </p:sp>
       <p:sp>
         <p:nvSpPr>
-          <p:cNvPr id="3" name="直排文字版面配置區 2">
-            <a:extLst>
-              <a:ext uri="{FF2B5EF4-FFF2-40B4-BE49-F238E27FC236}">
-                <a16:creationId xmlns:a16="http://schemas.microsoft.com/office/drawing/2014/main" id="{16AE40A3-FA5A-406D-AA9D-CC2C0D58DC8C}"/>
-              </a:ext>
-            </a:extLst>
-          </p:cNvPr>
+          <p:cNvPr id="3" name="Vertical Text Placeholder 2"/>
           <p:cNvSpPr>
             <a:spLocks noGrp="1"/>
           </p:cNvSpPr>
@@ -593,8 +531,8 @@
         </p:nvSpPr>
         <p:spPr>
           <a:xfrm>
-            <a:off x="838200" y="365125"/>
-            <a:ext cx="7734300" cy="5811838"/>
+            <a:off x="838200" y="316272"/>
+            <a:ext cx="7734300" cy="5034236"/>
           </a:xfrm>
         </p:spPr>
         <p:txBody>
@@ -634,18 +572,13 @@
               <a:rPr lang="zh-TW" altLang="en-US"/>
               <a:t>第五層</a:t>
             </a:r>
+            <a:endParaRPr lang="en-US" dirty="0"/>
           </a:p>
         </p:txBody>
       </p:sp>
       <p:sp>
         <p:nvSpPr>
-          <p:cNvPr id="4" name="日期版面配置區 3">
-            <a:extLst>
-              <a:ext uri="{FF2B5EF4-FFF2-40B4-BE49-F238E27FC236}">
-                <a16:creationId xmlns:a16="http://schemas.microsoft.com/office/drawing/2014/main" id="{4DE2A740-0C5B-49DC-88AE-EB2D422B3271}"/>
-              </a:ext>
-            </a:extLst>
-          </p:cNvPr>
+          <p:cNvPr id="4" name="Date Placeholder 3"/>
           <p:cNvSpPr>
             <a:spLocks noGrp="1"/>
           </p:cNvSpPr>
@@ -660,7 +593,7 @@
           <a:p>
             <a:fld id="{0C4F21BF-7999-4603-8982-00A319506255}" type="datetimeFigureOut">
               <a:rPr lang="zh-TW" altLang="en-US" smtClean="0"/>
-              <a:t>2026/3/17</a:t>
+              <a:t>2026/3/31</a:t>
             </a:fld>
             <a:endParaRPr lang="zh-TW" altLang="en-US"/>
           </a:p>
@@ -668,13 +601,7 @@
       </p:sp>
       <p:sp>
         <p:nvSpPr>
-          <p:cNvPr id="5" name="頁尾版面配置區 4">
-            <a:extLst>
-              <a:ext uri="{FF2B5EF4-FFF2-40B4-BE49-F238E27FC236}">
-                <a16:creationId xmlns:a16="http://schemas.microsoft.com/office/drawing/2014/main" id="{43D0D4CB-6638-4855-B864-5ADFE4C0A32C}"/>
-              </a:ext>
-            </a:extLst>
-          </p:cNvPr>
+          <p:cNvPr id="5" name="Footer Placeholder 4"/>
           <p:cNvSpPr>
             <a:spLocks noGrp="1"/>
           </p:cNvSpPr>
@@ -693,13 +620,7 @@
       </p:sp>
       <p:sp>
         <p:nvSpPr>
-          <p:cNvPr id="6" name="投影片編號版面配置區 5">
-            <a:extLst>
-              <a:ext uri="{FF2B5EF4-FFF2-40B4-BE49-F238E27FC236}">
-                <a16:creationId xmlns:a16="http://schemas.microsoft.com/office/drawing/2014/main" id="{8F7B4F50-4505-4892-8188-C85C2F1233D6}"/>
-              </a:ext>
-            </a:extLst>
-          </p:cNvPr>
+          <p:cNvPr id="6" name="Slide Number Placeholder 5"/>
           <p:cNvSpPr>
             <a:spLocks noGrp="1"/>
           </p:cNvSpPr>
@@ -723,7 +644,7 @@
     </p:spTree>
     <p:extLst>
       <p:ext uri="{BB962C8B-B14F-4D97-AF65-F5344CB8AC3E}">
-        <p14:creationId xmlns:p14="http://schemas.microsoft.com/office/powerpoint/2010/main" val="2481719859"/>
+        <p14:creationId xmlns:p14="http://schemas.microsoft.com/office/powerpoint/2010/main" val="245731843"/>
       </p:ext>
     </p:extLst>
   </p:cSld>
@@ -752,13 +673,7 @@
       </p:grpSpPr>
       <p:sp>
         <p:nvSpPr>
-          <p:cNvPr id="2" name="標題 1">
-            <a:extLst>
-              <a:ext uri="{FF2B5EF4-FFF2-40B4-BE49-F238E27FC236}">
-                <a16:creationId xmlns:a16="http://schemas.microsoft.com/office/drawing/2014/main" id="{F9146219-AE5A-4862-A9FB-EBD0B9DA1F39}"/>
-              </a:ext>
-            </a:extLst>
-          </p:cNvPr>
+          <p:cNvPr id="2" name="Title 1"/>
           <p:cNvSpPr>
             <a:spLocks noGrp="1"/>
           </p:cNvSpPr>
@@ -775,18 +690,13 @@
               <a:rPr lang="zh-TW" altLang="en-US"/>
               <a:t>按一下以編輯母片標題樣式</a:t>
             </a:r>
+            <a:endParaRPr lang="en-US" dirty="0"/>
           </a:p>
         </p:txBody>
       </p:sp>
       <p:sp>
         <p:nvSpPr>
-          <p:cNvPr id="3" name="內容版面配置區 2">
-            <a:extLst>
-              <a:ext uri="{FF2B5EF4-FFF2-40B4-BE49-F238E27FC236}">
-                <a16:creationId xmlns:a16="http://schemas.microsoft.com/office/drawing/2014/main" id="{35166741-FE59-4A0C-A1E2-DB0C4A3E16B3}"/>
-              </a:ext>
-            </a:extLst>
-          </p:cNvPr>
+          <p:cNvPr id="3" name="Content Placeholder 2"/>
           <p:cNvSpPr>
             <a:spLocks noGrp="1"/>
           </p:cNvSpPr>
@@ -832,18 +742,13 @@
               <a:rPr lang="zh-TW" altLang="en-US"/>
               <a:t>第五層</a:t>
             </a:r>
+            <a:endParaRPr lang="en-US" dirty="0"/>
           </a:p>
         </p:txBody>
       </p:sp>
       <p:sp>
         <p:nvSpPr>
-          <p:cNvPr id="4" name="日期版面配置區 3">
-            <a:extLst>
-              <a:ext uri="{FF2B5EF4-FFF2-40B4-BE49-F238E27FC236}">
-                <a16:creationId xmlns:a16="http://schemas.microsoft.com/office/drawing/2014/main" id="{939428E1-AF38-4F5B-92A3-4C3C180BD437}"/>
-              </a:ext>
-            </a:extLst>
-          </p:cNvPr>
+          <p:cNvPr id="4" name="Date Placeholder 3"/>
           <p:cNvSpPr>
             <a:spLocks noGrp="1"/>
           </p:cNvSpPr>
@@ -858,7 +763,7 @@
           <a:p>
             <a:fld id="{0C4F21BF-7999-4603-8982-00A319506255}" type="datetimeFigureOut">
               <a:rPr lang="zh-TW" altLang="en-US" smtClean="0"/>
-              <a:t>2026/3/17</a:t>
+              <a:t>2026/3/31</a:t>
             </a:fld>
             <a:endParaRPr lang="zh-TW" altLang="en-US"/>
           </a:p>
@@ -866,13 +771,7 @@
       </p:sp>
       <p:sp>
         <p:nvSpPr>
-          <p:cNvPr id="5" name="頁尾版面配置區 4">
-            <a:extLst>
-              <a:ext uri="{FF2B5EF4-FFF2-40B4-BE49-F238E27FC236}">
-                <a16:creationId xmlns:a16="http://schemas.microsoft.com/office/drawing/2014/main" id="{60253F7C-209B-461C-BADB-1A598111018D}"/>
-              </a:ext>
-            </a:extLst>
-          </p:cNvPr>
+          <p:cNvPr id="5" name="Footer Placeholder 4"/>
           <p:cNvSpPr>
             <a:spLocks noGrp="1"/>
           </p:cNvSpPr>
@@ -891,13 +790,7 @@
       </p:sp>
       <p:sp>
         <p:nvSpPr>
-          <p:cNvPr id="6" name="投影片編號版面配置區 5">
-            <a:extLst>
-              <a:ext uri="{FF2B5EF4-FFF2-40B4-BE49-F238E27FC236}">
-                <a16:creationId xmlns:a16="http://schemas.microsoft.com/office/drawing/2014/main" id="{A76AEE1D-C454-4F34-9B04-25B9E5854E3B}"/>
-              </a:ext>
-            </a:extLst>
-          </p:cNvPr>
+          <p:cNvPr id="6" name="Slide Number Placeholder 5"/>
           <p:cNvSpPr>
             <a:spLocks noGrp="1"/>
           </p:cNvSpPr>
@@ -921,7 +814,7 @@
     </p:spTree>
     <p:extLst>
       <p:ext uri="{BB962C8B-B14F-4D97-AF65-F5344CB8AC3E}">
-        <p14:creationId xmlns:p14="http://schemas.microsoft.com/office/powerpoint/2010/main" val="1110686193"/>
+        <p14:creationId xmlns:p14="http://schemas.microsoft.com/office/powerpoint/2010/main" val="4061216868"/>
       </p:ext>
     </p:extLst>
   </p:cSld>
@@ -950,13 +843,7 @@
       </p:grpSpPr>
       <p:sp>
         <p:nvSpPr>
-          <p:cNvPr id="2" name="標題 1">
-            <a:extLst>
-              <a:ext uri="{FF2B5EF4-FFF2-40B4-BE49-F238E27FC236}">
-                <a16:creationId xmlns:a16="http://schemas.microsoft.com/office/drawing/2014/main" id="{069EFDEE-9E9C-46A7-B308-30EB886E5CFC}"/>
-              </a:ext>
-            </a:extLst>
-          </p:cNvPr>
+          <p:cNvPr id="2" name="Title 1"/>
           <p:cNvSpPr>
             <a:spLocks noGrp="1"/>
           </p:cNvSpPr>
@@ -966,15 +853,15 @@
         </p:nvSpPr>
         <p:spPr>
           <a:xfrm>
-            <a:off x="831850" y="1709738"/>
-            <a:ext cx="10515600" cy="2852737"/>
+            <a:off x="831850" y="1480982"/>
+            <a:ext cx="10515600" cy="2471051"/>
           </a:xfrm>
         </p:spPr>
         <p:txBody>
           <a:bodyPr anchor="b"/>
           <a:lstStyle>
             <a:lvl1pPr>
-              <a:defRPr sz="6000"/>
+              <a:defRPr sz="5197"/>
             </a:lvl1pPr>
           </a:lstStyle>
           <a:p>
@@ -982,18 +869,13 @@
               <a:rPr lang="zh-TW" altLang="en-US"/>
               <a:t>按一下以編輯母片標題樣式</a:t>
             </a:r>
+            <a:endParaRPr lang="en-US" dirty="0"/>
           </a:p>
         </p:txBody>
       </p:sp>
       <p:sp>
         <p:nvSpPr>
-          <p:cNvPr id="3" name="文字版面配置區 2">
-            <a:extLst>
-              <a:ext uri="{FF2B5EF4-FFF2-40B4-BE49-F238E27FC236}">
-                <a16:creationId xmlns:a16="http://schemas.microsoft.com/office/drawing/2014/main" id="{79BD2695-9D6E-4DE0-B16F-37A7DCAAC53E}"/>
-              </a:ext>
-            </a:extLst>
-          </p:cNvPr>
+          <p:cNvPr id="3" name="Text Placeholder 2"/>
           <p:cNvSpPr>
             <a:spLocks noGrp="1"/>
           </p:cNvSpPr>
@@ -1003,8 +885,8 @@
         </p:nvSpPr>
         <p:spPr>
           <a:xfrm>
-            <a:off x="831850" y="4589463"/>
-            <a:ext cx="10515600" cy="1500187"/>
+            <a:off x="831850" y="3975410"/>
+            <a:ext cx="10515600" cy="1299468"/>
           </a:xfrm>
         </p:spPr>
         <p:txBody>
@@ -1012,7 +894,7 @@
           <a:lstStyle>
             <a:lvl1pPr marL="0" indent="0">
               <a:buNone/>
-              <a:defRPr sz="2400">
+              <a:defRPr sz="2079">
                 <a:solidFill>
                   <a:schemeClr val="tx1">
                     <a:tint val="75000"/>
@@ -1020,9 +902,9 @@
                 </a:solidFill>
               </a:defRPr>
             </a:lvl1pPr>
-            <a:lvl2pPr marL="457200" indent="0">
+            <a:lvl2pPr marL="396027" indent="0">
               <a:buNone/>
-              <a:defRPr sz="2000">
+              <a:defRPr sz="1732">
                 <a:solidFill>
                   <a:schemeClr val="tx1">
                     <a:tint val="75000"/>
@@ -1030,9 +912,9 @@
                 </a:solidFill>
               </a:defRPr>
             </a:lvl2pPr>
-            <a:lvl3pPr marL="914400" indent="0">
+            <a:lvl3pPr marL="792053" indent="0">
               <a:buNone/>
-              <a:defRPr sz="1800">
+              <a:defRPr sz="1559">
                 <a:solidFill>
                   <a:schemeClr val="tx1">
                     <a:tint val="75000"/>
@@ -1040,9 +922,9 @@
                 </a:solidFill>
               </a:defRPr>
             </a:lvl3pPr>
-            <a:lvl4pPr marL="1371600" indent="0">
+            <a:lvl4pPr marL="1188080" indent="0">
               <a:buNone/>
-              <a:defRPr sz="1600">
+              <a:defRPr sz="1386">
                 <a:solidFill>
                   <a:schemeClr val="tx1">
                     <a:tint val="75000"/>
@@ -1050,9 +932,9 @@
                 </a:solidFill>
               </a:defRPr>
             </a:lvl4pPr>
-            <a:lvl5pPr marL="1828800" indent="0">
+            <a:lvl5pPr marL="1584107" indent="0">
               <a:buNone/>
-              <a:defRPr sz="1600">
+              <a:defRPr sz="1386">
                 <a:solidFill>
                   <a:schemeClr val="tx1">
                     <a:tint val="75000"/>
@@ -1060,9 +942,9 @@
                 </a:solidFill>
               </a:defRPr>
             </a:lvl5pPr>
-            <a:lvl6pPr marL="2286000" indent="0">
+            <a:lvl6pPr marL="1980133" indent="0">
               <a:buNone/>
-              <a:defRPr sz="1600">
+              <a:defRPr sz="1386">
                 <a:solidFill>
                   <a:schemeClr val="tx1">
                     <a:tint val="75000"/>
@@ -1070,9 +952,9 @@
                 </a:solidFill>
               </a:defRPr>
             </a:lvl6pPr>
-            <a:lvl7pPr marL="2743200" indent="0">
+            <a:lvl7pPr marL="2376160" indent="0">
               <a:buNone/>
-              <a:defRPr sz="1600">
+              <a:defRPr sz="1386">
                 <a:solidFill>
                   <a:schemeClr val="tx1">
                     <a:tint val="75000"/>
@@ -1080,9 +962,9 @@
                 </a:solidFill>
               </a:defRPr>
             </a:lvl7pPr>
-            <a:lvl8pPr marL="3200400" indent="0">
+            <a:lvl8pPr marL="2772186" indent="0">
               <a:buNone/>
-              <a:defRPr sz="1600">
+              <a:defRPr sz="1386">
                 <a:solidFill>
                   <a:schemeClr val="tx1">
                     <a:tint val="75000"/>
@@ -1090,9 +972,9 @@
                 </a:solidFill>
               </a:defRPr>
             </a:lvl8pPr>
-            <a:lvl9pPr marL="3657600" indent="0">
+            <a:lvl9pPr marL="3168213" indent="0">
               <a:buNone/>
-              <a:defRPr sz="1600">
+              <a:defRPr sz="1386">
                 <a:solidFill>
                   <a:schemeClr val="tx1">
                     <a:tint val="75000"/>
@@ -1112,13 +994,7 @@
       </p:sp>
       <p:sp>
         <p:nvSpPr>
-          <p:cNvPr id="4" name="日期版面配置區 3">
-            <a:extLst>
-              <a:ext uri="{FF2B5EF4-FFF2-40B4-BE49-F238E27FC236}">
-                <a16:creationId xmlns:a16="http://schemas.microsoft.com/office/drawing/2014/main" id="{D8C65126-25ED-4C38-A907-14BACB25EBF7}"/>
-              </a:ext>
-            </a:extLst>
-          </p:cNvPr>
+          <p:cNvPr id="4" name="Date Placeholder 3"/>
           <p:cNvSpPr>
             <a:spLocks noGrp="1"/>
           </p:cNvSpPr>
@@ -1133,7 +1009,7 @@
           <a:p>
             <a:fld id="{0C4F21BF-7999-4603-8982-00A319506255}" type="datetimeFigureOut">
               <a:rPr lang="zh-TW" altLang="en-US" smtClean="0"/>
-              <a:t>2026/3/17</a:t>
+              <a:t>2026/3/31</a:t>
             </a:fld>
             <a:endParaRPr lang="zh-TW" altLang="en-US"/>
           </a:p>
@@ -1141,13 +1017,7 @@
       </p:sp>
       <p:sp>
         <p:nvSpPr>
-          <p:cNvPr id="5" name="頁尾版面配置區 4">
-            <a:extLst>
-              <a:ext uri="{FF2B5EF4-FFF2-40B4-BE49-F238E27FC236}">
-                <a16:creationId xmlns:a16="http://schemas.microsoft.com/office/drawing/2014/main" id="{62C3669F-960E-4A05-BC4F-54C85AB0CBC1}"/>
-              </a:ext>
-            </a:extLst>
-          </p:cNvPr>
+          <p:cNvPr id="5" name="Footer Placeholder 4"/>
           <p:cNvSpPr>
             <a:spLocks noGrp="1"/>
           </p:cNvSpPr>
@@ -1166,13 +1036,7 @@
       </p:sp>
       <p:sp>
         <p:nvSpPr>
-          <p:cNvPr id="6" name="投影片編號版面配置區 5">
-            <a:extLst>
-              <a:ext uri="{FF2B5EF4-FFF2-40B4-BE49-F238E27FC236}">
-                <a16:creationId xmlns:a16="http://schemas.microsoft.com/office/drawing/2014/main" id="{843558E3-598C-4190-9F42-D2ED46017F87}"/>
-              </a:ext>
-            </a:extLst>
-          </p:cNvPr>
+          <p:cNvPr id="6" name="Slide Number Placeholder 5"/>
           <p:cNvSpPr>
             <a:spLocks noGrp="1"/>
           </p:cNvSpPr>
@@ -1196,7 +1060,7 @@
     </p:spTree>
     <p:extLst>
       <p:ext uri="{BB962C8B-B14F-4D97-AF65-F5344CB8AC3E}">
-        <p14:creationId xmlns:p14="http://schemas.microsoft.com/office/powerpoint/2010/main" val="3507161267"/>
+        <p14:creationId xmlns:p14="http://schemas.microsoft.com/office/powerpoint/2010/main" val="3638080292"/>
       </p:ext>
     </p:extLst>
   </p:cSld>
@@ -1225,13 +1089,7 @@
       </p:grpSpPr>
       <p:sp>
         <p:nvSpPr>
-          <p:cNvPr id="2" name="標題 1">
-            <a:extLst>
-              <a:ext uri="{FF2B5EF4-FFF2-40B4-BE49-F238E27FC236}">
-                <a16:creationId xmlns:a16="http://schemas.microsoft.com/office/drawing/2014/main" id="{A7CFD828-0E44-46EE-85F6-0E8BD6F34FF1}"/>
-              </a:ext>
-            </a:extLst>
-          </p:cNvPr>
+          <p:cNvPr id="2" name="Title 1"/>
           <p:cNvSpPr>
             <a:spLocks noGrp="1"/>
           </p:cNvSpPr>
@@ -1248,18 +1106,13 @@
               <a:rPr lang="zh-TW" altLang="en-US"/>
               <a:t>按一下以編輯母片標題樣式</a:t>
             </a:r>
+            <a:endParaRPr lang="en-US" dirty="0"/>
           </a:p>
         </p:txBody>
       </p:sp>
       <p:sp>
         <p:nvSpPr>
-          <p:cNvPr id="3" name="內容版面配置區 2">
-            <a:extLst>
-              <a:ext uri="{FF2B5EF4-FFF2-40B4-BE49-F238E27FC236}">
-                <a16:creationId xmlns:a16="http://schemas.microsoft.com/office/drawing/2014/main" id="{09CF69C1-C5D0-480A-A76E-61A1E43BCD92}"/>
-              </a:ext>
-            </a:extLst>
-          </p:cNvPr>
+          <p:cNvPr id="3" name="Content Placeholder 2"/>
           <p:cNvSpPr>
             <a:spLocks noGrp="1"/>
           </p:cNvSpPr>
@@ -1269,8 +1122,8 @@
         </p:nvSpPr>
         <p:spPr>
           <a:xfrm>
-            <a:off x="838200" y="1825625"/>
-            <a:ext cx="5181600" cy="4351338"/>
+            <a:off x="838200" y="1581363"/>
+            <a:ext cx="5181600" cy="3769145"/>
           </a:xfrm>
         </p:spPr>
         <p:txBody>
@@ -1310,18 +1163,13 @@
               <a:rPr lang="zh-TW" altLang="en-US"/>
               <a:t>第五層</a:t>
             </a:r>
+            <a:endParaRPr lang="en-US" dirty="0"/>
           </a:p>
         </p:txBody>
       </p:sp>
       <p:sp>
         <p:nvSpPr>
-          <p:cNvPr id="4" name="內容版面配置區 3">
-            <a:extLst>
-              <a:ext uri="{FF2B5EF4-FFF2-40B4-BE49-F238E27FC236}">
-                <a16:creationId xmlns:a16="http://schemas.microsoft.com/office/drawing/2014/main" id="{26082E8C-EA0B-4452-A977-FED6E565DF12}"/>
-              </a:ext>
-            </a:extLst>
-          </p:cNvPr>
+          <p:cNvPr id="4" name="Content Placeholder 3"/>
           <p:cNvSpPr>
             <a:spLocks noGrp="1"/>
           </p:cNvSpPr>
@@ -1331,8 +1179,8 @@
         </p:nvSpPr>
         <p:spPr>
           <a:xfrm>
-            <a:off x="6172200" y="1825625"/>
-            <a:ext cx="5181600" cy="4351338"/>
+            <a:off x="6172200" y="1581363"/>
+            <a:ext cx="5181600" cy="3769145"/>
           </a:xfrm>
         </p:spPr>
         <p:txBody>
@@ -1372,18 +1220,13 @@
               <a:rPr lang="zh-TW" altLang="en-US"/>
               <a:t>第五層</a:t>
             </a:r>
+            <a:endParaRPr lang="en-US" dirty="0"/>
           </a:p>
         </p:txBody>
       </p:sp>
       <p:sp>
         <p:nvSpPr>
-          <p:cNvPr id="5" name="日期版面配置區 4">
-            <a:extLst>
-              <a:ext uri="{FF2B5EF4-FFF2-40B4-BE49-F238E27FC236}">
-                <a16:creationId xmlns:a16="http://schemas.microsoft.com/office/drawing/2014/main" id="{7FE1C4DB-D367-4B34-A982-5F42CFABEACC}"/>
-              </a:ext>
-            </a:extLst>
-          </p:cNvPr>
+          <p:cNvPr id="5" name="Date Placeholder 4"/>
           <p:cNvSpPr>
             <a:spLocks noGrp="1"/>
           </p:cNvSpPr>
@@ -1398,7 +1241,7 @@
           <a:p>
             <a:fld id="{0C4F21BF-7999-4603-8982-00A319506255}" type="datetimeFigureOut">
               <a:rPr lang="zh-TW" altLang="en-US" smtClean="0"/>
-              <a:t>2026/3/17</a:t>
+              <a:t>2026/3/31</a:t>
             </a:fld>
             <a:endParaRPr lang="zh-TW" altLang="en-US"/>
           </a:p>
@@ -1406,13 +1249,7 @@
       </p:sp>
       <p:sp>
         <p:nvSpPr>
-          <p:cNvPr id="6" name="頁尾版面配置區 5">
-            <a:extLst>
-              <a:ext uri="{FF2B5EF4-FFF2-40B4-BE49-F238E27FC236}">
-                <a16:creationId xmlns:a16="http://schemas.microsoft.com/office/drawing/2014/main" id="{B2FABFD9-03B3-4116-8454-FA4BFDE05F21}"/>
-              </a:ext>
-            </a:extLst>
-          </p:cNvPr>
+          <p:cNvPr id="6" name="Footer Placeholder 5"/>
           <p:cNvSpPr>
             <a:spLocks noGrp="1"/>
           </p:cNvSpPr>
@@ -1431,13 +1268,7 @@
       </p:sp>
       <p:sp>
         <p:nvSpPr>
-          <p:cNvPr id="7" name="投影片編號版面配置區 6">
-            <a:extLst>
-              <a:ext uri="{FF2B5EF4-FFF2-40B4-BE49-F238E27FC236}">
-                <a16:creationId xmlns:a16="http://schemas.microsoft.com/office/drawing/2014/main" id="{A8E963B6-958F-4BF1-926B-4BCC589FE613}"/>
-              </a:ext>
-            </a:extLst>
-          </p:cNvPr>
+          <p:cNvPr id="7" name="Slide Number Placeholder 6"/>
           <p:cNvSpPr>
             <a:spLocks noGrp="1"/>
           </p:cNvSpPr>
@@ -1461,7 +1292,7 @@
     </p:spTree>
     <p:extLst>
       <p:ext uri="{BB962C8B-B14F-4D97-AF65-F5344CB8AC3E}">
-        <p14:creationId xmlns:p14="http://schemas.microsoft.com/office/powerpoint/2010/main" val="2156878225"/>
+        <p14:creationId xmlns:p14="http://schemas.microsoft.com/office/powerpoint/2010/main" val="1706020070"/>
       </p:ext>
     </p:extLst>
   </p:cSld>
@@ -1490,13 +1321,7 @@
       </p:grpSpPr>
       <p:sp>
         <p:nvSpPr>
-          <p:cNvPr id="2" name="標題 1">
-            <a:extLst>
-              <a:ext uri="{FF2B5EF4-FFF2-40B4-BE49-F238E27FC236}">
-                <a16:creationId xmlns:a16="http://schemas.microsoft.com/office/drawing/2014/main" id="{79BB9D19-A6C8-4C3E-9C43-7C789658F6E4}"/>
-              </a:ext>
-            </a:extLst>
-          </p:cNvPr>
+          <p:cNvPr id="2" name="Title 1"/>
           <p:cNvSpPr>
             <a:spLocks noGrp="1"/>
           </p:cNvSpPr>
@@ -1506,8 +1331,8 @@
         </p:nvSpPr>
         <p:spPr>
           <a:xfrm>
-            <a:off x="839788" y="365125"/>
-            <a:ext cx="10515600" cy="1325563"/>
+            <a:off x="839788" y="316273"/>
+            <a:ext cx="10515600" cy="1148208"/>
           </a:xfrm>
         </p:spPr>
         <p:txBody>
@@ -1518,18 +1343,13 @@
               <a:rPr lang="zh-TW" altLang="en-US"/>
               <a:t>按一下以編輯母片標題樣式</a:t>
             </a:r>
+            <a:endParaRPr lang="en-US" dirty="0"/>
           </a:p>
         </p:txBody>
       </p:sp>
       <p:sp>
         <p:nvSpPr>
-          <p:cNvPr id="3" name="文字版面配置區 2">
-            <a:extLst>
-              <a:ext uri="{FF2B5EF4-FFF2-40B4-BE49-F238E27FC236}">
-                <a16:creationId xmlns:a16="http://schemas.microsoft.com/office/drawing/2014/main" id="{0F031E8C-47B4-48DB-9282-083768140363}"/>
-              </a:ext>
-            </a:extLst>
-          </p:cNvPr>
+          <p:cNvPr id="3" name="Text Placeholder 2"/>
           <p:cNvSpPr>
             <a:spLocks noGrp="1"/>
           </p:cNvSpPr>
@@ -1539,8 +1359,8 @@
         </p:nvSpPr>
         <p:spPr>
           <a:xfrm>
-            <a:off x="839788" y="1681163"/>
-            <a:ext cx="5157787" cy="823912"/>
+            <a:off x="839789" y="1456229"/>
+            <a:ext cx="5157787" cy="713676"/>
           </a:xfrm>
         </p:spPr>
         <p:txBody>
@@ -1548,39 +1368,39 @@
           <a:lstStyle>
             <a:lvl1pPr marL="0" indent="0">
               <a:buNone/>
-              <a:defRPr sz="2400" b="1"/>
+              <a:defRPr sz="2079" b="1"/>
             </a:lvl1pPr>
-            <a:lvl2pPr marL="457200" indent="0">
+            <a:lvl2pPr marL="396027" indent="0">
               <a:buNone/>
-              <a:defRPr sz="2000" b="1"/>
+              <a:defRPr sz="1732" b="1"/>
             </a:lvl2pPr>
-            <a:lvl3pPr marL="914400" indent="0">
+            <a:lvl3pPr marL="792053" indent="0">
               <a:buNone/>
-              <a:defRPr sz="1800" b="1"/>
+              <a:defRPr sz="1559" b="1"/>
             </a:lvl3pPr>
-            <a:lvl4pPr marL="1371600" indent="0">
+            <a:lvl4pPr marL="1188080" indent="0">
               <a:buNone/>
-              <a:defRPr sz="1600" b="1"/>
+              <a:defRPr sz="1386" b="1"/>
             </a:lvl4pPr>
-            <a:lvl5pPr marL="1828800" indent="0">
+            <a:lvl5pPr marL="1584107" indent="0">
               <a:buNone/>
-              <a:defRPr sz="1600" b="1"/>
+              <a:defRPr sz="1386" b="1"/>
             </a:lvl5pPr>
-            <a:lvl6pPr marL="2286000" indent="0">
+            <a:lvl6pPr marL="1980133" indent="0">
               <a:buNone/>
-              <a:defRPr sz="1600" b="1"/>
+              <a:defRPr sz="1386" b="1"/>
             </a:lvl6pPr>
-            <a:lvl7pPr marL="2743200" indent="0">
+            <a:lvl7pPr marL="2376160" indent="0">
               <a:buNone/>
-              <a:defRPr sz="1600" b="1"/>
+              <a:defRPr sz="1386" b="1"/>
             </a:lvl7pPr>
-            <a:lvl8pPr marL="3200400" indent="0">
+            <a:lvl8pPr marL="2772186" indent="0">
               <a:buNone/>
-              <a:defRPr sz="1600" b="1"/>
+              <a:defRPr sz="1386" b="1"/>
             </a:lvl8pPr>
-            <a:lvl9pPr marL="3657600" indent="0">
+            <a:lvl9pPr marL="3168213" indent="0">
               <a:buNone/>
-              <a:defRPr sz="1600" b="1"/>
+              <a:defRPr sz="1386" b="1"/>
             </a:lvl9pPr>
           </a:lstStyle>
           <a:p>
@@ -1594,13 +1414,7 @@
       </p:sp>
       <p:sp>
         <p:nvSpPr>
-          <p:cNvPr id="4" name="內容版面配置區 3">
-            <a:extLst>
-              <a:ext uri="{FF2B5EF4-FFF2-40B4-BE49-F238E27FC236}">
-                <a16:creationId xmlns:a16="http://schemas.microsoft.com/office/drawing/2014/main" id="{FE2CBC7C-AD96-402A-93DA-1F698E0F9707}"/>
-              </a:ext>
-            </a:extLst>
-          </p:cNvPr>
+          <p:cNvPr id="4" name="Content Placeholder 3"/>
           <p:cNvSpPr>
             <a:spLocks noGrp="1"/>
           </p:cNvSpPr>
@@ -1610,8 +1424,8 @@
         </p:nvSpPr>
         <p:spPr>
           <a:xfrm>
-            <a:off x="839788" y="2505075"/>
-            <a:ext cx="5157787" cy="3684588"/>
+            <a:off x="839789" y="2169905"/>
+            <a:ext cx="5157787" cy="3191604"/>
           </a:xfrm>
         </p:spPr>
         <p:txBody>
@@ -1651,18 +1465,13 @@
               <a:rPr lang="zh-TW" altLang="en-US"/>
               <a:t>第五層</a:t>
             </a:r>
+            <a:endParaRPr lang="en-US" dirty="0"/>
           </a:p>
         </p:txBody>
       </p:sp>
       <p:sp>
         <p:nvSpPr>
-          <p:cNvPr id="5" name="文字版面配置區 4">
-            <a:extLst>
-              <a:ext uri="{FF2B5EF4-FFF2-40B4-BE49-F238E27FC236}">
-                <a16:creationId xmlns:a16="http://schemas.microsoft.com/office/drawing/2014/main" id="{403D533C-E42F-4A6C-8518-148CFEE41A56}"/>
-              </a:ext>
-            </a:extLst>
-          </p:cNvPr>
+          <p:cNvPr id="5" name="Text Placeholder 4"/>
           <p:cNvSpPr>
             <a:spLocks noGrp="1"/>
           </p:cNvSpPr>
@@ -1672,8 +1481,8 @@
         </p:nvSpPr>
         <p:spPr>
           <a:xfrm>
-            <a:off x="6172200" y="1681163"/>
-            <a:ext cx="5183188" cy="823912"/>
+            <a:off x="6172200" y="1456229"/>
+            <a:ext cx="5183188" cy="713676"/>
           </a:xfrm>
         </p:spPr>
         <p:txBody>
@@ -1681,39 +1490,39 @@
           <a:lstStyle>
             <a:lvl1pPr marL="0" indent="0">
               <a:buNone/>
-              <a:defRPr sz="2400" b="1"/>
+              <a:defRPr sz="2079" b="1"/>
             </a:lvl1pPr>
-            <a:lvl2pPr marL="457200" indent="0">
+            <a:lvl2pPr marL="396027" indent="0">
               <a:buNone/>
-              <a:defRPr sz="2000" b="1"/>
+              <a:defRPr sz="1732" b="1"/>
             </a:lvl2pPr>
-            <a:lvl3pPr marL="914400" indent="0">
+            <a:lvl3pPr marL="792053" indent="0">
               <a:buNone/>
-              <a:defRPr sz="1800" b="1"/>
+              <a:defRPr sz="1559" b="1"/>
             </a:lvl3pPr>
-            <a:lvl4pPr marL="1371600" indent="0">
+            <a:lvl4pPr marL="1188080" indent="0">
               <a:buNone/>
-              <a:defRPr sz="1600" b="1"/>
+              <a:defRPr sz="1386" b="1"/>
             </a:lvl4pPr>
-            <a:lvl5pPr marL="1828800" indent="0">
+            <a:lvl5pPr marL="1584107" indent="0">
               <a:buNone/>
-              <a:defRPr sz="1600" b="1"/>
+              <a:defRPr sz="1386" b="1"/>
             </a:lvl5pPr>
-            <a:lvl6pPr marL="2286000" indent="0">
+            <a:lvl6pPr marL="1980133" indent="0">
               <a:buNone/>
-              <a:defRPr sz="1600" b="1"/>
+              <a:defRPr sz="1386" b="1"/>
             </a:lvl6pPr>
-            <a:lvl7pPr marL="2743200" indent="0">
+            <a:lvl7pPr marL="2376160" indent="0">
               <a:buNone/>
-              <a:defRPr sz="1600" b="1"/>
+              <a:defRPr sz="1386" b="1"/>
             </a:lvl7pPr>
-            <a:lvl8pPr marL="3200400" indent="0">
+            <a:lvl8pPr marL="2772186" indent="0">
               <a:buNone/>
-              <a:defRPr sz="1600" b="1"/>
+              <a:defRPr sz="1386" b="1"/>
             </a:lvl8pPr>
-            <a:lvl9pPr marL="3657600" indent="0">
+            <a:lvl9pPr marL="3168213" indent="0">
               <a:buNone/>
-              <a:defRPr sz="1600" b="1"/>
+              <a:defRPr sz="1386" b="1"/>
             </a:lvl9pPr>
           </a:lstStyle>
           <a:p>
@@ -1727,13 +1536,7 @@
       </p:sp>
       <p:sp>
         <p:nvSpPr>
-          <p:cNvPr id="6" name="內容版面配置區 5">
-            <a:extLst>
-              <a:ext uri="{FF2B5EF4-FFF2-40B4-BE49-F238E27FC236}">
-                <a16:creationId xmlns:a16="http://schemas.microsoft.com/office/drawing/2014/main" id="{775BE73B-1444-41FA-BDD2-9C2FF86CF7A4}"/>
-              </a:ext>
-            </a:extLst>
-          </p:cNvPr>
+          <p:cNvPr id="6" name="Content Placeholder 5"/>
           <p:cNvSpPr>
             <a:spLocks noGrp="1"/>
           </p:cNvSpPr>
@@ -1743,8 +1546,8 @@
         </p:nvSpPr>
         <p:spPr>
           <a:xfrm>
-            <a:off x="6172200" y="2505075"/>
-            <a:ext cx="5183188" cy="3684588"/>
+            <a:off x="6172200" y="2169905"/>
+            <a:ext cx="5183188" cy="3191604"/>
           </a:xfrm>
         </p:spPr>
         <p:txBody>
@@ -1784,18 +1587,13 @@
               <a:rPr lang="zh-TW" altLang="en-US"/>
               <a:t>第五層</a:t>
             </a:r>
+            <a:endParaRPr lang="en-US" dirty="0"/>
           </a:p>
         </p:txBody>
       </p:sp>
       <p:sp>
         <p:nvSpPr>
-          <p:cNvPr id="7" name="日期版面配置區 6">
-            <a:extLst>
-              <a:ext uri="{FF2B5EF4-FFF2-40B4-BE49-F238E27FC236}">
-                <a16:creationId xmlns:a16="http://schemas.microsoft.com/office/drawing/2014/main" id="{B51EB8B4-5A86-4AA2-9DCA-8A027FE88DEA}"/>
-              </a:ext>
-            </a:extLst>
-          </p:cNvPr>
+          <p:cNvPr id="7" name="Date Placeholder 6"/>
           <p:cNvSpPr>
             <a:spLocks noGrp="1"/>
           </p:cNvSpPr>
@@ -1810,7 +1608,7 @@
           <a:p>
             <a:fld id="{0C4F21BF-7999-4603-8982-00A319506255}" type="datetimeFigureOut">
               <a:rPr lang="zh-TW" altLang="en-US" smtClean="0"/>
-              <a:t>2026/3/17</a:t>
+              <a:t>2026/3/31</a:t>
             </a:fld>
             <a:endParaRPr lang="zh-TW" altLang="en-US"/>
           </a:p>
@@ -1818,13 +1616,7 @@
       </p:sp>
       <p:sp>
         <p:nvSpPr>
-          <p:cNvPr id="8" name="頁尾版面配置區 7">
-            <a:extLst>
-              <a:ext uri="{FF2B5EF4-FFF2-40B4-BE49-F238E27FC236}">
-                <a16:creationId xmlns:a16="http://schemas.microsoft.com/office/drawing/2014/main" id="{D9C75ABF-B7F9-476F-92FC-A756BE694338}"/>
-              </a:ext>
-            </a:extLst>
-          </p:cNvPr>
+          <p:cNvPr id="8" name="Footer Placeholder 7"/>
           <p:cNvSpPr>
             <a:spLocks noGrp="1"/>
           </p:cNvSpPr>
@@ -1843,13 +1635,7 @@
       </p:sp>
       <p:sp>
         <p:nvSpPr>
-          <p:cNvPr id="9" name="投影片編號版面配置區 8">
-            <a:extLst>
-              <a:ext uri="{FF2B5EF4-FFF2-40B4-BE49-F238E27FC236}">
-                <a16:creationId xmlns:a16="http://schemas.microsoft.com/office/drawing/2014/main" id="{5C5EDBB2-3481-4683-9BDF-A6ADB8BC2876}"/>
-              </a:ext>
-            </a:extLst>
-          </p:cNvPr>
+          <p:cNvPr id="9" name="Slide Number Placeholder 8"/>
           <p:cNvSpPr>
             <a:spLocks noGrp="1"/>
           </p:cNvSpPr>
@@ -1873,7 +1659,7 @@
     </p:spTree>
     <p:extLst>
       <p:ext uri="{BB962C8B-B14F-4D97-AF65-F5344CB8AC3E}">
-        <p14:creationId xmlns:p14="http://schemas.microsoft.com/office/powerpoint/2010/main" val="2927235218"/>
+        <p14:creationId xmlns:p14="http://schemas.microsoft.com/office/powerpoint/2010/main" val="439526107"/>
       </p:ext>
     </p:extLst>
   </p:cSld>
@@ -1902,13 +1688,7 @@
       </p:grpSpPr>
       <p:sp>
         <p:nvSpPr>
-          <p:cNvPr id="2" name="標題 1">
-            <a:extLst>
-              <a:ext uri="{FF2B5EF4-FFF2-40B4-BE49-F238E27FC236}">
-                <a16:creationId xmlns:a16="http://schemas.microsoft.com/office/drawing/2014/main" id="{4162C799-34E3-4600-8C01-558D8890A216}"/>
-              </a:ext>
-            </a:extLst>
-          </p:cNvPr>
+          <p:cNvPr id="2" name="Title 1"/>
           <p:cNvSpPr>
             <a:spLocks noGrp="1"/>
           </p:cNvSpPr>
@@ -1925,18 +1705,13 @@
               <a:rPr lang="zh-TW" altLang="en-US"/>
               <a:t>按一下以編輯母片標題樣式</a:t>
             </a:r>
+            <a:endParaRPr lang="en-US" dirty="0"/>
           </a:p>
         </p:txBody>
       </p:sp>
       <p:sp>
         <p:nvSpPr>
-          <p:cNvPr id="3" name="日期版面配置區 2">
-            <a:extLst>
-              <a:ext uri="{FF2B5EF4-FFF2-40B4-BE49-F238E27FC236}">
-                <a16:creationId xmlns:a16="http://schemas.microsoft.com/office/drawing/2014/main" id="{DD2F0A78-ACD8-4B12-AAB1-915EFDCB017C}"/>
-              </a:ext>
-            </a:extLst>
-          </p:cNvPr>
+          <p:cNvPr id="3" name="Date Placeholder 2"/>
           <p:cNvSpPr>
             <a:spLocks noGrp="1"/>
           </p:cNvSpPr>
@@ -1951,7 +1726,7 @@
           <a:p>
             <a:fld id="{0C4F21BF-7999-4603-8982-00A319506255}" type="datetimeFigureOut">
               <a:rPr lang="zh-TW" altLang="en-US" smtClean="0"/>
-              <a:t>2026/3/17</a:t>
+              <a:t>2026/3/31</a:t>
             </a:fld>
             <a:endParaRPr lang="zh-TW" altLang="en-US"/>
           </a:p>
@@ -1959,13 +1734,7 @@
       </p:sp>
       <p:sp>
         <p:nvSpPr>
-          <p:cNvPr id="4" name="頁尾版面配置區 3">
-            <a:extLst>
-              <a:ext uri="{FF2B5EF4-FFF2-40B4-BE49-F238E27FC236}">
-                <a16:creationId xmlns:a16="http://schemas.microsoft.com/office/drawing/2014/main" id="{EDE56E69-2D38-4327-BA20-1A28FDCECFAA}"/>
-              </a:ext>
-            </a:extLst>
-          </p:cNvPr>
+          <p:cNvPr id="4" name="Footer Placeholder 3"/>
           <p:cNvSpPr>
             <a:spLocks noGrp="1"/>
           </p:cNvSpPr>
@@ -1984,13 +1753,7 @@
       </p:sp>
       <p:sp>
         <p:nvSpPr>
-          <p:cNvPr id="5" name="投影片編號版面配置區 4">
-            <a:extLst>
-              <a:ext uri="{FF2B5EF4-FFF2-40B4-BE49-F238E27FC236}">
-                <a16:creationId xmlns:a16="http://schemas.microsoft.com/office/drawing/2014/main" id="{7E5882F2-0E10-4F89-8BD7-C7184EC0BB7B}"/>
-              </a:ext>
-            </a:extLst>
-          </p:cNvPr>
+          <p:cNvPr id="5" name="Slide Number Placeholder 4"/>
           <p:cNvSpPr>
             <a:spLocks noGrp="1"/>
           </p:cNvSpPr>
@@ -2014,7 +1777,7 @@
     </p:spTree>
     <p:extLst>
       <p:ext uri="{BB962C8B-B14F-4D97-AF65-F5344CB8AC3E}">
-        <p14:creationId xmlns:p14="http://schemas.microsoft.com/office/powerpoint/2010/main" val="1080803658"/>
+        <p14:creationId xmlns:p14="http://schemas.microsoft.com/office/powerpoint/2010/main" val="2733208356"/>
       </p:ext>
     </p:extLst>
   </p:cSld>
@@ -2043,13 +1806,7 @@
       </p:grpSpPr>
       <p:sp>
         <p:nvSpPr>
-          <p:cNvPr id="2" name="日期版面配置區 1">
-            <a:extLst>
-              <a:ext uri="{FF2B5EF4-FFF2-40B4-BE49-F238E27FC236}">
-                <a16:creationId xmlns:a16="http://schemas.microsoft.com/office/drawing/2014/main" id="{35EF0BD4-7373-4A68-AF85-11ECE6680379}"/>
-              </a:ext>
-            </a:extLst>
-          </p:cNvPr>
+          <p:cNvPr id="2" name="Date Placeholder 1"/>
           <p:cNvSpPr>
             <a:spLocks noGrp="1"/>
           </p:cNvSpPr>
@@ -2064,7 +1821,7 @@
           <a:p>
             <a:fld id="{0C4F21BF-7999-4603-8982-00A319506255}" type="datetimeFigureOut">
               <a:rPr lang="zh-TW" altLang="en-US" smtClean="0"/>
-              <a:t>2026/3/17</a:t>
+              <a:t>2026/3/31</a:t>
             </a:fld>
             <a:endParaRPr lang="zh-TW" altLang="en-US"/>
           </a:p>
@@ -2072,13 +1829,7 @@
       </p:sp>
       <p:sp>
         <p:nvSpPr>
-          <p:cNvPr id="3" name="頁尾版面配置區 2">
-            <a:extLst>
-              <a:ext uri="{FF2B5EF4-FFF2-40B4-BE49-F238E27FC236}">
-                <a16:creationId xmlns:a16="http://schemas.microsoft.com/office/drawing/2014/main" id="{10702B16-2794-43AD-AEE7-EFD30C7032C2}"/>
-              </a:ext>
-            </a:extLst>
-          </p:cNvPr>
+          <p:cNvPr id="3" name="Footer Placeholder 2"/>
           <p:cNvSpPr>
             <a:spLocks noGrp="1"/>
           </p:cNvSpPr>
@@ -2097,13 +1848,7 @@
       </p:sp>
       <p:sp>
         <p:nvSpPr>
-          <p:cNvPr id="4" name="投影片編號版面配置區 3">
-            <a:extLst>
-              <a:ext uri="{FF2B5EF4-FFF2-40B4-BE49-F238E27FC236}">
-                <a16:creationId xmlns:a16="http://schemas.microsoft.com/office/drawing/2014/main" id="{C50392AE-8553-4F1F-9042-B1D501CA0D1A}"/>
-              </a:ext>
-            </a:extLst>
-          </p:cNvPr>
+          <p:cNvPr id="4" name="Slide Number Placeholder 3"/>
           <p:cNvSpPr>
             <a:spLocks noGrp="1"/>
           </p:cNvSpPr>
@@ -2127,7 +1872,7 @@
     </p:spTree>
     <p:extLst>
       <p:ext uri="{BB962C8B-B14F-4D97-AF65-F5344CB8AC3E}">
-        <p14:creationId xmlns:p14="http://schemas.microsoft.com/office/powerpoint/2010/main" val="3442070264"/>
+        <p14:creationId xmlns:p14="http://schemas.microsoft.com/office/powerpoint/2010/main" val="3067641412"/>
       </p:ext>
     </p:extLst>
   </p:cSld>
@@ -2156,13 +1901,7 @@
       </p:grpSpPr>
       <p:sp>
         <p:nvSpPr>
-          <p:cNvPr id="2" name="標題 1">
-            <a:extLst>
-              <a:ext uri="{FF2B5EF4-FFF2-40B4-BE49-F238E27FC236}">
-                <a16:creationId xmlns:a16="http://schemas.microsoft.com/office/drawing/2014/main" id="{1172FC23-2809-46C9-AE84-925AAA4C5367}"/>
-              </a:ext>
-            </a:extLst>
-          </p:cNvPr>
+          <p:cNvPr id="2" name="Title 1"/>
           <p:cNvSpPr>
             <a:spLocks noGrp="1"/>
           </p:cNvSpPr>
@@ -2172,15 +1911,15 @@
         </p:nvSpPr>
         <p:spPr>
           <a:xfrm>
-            <a:off x="839788" y="457200"/>
-            <a:ext cx="3932237" cy="1600200"/>
+            <a:off x="839789" y="396028"/>
+            <a:ext cx="3932237" cy="1386099"/>
           </a:xfrm>
         </p:spPr>
         <p:txBody>
           <a:bodyPr anchor="b"/>
           <a:lstStyle>
             <a:lvl1pPr>
-              <a:defRPr sz="3200"/>
+              <a:defRPr sz="2772"/>
             </a:lvl1pPr>
           </a:lstStyle>
           <a:p>
@@ -2188,18 +1927,13 @@
               <a:rPr lang="zh-TW" altLang="en-US"/>
               <a:t>按一下以編輯母片標題樣式</a:t>
             </a:r>
+            <a:endParaRPr lang="en-US" dirty="0"/>
           </a:p>
         </p:txBody>
       </p:sp>
       <p:sp>
         <p:nvSpPr>
-          <p:cNvPr id="3" name="內容版面配置區 2">
-            <a:extLst>
-              <a:ext uri="{FF2B5EF4-FFF2-40B4-BE49-F238E27FC236}">
-                <a16:creationId xmlns:a16="http://schemas.microsoft.com/office/drawing/2014/main" id="{255D1D07-E81E-43A7-979B-F206D2D508FF}"/>
-              </a:ext>
-            </a:extLst>
-          </p:cNvPr>
+          <p:cNvPr id="3" name="Content Placeholder 2"/>
           <p:cNvSpPr>
             <a:spLocks noGrp="1"/>
           </p:cNvSpPr>
@@ -2209,39 +1943,39 @@
         </p:nvSpPr>
         <p:spPr>
           <a:xfrm>
-            <a:off x="5183188" y="987425"/>
-            <a:ext cx="6172200" cy="4873625"/>
+            <a:off x="5183188" y="855312"/>
+            <a:ext cx="6172200" cy="4221552"/>
           </a:xfrm>
         </p:spPr>
         <p:txBody>
           <a:bodyPr/>
           <a:lstStyle>
             <a:lvl1pPr>
-              <a:defRPr sz="3200"/>
+              <a:defRPr sz="2772"/>
             </a:lvl1pPr>
             <a:lvl2pPr>
-              <a:defRPr sz="2800"/>
+              <a:defRPr sz="2425"/>
             </a:lvl2pPr>
             <a:lvl3pPr>
-              <a:defRPr sz="2400"/>
+              <a:defRPr sz="2079"/>
             </a:lvl3pPr>
             <a:lvl4pPr>
-              <a:defRPr sz="2000"/>
+              <a:defRPr sz="1732"/>
             </a:lvl4pPr>
             <a:lvl5pPr>
-              <a:defRPr sz="2000"/>
+              <a:defRPr sz="1732"/>
             </a:lvl5pPr>
             <a:lvl6pPr>
-              <a:defRPr sz="2000"/>
+              <a:defRPr sz="1732"/>
             </a:lvl6pPr>
             <a:lvl7pPr>
-              <a:defRPr sz="2000"/>
+              <a:defRPr sz="1732"/>
             </a:lvl7pPr>
             <a:lvl8pPr>
-              <a:defRPr sz="2000"/>
+              <a:defRPr sz="1732"/>
             </a:lvl8pPr>
             <a:lvl9pPr>
-              <a:defRPr sz="2000"/>
+              <a:defRPr sz="1732"/>
             </a:lvl9pPr>
           </a:lstStyle>
           <a:p>
@@ -2278,18 +2012,13 @@
               <a:rPr lang="zh-TW" altLang="en-US"/>
               <a:t>第五層</a:t>
             </a:r>
+            <a:endParaRPr lang="en-US" dirty="0"/>
           </a:p>
         </p:txBody>
       </p:sp>
       <p:sp>
         <p:nvSpPr>
-          <p:cNvPr id="4" name="文字版面配置區 3">
-            <a:extLst>
-              <a:ext uri="{FF2B5EF4-FFF2-40B4-BE49-F238E27FC236}">
-                <a16:creationId xmlns:a16="http://schemas.microsoft.com/office/drawing/2014/main" id="{DF3C328D-EA6F-4365-AFF5-C6C9754C98DB}"/>
-              </a:ext>
-            </a:extLst>
-          </p:cNvPr>
+          <p:cNvPr id="4" name="Text Placeholder 3"/>
           <p:cNvSpPr>
             <a:spLocks noGrp="1"/>
           </p:cNvSpPr>
@@ -2299,8 +2028,8 @@
         </p:nvSpPr>
         <p:spPr>
           <a:xfrm>
-            <a:off x="839788" y="2057400"/>
-            <a:ext cx="3932237" cy="3811588"/>
+            <a:off x="839789" y="1782127"/>
+            <a:ext cx="3932237" cy="3301612"/>
           </a:xfrm>
         </p:spPr>
         <p:txBody>
@@ -2308,39 +2037,39 @@
           <a:lstStyle>
             <a:lvl1pPr marL="0" indent="0">
               <a:buNone/>
-              <a:defRPr sz="1600"/>
+              <a:defRPr sz="1386"/>
             </a:lvl1pPr>
-            <a:lvl2pPr marL="457200" indent="0">
+            <a:lvl2pPr marL="396027" indent="0">
               <a:buNone/>
-              <a:defRPr sz="1400"/>
+              <a:defRPr sz="1213"/>
             </a:lvl2pPr>
-            <a:lvl3pPr marL="914400" indent="0">
+            <a:lvl3pPr marL="792053" indent="0">
               <a:buNone/>
-              <a:defRPr sz="1200"/>
+              <a:defRPr sz="1039"/>
             </a:lvl3pPr>
-            <a:lvl4pPr marL="1371600" indent="0">
+            <a:lvl4pPr marL="1188080" indent="0">
               <a:buNone/>
-              <a:defRPr sz="1000"/>
+              <a:defRPr sz="866"/>
             </a:lvl4pPr>
-            <a:lvl5pPr marL="1828800" indent="0">
+            <a:lvl5pPr marL="1584107" indent="0">
               <a:buNone/>
-              <a:defRPr sz="1000"/>
+              <a:defRPr sz="866"/>
             </a:lvl5pPr>
-            <a:lvl6pPr marL="2286000" indent="0">
+            <a:lvl6pPr marL="1980133" indent="0">
               <a:buNone/>
-              <a:defRPr sz="1000"/>
+              <a:defRPr sz="866"/>
             </a:lvl6pPr>
-            <a:lvl7pPr marL="2743200" indent="0">
+            <a:lvl7pPr marL="2376160" indent="0">
               <a:buNone/>
-              <a:defRPr sz="1000"/>
+              <a:defRPr sz="866"/>
             </a:lvl7pPr>
-            <a:lvl8pPr marL="3200400" indent="0">
+            <a:lvl8pPr marL="2772186" indent="0">
               <a:buNone/>
-              <a:defRPr sz="1000"/>
+              <a:defRPr sz="866"/>
             </a:lvl8pPr>
-            <a:lvl9pPr marL="3657600" indent="0">
+            <a:lvl9pPr marL="3168213" indent="0">
               <a:buNone/>
-              <a:defRPr sz="1000"/>
+              <a:defRPr sz="866"/>
             </a:lvl9pPr>
           </a:lstStyle>
           <a:p>
@@ -2354,13 +2083,7 @@
       </p:sp>
       <p:sp>
         <p:nvSpPr>
-          <p:cNvPr id="5" name="日期版面配置區 4">
-            <a:extLst>
-              <a:ext uri="{FF2B5EF4-FFF2-40B4-BE49-F238E27FC236}">
-                <a16:creationId xmlns:a16="http://schemas.microsoft.com/office/drawing/2014/main" id="{8CDA9DED-3353-447E-9E58-5361DDF46C23}"/>
-              </a:ext>
-            </a:extLst>
-          </p:cNvPr>
+          <p:cNvPr id="5" name="Date Placeholder 4"/>
           <p:cNvSpPr>
             <a:spLocks noGrp="1"/>
           </p:cNvSpPr>
@@ -2375,7 +2098,7 @@
           <a:p>
             <a:fld id="{0C4F21BF-7999-4603-8982-00A319506255}" type="datetimeFigureOut">
               <a:rPr lang="zh-TW" altLang="en-US" smtClean="0"/>
-              <a:t>2026/3/17</a:t>
+              <a:t>2026/3/31</a:t>
             </a:fld>
             <a:endParaRPr lang="zh-TW" altLang="en-US"/>
           </a:p>
@@ -2383,13 +2106,7 @@
       </p:sp>
       <p:sp>
         <p:nvSpPr>
-          <p:cNvPr id="6" name="頁尾版面配置區 5">
-            <a:extLst>
-              <a:ext uri="{FF2B5EF4-FFF2-40B4-BE49-F238E27FC236}">
-                <a16:creationId xmlns:a16="http://schemas.microsoft.com/office/drawing/2014/main" id="{01933A57-6B01-4443-838B-BDFAFED10320}"/>
-              </a:ext>
-            </a:extLst>
-          </p:cNvPr>
+          <p:cNvPr id="6" name="Footer Placeholder 5"/>
           <p:cNvSpPr>
             <a:spLocks noGrp="1"/>
           </p:cNvSpPr>
@@ -2408,13 +2125,7 @@
       </p:sp>
       <p:sp>
         <p:nvSpPr>
-          <p:cNvPr id="7" name="投影片編號版面配置區 6">
-            <a:extLst>
-              <a:ext uri="{FF2B5EF4-FFF2-40B4-BE49-F238E27FC236}">
-                <a16:creationId xmlns:a16="http://schemas.microsoft.com/office/drawing/2014/main" id="{AC10B20F-3144-4AE7-A368-3F92AA0274E3}"/>
-              </a:ext>
-            </a:extLst>
-          </p:cNvPr>
+          <p:cNvPr id="7" name="Slide Number Placeholder 6"/>
           <p:cNvSpPr>
             <a:spLocks noGrp="1"/>
           </p:cNvSpPr>
@@ -2438,7 +2149,7 @@
     </p:spTree>
     <p:extLst>
       <p:ext uri="{BB962C8B-B14F-4D97-AF65-F5344CB8AC3E}">
-        <p14:creationId xmlns:p14="http://schemas.microsoft.com/office/powerpoint/2010/main" val="2085218429"/>
+        <p14:creationId xmlns:p14="http://schemas.microsoft.com/office/powerpoint/2010/main" val="3440635661"/>
       </p:ext>
     </p:extLst>
   </p:cSld>
@@ -2467,13 +2178,7 @@
       </p:grpSpPr>
       <p:sp>
         <p:nvSpPr>
-          <p:cNvPr id="2" name="標題 1">
-            <a:extLst>
-              <a:ext uri="{FF2B5EF4-FFF2-40B4-BE49-F238E27FC236}">
-                <a16:creationId xmlns:a16="http://schemas.microsoft.com/office/drawing/2014/main" id="{DE8F5348-AA41-46EB-B4C4-6FEA42582D9D}"/>
-              </a:ext>
-            </a:extLst>
-          </p:cNvPr>
+          <p:cNvPr id="2" name="Title 1"/>
           <p:cNvSpPr>
             <a:spLocks noGrp="1"/>
           </p:cNvSpPr>
@@ -2483,15 +2188,15 @@
         </p:nvSpPr>
         <p:spPr>
           <a:xfrm>
-            <a:off x="839788" y="457200"/>
-            <a:ext cx="3932237" cy="1600200"/>
+            <a:off x="839789" y="396028"/>
+            <a:ext cx="3932237" cy="1386099"/>
           </a:xfrm>
         </p:spPr>
         <p:txBody>
           <a:bodyPr anchor="b"/>
           <a:lstStyle>
             <a:lvl1pPr>
-              <a:defRPr sz="3200"/>
+              <a:defRPr sz="2772"/>
             </a:lvl1pPr>
           </a:lstStyle>
           <a:p>
@@ -2499,20 +2204,15 @@
               <a:rPr lang="zh-TW" altLang="en-US"/>
               <a:t>按一下以編輯母片標題樣式</a:t>
             </a:r>
+            <a:endParaRPr lang="en-US" dirty="0"/>
           </a:p>
         </p:txBody>
       </p:sp>
       <p:sp>
         <p:nvSpPr>
-          <p:cNvPr id="3" name="圖片版面配置區 2">
-            <a:extLst>
-              <a:ext uri="{FF2B5EF4-FFF2-40B4-BE49-F238E27FC236}">
-                <a16:creationId xmlns:a16="http://schemas.microsoft.com/office/drawing/2014/main" id="{EFAC5B38-95C1-4E02-A263-586FA414BF83}"/>
-              </a:ext>
-            </a:extLst>
-          </p:cNvPr>
+          <p:cNvPr id="3" name="Picture Placeholder 2"/>
           <p:cNvSpPr>
-            <a:spLocks noGrp="1"/>
+            <a:spLocks noGrp="1" noChangeAspect="1"/>
           </p:cNvSpPr>
           <p:nvPr>
             <p:ph type="pic" idx="1"/>
@@ -2520,64 +2220,62 @@
         </p:nvSpPr>
         <p:spPr>
           <a:xfrm>
-            <a:off x="5183188" y="987425"/>
-            <a:ext cx="6172200" cy="4873625"/>
+            <a:off x="5183188" y="855312"/>
+            <a:ext cx="6172200" cy="4221552"/>
           </a:xfrm>
         </p:spPr>
         <p:txBody>
-          <a:bodyPr/>
+          <a:bodyPr anchor="t"/>
           <a:lstStyle>
             <a:lvl1pPr marL="0" indent="0">
               <a:buNone/>
-              <a:defRPr sz="3200"/>
+              <a:defRPr sz="2772"/>
             </a:lvl1pPr>
-            <a:lvl2pPr marL="457200" indent="0">
+            <a:lvl2pPr marL="396027" indent="0">
               <a:buNone/>
-              <a:defRPr sz="2800"/>
+              <a:defRPr sz="2425"/>
             </a:lvl2pPr>
-            <a:lvl3pPr marL="914400" indent="0">
+            <a:lvl3pPr marL="792053" indent="0">
               <a:buNone/>
-              <a:defRPr sz="2400"/>
+              <a:defRPr sz="2079"/>
             </a:lvl3pPr>
-            <a:lvl4pPr marL="1371600" indent="0">
+            <a:lvl4pPr marL="1188080" indent="0">
               <a:buNone/>
-              <a:defRPr sz="2000"/>
+              <a:defRPr sz="1732"/>
             </a:lvl4pPr>
-            <a:lvl5pPr marL="1828800" indent="0">
+            <a:lvl5pPr marL="1584107" indent="0">
               <a:buNone/>
-              <a:defRPr sz="2000"/>
+              <a:defRPr sz="1732"/>
             </a:lvl5pPr>
-            <a:lvl6pPr marL="2286000" indent="0">
+            <a:lvl6pPr marL="1980133" indent="0">
               <a:buNone/>
-              <a:defRPr sz="2000"/>
+              <a:defRPr sz="1732"/>
             </a:lvl6pPr>
-            <a:lvl7pPr marL="2743200" indent="0">
+            <a:lvl7pPr marL="2376160" indent="0">
               <a:buNone/>
-              <a:defRPr sz="2000"/>
+              <a:defRPr sz="1732"/>
             </a:lvl7pPr>
-            <a:lvl8pPr marL="3200400" indent="0">
+            <a:lvl8pPr marL="2772186" indent="0">
               <a:buNone/>
-              <a:defRPr sz="2000"/>
+              <a:defRPr sz="1732"/>
             </a:lvl8pPr>
-            <a:lvl9pPr marL="3657600" indent="0">
+            <a:lvl9pPr marL="3168213" indent="0">
               <a:buNone/>
-              <a:defRPr sz="2000"/>
+              <a:defRPr sz="1732"/>
             </a:lvl9pPr>
           </a:lstStyle>
           <a:p>
-            <a:endParaRPr lang="zh-TW" altLang="en-US"/>
+            <a:r>
+              <a:rPr lang="zh-TW" altLang="en-US"/>
+              <a:t>按一下圖示以新增圖片</a:t>
+            </a:r>
+            <a:endParaRPr lang="en-US" dirty="0"/>
           </a:p>
         </p:txBody>
       </p:sp>
       <p:sp>
         <p:nvSpPr>
-          <p:cNvPr id="4" name="文字版面配置區 3">
-            <a:extLst>
-              <a:ext uri="{FF2B5EF4-FFF2-40B4-BE49-F238E27FC236}">
-                <a16:creationId xmlns:a16="http://schemas.microsoft.com/office/drawing/2014/main" id="{CD28D6D4-40DF-487B-AEA7-C6A255D72D56}"/>
-              </a:ext>
-            </a:extLst>
-          </p:cNvPr>
+          <p:cNvPr id="4" name="Text Placeholder 3"/>
           <p:cNvSpPr>
             <a:spLocks noGrp="1"/>
           </p:cNvSpPr>
@@ -2587,8 +2285,8 @@
         </p:nvSpPr>
         <p:spPr>
           <a:xfrm>
-            <a:off x="839788" y="2057400"/>
-            <a:ext cx="3932237" cy="3811588"/>
+            <a:off x="839789" y="1782127"/>
+            <a:ext cx="3932237" cy="3301612"/>
           </a:xfrm>
         </p:spPr>
         <p:txBody>
@@ -2596,39 +2294,39 @@
           <a:lstStyle>
             <a:lvl1pPr marL="0" indent="0">
               <a:buNone/>
-              <a:defRPr sz="1600"/>
+              <a:defRPr sz="1386"/>
             </a:lvl1pPr>
-            <a:lvl2pPr marL="457200" indent="0">
+            <a:lvl2pPr marL="396027" indent="0">
               <a:buNone/>
-              <a:defRPr sz="1400"/>
+              <a:defRPr sz="1213"/>
             </a:lvl2pPr>
-            <a:lvl3pPr marL="914400" indent="0">
+            <a:lvl3pPr marL="792053" indent="0">
               <a:buNone/>
-              <a:defRPr sz="1200"/>
+              <a:defRPr sz="1039"/>
             </a:lvl3pPr>
-            <a:lvl4pPr marL="1371600" indent="0">
+            <a:lvl4pPr marL="1188080" indent="0">
               <a:buNone/>
-              <a:defRPr sz="1000"/>
+              <a:defRPr sz="866"/>
             </a:lvl4pPr>
-            <a:lvl5pPr marL="1828800" indent="0">
+            <a:lvl5pPr marL="1584107" indent="0">
               <a:buNone/>
-              <a:defRPr sz="1000"/>
+              <a:defRPr sz="866"/>
             </a:lvl5pPr>
-            <a:lvl6pPr marL="2286000" indent="0">
+            <a:lvl6pPr marL="1980133" indent="0">
               <a:buNone/>
-              <a:defRPr sz="1000"/>
+              <a:defRPr sz="866"/>
             </a:lvl6pPr>
-            <a:lvl7pPr marL="2743200" indent="0">
+            <a:lvl7pPr marL="2376160" indent="0">
               <a:buNone/>
-              <a:defRPr sz="1000"/>
+              <a:defRPr sz="866"/>
             </a:lvl7pPr>
-            <a:lvl8pPr marL="3200400" indent="0">
+            <a:lvl8pPr marL="2772186" indent="0">
               <a:buNone/>
-              <a:defRPr sz="1000"/>
+              <a:defRPr sz="866"/>
             </a:lvl8pPr>
-            <a:lvl9pPr marL="3657600" indent="0">
+            <a:lvl9pPr marL="3168213" indent="0">
               <a:buNone/>
-              <a:defRPr sz="1000"/>
+              <a:defRPr sz="866"/>
             </a:lvl9pPr>
           </a:lstStyle>
           <a:p>
@@ -2642,13 +2340,7 @@
       </p:sp>
       <p:sp>
         <p:nvSpPr>
-          <p:cNvPr id="5" name="日期版面配置區 4">
-            <a:extLst>
-              <a:ext uri="{FF2B5EF4-FFF2-40B4-BE49-F238E27FC236}">
-                <a16:creationId xmlns:a16="http://schemas.microsoft.com/office/drawing/2014/main" id="{6735D3F6-DDAA-44BC-9388-20AD8794D3D7}"/>
-              </a:ext>
-            </a:extLst>
-          </p:cNvPr>
+          <p:cNvPr id="5" name="Date Placeholder 4"/>
           <p:cNvSpPr>
             <a:spLocks noGrp="1"/>
           </p:cNvSpPr>
@@ -2663,7 +2355,7 @@
           <a:p>
             <a:fld id="{0C4F21BF-7999-4603-8982-00A319506255}" type="datetimeFigureOut">
               <a:rPr lang="zh-TW" altLang="en-US" smtClean="0"/>
-              <a:t>2026/3/17</a:t>
+              <a:t>2026/3/31</a:t>
             </a:fld>
             <a:endParaRPr lang="zh-TW" altLang="en-US"/>
           </a:p>
@@ -2671,13 +2363,7 @@
       </p:sp>
       <p:sp>
         <p:nvSpPr>
-          <p:cNvPr id="6" name="頁尾版面配置區 5">
-            <a:extLst>
-              <a:ext uri="{FF2B5EF4-FFF2-40B4-BE49-F238E27FC236}">
-                <a16:creationId xmlns:a16="http://schemas.microsoft.com/office/drawing/2014/main" id="{727337CC-7E02-493E-8BB8-24D81D055891}"/>
-              </a:ext>
-            </a:extLst>
-          </p:cNvPr>
+          <p:cNvPr id="6" name="Footer Placeholder 5"/>
           <p:cNvSpPr>
             <a:spLocks noGrp="1"/>
           </p:cNvSpPr>
@@ -2696,13 +2382,7 @@
       </p:sp>
       <p:sp>
         <p:nvSpPr>
-          <p:cNvPr id="7" name="投影片編號版面配置區 6">
-            <a:extLst>
-              <a:ext uri="{FF2B5EF4-FFF2-40B4-BE49-F238E27FC236}">
-                <a16:creationId xmlns:a16="http://schemas.microsoft.com/office/drawing/2014/main" id="{3E30E554-17FD-4243-99CA-B5BE4593DE3D}"/>
-              </a:ext>
-            </a:extLst>
-          </p:cNvPr>
+          <p:cNvPr id="7" name="Slide Number Placeholder 6"/>
           <p:cNvSpPr>
             <a:spLocks noGrp="1"/>
           </p:cNvSpPr>
@@ -2726,7 +2406,7 @@
     </p:spTree>
     <p:extLst>
       <p:ext uri="{BB962C8B-B14F-4D97-AF65-F5344CB8AC3E}">
-        <p14:creationId xmlns:p14="http://schemas.microsoft.com/office/powerpoint/2010/main" val="139931994"/>
+        <p14:creationId xmlns:p14="http://schemas.microsoft.com/office/powerpoint/2010/main" val="1157673530"/>
       </p:ext>
     </p:extLst>
   </p:cSld>
@@ -2760,13 +2440,7 @@
       </p:grpSpPr>
       <p:sp>
         <p:nvSpPr>
-          <p:cNvPr id="2" name="標題版面配置區 1">
-            <a:extLst>
-              <a:ext uri="{FF2B5EF4-FFF2-40B4-BE49-F238E27FC236}">
-                <a16:creationId xmlns:a16="http://schemas.microsoft.com/office/drawing/2014/main" id="{CA80CAB4-5AEE-414E-AD46-D199E6CE520C}"/>
-              </a:ext>
-            </a:extLst>
-          </p:cNvPr>
+          <p:cNvPr id="2" name="Title Placeholder 1"/>
           <p:cNvSpPr>
             <a:spLocks noGrp="1"/>
           </p:cNvSpPr>
@@ -2776,8 +2450,8 @@
         </p:nvSpPr>
         <p:spPr>
           <a:xfrm>
-            <a:off x="838200" y="365125"/>
-            <a:ext cx="10515600" cy="1325563"/>
+            <a:off x="838200" y="316273"/>
+            <a:ext cx="10515600" cy="1148208"/>
           </a:xfrm>
           <a:prstGeom prst="rect">
             <a:avLst/>
@@ -2793,18 +2467,13 @@
               <a:rPr lang="zh-TW" altLang="en-US"/>
               <a:t>按一下以編輯母片標題樣式</a:t>
             </a:r>
+            <a:endParaRPr lang="en-US" dirty="0"/>
           </a:p>
         </p:txBody>
       </p:sp>
       <p:sp>
         <p:nvSpPr>
-          <p:cNvPr id="3" name="文字版面配置區 2">
-            <a:extLst>
-              <a:ext uri="{FF2B5EF4-FFF2-40B4-BE49-F238E27FC236}">
-                <a16:creationId xmlns:a16="http://schemas.microsoft.com/office/drawing/2014/main" id="{D2D28F8D-8B06-4975-8D1A-3DF14B2B4B07}"/>
-              </a:ext>
-            </a:extLst>
-          </p:cNvPr>
+          <p:cNvPr id="3" name="Text Placeholder 2"/>
           <p:cNvSpPr>
             <a:spLocks noGrp="1"/>
           </p:cNvSpPr>
@@ -2814,8 +2483,8 @@
         </p:nvSpPr>
         <p:spPr>
           <a:xfrm>
-            <a:off x="838200" y="1825625"/>
-            <a:ext cx="10515600" cy="4351338"/>
+            <a:off x="838200" y="1581363"/>
+            <a:ext cx="10515600" cy="3769145"/>
           </a:xfrm>
           <a:prstGeom prst="rect">
             <a:avLst/>
@@ -2860,18 +2529,13 @@
               <a:rPr lang="zh-TW" altLang="en-US"/>
               <a:t>第五層</a:t>
             </a:r>
+            <a:endParaRPr lang="en-US" dirty="0"/>
           </a:p>
         </p:txBody>
       </p:sp>
       <p:sp>
         <p:nvSpPr>
-          <p:cNvPr id="4" name="日期版面配置區 3">
-            <a:extLst>
-              <a:ext uri="{FF2B5EF4-FFF2-40B4-BE49-F238E27FC236}">
-                <a16:creationId xmlns:a16="http://schemas.microsoft.com/office/drawing/2014/main" id="{097DE6D8-8006-441A-927C-1F7BB74F73D6}"/>
-              </a:ext>
-            </a:extLst>
-          </p:cNvPr>
+          <p:cNvPr id="4" name="Date Placeholder 3"/>
           <p:cNvSpPr>
             <a:spLocks noGrp="1"/>
           </p:cNvSpPr>
@@ -2881,8 +2545,8 @@
         </p:nvSpPr>
         <p:spPr>
           <a:xfrm>
-            <a:off x="838200" y="6356350"/>
-            <a:ext cx="2743200" cy="365125"/>
+            <a:off x="838200" y="5505894"/>
+            <a:ext cx="2743200" cy="316273"/>
           </a:xfrm>
           <a:prstGeom prst="rect">
             <a:avLst/>
@@ -2892,7 +2556,7 @@
           <a:bodyPr vert="horz" lIns="91440" tIns="45720" rIns="91440" bIns="45720" rtlCol="0" anchor="ctr"/>
           <a:lstStyle>
             <a:lvl1pPr algn="l">
-              <a:defRPr sz="1200">
+              <a:defRPr sz="1039">
                 <a:solidFill>
                   <a:schemeClr val="tx1">
                     <a:tint val="75000"/>
@@ -2904,7 +2568,7 @@
           <a:p>
             <a:fld id="{0C4F21BF-7999-4603-8982-00A319506255}" type="datetimeFigureOut">
               <a:rPr lang="zh-TW" altLang="en-US" smtClean="0"/>
-              <a:t>2026/3/17</a:t>
+              <a:t>2026/3/31</a:t>
             </a:fld>
             <a:endParaRPr lang="zh-TW" altLang="en-US"/>
           </a:p>
@@ -2912,13 +2576,7 @@
       </p:sp>
       <p:sp>
         <p:nvSpPr>
-          <p:cNvPr id="5" name="頁尾版面配置區 4">
-            <a:extLst>
-              <a:ext uri="{FF2B5EF4-FFF2-40B4-BE49-F238E27FC236}">
-                <a16:creationId xmlns:a16="http://schemas.microsoft.com/office/drawing/2014/main" id="{F290E982-E981-40CA-ADDA-D8349AEB03E0}"/>
-              </a:ext>
-            </a:extLst>
-          </p:cNvPr>
+          <p:cNvPr id="5" name="Footer Placeholder 4"/>
           <p:cNvSpPr>
             <a:spLocks noGrp="1"/>
           </p:cNvSpPr>
@@ -2928,8 +2586,8 @@
         </p:nvSpPr>
         <p:spPr>
           <a:xfrm>
-            <a:off x="4038600" y="6356350"/>
-            <a:ext cx="4114800" cy="365125"/>
+            <a:off x="4038600" y="5505894"/>
+            <a:ext cx="4114800" cy="316273"/>
           </a:xfrm>
           <a:prstGeom prst="rect">
             <a:avLst/>
@@ -2939,7 +2597,7 @@
           <a:bodyPr vert="horz" lIns="91440" tIns="45720" rIns="91440" bIns="45720" rtlCol="0" anchor="ctr"/>
           <a:lstStyle>
             <a:lvl1pPr algn="ctr">
-              <a:defRPr sz="1200">
+              <a:defRPr sz="1039">
                 <a:solidFill>
                   <a:schemeClr val="tx1">
                     <a:tint val="75000"/>
@@ -2955,13 +2613,7 @@
       </p:sp>
       <p:sp>
         <p:nvSpPr>
-          <p:cNvPr id="6" name="投影片編號版面配置區 5">
-            <a:extLst>
-              <a:ext uri="{FF2B5EF4-FFF2-40B4-BE49-F238E27FC236}">
-                <a16:creationId xmlns:a16="http://schemas.microsoft.com/office/drawing/2014/main" id="{7A54C50C-F496-4064-9134-4BE92499F97F}"/>
-              </a:ext>
-            </a:extLst>
-          </p:cNvPr>
+          <p:cNvPr id="6" name="Slide Number Placeholder 5"/>
           <p:cNvSpPr>
             <a:spLocks noGrp="1"/>
           </p:cNvSpPr>
@@ -2971,8 +2623,8 @@
         </p:nvSpPr>
         <p:spPr>
           <a:xfrm>
-            <a:off x="8610600" y="6356350"/>
-            <a:ext cx="2743200" cy="365125"/>
+            <a:off x="8610600" y="5505894"/>
+            <a:ext cx="2743200" cy="316273"/>
           </a:xfrm>
           <a:prstGeom prst="rect">
             <a:avLst/>
@@ -2982,7 +2634,7 @@
           <a:bodyPr vert="horz" lIns="91440" tIns="45720" rIns="91440" bIns="45720" rtlCol="0" anchor="ctr"/>
           <a:lstStyle>
             <a:lvl1pPr algn="r">
-              <a:defRPr sz="1200">
+              <a:defRPr sz="1039">
                 <a:solidFill>
                   <a:schemeClr val="tx1">
                     <a:tint val="75000"/>
@@ -3003,27 +2655,27 @@
     </p:spTree>
     <p:extLst>
       <p:ext uri="{BB962C8B-B14F-4D97-AF65-F5344CB8AC3E}">
-        <p14:creationId xmlns:p14="http://schemas.microsoft.com/office/powerpoint/2010/main" val="2601325037"/>
+        <p14:creationId xmlns:p14="http://schemas.microsoft.com/office/powerpoint/2010/main" val="3009162855"/>
       </p:ext>
     </p:extLst>
   </p:cSld>
   <p:clrMap bg1="lt1" tx1="dk1" bg2="lt2" tx2="dk2" accent1="accent1" accent2="accent2" accent3="accent3" accent4="accent4" accent5="accent5" accent6="accent6" hlink="hlink" folHlink="folHlink"/>
   <p:sldLayoutIdLst>
-    <p:sldLayoutId id="2147483649" r:id="rId1"/>
-    <p:sldLayoutId id="2147483650" r:id="rId2"/>
-    <p:sldLayoutId id="2147483651" r:id="rId3"/>
-    <p:sldLayoutId id="2147483652" r:id="rId4"/>
-    <p:sldLayoutId id="2147483653" r:id="rId5"/>
-    <p:sldLayoutId id="2147483654" r:id="rId6"/>
-    <p:sldLayoutId id="2147483655" r:id="rId7"/>
-    <p:sldLayoutId id="2147483656" r:id="rId8"/>
-    <p:sldLayoutId id="2147483657" r:id="rId9"/>
-    <p:sldLayoutId id="2147483658" r:id="rId10"/>
-    <p:sldLayoutId id="2147483659" r:id="rId11"/>
+    <p:sldLayoutId id="2147483661" r:id="rId1"/>
+    <p:sldLayoutId id="2147483662" r:id="rId2"/>
+    <p:sldLayoutId id="2147483663" r:id="rId3"/>
+    <p:sldLayoutId id="2147483664" r:id="rId4"/>
+    <p:sldLayoutId id="2147483665" r:id="rId5"/>
+    <p:sldLayoutId id="2147483666" r:id="rId6"/>
+    <p:sldLayoutId id="2147483667" r:id="rId7"/>
+    <p:sldLayoutId id="2147483668" r:id="rId8"/>
+    <p:sldLayoutId id="2147483669" r:id="rId9"/>
+    <p:sldLayoutId id="2147483670" r:id="rId10"/>
+    <p:sldLayoutId id="2147483671" r:id="rId11"/>
   </p:sldLayoutIdLst>
   <p:txStyles>
     <p:titleStyle>
-      <a:lvl1pPr algn="l" defTabSz="914400" rtl="0" eaLnBrk="1" latinLnBrk="0" hangingPunct="1">
+      <a:lvl1pPr algn="l" defTabSz="792053" rtl="0" eaLnBrk="1" latinLnBrk="0" hangingPunct="1">
         <a:lnSpc>
           <a:spcPct val="90000"/>
         </a:lnSpc>
@@ -3031,7 +2683,7 @@
           <a:spcPct val="0"/>
         </a:spcBef>
         <a:buNone/>
-        <a:defRPr sz="4400" kern="1200">
+        <a:defRPr sz="3811" kern="1200">
           <a:solidFill>
             <a:schemeClr val="tx1"/>
           </a:solidFill>
@@ -3042,16 +2694,16 @@
       </a:lvl1pPr>
     </p:titleStyle>
     <p:bodyStyle>
-      <a:lvl1pPr marL="228600" indent="-228600" algn="l" defTabSz="914400" rtl="0" eaLnBrk="1" latinLnBrk="0" hangingPunct="1">
+      <a:lvl1pPr marL="198013" indent="-198013" algn="l" defTabSz="792053" rtl="0" eaLnBrk="1" latinLnBrk="0" hangingPunct="1">
         <a:lnSpc>
           <a:spcPct val="90000"/>
         </a:lnSpc>
         <a:spcBef>
-          <a:spcPts val="1000"/>
+          <a:spcPts val="866"/>
         </a:spcBef>
         <a:buFont typeface="Arial" panose="020B0604020202020204" pitchFamily="34" charset="0"/>
         <a:buChar char="•"/>
-        <a:defRPr sz="2800" kern="1200">
+        <a:defRPr sz="2425" kern="1200">
           <a:solidFill>
             <a:schemeClr val="tx1"/>
           </a:solidFill>
@@ -3060,16 +2712,16 @@
           <a:cs typeface="+mn-cs"/>
         </a:defRPr>
       </a:lvl1pPr>
-      <a:lvl2pPr marL="685800" indent="-228600" algn="l" defTabSz="914400" rtl="0" eaLnBrk="1" latinLnBrk="0" hangingPunct="1">
+      <a:lvl2pPr marL="594040" indent="-198013" algn="l" defTabSz="792053" rtl="0" eaLnBrk="1" latinLnBrk="0" hangingPunct="1">
         <a:lnSpc>
           <a:spcPct val="90000"/>
         </a:lnSpc>
         <a:spcBef>
-          <a:spcPts val="500"/>
+          <a:spcPts val="433"/>
         </a:spcBef>
         <a:buFont typeface="Arial" panose="020B0604020202020204" pitchFamily="34" charset="0"/>
         <a:buChar char="•"/>
-        <a:defRPr sz="2400" kern="1200">
+        <a:defRPr sz="2079" kern="1200">
           <a:solidFill>
             <a:schemeClr val="tx1"/>
           </a:solidFill>
@@ -3078,16 +2730,16 @@
           <a:cs typeface="+mn-cs"/>
         </a:defRPr>
       </a:lvl2pPr>
-      <a:lvl3pPr marL="1143000" indent="-228600" algn="l" defTabSz="914400" rtl="0" eaLnBrk="1" latinLnBrk="0" hangingPunct="1">
+      <a:lvl3pPr marL="990067" indent="-198013" algn="l" defTabSz="792053" rtl="0" eaLnBrk="1" latinLnBrk="0" hangingPunct="1">
         <a:lnSpc>
           <a:spcPct val="90000"/>
         </a:lnSpc>
         <a:spcBef>
-          <a:spcPts val="500"/>
+          <a:spcPts val="433"/>
         </a:spcBef>
         <a:buFont typeface="Arial" panose="020B0604020202020204" pitchFamily="34" charset="0"/>
         <a:buChar char="•"/>
-        <a:defRPr sz="2000" kern="1200">
+        <a:defRPr sz="1732" kern="1200">
           <a:solidFill>
             <a:schemeClr val="tx1"/>
           </a:solidFill>
@@ -3096,16 +2748,16 @@
           <a:cs typeface="+mn-cs"/>
         </a:defRPr>
       </a:lvl3pPr>
-      <a:lvl4pPr marL="1600200" indent="-228600" algn="l" defTabSz="914400" rtl="0" eaLnBrk="1" latinLnBrk="0" hangingPunct="1">
+      <a:lvl4pPr marL="1386093" indent="-198013" algn="l" defTabSz="792053" rtl="0" eaLnBrk="1" latinLnBrk="0" hangingPunct="1">
         <a:lnSpc>
           <a:spcPct val="90000"/>
         </a:lnSpc>
         <a:spcBef>
-          <a:spcPts val="500"/>
+          <a:spcPts val="433"/>
         </a:spcBef>
         <a:buFont typeface="Arial" panose="020B0604020202020204" pitchFamily="34" charset="0"/>
         <a:buChar char="•"/>
-        <a:defRPr sz="1800" kern="1200">
+        <a:defRPr sz="1559" kern="1200">
           <a:solidFill>
             <a:schemeClr val="tx1"/>
           </a:solidFill>
@@ -3114,16 +2766,16 @@
           <a:cs typeface="+mn-cs"/>
         </a:defRPr>
       </a:lvl4pPr>
-      <a:lvl5pPr marL="2057400" indent="-228600" algn="l" defTabSz="914400" rtl="0" eaLnBrk="1" latinLnBrk="0" hangingPunct="1">
+      <a:lvl5pPr marL="1782120" indent="-198013" algn="l" defTabSz="792053" rtl="0" eaLnBrk="1" latinLnBrk="0" hangingPunct="1">
         <a:lnSpc>
           <a:spcPct val="90000"/>
         </a:lnSpc>
         <a:spcBef>
-          <a:spcPts val="500"/>
+          <a:spcPts val="433"/>
         </a:spcBef>
         <a:buFont typeface="Arial" panose="020B0604020202020204" pitchFamily="34" charset="0"/>
         <a:buChar char="•"/>
-        <a:defRPr sz="1800" kern="1200">
+        <a:defRPr sz="1559" kern="1200">
           <a:solidFill>
             <a:schemeClr val="tx1"/>
           </a:solidFill>
@@ -3132,16 +2784,16 @@
           <a:cs typeface="+mn-cs"/>
         </a:defRPr>
       </a:lvl5pPr>
-      <a:lvl6pPr marL="2514600" indent="-228600" algn="l" defTabSz="914400" rtl="0" eaLnBrk="1" latinLnBrk="0" hangingPunct="1">
+      <a:lvl6pPr marL="2178147" indent="-198013" algn="l" defTabSz="792053" rtl="0" eaLnBrk="1" latinLnBrk="0" hangingPunct="1">
         <a:lnSpc>
           <a:spcPct val="90000"/>
         </a:lnSpc>
         <a:spcBef>
-          <a:spcPts val="500"/>
+          <a:spcPts val="433"/>
         </a:spcBef>
         <a:buFont typeface="Arial" panose="020B0604020202020204" pitchFamily="34" charset="0"/>
         <a:buChar char="•"/>
-        <a:defRPr sz="1800" kern="1200">
+        <a:defRPr sz="1559" kern="1200">
           <a:solidFill>
             <a:schemeClr val="tx1"/>
           </a:solidFill>
@@ -3150,16 +2802,16 @@
           <a:cs typeface="+mn-cs"/>
         </a:defRPr>
       </a:lvl6pPr>
-      <a:lvl7pPr marL="2971800" indent="-228600" algn="l" defTabSz="914400" rtl="0" eaLnBrk="1" latinLnBrk="0" hangingPunct="1">
+      <a:lvl7pPr marL="2574173" indent="-198013" algn="l" defTabSz="792053" rtl="0" eaLnBrk="1" latinLnBrk="0" hangingPunct="1">
         <a:lnSpc>
           <a:spcPct val="90000"/>
         </a:lnSpc>
         <a:spcBef>
-          <a:spcPts val="500"/>
+          <a:spcPts val="433"/>
         </a:spcBef>
         <a:buFont typeface="Arial" panose="020B0604020202020204" pitchFamily="34" charset="0"/>
         <a:buChar char="•"/>
-        <a:defRPr sz="1800" kern="1200">
+        <a:defRPr sz="1559" kern="1200">
           <a:solidFill>
             <a:schemeClr val="tx1"/>
           </a:solidFill>
@@ -3168,16 +2820,16 @@
           <a:cs typeface="+mn-cs"/>
         </a:defRPr>
       </a:lvl7pPr>
-      <a:lvl8pPr marL="3429000" indent="-228600" algn="l" defTabSz="914400" rtl="0" eaLnBrk="1" latinLnBrk="0" hangingPunct="1">
+      <a:lvl8pPr marL="2970200" indent="-198013" algn="l" defTabSz="792053" rtl="0" eaLnBrk="1" latinLnBrk="0" hangingPunct="1">
         <a:lnSpc>
           <a:spcPct val="90000"/>
         </a:lnSpc>
         <a:spcBef>
-          <a:spcPts val="500"/>
+          <a:spcPts val="433"/>
         </a:spcBef>
         <a:buFont typeface="Arial" panose="020B0604020202020204" pitchFamily="34" charset="0"/>
         <a:buChar char="•"/>
-        <a:defRPr sz="1800" kern="1200">
+        <a:defRPr sz="1559" kern="1200">
           <a:solidFill>
             <a:schemeClr val="tx1"/>
           </a:solidFill>
@@ -3186,16 +2838,16 @@
           <a:cs typeface="+mn-cs"/>
         </a:defRPr>
       </a:lvl8pPr>
-      <a:lvl9pPr marL="3886200" indent="-228600" algn="l" defTabSz="914400" rtl="0" eaLnBrk="1" latinLnBrk="0" hangingPunct="1">
+      <a:lvl9pPr marL="3366226" indent="-198013" algn="l" defTabSz="792053" rtl="0" eaLnBrk="1" latinLnBrk="0" hangingPunct="1">
         <a:lnSpc>
           <a:spcPct val="90000"/>
         </a:lnSpc>
         <a:spcBef>
-          <a:spcPts val="500"/>
+          <a:spcPts val="433"/>
         </a:spcBef>
         <a:buFont typeface="Arial" panose="020B0604020202020204" pitchFamily="34" charset="0"/>
         <a:buChar char="•"/>
-        <a:defRPr sz="1800" kern="1200">
+        <a:defRPr sz="1559" kern="1200">
           <a:solidFill>
             <a:schemeClr val="tx1"/>
           </a:solidFill>
@@ -3207,10 +2859,10 @@
     </p:bodyStyle>
     <p:otherStyle>
       <a:defPPr>
-        <a:defRPr lang="zh-TW"/>
+        <a:defRPr lang="en-US"/>
       </a:defPPr>
-      <a:lvl1pPr marL="0" algn="l" defTabSz="914400" rtl="0" eaLnBrk="1" latinLnBrk="0" hangingPunct="1">
-        <a:defRPr sz="1800" kern="1200">
+      <a:lvl1pPr marL="0" algn="l" defTabSz="792053" rtl="0" eaLnBrk="1" latinLnBrk="0" hangingPunct="1">
+        <a:defRPr sz="1559" kern="1200">
           <a:solidFill>
             <a:schemeClr val="tx1"/>
           </a:solidFill>
@@ -3219,8 +2871,8 @@
           <a:cs typeface="+mn-cs"/>
         </a:defRPr>
       </a:lvl1pPr>
-      <a:lvl2pPr marL="457200" algn="l" defTabSz="914400" rtl="0" eaLnBrk="1" latinLnBrk="0" hangingPunct="1">
-        <a:defRPr sz="1800" kern="1200">
+      <a:lvl2pPr marL="396027" algn="l" defTabSz="792053" rtl="0" eaLnBrk="1" latinLnBrk="0" hangingPunct="1">
+        <a:defRPr sz="1559" kern="1200">
           <a:solidFill>
             <a:schemeClr val="tx1"/>
           </a:solidFill>
@@ -3229,8 +2881,8 @@
           <a:cs typeface="+mn-cs"/>
         </a:defRPr>
       </a:lvl2pPr>
-      <a:lvl3pPr marL="914400" algn="l" defTabSz="914400" rtl="0" eaLnBrk="1" latinLnBrk="0" hangingPunct="1">
-        <a:defRPr sz="1800" kern="1200">
+      <a:lvl3pPr marL="792053" algn="l" defTabSz="792053" rtl="0" eaLnBrk="1" latinLnBrk="0" hangingPunct="1">
+        <a:defRPr sz="1559" kern="1200">
           <a:solidFill>
             <a:schemeClr val="tx1"/>
           </a:solidFill>
@@ -3239,8 +2891,8 @@
           <a:cs typeface="+mn-cs"/>
         </a:defRPr>
       </a:lvl3pPr>
-      <a:lvl4pPr marL="1371600" algn="l" defTabSz="914400" rtl="0" eaLnBrk="1" latinLnBrk="0" hangingPunct="1">
-        <a:defRPr sz="1800" kern="1200">
+      <a:lvl4pPr marL="1188080" algn="l" defTabSz="792053" rtl="0" eaLnBrk="1" latinLnBrk="0" hangingPunct="1">
+        <a:defRPr sz="1559" kern="1200">
           <a:solidFill>
             <a:schemeClr val="tx1"/>
           </a:solidFill>
@@ -3249,8 +2901,8 @@
           <a:cs typeface="+mn-cs"/>
         </a:defRPr>
       </a:lvl4pPr>
-      <a:lvl5pPr marL="1828800" algn="l" defTabSz="914400" rtl="0" eaLnBrk="1" latinLnBrk="0" hangingPunct="1">
-        <a:defRPr sz="1800" kern="1200">
+      <a:lvl5pPr marL="1584107" algn="l" defTabSz="792053" rtl="0" eaLnBrk="1" latinLnBrk="0" hangingPunct="1">
+        <a:defRPr sz="1559" kern="1200">
           <a:solidFill>
             <a:schemeClr val="tx1"/>
           </a:solidFill>
@@ -3259,8 +2911,8 @@
           <a:cs typeface="+mn-cs"/>
         </a:defRPr>
       </a:lvl5pPr>
-      <a:lvl6pPr marL="2286000" algn="l" defTabSz="914400" rtl="0" eaLnBrk="1" latinLnBrk="0" hangingPunct="1">
-        <a:defRPr sz="1800" kern="1200">
+      <a:lvl6pPr marL="1980133" algn="l" defTabSz="792053" rtl="0" eaLnBrk="1" latinLnBrk="0" hangingPunct="1">
+        <a:defRPr sz="1559" kern="1200">
           <a:solidFill>
             <a:schemeClr val="tx1"/>
           </a:solidFill>
@@ -3269,8 +2921,8 @@
           <a:cs typeface="+mn-cs"/>
         </a:defRPr>
       </a:lvl6pPr>
-      <a:lvl7pPr marL="2743200" algn="l" defTabSz="914400" rtl="0" eaLnBrk="1" latinLnBrk="0" hangingPunct="1">
-        <a:defRPr sz="1800" kern="1200">
+      <a:lvl7pPr marL="2376160" algn="l" defTabSz="792053" rtl="0" eaLnBrk="1" latinLnBrk="0" hangingPunct="1">
+        <a:defRPr sz="1559" kern="1200">
           <a:solidFill>
             <a:schemeClr val="tx1"/>
           </a:solidFill>
@@ -3279,8 +2931,8 @@
           <a:cs typeface="+mn-cs"/>
         </a:defRPr>
       </a:lvl7pPr>
-      <a:lvl8pPr marL="3200400" algn="l" defTabSz="914400" rtl="0" eaLnBrk="1" latinLnBrk="0" hangingPunct="1">
-        <a:defRPr sz="1800" kern="1200">
+      <a:lvl8pPr marL="2772186" algn="l" defTabSz="792053" rtl="0" eaLnBrk="1" latinLnBrk="0" hangingPunct="1">
+        <a:defRPr sz="1559" kern="1200">
           <a:solidFill>
             <a:schemeClr val="tx1"/>
           </a:solidFill>
@@ -3289,8 +2941,8 @@
           <a:cs typeface="+mn-cs"/>
         </a:defRPr>
       </a:lvl8pPr>
-      <a:lvl9pPr marL="3657600" algn="l" defTabSz="914400" rtl="0" eaLnBrk="1" latinLnBrk="0" hangingPunct="1">
-        <a:defRPr sz="1800" kern="1200">
+      <a:lvl9pPr marL="3168213" algn="l" defTabSz="792053" rtl="0" eaLnBrk="1" latinLnBrk="0" hangingPunct="1">
+        <a:defRPr sz="1559" kern="1200">
           <a:solidFill>
             <a:schemeClr val="tx1"/>
           </a:solidFill>
@@ -3321,6 +2973,3107 @@
           <a:chExt cx="0" cy="0"/>
         </a:xfrm>
       </p:grpSpPr>
+      <p:sp>
+        <p:nvSpPr>
+          <p:cNvPr id="90" name="矩形 89">
+            <a:extLst>
+              <a:ext uri="{FF2B5EF4-FFF2-40B4-BE49-F238E27FC236}">
+                <a16:creationId xmlns:a16="http://schemas.microsoft.com/office/drawing/2014/main" id="{51794149-3CEA-4A61-9D1D-9B37259D93E3}"/>
+              </a:ext>
+            </a:extLst>
+          </p:cNvPr>
+          <p:cNvSpPr/>
+          <p:nvPr/>
+        </p:nvSpPr>
+        <p:spPr>
+          <a:xfrm>
+            <a:off x="123826" y="17462"/>
+            <a:ext cx="12068175" cy="5734050"/>
+          </a:xfrm>
+          <a:prstGeom prst="rect">
+            <a:avLst/>
+          </a:prstGeom>
+          <a:solidFill>
+            <a:schemeClr val="bg1"/>
+          </a:solidFill>
+          <a:ln>
+            <a:noFill/>
+          </a:ln>
+        </p:spPr>
+        <p:style>
+          <a:lnRef idx="2">
+            <a:schemeClr val="accent1">
+              <a:shade val="50000"/>
+            </a:schemeClr>
+          </a:lnRef>
+          <a:fillRef idx="1">
+            <a:schemeClr val="accent1"/>
+          </a:fillRef>
+          <a:effectRef idx="0">
+            <a:schemeClr val="accent1"/>
+          </a:effectRef>
+          <a:fontRef idx="minor">
+            <a:schemeClr val="lt1"/>
+          </a:fontRef>
+        </p:style>
+        <p:txBody>
+          <a:bodyPr rot="0" spcFirstLastPara="0" vertOverflow="overflow" horzOverflow="overflow" vert="horz" wrap="square" lIns="91440" tIns="45720" rIns="91440" bIns="45720" numCol="1" spcCol="0" rtlCol="0" fromWordArt="0" anchor="ctr" anchorCtr="0" forceAA="0" compatLnSpc="1">
+            <a:prstTxWarp prst="textNoShape">
+              <a:avLst/>
+            </a:prstTxWarp>
+            <a:noAutofit/>
+          </a:bodyPr>
+          <a:lstStyle/>
+          <a:p>
+            <a:pPr algn="ctr"/>
+            <a:endParaRPr lang="zh-TW" altLang="en-US"/>
+          </a:p>
+        </p:txBody>
+      </p:sp>
+      <p:grpSp>
+        <p:nvGrpSpPr>
+          <p:cNvPr id="60" name="群組 59">
+            <a:extLst>
+              <a:ext uri="{FF2B5EF4-FFF2-40B4-BE49-F238E27FC236}">
+                <a16:creationId xmlns:a16="http://schemas.microsoft.com/office/drawing/2014/main" id="{A0E27693-9B7E-4785-8F7B-A0BD897A2C62}"/>
+              </a:ext>
+            </a:extLst>
+          </p:cNvPr>
+          <p:cNvGrpSpPr/>
+          <p:nvPr/>
+        </p:nvGrpSpPr>
+        <p:grpSpPr>
+          <a:xfrm>
+            <a:off x="8074370" y="236550"/>
+            <a:ext cx="4487124" cy="4487124"/>
+            <a:chOff x="-98851" y="651318"/>
+            <a:chExt cx="4487124" cy="4487124"/>
+          </a:xfrm>
+        </p:grpSpPr>
+        <p:pic>
+          <p:nvPicPr>
+            <p:cNvPr id="14" name="Picture 2" descr="https://www.mdpi.com/applsci/applsci-08-01157/article_deploy/html/images/applsci-08-01157-g001.png">
+              <a:extLst>
+                <a:ext uri="{FF2B5EF4-FFF2-40B4-BE49-F238E27FC236}">
+                  <a16:creationId xmlns:a16="http://schemas.microsoft.com/office/drawing/2014/main" id="{BB779D1F-F040-4DA2-BAE2-2F7A34E9CB19}"/>
+                </a:ext>
+              </a:extLst>
+            </p:cNvPr>
+            <p:cNvPicPr>
+              <a:picLocks noChangeAspect="1" noChangeArrowheads="1"/>
+            </p:cNvPicPr>
+            <p:nvPr/>
+          </p:nvPicPr>
+          <p:blipFill rotWithShape="1">
+            <a:blip r:embed="rId2">
+              <a:extLst>
+                <a:ext uri="{28A0092B-C50C-407E-A947-70E740481C1C}">
+                  <a14:useLocalDpi xmlns:a14="http://schemas.microsoft.com/office/drawing/2010/main" val="0"/>
+                </a:ext>
+              </a:extLst>
+            </a:blip>
+            <a:srcRect l="3264" t="6572" r="70352" b="56107"/>
+            <a:stretch/>
+          </p:blipFill>
+          <p:spPr bwMode="auto">
+            <a:xfrm rot="1809625">
+              <a:off x="709001" y="1827176"/>
+              <a:ext cx="3270061" cy="2593551"/>
+            </a:xfrm>
+            <a:prstGeom prst="rect">
+              <a:avLst/>
+            </a:prstGeom>
+            <a:noFill/>
+            <a:extLst>
+              <a:ext uri="{909E8E84-426E-40DD-AFC4-6F175D3DCCD1}">
+                <a14:hiddenFill xmlns:a14="http://schemas.microsoft.com/office/drawing/2010/main">
+                  <a:solidFill>
+                    <a:srgbClr val="FFFFFF"/>
+                  </a:solidFill>
+                </a14:hiddenFill>
+              </a:ext>
+            </a:extLst>
+          </p:spPr>
+        </p:pic>
+        <p:sp>
+          <p:nvSpPr>
+            <p:cNvPr id="52" name="圓形: 空心 51">
+              <a:extLst>
+                <a:ext uri="{FF2B5EF4-FFF2-40B4-BE49-F238E27FC236}">
+                  <a16:creationId xmlns:a16="http://schemas.microsoft.com/office/drawing/2014/main" id="{95ED25BA-F532-4FA5-AFA3-4E2463E8056B}"/>
+                </a:ext>
+              </a:extLst>
+            </p:cNvPr>
+            <p:cNvSpPr/>
+            <p:nvPr/>
+          </p:nvSpPr>
+          <p:spPr>
+            <a:xfrm>
+              <a:off x="-98851" y="651318"/>
+              <a:ext cx="4487124" cy="4487124"/>
+            </a:xfrm>
+            <a:prstGeom prst="donut">
+              <a:avLst>
+                <a:gd name="adj" fmla="val 24348"/>
+              </a:avLst>
+            </a:prstGeom>
+            <a:solidFill>
+              <a:schemeClr val="bg1"/>
+            </a:solidFill>
+            <a:ln>
+              <a:noFill/>
+            </a:ln>
+          </p:spPr>
+          <p:style>
+            <a:lnRef idx="2">
+              <a:schemeClr val="accent1">
+                <a:shade val="50000"/>
+              </a:schemeClr>
+            </a:lnRef>
+            <a:fillRef idx="1">
+              <a:schemeClr val="accent1"/>
+            </a:fillRef>
+            <a:effectRef idx="0">
+              <a:schemeClr val="accent1"/>
+            </a:effectRef>
+            <a:fontRef idx="minor">
+              <a:schemeClr val="lt1"/>
+            </a:fontRef>
+          </p:style>
+          <p:txBody>
+            <a:bodyPr rot="0" spcFirstLastPara="0" vertOverflow="overflow" horzOverflow="overflow" vert="horz" wrap="square" lIns="91440" tIns="45720" rIns="91440" bIns="45720" numCol="1" spcCol="0" rtlCol="0" fromWordArt="0" anchor="ctr" anchorCtr="0" forceAA="0" compatLnSpc="1">
+              <a:prstTxWarp prst="textNoShape">
+                <a:avLst/>
+              </a:prstTxWarp>
+              <a:noAutofit/>
+            </a:bodyPr>
+            <a:lstStyle/>
+            <a:p>
+              <a:pPr algn="ctr"/>
+              <a:endParaRPr lang="zh-TW" altLang="en-US" dirty="0">
+                <a:solidFill>
+                  <a:schemeClr val="tx1"/>
+                </a:solidFill>
+              </a:endParaRPr>
+            </a:p>
+          </p:txBody>
+        </p:sp>
+        <p:grpSp>
+          <p:nvGrpSpPr>
+            <p:cNvPr id="53" name="群組 52">
+              <a:extLst>
+                <a:ext uri="{FF2B5EF4-FFF2-40B4-BE49-F238E27FC236}">
+                  <a16:creationId xmlns:a16="http://schemas.microsoft.com/office/drawing/2014/main" id="{B99EA0DF-4EF0-46D2-9628-2B1F6F91D90B}"/>
+                </a:ext>
+              </a:extLst>
+            </p:cNvPr>
+            <p:cNvGrpSpPr/>
+            <p:nvPr/>
+          </p:nvGrpSpPr>
+          <p:grpSpPr>
+            <a:xfrm rot="16200000">
+              <a:off x="1839247" y="2755590"/>
+              <a:ext cx="589628" cy="333090"/>
+              <a:chOff x="1763808" y="585245"/>
+              <a:chExt cx="1828792" cy="863907"/>
+            </a:xfrm>
+          </p:grpSpPr>
+          <p:cxnSp>
+            <p:nvCxnSpPr>
+              <p:cNvPr id="54" name="直線接點 53">
+                <a:extLst>
+                  <a:ext uri="{FF2B5EF4-FFF2-40B4-BE49-F238E27FC236}">
+                    <a16:creationId xmlns:a16="http://schemas.microsoft.com/office/drawing/2014/main" id="{62AF9BEC-FDCC-477A-8FC0-BEAF65E92CEE}"/>
+                  </a:ext>
+                </a:extLst>
+              </p:cNvPr>
+              <p:cNvCxnSpPr/>
+              <p:nvPr/>
+            </p:nvCxnSpPr>
+            <p:spPr>
+              <a:xfrm>
+                <a:off x="2678201" y="586088"/>
+                <a:ext cx="914399" cy="426720"/>
+              </a:xfrm>
+              <a:prstGeom prst="line">
+                <a:avLst/>
+              </a:prstGeom>
+              <a:ln w="9525">
+                <a:prstDash val="sysDash"/>
+              </a:ln>
+            </p:spPr>
+            <p:style>
+              <a:lnRef idx="3">
+                <a:schemeClr val="dk1"/>
+              </a:lnRef>
+              <a:fillRef idx="0">
+                <a:schemeClr val="dk1"/>
+              </a:fillRef>
+              <a:effectRef idx="2">
+                <a:schemeClr val="dk1"/>
+              </a:effectRef>
+              <a:fontRef idx="minor">
+                <a:schemeClr val="tx1"/>
+              </a:fontRef>
+            </p:style>
+          </p:cxnSp>
+          <p:cxnSp>
+            <p:nvCxnSpPr>
+              <p:cNvPr id="55" name="直線接點 54">
+                <a:extLst>
+                  <a:ext uri="{FF2B5EF4-FFF2-40B4-BE49-F238E27FC236}">
+                    <a16:creationId xmlns:a16="http://schemas.microsoft.com/office/drawing/2014/main" id="{2702ACC3-77E2-4B95-A6BB-83EE61921103}"/>
+                  </a:ext>
+                </a:extLst>
+              </p:cNvPr>
+              <p:cNvCxnSpPr/>
+              <p:nvPr/>
+            </p:nvCxnSpPr>
+            <p:spPr>
+              <a:xfrm>
+                <a:off x="1763811" y="1021595"/>
+                <a:ext cx="914399" cy="426720"/>
+              </a:xfrm>
+              <a:prstGeom prst="line">
+                <a:avLst/>
+              </a:prstGeom>
+              <a:ln w="9525">
+                <a:prstDash val="sysDash"/>
+              </a:ln>
+            </p:spPr>
+            <p:style>
+              <a:lnRef idx="3">
+                <a:schemeClr val="dk1"/>
+              </a:lnRef>
+              <a:fillRef idx="0">
+                <a:schemeClr val="dk1"/>
+              </a:fillRef>
+              <a:effectRef idx="2">
+                <a:schemeClr val="dk1"/>
+              </a:effectRef>
+              <a:fontRef idx="minor">
+                <a:schemeClr val="tx1"/>
+              </a:fontRef>
+            </p:style>
+          </p:cxnSp>
+          <p:cxnSp>
+            <p:nvCxnSpPr>
+              <p:cNvPr id="56" name="直線接點 55">
+                <a:extLst>
+                  <a:ext uri="{FF2B5EF4-FFF2-40B4-BE49-F238E27FC236}">
+                    <a16:creationId xmlns:a16="http://schemas.microsoft.com/office/drawing/2014/main" id="{B581387D-7DDE-404B-9E32-1D986E3DF29E}"/>
+                  </a:ext>
+                </a:extLst>
+              </p:cNvPr>
+              <p:cNvCxnSpPr>
+                <a:cxnSpLocks/>
+              </p:cNvCxnSpPr>
+              <p:nvPr/>
+            </p:nvCxnSpPr>
+            <p:spPr>
+              <a:xfrm flipV="1">
+                <a:off x="2678201" y="1020752"/>
+                <a:ext cx="914399" cy="428400"/>
+              </a:xfrm>
+              <a:prstGeom prst="line">
+                <a:avLst/>
+              </a:prstGeom>
+              <a:ln w="9525">
+                <a:prstDash val="sysDash"/>
+              </a:ln>
+            </p:spPr>
+            <p:style>
+              <a:lnRef idx="3">
+                <a:schemeClr val="dk1"/>
+              </a:lnRef>
+              <a:fillRef idx="0">
+                <a:schemeClr val="dk1"/>
+              </a:fillRef>
+              <a:effectRef idx="2">
+                <a:schemeClr val="dk1"/>
+              </a:effectRef>
+              <a:fontRef idx="minor">
+                <a:schemeClr val="tx1"/>
+              </a:fontRef>
+            </p:style>
+          </p:cxnSp>
+          <p:cxnSp>
+            <p:nvCxnSpPr>
+              <p:cNvPr id="57" name="直線接點 56">
+                <a:extLst>
+                  <a:ext uri="{FF2B5EF4-FFF2-40B4-BE49-F238E27FC236}">
+                    <a16:creationId xmlns:a16="http://schemas.microsoft.com/office/drawing/2014/main" id="{2A771E86-1748-475E-BF31-D18696D6F3C2}"/>
+                  </a:ext>
+                </a:extLst>
+              </p:cNvPr>
+              <p:cNvCxnSpPr>
+                <a:cxnSpLocks/>
+              </p:cNvCxnSpPr>
+              <p:nvPr/>
+            </p:nvCxnSpPr>
+            <p:spPr>
+              <a:xfrm flipV="1">
+                <a:off x="1763808" y="585245"/>
+                <a:ext cx="914399" cy="428400"/>
+              </a:xfrm>
+              <a:prstGeom prst="line">
+                <a:avLst/>
+              </a:prstGeom>
+              <a:ln w="9525">
+                <a:prstDash val="sysDash"/>
+              </a:ln>
+            </p:spPr>
+            <p:style>
+              <a:lnRef idx="3">
+                <a:schemeClr val="dk1"/>
+              </a:lnRef>
+              <a:fillRef idx="0">
+                <a:schemeClr val="dk1"/>
+              </a:fillRef>
+              <a:effectRef idx="2">
+                <a:schemeClr val="dk1"/>
+              </a:effectRef>
+              <a:fontRef idx="minor">
+                <a:schemeClr val="tx1"/>
+              </a:fontRef>
+            </p:style>
+          </p:cxnSp>
+        </p:grpSp>
+      </p:grpSp>
+      <p:pic>
+        <p:nvPicPr>
+          <p:cNvPr id="15" name="Picture 2" descr="https://www.mdpi.com/applsci/applsci-08-01157/article_deploy/html/images/applsci-08-01157-g001.png">
+            <a:extLst>
+              <a:ext uri="{FF2B5EF4-FFF2-40B4-BE49-F238E27FC236}">
+                <a16:creationId xmlns:a16="http://schemas.microsoft.com/office/drawing/2014/main" id="{84CEEA8B-37D1-4637-B472-26FA9690D789}"/>
+              </a:ext>
+            </a:extLst>
+          </p:cNvPr>
+          <p:cNvPicPr>
+            <a:picLocks noChangeAspect="1" noChangeArrowheads="1"/>
+          </p:cNvPicPr>
+          <p:nvPr/>
+        </p:nvPicPr>
+        <p:blipFill rotWithShape="1">
+          <a:blip r:embed="rId2">
+            <a:extLst>
+              <a:ext uri="{28A0092B-C50C-407E-A947-70E740481C1C}">
+                <a14:useLocalDpi xmlns:a14="http://schemas.microsoft.com/office/drawing/2010/main" val="0"/>
+              </a:ext>
+            </a:extLst>
+          </a:blip>
+          <a:srcRect l="8003" t="43627" r="69001" b="47528"/>
+          <a:stretch/>
+        </p:blipFill>
+        <p:spPr bwMode="auto">
+          <a:xfrm>
+            <a:off x="8927726" y="374129"/>
+            <a:ext cx="2850110" cy="614681"/>
+          </a:xfrm>
+          <a:prstGeom prst="rect">
+            <a:avLst/>
+          </a:prstGeom>
+          <a:noFill/>
+          <a:extLst>
+            <a:ext uri="{909E8E84-426E-40DD-AFC4-6F175D3DCCD1}">
+              <a14:hiddenFill xmlns:a14="http://schemas.microsoft.com/office/drawing/2010/main">
+                <a:solidFill>
+                  <a:srgbClr val="FFFFFF"/>
+                </a:solidFill>
+              </a14:hiddenFill>
+            </a:ext>
+          </a:extLst>
+        </p:spPr>
+      </p:pic>
+      <p:grpSp>
+        <p:nvGrpSpPr>
+          <p:cNvPr id="65" name="群組 64">
+            <a:extLst>
+              <a:ext uri="{FF2B5EF4-FFF2-40B4-BE49-F238E27FC236}">
+                <a16:creationId xmlns:a16="http://schemas.microsoft.com/office/drawing/2014/main" id="{9FD33F3C-2EA6-4223-8AA7-18DB949691BD}"/>
+              </a:ext>
+            </a:extLst>
+          </p:cNvPr>
+          <p:cNvGrpSpPr/>
+          <p:nvPr/>
+        </p:nvGrpSpPr>
+        <p:grpSpPr>
+          <a:xfrm>
+            <a:off x="8317308" y="2975105"/>
+            <a:ext cx="1001952" cy="814592"/>
+            <a:chOff x="6095200" y="86196"/>
+            <a:chExt cx="1153156" cy="937523"/>
+          </a:xfrm>
+        </p:grpSpPr>
+        <p:cxnSp>
+          <p:nvCxnSpPr>
+            <p:cNvPr id="44" name="直線單箭頭接點 43">
+              <a:extLst>
+                <a:ext uri="{FF2B5EF4-FFF2-40B4-BE49-F238E27FC236}">
+                  <a16:creationId xmlns:a16="http://schemas.microsoft.com/office/drawing/2014/main" id="{EBDF0B66-0BCB-438D-B5A5-204CE09C230F}"/>
+                </a:ext>
+              </a:extLst>
+            </p:cNvPr>
+            <p:cNvCxnSpPr>
+              <a:cxnSpLocks/>
+            </p:cNvCxnSpPr>
+            <p:nvPr/>
+          </p:nvCxnSpPr>
+          <p:spPr>
+            <a:xfrm>
+              <a:off x="6502870" y="782175"/>
+              <a:ext cx="363442" cy="0"/>
+            </a:xfrm>
+            <a:prstGeom prst="straightConnector1">
+              <a:avLst/>
+            </a:prstGeom>
+            <a:solidFill>
+              <a:schemeClr val="bg1"/>
+            </a:solidFill>
+            <a:ln>
+              <a:tailEnd type="triangle"/>
+            </a:ln>
+          </p:spPr>
+          <p:style>
+            <a:lnRef idx="2">
+              <a:schemeClr val="dk1"/>
+            </a:lnRef>
+            <a:fillRef idx="0">
+              <a:schemeClr val="dk1"/>
+            </a:fillRef>
+            <a:effectRef idx="1">
+              <a:schemeClr val="dk1"/>
+            </a:effectRef>
+            <a:fontRef idx="minor">
+              <a:schemeClr val="tx1"/>
+            </a:fontRef>
+          </p:style>
+        </p:cxnSp>
+        <p:cxnSp>
+          <p:nvCxnSpPr>
+            <p:cNvPr id="45" name="直線單箭頭接點 44">
+              <a:extLst>
+                <a:ext uri="{FF2B5EF4-FFF2-40B4-BE49-F238E27FC236}">
+                  <a16:creationId xmlns:a16="http://schemas.microsoft.com/office/drawing/2014/main" id="{1554358E-A756-4E34-AD44-5C8E42D7A655}"/>
+                </a:ext>
+              </a:extLst>
+            </p:cNvPr>
+            <p:cNvCxnSpPr>
+              <a:cxnSpLocks/>
+            </p:cNvCxnSpPr>
+            <p:nvPr/>
+          </p:nvCxnSpPr>
+          <p:spPr>
+            <a:xfrm flipV="1">
+              <a:off x="6508390" y="432919"/>
+              <a:ext cx="0" cy="355792"/>
+            </a:xfrm>
+            <a:prstGeom prst="straightConnector1">
+              <a:avLst/>
+            </a:prstGeom>
+            <a:solidFill>
+              <a:schemeClr val="bg1"/>
+            </a:solidFill>
+            <a:ln>
+              <a:tailEnd type="triangle"/>
+            </a:ln>
+          </p:spPr>
+          <p:style>
+            <a:lnRef idx="2">
+              <a:schemeClr val="dk1"/>
+            </a:lnRef>
+            <a:fillRef idx="0">
+              <a:schemeClr val="dk1"/>
+            </a:fillRef>
+            <a:effectRef idx="1">
+              <a:schemeClr val="dk1"/>
+            </a:effectRef>
+            <a:fontRef idx="minor">
+              <a:schemeClr val="tx1"/>
+            </a:fontRef>
+          </p:style>
+        </p:cxnSp>
+        <mc:AlternateContent xmlns:mc="http://schemas.openxmlformats.org/markup-compatibility/2006">
+          <mc:Choice xmlns:a14="http://schemas.microsoft.com/office/drawing/2010/main" Requires="a14">
+            <p:sp>
+              <p:nvSpPr>
+                <p:cNvPr id="46" name="文字方塊 45">
+                  <a:extLst>
+                    <a:ext uri="{FF2B5EF4-FFF2-40B4-BE49-F238E27FC236}">
+                      <a16:creationId xmlns:a16="http://schemas.microsoft.com/office/drawing/2014/main" id="{F9381824-E8D5-4BFC-91DD-94D582F39669}"/>
+                    </a:ext>
+                  </a:extLst>
+                </p:cNvPr>
+                <p:cNvSpPr txBox="1"/>
+                <p:nvPr/>
+              </p:nvSpPr>
+              <p:spPr>
+                <a:xfrm>
+                  <a:off x="6747663" y="592474"/>
+                  <a:ext cx="500693" cy="369332"/>
+                </a:xfrm>
+                <a:prstGeom prst="rect">
+                  <a:avLst/>
+                </a:prstGeom>
+                <a:noFill/>
+              </p:spPr>
+              <p:txBody>
+                <a:bodyPr wrap="square" rtlCol="0">
+                  <a:spAutoFit/>
+                </a:bodyPr>
+                <a:lstStyle/>
+                <a:p>
+                  <a:pPr/>
+                  <a14:m>
+                    <m:oMathPara xmlns:m="http://schemas.openxmlformats.org/officeDocument/2006/math">
+                      <m:oMathParaPr>
+                        <m:jc m:val="centerGroup"/>
+                      </m:oMathParaPr>
+                      <m:oMath xmlns:m="http://schemas.openxmlformats.org/officeDocument/2006/math">
+                        <m:r>
+                          <a:rPr lang="en-US" altLang="zh-TW" i="1">
+                            <a:latin typeface="Cambria Math" panose="02040503050406030204" pitchFamily="18" charset="0"/>
+                          </a:rPr>
+                          <m:t>𝑥</m:t>
+                        </m:r>
+                      </m:oMath>
+                    </m:oMathPara>
+                  </a14:m>
+                  <a:endParaRPr lang="zh-TW" altLang="en-US" dirty="0"/>
+                </a:p>
+              </p:txBody>
+            </p:sp>
+          </mc:Choice>
+          <mc:Fallback>
+            <p:sp>
+              <p:nvSpPr>
+                <p:cNvPr id="46" name="文字方塊 45">
+                  <a:extLst>
+                    <a:ext uri="{FF2B5EF4-FFF2-40B4-BE49-F238E27FC236}">
+                      <a16:creationId xmlns:a16="http://schemas.microsoft.com/office/drawing/2014/main" id="{F9381824-E8D5-4BFC-91DD-94D582F39669}"/>
+                    </a:ext>
+                  </a:extLst>
+                </p:cNvPr>
+                <p:cNvSpPr txBox="1">
+                  <a:spLocks noRot="1" noChangeAspect="1" noMove="1" noResize="1" noEditPoints="1" noAdjustHandles="1" noChangeArrowheads="1" noChangeShapeType="1" noTextEdit="1"/>
+                </p:cNvSpPr>
+                <p:nvPr/>
+              </p:nvSpPr>
+              <p:spPr>
+                <a:xfrm>
+                  <a:off x="6747663" y="592474"/>
+                  <a:ext cx="500693" cy="369332"/>
+                </a:xfrm>
+                <a:prstGeom prst="rect">
+                  <a:avLst/>
+                </a:prstGeom>
+                <a:blipFill>
+                  <a:blip r:embed="rId3"/>
+                  <a:stretch>
+                    <a:fillRect/>
+                  </a:stretch>
+                </a:blipFill>
+              </p:spPr>
+              <p:txBody>
+                <a:bodyPr/>
+                <a:lstStyle/>
+                <a:p>
+                  <a:r>
+                    <a:rPr lang="zh-TW" altLang="en-US">
+                      <a:noFill/>
+                    </a:rPr>
+                    <a:t> </a:t>
+                  </a:r>
+                </a:p>
+              </p:txBody>
+            </p:sp>
+          </mc:Fallback>
+        </mc:AlternateContent>
+        <mc:AlternateContent xmlns:mc="http://schemas.openxmlformats.org/markup-compatibility/2006">
+          <mc:Choice xmlns:a14="http://schemas.microsoft.com/office/drawing/2010/main" Requires="a14">
+            <p:sp>
+              <p:nvSpPr>
+                <p:cNvPr id="47" name="文字方塊 46">
+                  <a:extLst>
+                    <a:ext uri="{FF2B5EF4-FFF2-40B4-BE49-F238E27FC236}">
+                      <a16:creationId xmlns:a16="http://schemas.microsoft.com/office/drawing/2014/main" id="{5E2D19B0-E246-47EA-BEFF-DC7713F756AE}"/>
+                    </a:ext>
+                  </a:extLst>
+                </p:cNvPr>
+                <p:cNvSpPr txBox="1"/>
+                <p:nvPr/>
+              </p:nvSpPr>
+              <p:spPr>
+                <a:xfrm>
+                  <a:off x="6281529" y="86196"/>
+                  <a:ext cx="500693" cy="369332"/>
+                </a:xfrm>
+                <a:prstGeom prst="rect">
+                  <a:avLst/>
+                </a:prstGeom>
+                <a:noFill/>
+              </p:spPr>
+              <p:txBody>
+                <a:bodyPr wrap="square" rtlCol="0">
+                  <a:spAutoFit/>
+                </a:bodyPr>
+                <a:lstStyle/>
+                <a:p>
+                  <a:pPr/>
+                  <a14:m>
+                    <m:oMathPara xmlns:m="http://schemas.openxmlformats.org/officeDocument/2006/math">
+                      <m:oMathParaPr>
+                        <m:jc m:val="centerGroup"/>
+                      </m:oMathParaPr>
+                      <m:oMath xmlns:m="http://schemas.openxmlformats.org/officeDocument/2006/math">
+                        <m:r>
+                          <a:rPr lang="en-US" altLang="zh-TW" i="1">
+                            <a:latin typeface="Cambria Math" panose="02040503050406030204" pitchFamily="18" charset="0"/>
+                          </a:rPr>
+                          <m:t>𝑦</m:t>
+                        </m:r>
+                      </m:oMath>
+                    </m:oMathPara>
+                  </a14:m>
+                  <a:endParaRPr lang="zh-TW" altLang="en-US" dirty="0"/>
+                </a:p>
+              </p:txBody>
+            </p:sp>
+          </mc:Choice>
+          <mc:Fallback>
+            <p:sp>
+              <p:nvSpPr>
+                <p:cNvPr id="47" name="文字方塊 46">
+                  <a:extLst>
+                    <a:ext uri="{FF2B5EF4-FFF2-40B4-BE49-F238E27FC236}">
+                      <a16:creationId xmlns:a16="http://schemas.microsoft.com/office/drawing/2014/main" id="{5E2D19B0-E246-47EA-BEFF-DC7713F756AE}"/>
+                    </a:ext>
+                  </a:extLst>
+                </p:cNvPr>
+                <p:cNvSpPr txBox="1">
+                  <a:spLocks noRot="1" noChangeAspect="1" noMove="1" noResize="1" noEditPoints="1" noAdjustHandles="1" noChangeArrowheads="1" noChangeShapeType="1" noTextEdit="1"/>
+                </p:cNvSpPr>
+                <p:nvPr/>
+              </p:nvSpPr>
+              <p:spPr>
+                <a:xfrm>
+                  <a:off x="6281529" y="86196"/>
+                  <a:ext cx="500693" cy="369332"/>
+                </a:xfrm>
+                <a:prstGeom prst="rect">
+                  <a:avLst/>
+                </a:prstGeom>
+                <a:blipFill>
+                  <a:blip r:embed="rId4"/>
+                  <a:stretch>
+                    <a:fillRect b="-22642"/>
+                  </a:stretch>
+                </a:blipFill>
+              </p:spPr>
+              <p:txBody>
+                <a:bodyPr/>
+                <a:lstStyle/>
+                <a:p>
+                  <a:r>
+                    <a:rPr lang="zh-TW" altLang="en-US">
+                      <a:noFill/>
+                    </a:rPr>
+                    <a:t> </a:t>
+                  </a:r>
+                </a:p>
+              </p:txBody>
+            </p:sp>
+          </mc:Fallback>
+        </mc:AlternateContent>
+        <p:grpSp>
+          <p:nvGrpSpPr>
+            <p:cNvPr id="63" name="群組 62">
+              <a:extLst>
+                <a:ext uri="{FF2B5EF4-FFF2-40B4-BE49-F238E27FC236}">
+                  <a16:creationId xmlns:a16="http://schemas.microsoft.com/office/drawing/2014/main" id="{86C01793-27FB-4469-B902-77A19DA60798}"/>
+                </a:ext>
+              </a:extLst>
+            </p:cNvPr>
+            <p:cNvGrpSpPr/>
+            <p:nvPr/>
+          </p:nvGrpSpPr>
+          <p:grpSpPr>
+            <a:xfrm>
+              <a:off x="6473200" y="745891"/>
+              <a:ext cx="77620" cy="77620"/>
+              <a:chOff x="5995892" y="914379"/>
+              <a:chExt cx="540639" cy="540639"/>
+            </a:xfrm>
+          </p:grpSpPr>
+          <p:sp>
+            <p:nvSpPr>
+              <p:cNvPr id="61" name="圓形: 空心 60">
+                <a:extLst>
+                  <a:ext uri="{FF2B5EF4-FFF2-40B4-BE49-F238E27FC236}">
+                    <a16:creationId xmlns:a16="http://schemas.microsoft.com/office/drawing/2014/main" id="{4095E452-70E7-4ED1-B8B6-9B95E719916F}"/>
+                  </a:ext>
+                </a:extLst>
+              </p:cNvPr>
+              <p:cNvSpPr/>
+              <p:nvPr/>
+            </p:nvSpPr>
+            <p:spPr>
+              <a:xfrm>
+                <a:off x="5995892" y="914379"/>
+                <a:ext cx="540639" cy="540639"/>
+              </a:xfrm>
+              <a:prstGeom prst="donut">
+                <a:avLst>
+                  <a:gd name="adj" fmla="val 38442"/>
+                </a:avLst>
+              </a:prstGeom>
+              <a:solidFill>
+                <a:schemeClr val="bg1"/>
+              </a:solidFill>
+              <a:ln>
+                <a:solidFill>
+                  <a:schemeClr val="tx1"/>
+                </a:solidFill>
+              </a:ln>
+            </p:spPr>
+            <p:style>
+              <a:lnRef idx="2">
+                <a:schemeClr val="accent1">
+                  <a:shade val="50000"/>
+                </a:schemeClr>
+              </a:lnRef>
+              <a:fillRef idx="1">
+                <a:schemeClr val="accent1"/>
+              </a:fillRef>
+              <a:effectRef idx="0">
+                <a:schemeClr val="accent1"/>
+              </a:effectRef>
+              <a:fontRef idx="minor">
+                <a:schemeClr val="lt1"/>
+              </a:fontRef>
+            </p:style>
+            <p:txBody>
+              <a:bodyPr rot="0" spcFirstLastPara="0" vertOverflow="overflow" horzOverflow="overflow" vert="horz" wrap="square" lIns="91440" tIns="45720" rIns="91440" bIns="45720" numCol="1" spcCol="0" rtlCol="0" fromWordArt="0" anchor="ctr" anchorCtr="0" forceAA="0" compatLnSpc="1">
+                <a:prstTxWarp prst="textNoShape">
+                  <a:avLst/>
+                </a:prstTxWarp>
+                <a:noAutofit/>
+              </a:bodyPr>
+              <a:lstStyle/>
+              <a:p>
+                <a:pPr algn="ctr"/>
+                <a:endParaRPr lang="zh-TW" altLang="en-US" dirty="0">
+                  <a:solidFill>
+                    <a:schemeClr val="tx1"/>
+                  </a:solidFill>
+                </a:endParaRPr>
+              </a:p>
+            </p:txBody>
+          </p:sp>
+          <p:sp>
+            <p:nvSpPr>
+              <p:cNvPr id="62" name="橢圓 61">
+                <a:extLst>
+                  <a:ext uri="{FF2B5EF4-FFF2-40B4-BE49-F238E27FC236}">
+                    <a16:creationId xmlns:a16="http://schemas.microsoft.com/office/drawing/2014/main" id="{590205C3-404B-47C5-9E3F-133C45A0FF04}"/>
+                  </a:ext>
+                </a:extLst>
+              </p:cNvPr>
+              <p:cNvSpPr/>
+              <p:nvPr/>
+            </p:nvSpPr>
+            <p:spPr>
+              <a:xfrm>
+                <a:off x="6200578" y="1119065"/>
+                <a:ext cx="131269" cy="131269"/>
+              </a:xfrm>
+              <a:prstGeom prst="ellipse">
+                <a:avLst/>
+              </a:prstGeom>
+              <a:solidFill>
+                <a:schemeClr val="tx1"/>
+              </a:solidFill>
+              <a:ln>
+                <a:noFill/>
+              </a:ln>
+            </p:spPr>
+            <p:style>
+              <a:lnRef idx="2">
+                <a:schemeClr val="accent1">
+                  <a:shade val="50000"/>
+                </a:schemeClr>
+              </a:lnRef>
+              <a:fillRef idx="1">
+                <a:schemeClr val="accent1"/>
+              </a:fillRef>
+              <a:effectRef idx="0">
+                <a:schemeClr val="accent1"/>
+              </a:effectRef>
+              <a:fontRef idx="minor">
+                <a:schemeClr val="lt1"/>
+              </a:fontRef>
+            </p:style>
+            <p:txBody>
+              <a:bodyPr rot="0" spcFirstLastPara="0" vertOverflow="overflow" horzOverflow="overflow" vert="horz" wrap="square" lIns="91440" tIns="45720" rIns="91440" bIns="45720" numCol="1" spcCol="0" rtlCol="0" fromWordArt="0" anchor="ctr" anchorCtr="0" forceAA="0" compatLnSpc="1">
+                <a:prstTxWarp prst="textNoShape">
+                  <a:avLst/>
+                </a:prstTxWarp>
+                <a:noAutofit/>
+              </a:bodyPr>
+              <a:lstStyle/>
+              <a:p>
+                <a:pPr algn="ctr"/>
+                <a:endParaRPr lang="zh-TW" altLang="en-US"/>
+              </a:p>
+            </p:txBody>
+          </p:sp>
+        </p:grpSp>
+        <mc:AlternateContent xmlns:mc="http://schemas.openxmlformats.org/markup-compatibility/2006">
+          <mc:Choice xmlns:a14="http://schemas.microsoft.com/office/drawing/2010/main" Requires="a14">
+            <p:sp>
+              <p:nvSpPr>
+                <p:cNvPr id="64" name="文字方塊 63">
+                  <a:extLst>
+                    <a:ext uri="{FF2B5EF4-FFF2-40B4-BE49-F238E27FC236}">
+                      <a16:creationId xmlns:a16="http://schemas.microsoft.com/office/drawing/2014/main" id="{1AC21DCA-45FB-481B-8FAD-616224AF2E4F}"/>
+                    </a:ext>
+                  </a:extLst>
+                </p:cNvPr>
+                <p:cNvSpPr txBox="1"/>
+                <p:nvPr/>
+              </p:nvSpPr>
+              <p:spPr>
+                <a:xfrm>
+                  <a:off x="6095200" y="654387"/>
+                  <a:ext cx="500693" cy="369332"/>
+                </a:xfrm>
+                <a:prstGeom prst="rect">
+                  <a:avLst/>
+                </a:prstGeom>
+                <a:noFill/>
+              </p:spPr>
+              <p:txBody>
+                <a:bodyPr wrap="square" rtlCol="0">
+                  <a:spAutoFit/>
+                </a:bodyPr>
+                <a:lstStyle/>
+                <a:p>
+                  <a:pPr/>
+                  <a14:m>
+                    <m:oMathPara xmlns:m="http://schemas.openxmlformats.org/officeDocument/2006/math">
+                      <m:oMathParaPr>
+                        <m:jc m:val="centerGroup"/>
+                      </m:oMathParaPr>
+                      <m:oMath xmlns:m="http://schemas.openxmlformats.org/officeDocument/2006/math">
+                        <m:r>
+                          <a:rPr lang="en-US" altLang="zh-TW" i="1">
+                            <a:latin typeface="Cambria Math" panose="02040503050406030204" pitchFamily="18" charset="0"/>
+                          </a:rPr>
+                          <m:t>𝑧</m:t>
+                        </m:r>
+                      </m:oMath>
+                    </m:oMathPara>
+                  </a14:m>
+                  <a:endParaRPr lang="zh-TW" altLang="en-US" dirty="0"/>
+                </a:p>
+              </p:txBody>
+            </p:sp>
+          </mc:Choice>
+          <mc:Fallback>
+            <p:sp>
+              <p:nvSpPr>
+                <p:cNvPr id="64" name="文字方塊 63">
+                  <a:extLst>
+                    <a:ext uri="{FF2B5EF4-FFF2-40B4-BE49-F238E27FC236}">
+                      <a16:creationId xmlns:a16="http://schemas.microsoft.com/office/drawing/2014/main" id="{1AC21DCA-45FB-481B-8FAD-616224AF2E4F}"/>
+                    </a:ext>
+                  </a:extLst>
+                </p:cNvPr>
+                <p:cNvSpPr txBox="1">
+                  <a:spLocks noRot="1" noChangeAspect="1" noMove="1" noResize="1" noEditPoints="1" noAdjustHandles="1" noChangeArrowheads="1" noChangeShapeType="1" noTextEdit="1"/>
+                </p:cNvSpPr>
+                <p:nvPr/>
+              </p:nvSpPr>
+              <p:spPr>
+                <a:xfrm>
+                  <a:off x="6095200" y="654387"/>
+                  <a:ext cx="500693" cy="369332"/>
+                </a:xfrm>
+                <a:prstGeom prst="rect">
+                  <a:avLst/>
+                </a:prstGeom>
+                <a:blipFill>
+                  <a:blip r:embed="rId5"/>
+                  <a:stretch>
+                    <a:fillRect/>
+                  </a:stretch>
+                </a:blipFill>
+              </p:spPr>
+              <p:txBody>
+                <a:bodyPr/>
+                <a:lstStyle/>
+                <a:p>
+                  <a:r>
+                    <a:rPr lang="zh-TW" altLang="en-US">
+                      <a:noFill/>
+                    </a:rPr>
+                    <a:t> </a:t>
+                  </a:r>
+                </a:p>
+              </p:txBody>
+            </p:sp>
+          </mc:Fallback>
+        </mc:AlternateContent>
+      </p:grpSp>
+      <p:grpSp>
+        <p:nvGrpSpPr>
+          <p:cNvPr id="3" name="群組 2">
+            <a:extLst>
+              <a:ext uri="{FF2B5EF4-FFF2-40B4-BE49-F238E27FC236}">
+                <a16:creationId xmlns:a16="http://schemas.microsoft.com/office/drawing/2014/main" id="{5FDA83A2-C41F-4A11-8390-268C85ADC071}"/>
+              </a:ext>
+            </a:extLst>
+          </p:cNvPr>
+          <p:cNvGrpSpPr/>
+          <p:nvPr/>
+        </p:nvGrpSpPr>
+        <p:grpSpPr>
+          <a:xfrm>
+            <a:off x="9446082" y="3630795"/>
+            <a:ext cx="2186744" cy="1883192"/>
+            <a:chOff x="4630105" y="93366"/>
+            <a:chExt cx="1879637" cy="1618713"/>
+          </a:xfrm>
+        </p:grpSpPr>
+        <p:sp>
+          <p:nvSpPr>
+            <p:cNvPr id="18" name="六邊形 17">
+              <a:extLst>
+                <a:ext uri="{FF2B5EF4-FFF2-40B4-BE49-F238E27FC236}">
+                  <a16:creationId xmlns:a16="http://schemas.microsoft.com/office/drawing/2014/main" id="{F0697EBA-83D2-4D22-8B5F-6081014D393C}"/>
+                </a:ext>
+              </a:extLst>
+            </p:cNvPr>
+            <p:cNvSpPr/>
+            <p:nvPr/>
+          </p:nvSpPr>
+          <p:spPr>
+            <a:xfrm>
+              <a:off x="4630105" y="432916"/>
+              <a:ext cx="1483948" cy="1279163"/>
+            </a:xfrm>
+            <a:prstGeom prst="hexagon">
+              <a:avLst>
+                <a:gd name="adj" fmla="val 29067"/>
+                <a:gd name="vf" fmla="val 115470"/>
+              </a:avLst>
+            </a:prstGeom>
+            <a:solidFill>
+              <a:schemeClr val="bg1"/>
+            </a:solidFill>
+            <a:ln>
+              <a:solidFill>
+                <a:schemeClr val="tx1"/>
+              </a:solidFill>
+            </a:ln>
+          </p:spPr>
+          <p:style>
+            <a:lnRef idx="2">
+              <a:schemeClr val="accent1">
+                <a:shade val="50000"/>
+              </a:schemeClr>
+            </a:lnRef>
+            <a:fillRef idx="1">
+              <a:schemeClr val="accent1"/>
+            </a:fillRef>
+            <a:effectRef idx="0">
+              <a:schemeClr val="accent1"/>
+            </a:effectRef>
+            <a:fontRef idx="minor">
+              <a:schemeClr val="lt1"/>
+            </a:fontRef>
+          </p:style>
+          <p:txBody>
+            <a:bodyPr rtlCol="0" anchor="ctr"/>
+            <a:lstStyle/>
+            <a:p>
+              <a:pPr algn="ctr"/>
+              <a:endParaRPr lang="zh-TW" altLang="en-US" dirty="0"/>
+            </a:p>
+          </p:txBody>
+        </p:sp>
+        <mc:AlternateContent xmlns:mc="http://schemas.openxmlformats.org/markup-compatibility/2006">
+          <mc:Choice xmlns:a14="http://schemas.microsoft.com/office/drawing/2010/main" Requires="a14">
+            <p:sp>
+              <p:nvSpPr>
+                <p:cNvPr id="23" name="文字方塊 22">
+                  <a:extLst>
+                    <a:ext uri="{FF2B5EF4-FFF2-40B4-BE49-F238E27FC236}">
+                      <a16:creationId xmlns:a16="http://schemas.microsoft.com/office/drawing/2014/main" id="{4A972CE0-B624-471F-AEE8-237ADA8C4A64}"/>
+                    </a:ext>
+                  </a:extLst>
+                </p:cNvPr>
+                <p:cNvSpPr txBox="1"/>
+                <p:nvPr/>
+              </p:nvSpPr>
+              <p:spPr>
+                <a:xfrm>
+                  <a:off x="6009049" y="1044766"/>
+                  <a:ext cx="500693" cy="294333"/>
+                </a:xfrm>
+                <a:prstGeom prst="rect">
+                  <a:avLst/>
+                </a:prstGeom>
+                <a:noFill/>
+              </p:spPr>
+              <p:txBody>
+                <a:bodyPr wrap="square" rtlCol="0">
+                  <a:spAutoFit/>
+                </a:bodyPr>
+                <a:lstStyle/>
+                <a:p>
+                  <a:pPr/>
+                  <a14:m>
+                    <m:oMathPara xmlns:m="http://schemas.openxmlformats.org/officeDocument/2006/math">
+                      <m:oMathParaPr>
+                        <m:jc m:val="centerGroup"/>
+                      </m:oMathParaPr>
+                      <m:oMath xmlns:m="http://schemas.openxmlformats.org/officeDocument/2006/math">
+                        <m:r>
+                          <a:rPr lang="en-US" altLang="zh-TW" i="1">
+                            <a:latin typeface="Cambria Math" panose="02040503050406030204" pitchFamily="18" charset="0"/>
+                          </a:rPr>
+                          <m:t>𝐾</m:t>
+                        </m:r>
+                      </m:oMath>
+                    </m:oMathPara>
+                  </a14:m>
+                  <a:endParaRPr lang="zh-TW" altLang="en-US" dirty="0"/>
+                </a:p>
+              </p:txBody>
+            </p:sp>
+          </mc:Choice>
+          <mc:Fallback>
+            <p:sp>
+              <p:nvSpPr>
+                <p:cNvPr id="23" name="文字方塊 22">
+                  <a:extLst>
+                    <a:ext uri="{FF2B5EF4-FFF2-40B4-BE49-F238E27FC236}">
+                      <a16:creationId xmlns:a16="http://schemas.microsoft.com/office/drawing/2014/main" id="{4A972CE0-B624-471F-AEE8-237ADA8C4A64}"/>
+                    </a:ext>
+                  </a:extLst>
+                </p:cNvPr>
+                <p:cNvSpPr txBox="1">
+                  <a:spLocks noRot="1" noChangeAspect="1" noMove="1" noResize="1" noEditPoints="1" noAdjustHandles="1" noChangeArrowheads="1" noChangeShapeType="1" noTextEdit="1"/>
+                </p:cNvSpPr>
+                <p:nvPr/>
+              </p:nvSpPr>
+              <p:spPr>
+                <a:xfrm>
+                  <a:off x="6009049" y="1044766"/>
+                  <a:ext cx="500693" cy="294333"/>
+                </a:xfrm>
+                <a:prstGeom prst="rect">
+                  <a:avLst/>
+                </a:prstGeom>
+                <a:blipFill>
+                  <a:blip r:embed="rId6"/>
+                  <a:stretch>
+                    <a:fillRect/>
+                  </a:stretch>
+                </a:blipFill>
+              </p:spPr>
+              <p:txBody>
+                <a:bodyPr/>
+                <a:lstStyle/>
+                <a:p>
+                  <a:r>
+                    <a:rPr lang="zh-TW" altLang="en-US">
+                      <a:noFill/>
+                    </a:rPr>
+                    <a:t> </a:t>
+                  </a:r>
+                </a:p>
+              </p:txBody>
+            </p:sp>
+          </mc:Fallback>
+        </mc:AlternateContent>
+        <mc:AlternateContent xmlns:mc="http://schemas.openxmlformats.org/markup-compatibility/2006">
+          <mc:Choice xmlns:a14="http://schemas.microsoft.com/office/drawing/2010/main" Requires="a14">
+            <p:sp>
+              <p:nvSpPr>
+                <p:cNvPr id="24" name="文字方塊 23">
+                  <a:extLst>
+                    <a:ext uri="{FF2B5EF4-FFF2-40B4-BE49-F238E27FC236}">
+                      <a16:creationId xmlns:a16="http://schemas.microsoft.com/office/drawing/2014/main" id="{A5D18D05-50DF-4D1E-AAFB-B58A0119A134}"/>
+                    </a:ext>
+                  </a:extLst>
+                </p:cNvPr>
+                <p:cNvSpPr txBox="1"/>
+                <p:nvPr/>
+              </p:nvSpPr>
+              <p:spPr>
+                <a:xfrm>
+                  <a:off x="5510827" y="93366"/>
+                  <a:ext cx="500693" cy="294333"/>
+                </a:xfrm>
+                <a:prstGeom prst="rect">
+                  <a:avLst/>
+                </a:prstGeom>
+                <a:noFill/>
+              </p:spPr>
+              <p:txBody>
+                <a:bodyPr wrap="square" rtlCol="0">
+                  <a:spAutoFit/>
+                </a:bodyPr>
+                <a:lstStyle/>
+                <a:p>
+                  <a:pPr/>
+                  <a14:m>
+                    <m:oMathPara xmlns:m="http://schemas.openxmlformats.org/officeDocument/2006/math">
+                      <m:oMathParaPr>
+                        <m:jc m:val="centerGroup"/>
+                      </m:oMathParaPr>
+                      <m:oMath xmlns:m="http://schemas.openxmlformats.org/officeDocument/2006/math">
+                        <m:r>
+                          <a:rPr lang="en-US" altLang="zh-TW" i="1">
+                            <a:latin typeface="Cambria Math" panose="02040503050406030204" pitchFamily="18" charset="0"/>
+                          </a:rPr>
+                          <m:t>𝐾</m:t>
+                        </m:r>
+                        <m:r>
+                          <a:rPr lang="en-US" altLang="zh-TW" i="1">
+                            <a:latin typeface="Cambria Math" panose="02040503050406030204" pitchFamily="18" charset="0"/>
+                          </a:rPr>
+                          <m:t>’</m:t>
+                        </m:r>
+                      </m:oMath>
+                    </m:oMathPara>
+                  </a14:m>
+                  <a:endParaRPr lang="zh-TW" altLang="en-US" dirty="0"/>
+                </a:p>
+              </p:txBody>
+            </p:sp>
+          </mc:Choice>
+          <mc:Fallback>
+            <p:sp>
+              <p:nvSpPr>
+                <p:cNvPr id="24" name="文字方塊 23">
+                  <a:extLst>
+                    <a:ext uri="{FF2B5EF4-FFF2-40B4-BE49-F238E27FC236}">
+                      <a16:creationId xmlns:a16="http://schemas.microsoft.com/office/drawing/2014/main" id="{A5D18D05-50DF-4D1E-AAFB-B58A0119A134}"/>
+                    </a:ext>
+                  </a:extLst>
+                </p:cNvPr>
+                <p:cNvSpPr txBox="1">
+                  <a:spLocks noRot="1" noChangeAspect="1" noMove="1" noResize="1" noEditPoints="1" noAdjustHandles="1" noChangeArrowheads="1" noChangeShapeType="1" noTextEdit="1"/>
+                </p:cNvSpPr>
+                <p:nvPr/>
+              </p:nvSpPr>
+              <p:spPr>
+                <a:xfrm>
+                  <a:off x="5510827" y="93366"/>
+                  <a:ext cx="500693" cy="294333"/>
+                </a:xfrm>
+                <a:prstGeom prst="rect">
+                  <a:avLst/>
+                </a:prstGeom>
+                <a:blipFill>
+                  <a:blip r:embed="rId7"/>
+                  <a:stretch>
+                    <a:fillRect/>
+                  </a:stretch>
+                </a:blipFill>
+              </p:spPr>
+              <p:txBody>
+                <a:bodyPr/>
+                <a:lstStyle/>
+                <a:p>
+                  <a:r>
+                    <a:rPr lang="zh-TW" altLang="en-US">
+                      <a:noFill/>
+                    </a:rPr>
+                    <a:t> </a:t>
+                  </a:r>
+                </a:p>
+              </p:txBody>
+            </p:sp>
+          </mc:Fallback>
+        </mc:AlternateContent>
+        <mc:AlternateContent xmlns:mc="http://schemas.openxmlformats.org/markup-compatibility/2006">
+          <mc:Choice xmlns:a14="http://schemas.microsoft.com/office/drawing/2010/main" Requires="a14">
+            <p:sp>
+              <p:nvSpPr>
+                <p:cNvPr id="25" name="文字方塊 24">
+                  <a:extLst>
+                    <a:ext uri="{FF2B5EF4-FFF2-40B4-BE49-F238E27FC236}">
+                      <a16:creationId xmlns:a16="http://schemas.microsoft.com/office/drawing/2014/main" id="{9889234A-4146-4DFD-A384-1D93E5EBD06B}"/>
+                    </a:ext>
+                  </a:extLst>
+                </p:cNvPr>
+                <p:cNvSpPr txBox="1"/>
+                <p:nvPr/>
+              </p:nvSpPr>
+              <p:spPr>
+                <a:xfrm>
+                  <a:off x="5830031" y="479920"/>
+                  <a:ext cx="500693" cy="294333"/>
+                </a:xfrm>
+                <a:prstGeom prst="rect">
+                  <a:avLst/>
+                </a:prstGeom>
+                <a:noFill/>
+              </p:spPr>
+              <p:txBody>
+                <a:bodyPr wrap="square" rtlCol="0">
+                  <a:spAutoFit/>
+                </a:bodyPr>
+                <a:lstStyle/>
+                <a:p>
+                  <a:pPr/>
+                  <a14:m>
+                    <m:oMathPara xmlns:m="http://schemas.openxmlformats.org/officeDocument/2006/math">
+                      <m:oMathParaPr>
+                        <m:jc m:val="centerGroup"/>
+                      </m:oMathParaPr>
+                      <m:oMath xmlns:m="http://schemas.openxmlformats.org/officeDocument/2006/math">
+                        <m:r>
+                          <a:rPr lang="en-US" altLang="zh-TW" i="1">
+                            <a:latin typeface="Cambria Math" panose="02040503050406030204" pitchFamily="18" charset="0"/>
+                          </a:rPr>
+                          <m:t>𝑀</m:t>
+                        </m:r>
+                      </m:oMath>
+                    </m:oMathPara>
+                  </a14:m>
+                  <a:endParaRPr lang="zh-TW" altLang="en-US" dirty="0"/>
+                </a:p>
+              </p:txBody>
+            </p:sp>
+          </mc:Choice>
+          <mc:Fallback>
+            <p:sp>
+              <p:nvSpPr>
+                <p:cNvPr id="25" name="文字方塊 24">
+                  <a:extLst>
+                    <a:ext uri="{FF2B5EF4-FFF2-40B4-BE49-F238E27FC236}">
+                      <a16:creationId xmlns:a16="http://schemas.microsoft.com/office/drawing/2014/main" id="{9889234A-4146-4DFD-A384-1D93E5EBD06B}"/>
+                    </a:ext>
+                  </a:extLst>
+                </p:cNvPr>
+                <p:cNvSpPr txBox="1">
+                  <a:spLocks noRot="1" noChangeAspect="1" noMove="1" noResize="1" noEditPoints="1" noAdjustHandles="1" noChangeArrowheads="1" noChangeShapeType="1" noTextEdit="1"/>
+                </p:cNvSpPr>
+                <p:nvPr/>
+              </p:nvSpPr>
+              <p:spPr>
+                <a:xfrm>
+                  <a:off x="5830031" y="479920"/>
+                  <a:ext cx="500693" cy="294333"/>
+                </a:xfrm>
+                <a:prstGeom prst="rect">
+                  <a:avLst/>
+                </a:prstGeom>
+                <a:blipFill>
+                  <a:blip r:embed="rId8"/>
+                  <a:stretch>
+                    <a:fillRect/>
+                  </a:stretch>
+                </a:blipFill>
+              </p:spPr>
+              <p:txBody>
+                <a:bodyPr/>
+                <a:lstStyle/>
+                <a:p>
+                  <a:r>
+                    <a:rPr lang="zh-TW" altLang="en-US">
+                      <a:noFill/>
+                    </a:rPr>
+                    <a:t> </a:t>
+                  </a:r>
+                </a:p>
+              </p:txBody>
+            </p:sp>
+          </mc:Fallback>
+        </mc:AlternateContent>
+        <p:sp>
+          <p:nvSpPr>
+            <p:cNvPr id="26" name="橢圓 25">
+              <a:extLst>
+                <a:ext uri="{FF2B5EF4-FFF2-40B4-BE49-F238E27FC236}">
+                  <a16:creationId xmlns:a16="http://schemas.microsoft.com/office/drawing/2014/main" id="{123D994E-8905-46CD-8FAE-24B0A3D5508E}"/>
+                </a:ext>
+              </a:extLst>
+            </p:cNvPr>
+            <p:cNvSpPr/>
+            <p:nvPr/>
+          </p:nvSpPr>
+          <p:spPr>
+            <a:xfrm rot="1800318">
+              <a:off x="5704815" y="395314"/>
+              <a:ext cx="72000" cy="72000"/>
+            </a:xfrm>
+            <a:prstGeom prst="ellipse">
+              <a:avLst/>
+            </a:prstGeom>
+            <a:solidFill>
+              <a:schemeClr val="tx1"/>
+            </a:solidFill>
+            <a:ln w="6350">
+              <a:solidFill>
+                <a:schemeClr val="tx1"/>
+              </a:solidFill>
+            </a:ln>
+          </p:spPr>
+          <p:style>
+            <a:lnRef idx="2">
+              <a:schemeClr val="dk1">
+                <a:shade val="50000"/>
+              </a:schemeClr>
+            </a:lnRef>
+            <a:fillRef idx="1">
+              <a:schemeClr val="dk1"/>
+            </a:fillRef>
+            <a:effectRef idx="0">
+              <a:schemeClr val="dk1"/>
+            </a:effectRef>
+            <a:fontRef idx="minor">
+              <a:schemeClr val="lt1"/>
+            </a:fontRef>
+          </p:style>
+          <p:txBody>
+            <a:bodyPr rtlCol="0" anchor="ctr"/>
+            <a:lstStyle/>
+            <a:p>
+              <a:pPr algn="ctr"/>
+              <a:endParaRPr lang="zh-TW" altLang="en-US" dirty="0"/>
+            </a:p>
+          </p:txBody>
+        </p:sp>
+        <p:sp>
+          <p:nvSpPr>
+            <p:cNvPr id="27" name="橢圓 26">
+              <a:extLst>
+                <a:ext uri="{FF2B5EF4-FFF2-40B4-BE49-F238E27FC236}">
+                  <a16:creationId xmlns:a16="http://schemas.microsoft.com/office/drawing/2014/main" id="{9FDB16D7-52BC-493A-B1B4-54F5D3236A58}"/>
+                </a:ext>
+              </a:extLst>
+            </p:cNvPr>
+            <p:cNvSpPr/>
+            <p:nvPr/>
+          </p:nvSpPr>
+          <p:spPr>
+            <a:xfrm rot="1800318">
+              <a:off x="6073550" y="1034866"/>
+              <a:ext cx="72000" cy="72000"/>
+            </a:xfrm>
+            <a:prstGeom prst="ellipse">
+              <a:avLst/>
+            </a:prstGeom>
+            <a:solidFill>
+              <a:schemeClr val="tx1"/>
+            </a:solidFill>
+            <a:ln w="6350">
+              <a:solidFill>
+                <a:schemeClr val="tx1"/>
+              </a:solidFill>
+            </a:ln>
+          </p:spPr>
+          <p:style>
+            <a:lnRef idx="2">
+              <a:schemeClr val="dk1">
+                <a:shade val="50000"/>
+              </a:schemeClr>
+            </a:lnRef>
+            <a:fillRef idx="1">
+              <a:schemeClr val="dk1"/>
+            </a:fillRef>
+            <a:effectRef idx="0">
+              <a:schemeClr val="dk1"/>
+            </a:effectRef>
+            <a:fontRef idx="minor">
+              <a:schemeClr val="lt1"/>
+            </a:fontRef>
+          </p:style>
+          <p:txBody>
+            <a:bodyPr rtlCol="0" anchor="ctr"/>
+            <a:lstStyle/>
+            <a:p>
+              <a:pPr algn="ctr"/>
+              <a:endParaRPr lang="zh-TW" altLang="en-US" dirty="0"/>
+            </a:p>
+          </p:txBody>
+        </p:sp>
+        <mc:AlternateContent xmlns:mc="http://schemas.openxmlformats.org/markup-compatibility/2006">
+          <mc:Choice xmlns:a14="http://schemas.microsoft.com/office/drawing/2010/main" Requires="a14">
+            <p:sp>
+              <p:nvSpPr>
+                <p:cNvPr id="28" name="文字方塊 27">
+                  <a:extLst>
+                    <a:ext uri="{FF2B5EF4-FFF2-40B4-BE49-F238E27FC236}">
+                      <a16:creationId xmlns:a16="http://schemas.microsoft.com/office/drawing/2014/main" id="{283E8ED5-0F51-4EE2-9FDC-01B1883EA98B}"/>
+                    </a:ext>
+                  </a:extLst>
+                </p:cNvPr>
+                <p:cNvSpPr txBox="1"/>
+                <p:nvPr/>
+              </p:nvSpPr>
+              <p:spPr>
+                <a:xfrm>
+                  <a:off x="4942271" y="1044766"/>
+                  <a:ext cx="500693" cy="294333"/>
+                </a:xfrm>
+                <a:prstGeom prst="rect">
+                  <a:avLst/>
+                </a:prstGeom>
+                <a:noFill/>
+              </p:spPr>
+              <p:txBody>
+                <a:bodyPr wrap="square" rtlCol="0">
+                  <a:spAutoFit/>
+                </a:bodyPr>
+                <a:lstStyle/>
+                <a:p>
+                  <a:pPr/>
+                  <a14:m>
+                    <m:oMathPara xmlns:m="http://schemas.openxmlformats.org/officeDocument/2006/math">
+                      <m:oMathParaPr>
+                        <m:jc m:val="centerGroup"/>
+                      </m:oMathParaPr>
+                      <m:oMath xmlns:m="http://schemas.openxmlformats.org/officeDocument/2006/math">
+                        <m:r>
+                          <m:rPr>
+                            <m:sty m:val="p"/>
+                          </m:rPr>
+                          <a:rPr lang="en-US" altLang="zh-TW">
+                            <a:latin typeface="Cambria Math" panose="02040503050406030204" pitchFamily="18" charset="0"/>
+                          </a:rPr>
+                          <m:t>Γ</m:t>
+                        </m:r>
+                      </m:oMath>
+                    </m:oMathPara>
+                  </a14:m>
+                  <a:endParaRPr lang="zh-TW" altLang="en-US" dirty="0"/>
+                </a:p>
+              </p:txBody>
+            </p:sp>
+          </mc:Choice>
+          <mc:Fallback>
+            <p:sp>
+              <p:nvSpPr>
+                <p:cNvPr id="28" name="文字方塊 27">
+                  <a:extLst>
+                    <a:ext uri="{FF2B5EF4-FFF2-40B4-BE49-F238E27FC236}">
+                      <a16:creationId xmlns:a16="http://schemas.microsoft.com/office/drawing/2014/main" id="{283E8ED5-0F51-4EE2-9FDC-01B1883EA98B}"/>
+                    </a:ext>
+                  </a:extLst>
+                </p:cNvPr>
+                <p:cNvSpPr txBox="1">
+                  <a:spLocks noRot="1" noChangeAspect="1" noMove="1" noResize="1" noEditPoints="1" noAdjustHandles="1" noChangeArrowheads="1" noChangeShapeType="1" noTextEdit="1"/>
+                </p:cNvSpPr>
+                <p:nvPr/>
+              </p:nvSpPr>
+              <p:spPr>
+                <a:xfrm>
+                  <a:off x="4942271" y="1044766"/>
+                  <a:ext cx="500693" cy="294333"/>
+                </a:xfrm>
+                <a:prstGeom prst="rect">
+                  <a:avLst/>
+                </a:prstGeom>
+                <a:blipFill>
+                  <a:blip r:embed="rId9"/>
+                  <a:stretch>
+                    <a:fillRect/>
+                  </a:stretch>
+                </a:blipFill>
+              </p:spPr>
+              <p:txBody>
+                <a:bodyPr/>
+                <a:lstStyle/>
+                <a:p>
+                  <a:r>
+                    <a:rPr lang="zh-TW" altLang="en-US">
+                      <a:noFill/>
+                    </a:rPr>
+                    <a:t> </a:t>
+                  </a:r>
+                </a:p>
+              </p:txBody>
+            </p:sp>
+          </mc:Fallback>
+        </mc:AlternateContent>
+        <p:sp>
+          <p:nvSpPr>
+            <p:cNvPr id="29" name="橢圓 28">
+              <a:extLst>
+                <a:ext uri="{FF2B5EF4-FFF2-40B4-BE49-F238E27FC236}">
+                  <a16:creationId xmlns:a16="http://schemas.microsoft.com/office/drawing/2014/main" id="{4305C0AF-4D0C-479E-BADB-A00EC0C525F7}"/>
+                </a:ext>
+              </a:extLst>
+            </p:cNvPr>
+            <p:cNvSpPr/>
+            <p:nvPr/>
+          </p:nvSpPr>
+          <p:spPr>
+            <a:xfrm rot="1800318">
+              <a:off x="5889183" y="715090"/>
+              <a:ext cx="72000" cy="72000"/>
+            </a:xfrm>
+            <a:prstGeom prst="ellipse">
+              <a:avLst/>
+            </a:prstGeom>
+            <a:solidFill>
+              <a:schemeClr val="tx1"/>
+            </a:solidFill>
+            <a:ln w="6350">
+              <a:solidFill>
+                <a:schemeClr val="tx1"/>
+              </a:solidFill>
+            </a:ln>
+          </p:spPr>
+          <p:style>
+            <a:lnRef idx="2">
+              <a:schemeClr val="dk1">
+                <a:shade val="50000"/>
+              </a:schemeClr>
+            </a:lnRef>
+            <a:fillRef idx="1">
+              <a:schemeClr val="dk1"/>
+            </a:fillRef>
+            <a:effectRef idx="0">
+              <a:schemeClr val="dk1"/>
+            </a:effectRef>
+            <a:fontRef idx="minor">
+              <a:schemeClr val="lt1"/>
+            </a:fontRef>
+          </p:style>
+          <p:txBody>
+            <a:bodyPr rtlCol="0" anchor="ctr"/>
+            <a:lstStyle/>
+            <a:p>
+              <a:pPr algn="ctr"/>
+              <a:endParaRPr lang="zh-TW" altLang="en-US" dirty="0"/>
+            </a:p>
+          </p:txBody>
+        </p:sp>
+        <p:sp>
+          <p:nvSpPr>
+            <p:cNvPr id="30" name="橢圓 29">
+              <a:extLst>
+                <a:ext uri="{FF2B5EF4-FFF2-40B4-BE49-F238E27FC236}">
+                  <a16:creationId xmlns:a16="http://schemas.microsoft.com/office/drawing/2014/main" id="{83BDADA2-A496-476E-A8BC-AD2B3166E19F}"/>
+                </a:ext>
+              </a:extLst>
+            </p:cNvPr>
+            <p:cNvSpPr/>
+            <p:nvPr/>
+          </p:nvSpPr>
+          <p:spPr>
+            <a:xfrm rot="1800318">
+              <a:off x="5336079" y="1034866"/>
+              <a:ext cx="72000" cy="72000"/>
+            </a:xfrm>
+            <a:prstGeom prst="ellipse">
+              <a:avLst/>
+            </a:prstGeom>
+            <a:solidFill>
+              <a:schemeClr val="tx1"/>
+            </a:solidFill>
+            <a:ln w="6350">
+              <a:solidFill>
+                <a:schemeClr val="tx1"/>
+              </a:solidFill>
+            </a:ln>
+          </p:spPr>
+          <p:style>
+            <a:lnRef idx="2">
+              <a:schemeClr val="dk1">
+                <a:shade val="50000"/>
+              </a:schemeClr>
+            </a:lnRef>
+            <a:fillRef idx="1">
+              <a:schemeClr val="dk1"/>
+            </a:fillRef>
+            <a:effectRef idx="0">
+              <a:schemeClr val="dk1"/>
+            </a:effectRef>
+            <a:fontRef idx="minor">
+              <a:schemeClr val="lt1"/>
+            </a:fontRef>
+          </p:style>
+          <p:txBody>
+            <a:bodyPr rtlCol="0" anchor="ctr"/>
+            <a:lstStyle/>
+            <a:p>
+              <a:pPr algn="ctr"/>
+              <a:endParaRPr lang="zh-TW" altLang="en-US" dirty="0"/>
+            </a:p>
+          </p:txBody>
+        </p:sp>
+        <p:sp>
+          <p:nvSpPr>
+            <p:cNvPr id="31" name="橢圓 30">
+              <a:extLst>
+                <a:ext uri="{FF2B5EF4-FFF2-40B4-BE49-F238E27FC236}">
+                  <a16:creationId xmlns:a16="http://schemas.microsoft.com/office/drawing/2014/main" id="{439E7B51-CDCD-4B79-8B92-358AA3EAEF51}"/>
+                </a:ext>
+              </a:extLst>
+            </p:cNvPr>
+            <p:cNvSpPr/>
+            <p:nvPr/>
+          </p:nvSpPr>
+          <p:spPr>
+            <a:xfrm rot="1800318">
+              <a:off x="5520447" y="715905"/>
+              <a:ext cx="72000" cy="72000"/>
+            </a:xfrm>
+            <a:prstGeom prst="ellipse">
+              <a:avLst/>
+            </a:prstGeom>
+            <a:solidFill>
+              <a:schemeClr val="tx1"/>
+            </a:solidFill>
+            <a:ln w="6350">
+              <a:solidFill>
+                <a:schemeClr val="tx1"/>
+              </a:solidFill>
+            </a:ln>
+          </p:spPr>
+          <p:style>
+            <a:lnRef idx="2">
+              <a:schemeClr val="dk1">
+                <a:shade val="50000"/>
+              </a:schemeClr>
+            </a:lnRef>
+            <a:fillRef idx="1">
+              <a:schemeClr val="dk1"/>
+            </a:fillRef>
+            <a:effectRef idx="0">
+              <a:schemeClr val="dk1"/>
+            </a:effectRef>
+            <a:fontRef idx="minor">
+              <a:schemeClr val="lt1"/>
+            </a:fontRef>
+          </p:style>
+          <p:txBody>
+            <a:bodyPr rtlCol="0" anchor="ctr"/>
+            <a:lstStyle/>
+            <a:p>
+              <a:pPr algn="ctr"/>
+              <a:endParaRPr lang="zh-TW" altLang="en-US" dirty="0"/>
+            </a:p>
+          </p:txBody>
+        </p:sp>
+        <p:sp>
+          <p:nvSpPr>
+            <p:cNvPr id="32" name="橢圓 31">
+              <a:extLst>
+                <a:ext uri="{FF2B5EF4-FFF2-40B4-BE49-F238E27FC236}">
+                  <a16:creationId xmlns:a16="http://schemas.microsoft.com/office/drawing/2014/main" id="{14C492AD-7AB9-49BB-A7CA-6E2AAF76DFD2}"/>
+                </a:ext>
+              </a:extLst>
+            </p:cNvPr>
+            <p:cNvSpPr/>
+            <p:nvPr/>
+          </p:nvSpPr>
+          <p:spPr>
+            <a:xfrm rot="1800318">
+              <a:off x="5704815" y="1034866"/>
+              <a:ext cx="72000" cy="72000"/>
+            </a:xfrm>
+            <a:prstGeom prst="ellipse">
+              <a:avLst/>
+            </a:prstGeom>
+            <a:solidFill>
+              <a:schemeClr val="tx1"/>
+            </a:solidFill>
+            <a:ln w="6350">
+              <a:solidFill>
+                <a:schemeClr val="tx1"/>
+              </a:solidFill>
+            </a:ln>
+          </p:spPr>
+          <p:style>
+            <a:lnRef idx="2">
+              <a:schemeClr val="dk1">
+                <a:shade val="50000"/>
+              </a:schemeClr>
+            </a:lnRef>
+            <a:fillRef idx="1">
+              <a:schemeClr val="dk1"/>
+            </a:fillRef>
+            <a:effectRef idx="0">
+              <a:schemeClr val="dk1"/>
+            </a:effectRef>
+            <a:fontRef idx="minor">
+              <a:schemeClr val="lt1"/>
+            </a:fontRef>
+          </p:style>
+          <p:txBody>
+            <a:bodyPr rtlCol="0" anchor="ctr"/>
+            <a:lstStyle/>
+            <a:p>
+              <a:pPr algn="ctr"/>
+              <a:endParaRPr lang="zh-TW" altLang="en-US" dirty="0"/>
+            </a:p>
+          </p:txBody>
+        </p:sp>
+        <mc:AlternateContent xmlns:mc="http://schemas.openxmlformats.org/markup-compatibility/2006">
+          <mc:Choice xmlns:a14="http://schemas.microsoft.com/office/drawing/2010/main" Requires="a14">
+            <p:sp>
+              <p:nvSpPr>
+                <p:cNvPr id="33" name="文字方塊 32">
+                  <a:extLst>
+                    <a:ext uri="{FF2B5EF4-FFF2-40B4-BE49-F238E27FC236}">
+                      <a16:creationId xmlns:a16="http://schemas.microsoft.com/office/drawing/2014/main" id="{5749DBA2-3861-4B36-B154-DD4BD215C4D4}"/>
+                    </a:ext>
+                  </a:extLst>
+                </p:cNvPr>
+                <p:cNvSpPr txBox="1"/>
+                <p:nvPr/>
+              </p:nvSpPr>
+              <p:spPr>
+                <a:xfrm>
+                  <a:off x="5177253" y="479920"/>
+                  <a:ext cx="500693" cy="294333"/>
+                </a:xfrm>
+                <a:prstGeom prst="rect">
+                  <a:avLst/>
+                </a:prstGeom>
+                <a:noFill/>
+              </p:spPr>
+              <p:txBody>
+                <a:bodyPr wrap="square" rtlCol="0">
+                  <a:spAutoFit/>
+                </a:bodyPr>
+                <a:lstStyle/>
+                <a:p>
+                  <a:pPr/>
+                  <a14:m>
+                    <m:oMathPara xmlns:m="http://schemas.openxmlformats.org/officeDocument/2006/math">
+                      <m:oMathParaPr>
+                        <m:jc m:val="centerGroup"/>
+                      </m:oMathParaPr>
+                      <m:oMath xmlns:m="http://schemas.openxmlformats.org/officeDocument/2006/math">
+                        <m:r>
+                          <a:rPr lang="en-US" altLang="zh-TW" i="1">
+                            <a:latin typeface="Cambria Math" panose="02040503050406030204" pitchFamily="18" charset="0"/>
+                          </a:rPr>
+                          <m:t>𝑄</m:t>
+                        </m:r>
+                        <m:r>
+                          <a:rPr lang="en-US" altLang="zh-TW" i="1">
+                            <a:latin typeface="Cambria Math" panose="02040503050406030204" pitchFamily="18" charset="0"/>
+                          </a:rPr>
+                          <m:t>’</m:t>
+                        </m:r>
+                      </m:oMath>
+                    </m:oMathPara>
+                  </a14:m>
+                  <a:endParaRPr lang="zh-TW" altLang="en-US" dirty="0"/>
+                </a:p>
+              </p:txBody>
+            </p:sp>
+          </mc:Choice>
+          <mc:Fallback>
+            <p:sp>
+              <p:nvSpPr>
+                <p:cNvPr id="33" name="文字方塊 32">
+                  <a:extLst>
+                    <a:ext uri="{FF2B5EF4-FFF2-40B4-BE49-F238E27FC236}">
+                      <a16:creationId xmlns:a16="http://schemas.microsoft.com/office/drawing/2014/main" id="{5749DBA2-3861-4B36-B154-DD4BD215C4D4}"/>
+                    </a:ext>
+                  </a:extLst>
+                </p:cNvPr>
+                <p:cNvSpPr txBox="1">
+                  <a:spLocks noRot="1" noChangeAspect="1" noMove="1" noResize="1" noEditPoints="1" noAdjustHandles="1" noChangeArrowheads="1" noChangeShapeType="1" noTextEdit="1"/>
+                </p:cNvSpPr>
+                <p:nvPr/>
+              </p:nvSpPr>
+              <p:spPr>
+                <a:xfrm>
+                  <a:off x="5177253" y="479920"/>
+                  <a:ext cx="500693" cy="294333"/>
+                </a:xfrm>
+                <a:prstGeom prst="rect">
+                  <a:avLst/>
+                </a:prstGeom>
+                <a:blipFill>
+                  <a:blip r:embed="rId10"/>
+                  <a:stretch>
+                    <a:fillRect b="-17544"/>
+                  </a:stretch>
+                </a:blipFill>
+              </p:spPr>
+              <p:txBody>
+                <a:bodyPr/>
+                <a:lstStyle/>
+                <a:p>
+                  <a:r>
+                    <a:rPr lang="zh-TW" altLang="en-US">
+                      <a:noFill/>
+                    </a:rPr>
+                    <a:t> </a:t>
+                  </a:r>
+                </a:p>
+              </p:txBody>
+            </p:sp>
+          </mc:Fallback>
+        </mc:AlternateContent>
+        <mc:AlternateContent xmlns:mc="http://schemas.openxmlformats.org/markup-compatibility/2006">
+          <mc:Choice xmlns:a14="http://schemas.microsoft.com/office/drawing/2010/main" Requires="a14">
+            <p:sp>
+              <p:nvSpPr>
+                <p:cNvPr id="34" name="文字方塊 33">
+                  <a:extLst>
+                    <a:ext uri="{FF2B5EF4-FFF2-40B4-BE49-F238E27FC236}">
+                      <a16:creationId xmlns:a16="http://schemas.microsoft.com/office/drawing/2014/main" id="{174AD440-EBE8-40B0-A2C0-B223506D29B0}"/>
+                    </a:ext>
+                  </a:extLst>
+                </p:cNvPr>
+                <p:cNvSpPr txBox="1"/>
+                <p:nvPr/>
+              </p:nvSpPr>
+              <p:spPr>
+                <a:xfrm>
+                  <a:off x="5510827" y="1044766"/>
+                  <a:ext cx="500693" cy="294333"/>
+                </a:xfrm>
+                <a:prstGeom prst="rect">
+                  <a:avLst/>
+                </a:prstGeom>
+                <a:noFill/>
+              </p:spPr>
+              <p:txBody>
+                <a:bodyPr wrap="square" rtlCol="0">
+                  <a:spAutoFit/>
+                </a:bodyPr>
+                <a:lstStyle/>
+                <a:p>
+                  <a:pPr/>
+                  <a14:m>
+                    <m:oMathPara xmlns:m="http://schemas.openxmlformats.org/officeDocument/2006/math">
+                      <m:oMathParaPr>
+                        <m:jc m:val="centerGroup"/>
+                      </m:oMathParaPr>
+                      <m:oMath xmlns:m="http://schemas.openxmlformats.org/officeDocument/2006/math">
+                        <m:r>
+                          <a:rPr lang="en-US" altLang="zh-TW" i="1">
+                            <a:latin typeface="Cambria Math" panose="02040503050406030204" pitchFamily="18" charset="0"/>
+                          </a:rPr>
+                          <m:t>𝑄</m:t>
+                        </m:r>
+                      </m:oMath>
+                    </m:oMathPara>
+                  </a14:m>
+                  <a:endParaRPr lang="zh-TW" altLang="en-US" dirty="0"/>
+                </a:p>
+              </p:txBody>
+            </p:sp>
+          </mc:Choice>
+          <mc:Fallback>
+            <p:sp>
+              <p:nvSpPr>
+                <p:cNvPr id="34" name="文字方塊 33">
+                  <a:extLst>
+                    <a:ext uri="{FF2B5EF4-FFF2-40B4-BE49-F238E27FC236}">
+                      <a16:creationId xmlns:a16="http://schemas.microsoft.com/office/drawing/2014/main" id="{174AD440-EBE8-40B0-A2C0-B223506D29B0}"/>
+                    </a:ext>
+                  </a:extLst>
+                </p:cNvPr>
+                <p:cNvSpPr txBox="1">
+                  <a:spLocks noRot="1" noChangeAspect="1" noMove="1" noResize="1" noEditPoints="1" noAdjustHandles="1" noChangeArrowheads="1" noChangeShapeType="1" noTextEdit="1"/>
+                </p:cNvSpPr>
+                <p:nvPr/>
+              </p:nvSpPr>
+              <p:spPr>
+                <a:xfrm>
+                  <a:off x="5510827" y="1044766"/>
+                  <a:ext cx="500693" cy="294333"/>
+                </a:xfrm>
+                <a:prstGeom prst="rect">
+                  <a:avLst/>
+                </a:prstGeom>
+                <a:blipFill>
+                  <a:blip r:embed="rId11"/>
+                  <a:stretch>
+                    <a:fillRect b="-19643"/>
+                  </a:stretch>
+                </a:blipFill>
+              </p:spPr>
+              <p:txBody>
+                <a:bodyPr/>
+                <a:lstStyle/>
+                <a:p>
+                  <a:r>
+                    <a:rPr lang="zh-TW" altLang="en-US">
+                      <a:noFill/>
+                    </a:rPr>
+                    <a:t> </a:t>
+                  </a:r>
+                </a:p>
+              </p:txBody>
+            </p:sp>
+          </mc:Fallback>
+        </mc:AlternateContent>
+      </p:grpSp>
+      <p:grpSp>
+        <p:nvGrpSpPr>
+          <p:cNvPr id="79" name="群組 78">
+            <a:extLst>
+              <a:ext uri="{FF2B5EF4-FFF2-40B4-BE49-F238E27FC236}">
+                <a16:creationId xmlns:a16="http://schemas.microsoft.com/office/drawing/2014/main" id="{E588A180-2FB7-4D06-B54F-8C8BE4B436B6}"/>
+              </a:ext>
+            </a:extLst>
+          </p:cNvPr>
+          <p:cNvGrpSpPr/>
+          <p:nvPr/>
+        </p:nvGrpSpPr>
+        <p:grpSpPr>
+          <a:xfrm>
+            <a:off x="8317308" y="4909152"/>
+            <a:ext cx="1001952" cy="814592"/>
+            <a:chOff x="6095200" y="86196"/>
+            <a:chExt cx="1153156" cy="937523"/>
+          </a:xfrm>
+        </p:grpSpPr>
+        <p:cxnSp>
+          <p:nvCxnSpPr>
+            <p:cNvPr id="80" name="直線單箭頭接點 79">
+              <a:extLst>
+                <a:ext uri="{FF2B5EF4-FFF2-40B4-BE49-F238E27FC236}">
+                  <a16:creationId xmlns:a16="http://schemas.microsoft.com/office/drawing/2014/main" id="{80C7D949-C218-4433-B52A-F2DE23D67403}"/>
+                </a:ext>
+              </a:extLst>
+            </p:cNvPr>
+            <p:cNvCxnSpPr>
+              <a:cxnSpLocks/>
+            </p:cNvCxnSpPr>
+            <p:nvPr/>
+          </p:nvCxnSpPr>
+          <p:spPr>
+            <a:xfrm>
+              <a:off x="6502870" y="782175"/>
+              <a:ext cx="363442" cy="0"/>
+            </a:xfrm>
+            <a:prstGeom prst="straightConnector1">
+              <a:avLst/>
+            </a:prstGeom>
+            <a:solidFill>
+              <a:schemeClr val="bg1"/>
+            </a:solidFill>
+            <a:ln>
+              <a:tailEnd type="triangle"/>
+            </a:ln>
+          </p:spPr>
+          <p:style>
+            <a:lnRef idx="2">
+              <a:schemeClr val="dk1"/>
+            </a:lnRef>
+            <a:fillRef idx="0">
+              <a:schemeClr val="dk1"/>
+            </a:fillRef>
+            <a:effectRef idx="1">
+              <a:schemeClr val="dk1"/>
+            </a:effectRef>
+            <a:fontRef idx="minor">
+              <a:schemeClr val="tx1"/>
+            </a:fontRef>
+          </p:style>
+        </p:cxnSp>
+        <p:cxnSp>
+          <p:nvCxnSpPr>
+            <p:cNvPr id="81" name="直線單箭頭接點 80">
+              <a:extLst>
+                <a:ext uri="{FF2B5EF4-FFF2-40B4-BE49-F238E27FC236}">
+                  <a16:creationId xmlns:a16="http://schemas.microsoft.com/office/drawing/2014/main" id="{DFD5C945-0593-467A-B538-CF53EC4B4390}"/>
+                </a:ext>
+              </a:extLst>
+            </p:cNvPr>
+            <p:cNvCxnSpPr>
+              <a:cxnSpLocks/>
+            </p:cNvCxnSpPr>
+            <p:nvPr/>
+          </p:nvCxnSpPr>
+          <p:spPr>
+            <a:xfrm flipV="1">
+              <a:off x="6508390" y="432919"/>
+              <a:ext cx="0" cy="355792"/>
+            </a:xfrm>
+            <a:prstGeom prst="straightConnector1">
+              <a:avLst/>
+            </a:prstGeom>
+            <a:solidFill>
+              <a:schemeClr val="bg1"/>
+            </a:solidFill>
+            <a:ln>
+              <a:tailEnd type="triangle"/>
+            </a:ln>
+          </p:spPr>
+          <p:style>
+            <a:lnRef idx="2">
+              <a:schemeClr val="dk1"/>
+            </a:lnRef>
+            <a:fillRef idx="0">
+              <a:schemeClr val="dk1"/>
+            </a:fillRef>
+            <a:effectRef idx="1">
+              <a:schemeClr val="dk1"/>
+            </a:effectRef>
+            <a:fontRef idx="minor">
+              <a:schemeClr val="tx1"/>
+            </a:fontRef>
+          </p:style>
+        </p:cxnSp>
+        <mc:AlternateContent xmlns:mc="http://schemas.openxmlformats.org/markup-compatibility/2006">
+          <mc:Choice xmlns:a14="http://schemas.microsoft.com/office/drawing/2010/main" Requires="a14">
+            <p:sp>
+              <p:nvSpPr>
+                <p:cNvPr id="82" name="文字方塊 81">
+                  <a:extLst>
+                    <a:ext uri="{FF2B5EF4-FFF2-40B4-BE49-F238E27FC236}">
+                      <a16:creationId xmlns:a16="http://schemas.microsoft.com/office/drawing/2014/main" id="{A85838C4-7CEB-42A7-9F9D-8F4611F3AD3B}"/>
+                    </a:ext>
+                  </a:extLst>
+                </p:cNvPr>
+                <p:cNvSpPr txBox="1"/>
+                <p:nvPr/>
+              </p:nvSpPr>
+              <p:spPr>
+                <a:xfrm>
+                  <a:off x="6747663" y="592474"/>
+                  <a:ext cx="500693" cy="369332"/>
+                </a:xfrm>
+                <a:prstGeom prst="rect">
+                  <a:avLst/>
+                </a:prstGeom>
+                <a:noFill/>
+              </p:spPr>
+              <p:txBody>
+                <a:bodyPr wrap="square" rtlCol="0">
+                  <a:spAutoFit/>
+                </a:bodyPr>
+                <a:lstStyle/>
+                <a:p>
+                  <a:pPr/>
+                  <a14:m>
+                    <m:oMathPara xmlns:m="http://schemas.openxmlformats.org/officeDocument/2006/math">
+                      <m:oMathParaPr>
+                        <m:jc m:val="centerGroup"/>
+                      </m:oMathParaPr>
+                      <m:oMath xmlns:m="http://schemas.openxmlformats.org/officeDocument/2006/math">
+                        <m:sSub>
+                          <m:sSubPr>
+                            <m:ctrlPr>
+                              <a:rPr lang="en-US" altLang="zh-TW" i="1">
+                                <a:latin typeface="Cambria Math" panose="02040503050406030204" pitchFamily="18" charset="0"/>
+                              </a:rPr>
+                            </m:ctrlPr>
+                          </m:sSubPr>
+                          <m:e>
+                            <m:r>
+                              <a:rPr lang="en-US" altLang="zh-TW" i="1">
+                                <a:latin typeface="Cambria Math" panose="02040503050406030204" pitchFamily="18" charset="0"/>
+                              </a:rPr>
+                              <m:t>𝑘</m:t>
+                            </m:r>
+                          </m:e>
+                          <m:sub>
+                            <m:r>
+                              <a:rPr lang="en-US" altLang="zh-TW" i="1">
+                                <a:latin typeface="Cambria Math" panose="02040503050406030204" pitchFamily="18" charset="0"/>
+                              </a:rPr>
+                              <m:t>𝑥</m:t>
+                            </m:r>
+                          </m:sub>
+                        </m:sSub>
+                      </m:oMath>
+                    </m:oMathPara>
+                  </a14:m>
+                  <a:endParaRPr lang="zh-TW" altLang="en-US" dirty="0"/>
+                </a:p>
+              </p:txBody>
+            </p:sp>
+          </mc:Choice>
+          <mc:Fallback>
+            <p:sp>
+              <p:nvSpPr>
+                <p:cNvPr id="82" name="文字方塊 81">
+                  <a:extLst>
+                    <a:ext uri="{FF2B5EF4-FFF2-40B4-BE49-F238E27FC236}">
+                      <a16:creationId xmlns:a16="http://schemas.microsoft.com/office/drawing/2014/main" id="{A85838C4-7CEB-42A7-9F9D-8F4611F3AD3B}"/>
+                    </a:ext>
+                  </a:extLst>
+                </p:cNvPr>
+                <p:cNvSpPr txBox="1">
+                  <a:spLocks noRot="1" noChangeAspect="1" noMove="1" noResize="1" noEditPoints="1" noAdjustHandles="1" noChangeArrowheads="1" noChangeShapeType="1" noTextEdit="1"/>
+                </p:cNvSpPr>
+                <p:nvPr/>
+              </p:nvSpPr>
+              <p:spPr>
+                <a:xfrm>
+                  <a:off x="6747663" y="592474"/>
+                  <a:ext cx="500693" cy="369332"/>
+                </a:xfrm>
+                <a:prstGeom prst="rect">
+                  <a:avLst/>
+                </a:prstGeom>
+                <a:blipFill>
+                  <a:blip r:embed="rId12"/>
+                  <a:stretch>
+                    <a:fillRect b="-9434"/>
+                  </a:stretch>
+                </a:blipFill>
+              </p:spPr>
+              <p:txBody>
+                <a:bodyPr/>
+                <a:lstStyle/>
+                <a:p>
+                  <a:r>
+                    <a:rPr lang="zh-TW" altLang="en-US">
+                      <a:noFill/>
+                    </a:rPr>
+                    <a:t> </a:t>
+                  </a:r>
+                </a:p>
+              </p:txBody>
+            </p:sp>
+          </mc:Fallback>
+        </mc:AlternateContent>
+        <mc:AlternateContent xmlns:mc="http://schemas.openxmlformats.org/markup-compatibility/2006">
+          <mc:Choice xmlns:a14="http://schemas.microsoft.com/office/drawing/2010/main" Requires="a14">
+            <p:sp>
+              <p:nvSpPr>
+                <p:cNvPr id="83" name="文字方塊 82">
+                  <a:extLst>
+                    <a:ext uri="{FF2B5EF4-FFF2-40B4-BE49-F238E27FC236}">
+                      <a16:creationId xmlns:a16="http://schemas.microsoft.com/office/drawing/2014/main" id="{3519F496-065B-4C4E-8ED7-71C585DD926B}"/>
+                    </a:ext>
+                  </a:extLst>
+                </p:cNvPr>
+                <p:cNvSpPr txBox="1"/>
+                <p:nvPr/>
+              </p:nvSpPr>
+              <p:spPr>
+                <a:xfrm>
+                  <a:off x="6281529" y="86196"/>
+                  <a:ext cx="500693" cy="391261"/>
+                </a:xfrm>
+                <a:prstGeom prst="rect">
+                  <a:avLst/>
+                </a:prstGeom>
+                <a:noFill/>
+              </p:spPr>
+              <p:txBody>
+                <a:bodyPr wrap="square" rtlCol="0">
+                  <a:spAutoFit/>
+                </a:bodyPr>
+                <a:lstStyle/>
+                <a:p>
+                  <a:pPr/>
+                  <a14:m>
+                    <m:oMathPara xmlns:m="http://schemas.openxmlformats.org/officeDocument/2006/math">
+                      <m:oMathParaPr>
+                        <m:jc m:val="centerGroup"/>
+                      </m:oMathParaPr>
+                      <m:oMath xmlns:m="http://schemas.openxmlformats.org/officeDocument/2006/math">
+                        <m:sSub>
+                          <m:sSubPr>
+                            <m:ctrlPr>
+                              <a:rPr lang="en-US" altLang="zh-TW" i="1">
+                                <a:latin typeface="Cambria Math" panose="02040503050406030204" pitchFamily="18" charset="0"/>
+                              </a:rPr>
+                            </m:ctrlPr>
+                          </m:sSubPr>
+                          <m:e>
+                            <m:r>
+                              <a:rPr lang="en-US" altLang="zh-TW" i="1">
+                                <a:latin typeface="Cambria Math" panose="02040503050406030204" pitchFamily="18" charset="0"/>
+                              </a:rPr>
+                              <m:t>𝑘</m:t>
+                            </m:r>
+                          </m:e>
+                          <m:sub>
+                            <m:r>
+                              <a:rPr lang="en-US" altLang="zh-TW" i="1">
+                                <a:latin typeface="Cambria Math" panose="02040503050406030204" pitchFamily="18" charset="0"/>
+                              </a:rPr>
+                              <m:t>𝑦</m:t>
+                            </m:r>
+                          </m:sub>
+                        </m:sSub>
+                      </m:oMath>
+                    </m:oMathPara>
+                  </a14:m>
+                  <a:endParaRPr lang="zh-TW" altLang="en-US" dirty="0"/>
+                </a:p>
+              </p:txBody>
+            </p:sp>
+          </mc:Choice>
+          <mc:Fallback>
+            <p:sp>
+              <p:nvSpPr>
+                <p:cNvPr id="83" name="文字方塊 82">
+                  <a:extLst>
+                    <a:ext uri="{FF2B5EF4-FFF2-40B4-BE49-F238E27FC236}">
+                      <a16:creationId xmlns:a16="http://schemas.microsoft.com/office/drawing/2014/main" id="{3519F496-065B-4C4E-8ED7-71C585DD926B}"/>
+                    </a:ext>
+                  </a:extLst>
+                </p:cNvPr>
+                <p:cNvSpPr txBox="1">
+                  <a:spLocks noRot="1" noChangeAspect="1" noMove="1" noResize="1" noEditPoints="1" noAdjustHandles="1" noChangeArrowheads="1" noChangeShapeType="1" noTextEdit="1"/>
+                </p:cNvSpPr>
+                <p:nvPr/>
+              </p:nvSpPr>
+              <p:spPr>
+                <a:xfrm>
+                  <a:off x="6281529" y="86196"/>
+                  <a:ext cx="500693" cy="391261"/>
+                </a:xfrm>
+                <a:prstGeom prst="rect">
+                  <a:avLst/>
+                </a:prstGeom>
+                <a:blipFill>
+                  <a:blip r:embed="rId13"/>
+                  <a:stretch>
+                    <a:fillRect b="-19643"/>
+                  </a:stretch>
+                </a:blipFill>
+              </p:spPr>
+              <p:txBody>
+                <a:bodyPr/>
+                <a:lstStyle/>
+                <a:p>
+                  <a:r>
+                    <a:rPr lang="zh-TW" altLang="en-US">
+                      <a:noFill/>
+                    </a:rPr>
+                    <a:t> </a:t>
+                  </a:r>
+                </a:p>
+              </p:txBody>
+            </p:sp>
+          </mc:Fallback>
+        </mc:AlternateContent>
+        <p:grpSp>
+          <p:nvGrpSpPr>
+            <p:cNvPr id="84" name="群組 83">
+              <a:extLst>
+                <a:ext uri="{FF2B5EF4-FFF2-40B4-BE49-F238E27FC236}">
+                  <a16:creationId xmlns:a16="http://schemas.microsoft.com/office/drawing/2014/main" id="{495DF09D-1858-4C50-8BC1-76A72A31389C}"/>
+                </a:ext>
+              </a:extLst>
+            </p:cNvPr>
+            <p:cNvGrpSpPr/>
+            <p:nvPr/>
+          </p:nvGrpSpPr>
+          <p:grpSpPr>
+            <a:xfrm>
+              <a:off x="6473200" y="745891"/>
+              <a:ext cx="77620" cy="77620"/>
+              <a:chOff x="5995892" y="914379"/>
+              <a:chExt cx="540639" cy="540639"/>
+            </a:xfrm>
+          </p:grpSpPr>
+          <p:sp>
+            <p:nvSpPr>
+              <p:cNvPr id="86" name="圓形: 空心 85">
+                <a:extLst>
+                  <a:ext uri="{FF2B5EF4-FFF2-40B4-BE49-F238E27FC236}">
+                    <a16:creationId xmlns:a16="http://schemas.microsoft.com/office/drawing/2014/main" id="{ACE52A13-FB9D-4060-9C97-8A67AFE54A4A}"/>
+                  </a:ext>
+                </a:extLst>
+              </p:cNvPr>
+              <p:cNvSpPr/>
+              <p:nvPr/>
+            </p:nvSpPr>
+            <p:spPr>
+              <a:xfrm>
+                <a:off x="5995892" y="914379"/>
+                <a:ext cx="540639" cy="540639"/>
+              </a:xfrm>
+              <a:prstGeom prst="donut">
+                <a:avLst>
+                  <a:gd name="adj" fmla="val 38442"/>
+                </a:avLst>
+              </a:prstGeom>
+              <a:solidFill>
+                <a:schemeClr val="bg1"/>
+              </a:solidFill>
+              <a:ln>
+                <a:solidFill>
+                  <a:schemeClr val="tx1"/>
+                </a:solidFill>
+              </a:ln>
+            </p:spPr>
+            <p:style>
+              <a:lnRef idx="2">
+                <a:schemeClr val="accent1">
+                  <a:shade val="50000"/>
+                </a:schemeClr>
+              </a:lnRef>
+              <a:fillRef idx="1">
+                <a:schemeClr val="accent1"/>
+              </a:fillRef>
+              <a:effectRef idx="0">
+                <a:schemeClr val="accent1"/>
+              </a:effectRef>
+              <a:fontRef idx="minor">
+                <a:schemeClr val="lt1"/>
+              </a:fontRef>
+            </p:style>
+            <p:txBody>
+              <a:bodyPr rot="0" spcFirstLastPara="0" vertOverflow="overflow" horzOverflow="overflow" vert="horz" wrap="square" lIns="91440" tIns="45720" rIns="91440" bIns="45720" numCol="1" spcCol="0" rtlCol="0" fromWordArt="0" anchor="ctr" anchorCtr="0" forceAA="0" compatLnSpc="1">
+                <a:prstTxWarp prst="textNoShape">
+                  <a:avLst/>
+                </a:prstTxWarp>
+                <a:noAutofit/>
+              </a:bodyPr>
+              <a:lstStyle/>
+              <a:p>
+                <a:pPr algn="ctr"/>
+                <a:endParaRPr lang="zh-TW" altLang="en-US" dirty="0">
+                  <a:solidFill>
+                    <a:schemeClr val="tx1"/>
+                  </a:solidFill>
+                </a:endParaRPr>
+              </a:p>
+            </p:txBody>
+          </p:sp>
+          <p:sp>
+            <p:nvSpPr>
+              <p:cNvPr id="87" name="橢圓 86">
+                <a:extLst>
+                  <a:ext uri="{FF2B5EF4-FFF2-40B4-BE49-F238E27FC236}">
+                    <a16:creationId xmlns:a16="http://schemas.microsoft.com/office/drawing/2014/main" id="{149EA94D-64FC-4D0B-8973-99184378A3FF}"/>
+                  </a:ext>
+                </a:extLst>
+              </p:cNvPr>
+              <p:cNvSpPr/>
+              <p:nvPr/>
+            </p:nvSpPr>
+            <p:spPr>
+              <a:xfrm>
+                <a:off x="6200578" y="1119065"/>
+                <a:ext cx="131269" cy="131269"/>
+              </a:xfrm>
+              <a:prstGeom prst="ellipse">
+                <a:avLst/>
+              </a:prstGeom>
+              <a:solidFill>
+                <a:schemeClr val="tx1"/>
+              </a:solidFill>
+              <a:ln>
+                <a:noFill/>
+              </a:ln>
+            </p:spPr>
+            <p:style>
+              <a:lnRef idx="2">
+                <a:schemeClr val="accent1">
+                  <a:shade val="50000"/>
+                </a:schemeClr>
+              </a:lnRef>
+              <a:fillRef idx="1">
+                <a:schemeClr val="accent1"/>
+              </a:fillRef>
+              <a:effectRef idx="0">
+                <a:schemeClr val="accent1"/>
+              </a:effectRef>
+              <a:fontRef idx="minor">
+                <a:schemeClr val="lt1"/>
+              </a:fontRef>
+            </p:style>
+            <p:txBody>
+              <a:bodyPr rot="0" spcFirstLastPara="0" vertOverflow="overflow" horzOverflow="overflow" vert="horz" wrap="square" lIns="91440" tIns="45720" rIns="91440" bIns="45720" numCol="1" spcCol="0" rtlCol="0" fromWordArt="0" anchor="ctr" anchorCtr="0" forceAA="0" compatLnSpc="1">
+                <a:prstTxWarp prst="textNoShape">
+                  <a:avLst/>
+                </a:prstTxWarp>
+                <a:noAutofit/>
+              </a:bodyPr>
+              <a:lstStyle/>
+              <a:p>
+                <a:pPr algn="ctr"/>
+                <a:endParaRPr lang="zh-TW" altLang="en-US"/>
+              </a:p>
+            </p:txBody>
+          </p:sp>
+        </p:grpSp>
+        <mc:AlternateContent xmlns:mc="http://schemas.openxmlformats.org/markup-compatibility/2006">
+          <mc:Choice xmlns:a14="http://schemas.microsoft.com/office/drawing/2010/main" Requires="a14">
+            <p:sp>
+              <p:nvSpPr>
+                <p:cNvPr id="85" name="文字方塊 84">
+                  <a:extLst>
+                    <a:ext uri="{FF2B5EF4-FFF2-40B4-BE49-F238E27FC236}">
+                      <a16:creationId xmlns:a16="http://schemas.microsoft.com/office/drawing/2014/main" id="{7F292124-D26C-4A4D-B471-6E640C42DA47}"/>
+                    </a:ext>
+                  </a:extLst>
+                </p:cNvPr>
+                <p:cNvSpPr txBox="1"/>
+                <p:nvPr/>
+              </p:nvSpPr>
+              <p:spPr>
+                <a:xfrm>
+                  <a:off x="6095200" y="654387"/>
+                  <a:ext cx="500693" cy="369332"/>
+                </a:xfrm>
+                <a:prstGeom prst="rect">
+                  <a:avLst/>
+                </a:prstGeom>
+                <a:noFill/>
+              </p:spPr>
+              <p:txBody>
+                <a:bodyPr wrap="square" rtlCol="0">
+                  <a:spAutoFit/>
+                </a:bodyPr>
+                <a:lstStyle/>
+                <a:p>
+                  <a:pPr/>
+                  <a14:m>
+                    <m:oMathPara xmlns:m="http://schemas.openxmlformats.org/officeDocument/2006/math">
+                      <m:oMathParaPr>
+                        <m:jc m:val="centerGroup"/>
+                      </m:oMathParaPr>
+                      <m:oMath xmlns:m="http://schemas.openxmlformats.org/officeDocument/2006/math">
+                        <m:sSub>
+                          <m:sSubPr>
+                            <m:ctrlPr>
+                              <a:rPr lang="en-US" altLang="zh-TW" i="1">
+                                <a:latin typeface="Cambria Math" panose="02040503050406030204" pitchFamily="18" charset="0"/>
+                              </a:rPr>
+                            </m:ctrlPr>
+                          </m:sSubPr>
+                          <m:e>
+                            <m:r>
+                              <a:rPr lang="en-US" altLang="zh-TW" i="1">
+                                <a:latin typeface="Cambria Math" panose="02040503050406030204" pitchFamily="18" charset="0"/>
+                              </a:rPr>
+                              <m:t>𝑘</m:t>
+                            </m:r>
+                          </m:e>
+                          <m:sub>
+                            <m:r>
+                              <a:rPr lang="en-US" altLang="zh-TW" i="1">
+                                <a:latin typeface="Cambria Math" panose="02040503050406030204" pitchFamily="18" charset="0"/>
+                              </a:rPr>
+                              <m:t>𝑧</m:t>
+                            </m:r>
+                          </m:sub>
+                        </m:sSub>
+                      </m:oMath>
+                    </m:oMathPara>
+                  </a14:m>
+                  <a:endParaRPr lang="zh-TW" altLang="en-US" dirty="0"/>
+                </a:p>
+              </p:txBody>
+            </p:sp>
+          </mc:Choice>
+          <mc:Fallback>
+            <p:sp>
+              <p:nvSpPr>
+                <p:cNvPr id="85" name="文字方塊 84">
+                  <a:extLst>
+                    <a:ext uri="{FF2B5EF4-FFF2-40B4-BE49-F238E27FC236}">
+                      <a16:creationId xmlns:a16="http://schemas.microsoft.com/office/drawing/2014/main" id="{7F292124-D26C-4A4D-B471-6E640C42DA47}"/>
+                    </a:ext>
+                  </a:extLst>
+                </p:cNvPr>
+                <p:cNvSpPr txBox="1">
+                  <a:spLocks noRot="1" noChangeAspect="1" noMove="1" noResize="1" noEditPoints="1" noAdjustHandles="1" noChangeArrowheads="1" noChangeShapeType="1" noTextEdit="1"/>
+                </p:cNvSpPr>
+                <p:nvPr/>
+              </p:nvSpPr>
+              <p:spPr>
+                <a:xfrm>
+                  <a:off x="6095200" y="654387"/>
+                  <a:ext cx="500693" cy="369332"/>
+                </a:xfrm>
+                <a:prstGeom prst="rect">
+                  <a:avLst/>
+                </a:prstGeom>
+                <a:blipFill>
+                  <a:blip r:embed="rId14"/>
+                  <a:stretch>
+                    <a:fillRect b="-9434"/>
+                  </a:stretch>
+                </a:blipFill>
+              </p:spPr>
+              <p:txBody>
+                <a:bodyPr/>
+                <a:lstStyle/>
+                <a:p>
+                  <a:r>
+                    <a:rPr lang="zh-TW" altLang="en-US">
+                      <a:noFill/>
+                    </a:rPr>
+                    <a:t> </a:t>
+                  </a:r>
+                </a:p>
+              </p:txBody>
+            </p:sp>
+          </mc:Fallback>
+        </mc:AlternateContent>
+      </p:grpSp>
+      <p:grpSp>
+        <p:nvGrpSpPr>
+          <p:cNvPr id="88" name="群組 87">
+            <a:extLst>
+              <a:ext uri="{FF2B5EF4-FFF2-40B4-BE49-F238E27FC236}">
+                <a16:creationId xmlns:a16="http://schemas.microsoft.com/office/drawing/2014/main" id="{73EED529-FC4A-4D4B-BB11-FD5158CE3413}"/>
+              </a:ext>
+            </a:extLst>
+          </p:cNvPr>
+          <p:cNvGrpSpPr/>
+          <p:nvPr/>
+        </p:nvGrpSpPr>
+        <p:grpSpPr>
+          <a:xfrm>
+            <a:off x="8317308" y="550732"/>
+            <a:ext cx="1001952" cy="814592"/>
+            <a:chOff x="1884085" y="953133"/>
+            <a:chExt cx="1153156" cy="937523"/>
+          </a:xfrm>
+        </p:grpSpPr>
+        <p:grpSp>
+          <p:nvGrpSpPr>
+            <p:cNvPr id="66" name="群組 65">
+              <a:extLst>
+                <a:ext uri="{FF2B5EF4-FFF2-40B4-BE49-F238E27FC236}">
+                  <a16:creationId xmlns:a16="http://schemas.microsoft.com/office/drawing/2014/main" id="{D3C30B12-C841-478A-8023-FFA4E768F38A}"/>
+                </a:ext>
+              </a:extLst>
+            </p:cNvPr>
+            <p:cNvGrpSpPr/>
+            <p:nvPr/>
+          </p:nvGrpSpPr>
+          <p:grpSpPr>
+            <a:xfrm>
+              <a:off x="1884085" y="953133"/>
+              <a:ext cx="1153156" cy="937523"/>
+              <a:chOff x="6095200" y="86196"/>
+              <a:chExt cx="1153156" cy="937523"/>
+            </a:xfrm>
+          </p:grpSpPr>
+          <mc:AlternateContent xmlns:mc="http://schemas.openxmlformats.org/markup-compatibility/2006">
+            <mc:Choice xmlns:a14="http://schemas.microsoft.com/office/drawing/2010/main" Requires="a14">
+              <p:sp>
+                <p:nvSpPr>
+                  <p:cNvPr id="72" name="文字方塊 71">
+                    <a:extLst>
+                      <a:ext uri="{FF2B5EF4-FFF2-40B4-BE49-F238E27FC236}">
+                        <a16:creationId xmlns:a16="http://schemas.microsoft.com/office/drawing/2014/main" id="{79885C87-960B-4533-8B78-16664E820A61}"/>
+                      </a:ext>
+                    </a:extLst>
+                  </p:cNvPr>
+                  <p:cNvSpPr txBox="1"/>
+                  <p:nvPr/>
+                </p:nvSpPr>
+                <p:spPr>
+                  <a:xfrm>
+                    <a:off x="6095200" y="654387"/>
+                    <a:ext cx="500693" cy="369332"/>
+                  </a:xfrm>
+                  <a:prstGeom prst="rect">
+                    <a:avLst/>
+                  </a:prstGeom>
+                  <a:noFill/>
+                </p:spPr>
+                <p:txBody>
+                  <a:bodyPr wrap="square" rtlCol="0">
+                    <a:spAutoFit/>
+                  </a:bodyPr>
+                  <a:lstStyle/>
+                  <a:p>
+                    <a:pPr/>
+                    <a14:m>
+                      <m:oMathPara xmlns:m="http://schemas.openxmlformats.org/officeDocument/2006/math">
+                        <m:oMathParaPr>
+                          <m:jc m:val="centerGroup"/>
+                        </m:oMathParaPr>
+                        <m:oMath xmlns:m="http://schemas.openxmlformats.org/officeDocument/2006/math">
+                          <m:r>
+                            <a:rPr lang="en-US" altLang="zh-TW" i="1">
+                              <a:latin typeface="Cambria Math" panose="02040503050406030204" pitchFamily="18" charset="0"/>
+                            </a:rPr>
+                            <m:t>𝑦</m:t>
+                          </m:r>
+                        </m:oMath>
+                      </m:oMathPara>
+                    </a14:m>
+                    <a:endParaRPr lang="zh-TW" altLang="en-US" dirty="0"/>
+                  </a:p>
+                </p:txBody>
+              </p:sp>
+            </mc:Choice>
+            <mc:Fallback>
+              <p:sp>
+                <p:nvSpPr>
+                  <p:cNvPr id="72" name="文字方塊 71">
+                    <a:extLst>
+                      <a:ext uri="{FF2B5EF4-FFF2-40B4-BE49-F238E27FC236}">
+                        <a16:creationId xmlns:a16="http://schemas.microsoft.com/office/drawing/2014/main" id="{79885C87-960B-4533-8B78-16664E820A61}"/>
+                      </a:ext>
+                    </a:extLst>
+                  </p:cNvPr>
+                  <p:cNvSpPr txBox="1">
+                    <a:spLocks noRot="1" noChangeAspect="1" noMove="1" noResize="1" noEditPoints="1" noAdjustHandles="1" noChangeArrowheads="1" noChangeShapeType="1" noTextEdit="1"/>
+                  </p:cNvSpPr>
+                  <p:nvPr/>
+                </p:nvSpPr>
+                <p:spPr>
+                  <a:xfrm>
+                    <a:off x="6095200" y="654387"/>
+                    <a:ext cx="500693" cy="369332"/>
+                  </a:xfrm>
+                  <a:prstGeom prst="rect">
+                    <a:avLst/>
+                  </a:prstGeom>
+                  <a:blipFill>
+                    <a:blip r:embed="rId15"/>
+                    <a:stretch>
+                      <a:fillRect b="-22642"/>
+                    </a:stretch>
+                  </a:blipFill>
+                </p:spPr>
+                <p:txBody>
+                  <a:bodyPr/>
+                  <a:lstStyle/>
+                  <a:p>
+                    <a:r>
+                      <a:rPr lang="zh-TW" altLang="en-US">
+                        <a:noFill/>
+                      </a:rPr>
+                      <a:t> </a:t>
+                    </a:r>
+                  </a:p>
+                </p:txBody>
+              </p:sp>
+            </mc:Fallback>
+          </mc:AlternateContent>
+          <p:cxnSp>
+            <p:nvCxnSpPr>
+              <p:cNvPr id="67" name="直線單箭頭接點 66">
+                <a:extLst>
+                  <a:ext uri="{FF2B5EF4-FFF2-40B4-BE49-F238E27FC236}">
+                    <a16:creationId xmlns:a16="http://schemas.microsoft.com/office/drawing/2014/main" id="{89E15BBF-7670-4A3F-BADB-C7EFDDB3224E}"/>
+                  </a:ext>
+                </a:extLst>
+              </p:cNvPr>
+              <p:cNvCxnSpPr>
+                <a:cxnSpLocks/>
+              </p:cNvCxnSpPr>
+              <p:nvPr/>
+            </p:nvCxnSpPr>
+            <p:spPr>
+              <a:xfrm>
+                <a:off x="6502870" y="782175"/>
+                <a:ext cx="363442" cy="0"/>
+              </a:xfrm>
+              <a:prstGeom prst="straightConnector1">
+                <a:avLst/>
+              </a:prstGeom>
+              <a:solidFill>
+                <a:schemeClr val="bg1"/>
+              </a:solidFill>
+              <a:ln>
+                <a:tailEnd type="triangle"/>
+              </a:ln>
+            </p:spPr>
+            <p:style>
+              <a:lnRef idx="2">
+                <a:schemeClr val="dk1"/>
+              </a:lnRef>
+              <a:fillRef idx="0">
+                <a:schemeClr val="dk1"/>
+              </a:fillRef>
+              <a:effectRef idx="1">
+                <a:schemeClr val="dk1"/>
+              </a:effectRef>
+              <a:fontRef idx="minor">
+                <a:schemeClr val="tx1"/>
+              </a:fontRef>
+            </p:style>
+          </p:cxnSp>
+          <p:cxnSp>
+            <p:nvCxnSpPr>
+              <p:cNvPr id="68" name="直線單箭頭接點 67">
+                <a:extLst>
+                  <a:ext uri="{FF2B5EF4-FFF2-40B4-BE49-F238E27FC236}">
+                    <a16:creationId xmlns:a16="http://schemas.microsoft.com/office/drawing/2014/main" id="{C471E3AC-049E-4231-A4DD-08949586D145}"/>
+                  </a:ext>
+                </a:extLst>
+              </p:cNvPr>
+              <p:cNvCxnSpPr>
+                <a:cxnSpLocks/>
+              </p:cNvCxnSpPr>
+              <p:nvPr/>
+            </p:nvCxnSpPr>
+            <p:spPr>
+              <a:xfrm flipV="1">
+                <a:off x="6508390" y="432919"/>
+                <a:ext cx="0" cy="355792"/>
+              </a:xfrm>
+              <a:prstGeom prst="straightConnector1">
+                <a:avLst/>
+              </a:prstGeom>
+              <a:solidFill>
+                <a:schemeClr val="bg1"/>
+              </a:solidFill>
+              <a:ln>
+                <a:tailEnd type="triangle"/>
+              </a:ln>
+            </p:spPr>
+            <p:style>
+              <a:lnRef idx="2">
+                <a:schemeClr val="dk1"/>
+              </a:lnRef>
+              <a:fillRef idx="0">
+                <a:schemeClr val="dk1"/>
+              </a:fillRef>
+              <a:effectRef idx="1">
+                <a:schemeClr val="dk1"/>
+              </a:effectRef>
+              <a:fontRef idx="minor">
+                <a:schemeClr val="tx1"/>
+              </a:fontRef>
+            </p:style>
+          </p:cxnSp>
+          <mc:AlternateContent xmlns:mc="http://schemas.openxmlformats.org/markup-compatibility/2006">
+            <mc:Choice xmlns:a14="http://schemas.microsoft.com/office/drawing/2010/main" Requires="a14">
+              <p:sp>
+                <p:nvSpPr>
+                  <p:cNvPr id="69" name="文字方塊 68">
+                    <a:extLst>
+                      <a:ext uri="{FF2B5EF4-FFF2-40B4-BE49-F238E27FC236}">
+                        <a16:creationId xmlns:a16="http://schemas.microsoft.com/office/drawing/2014/main" id="{E065E39B-4A55-4C1C-9725-9C09934398BF}"/>
+                      </a:ext>
+                    </a:extLst>
+                  </p:cNvPr>
+                  <p:cNvSpPr txBox="1"/>
+                  <p:nvPr/>
+                </p:nvSpPr>
+                <p:spPr>
+                  <a:xfrm>
+                    <a:off x="6747663" y="592474"/>
+                    <a:ext cx="500693" cy="369332"/>
+                  </a:xfrm>
+                  <a:prstGeom prst="rect">
+                    <a:avLst/>
+                  </a:prstGeom>
+                  <a:noFill/>
+                </p:spPr>
+                <p:txBody>
+                  <a:bodyPr wrap="square" rtlCol="0">
+                    <a:spAutoFit/>
+                  </a:bodyPr>
+                  <a:lstStyle/>
+                  <a:p>
+                    <a:pPr/>
+                    <a14:m>
+                      <m:oMathPara xmlns:m="http://schemas.openxmlformats.org/officeDocument/2006/math">
+                        <m:oMathParaPr>
+                          <m:jc m:val="centerGroup"/>
+                        </m:oMathParaPr>
+                        <m:oMath xmlns:m="http://schemas.openxmlformats.org/officeDocument/2006/math">
+                          <m:r>
+                            <a:rPr lang="en-US" altLang="zh-TW" i="1">
+                              <a:latin typeface="Cambria Math" panose="02040503050406030204" pitchFamily="18" charset="0"/>
+                            </a:rPr>
+                            <m:t>𝑥</m:t>
+                          </m:r>
+                        </m:oMath>
+                      </m:oMathPara>
+                    </a14:m>
+                    <a:endParaRPr lang="zh-TW" altLang="en-US" dirty="0"/>
+                  </a:p>
+                </p:txBody>
+              </p:sp>
+            </mc:Choice>
+            <mc:Fallback>
+              <p:sp>
+                <p:nvSpPr>
+                  <p:cNvPr id="69" name="文字方塊 68">
+                    <a:extLst>
+                      <a:ext uri="{FF2B5EF4-FFF2-40B4-BE49-F238E27FC236}">
+                        <a16:creationId xmlns:a16="http://schemas.microsoft.com/office/drawing/2014/main" id="{E065E39B-4A55-4C1C-9725-9C09934398BF}"/>
+                      </a:ext>
+                    </a:extLst>
+                  </p:cNvPr>
+                  <p:cNvSpPr txBox="1">
+                    <a:spLocks noRot="1" noChangeAspect="1" noMove="1" noResize="1" noEditPoints="1" noAdjustHandles="1" noChangeArrowheads="1" noChangeShapeType="1" noTextEdit="1"/>
+                  </p:cNvSpPr>
+                  <p:nvPr/>
+                </p:nvSpPr>
+                <p:spPr>
+                  <a:xfrm>
+                    <a:off x="6747663" y="592474"/>
+                    <a:ext cx="500693" cy="369332"/>
+                  </a:xfrm>
+                  <a:prstGeom prst="rect">
+                    <a:avLst/>
+                  </a:prstGeom>
+                  <a:blipFill>
+                    <a:blip r:embed="rId16"/>
+                    <a:stretch>
+                      <a:fillRect/>
+                    </a:stretch>
+                  </a:blipFill>
+                </p:spPr>
+                <p:txBody>
+                  <a:bodyPr/>
+                  <a:lstStyle/>
+                  <a:p>
+                    <a:r>
+                      <a:rPr lang="zh-TW" altLang="en-US">
+                        <a:noFill/>
+                      </a:rPr>
+                      <a:t> </a:t>
+                    </a:r>
+                  </a:p>
+                </p:txBody>
+              </p:sp>
+            </mc:Fallback>
+          </mc:AlternateContent>
+          <mc:AlternateContent xmlns:mc="http://schemas.openxmlformats.org/markup-compatibility/2006">
+            <mc:Choice xmlns:a14="http://schemas.microsoft.com/office/drawing/2010/main" Requires="a14">
+              <p:sp>
+                <p:nvSpPr>
+                  <p:cNvPr id="70" name="文字方塊 69">
+                    <a:extLst>
+                      <a:ext uri="{FF2B5EF4-FFF2-40B4-BE49-F238E27FC236}">
+                        <a16:creationId xmlns:a16="http://schemas.microsoft.com/office/drawing/2014/main" id="{7E55DF81-5B1D-470B-98DF-CE680CB1E8EE}"/>
+                      </a:ext>
+                    </a:extLst>
+                  </p:cNvPr>
+                  <p:cNvSpPr txBox="1"/>
+                  <p:nvPr/>
+                </p:nvSpPr>
+                <p:spPr>
+                  <a:xfrm>
+                    <a:off x="6281529" y="86196"/>
+                    <a:ext cx="500693" cy="369332"/>
+                  </a:xfrm>
+                  <a:prstGeom prst="rect">
+                    <a:avLst/>
+                  </a:prstGeom>
+                  <a:noFill/>
+                </p:spPr>
+                <p:txBody>
+                  <a:bodyPr wrap="square" rtlCol="0">
+                    <a:spAutoFit/>
+                  </a:bodyPr>
+                  <a:lstStyle/>
+                  <a:p>
+                    <a:pPr/>
+                    <a14:m>
+                      <m:oMathPara xmlns:m="http://schemas.openxmlformats.org/officeDocument/2006/math">
+                        <m:oMathParaPr>
+                          <m:jc m:val="centerGroup"/>
+                        </m:oMathParaPr>
+                        <m:oMath xmlns:m="http://schemas.openxmlformats.org/officeDocument/2006/math">
+                          <m:r>
+                            <a:rPr lang="en-US" altLang="zh-TW" i="1">
+                              <a:latin typeface="Cambria Math" panose="02040503050406030204" pitchFamily="18" charset="0"/>
+                            </a:rPr>
+                            <m:t>𝑧</m:t>
+                          </m:r>
+                        </m:oMath>
+                      </m:oMathPara>
+                    </a14:m>
+                    <a:endParaRPr lang="zh-TW" altLang="en-US" dirty="0"/>
+                  </a:p>
+                </p:txBody>
+              </p:sp>
+            </mc:Choice>
+            <mc:Fallback>
+              <p:sp>
+                <p:nvSpPr>
+                  <p:cNvPr id="70" name="文字方塊 69">
+                    <a:extLst>
+                      <a:ext uri="{FF2B5EF4-FFF2-40B4-BE49-F238E27FC236}">
+                        <a16:creationId xmlns:a16="http://schemas.microsoft.com/office/drawing/2014/main" id="{7E55DF81-5B1D-470B-98DF-CE680CB1E8EE}"/>
+                      </a:ext>
+                    </a:extLst>
+                  </p:cNvPr>
+                  <p:cNvSpPr txBox="1">
+                    <a:spLocks noRot="1" noChangeAspect="1" noMove="1" noResize="1" noEditPoints="1" noAdjustHandles="1" noChangeArrowheads="1" noChangeShapeType="1" noTextEdit="1"/>
+                  </p:cNvSpPr>
+                  <p:nvPr/>
+                </p:nvSpPr>
+                <p:spPr>
+                  <a:xfrm>
+                    <a:off x="6281529" y="86196"/>
+                    <a:ext cx="500693" cy="369332"/>
+                  </a:xfrm>
+                  <a:prstGeom prst="rect">
+                    <a:avLst/>
+                  </a:prstGeom>
+                  <a:blipFill>
+                    <a:blip r:embed="rId17"/>
+                    <a:stretch>
+                      <a:fillRect/>
+                    </a:stretch>
+                  </a:blipFill>
+                </p:spPr>
+                <p:txBody>
+                  <a:bodyPr/>
+                  <a:lstStyle/>
+                  <a:p>
+                    <a:r>
+                      <a:rPr lang="zh-TW" altLang="en-US">
+                        <a:noFill/>
+                      </a:rPr>
+                      <a:t> </a:t>
+                    </a:r>
+                  </a:p>
+                </p:txBody>
+              </p:sp>
+            </mc:Fallback>
+          </mc:AlternateContent>
+        </p:grpSp>
+        <p:grpSp>
+          <p:nvGrpSpPr>
+            <p:cNvPr id="78" name="群組 77">
+              <a:extLst>
+                <a:ext uri="{FF2B5EF4-FFF2-40B4-BE49-F238E27FC236}">
+                  <a16:creationId xmlns:a16="http://schemas.microsoft.com/office/drawing/2014/main" id="{8612E472-0341-4444-B726-C876552B0738}"/>
+                </a:ext>
+              </a:extLst>
+            </p:cNvPr>
+            <p:cNvGrpSpPr/>
+            <p:nvPr/>
+          </p:nvGrpSpPr>
+          <p:grpSpPr>
+            <a:xfrm>
+              <a:off x="2265833" y="1610990"/>
+              <a:ext cx="79200" cy="79200"/>
+              <a:chOff x="406078" y="1237436"/>
+              <a:chExt cx="1456060" cy="1456060"/>
+            </a:xfrm>
+          </p:grpSpPr>
+          <p:sp>
+            <p:nvSpPr>
+              <p:cNvPr id="76" name="橢圓 75">
+                <a:extLst>
+                  <a:ext uri="{FF2B5EF4-FFF2-40B4-BE49-F238E27FC236}">
+                    <a16:creationId xmlns:a16="http://schemas.microsoft.com/office/drawing/2014/main" id="{99874BD5-0A9D-4A6D-80FA-8D320A783253}"/>
+                  </a:ext>
+                </a:extLst>
+              </p:cNvPr>
+              <p:cNvSpPr/>
+              <p:nvPr/>
+            </p:nvSpPr>
+            <p:spPr>
+              <a:xfrm>
+                <a:off x="595101" y="1426459"/>
+                <a:ext cx="1078014" cy="1078014"/>
+              </a:xfrm>
+              <a:prstGeom prst="ellipse">
+                <a:avLst/>
+              </a:prstGeom>
+              <a:solidFill>
+                <a:schemeClr val="bg1"/>
+              </a:solidFill>
+              <a:ln w="9525">
+                <a:solidFill>
+                  <a:schemeClr val="tx1"/>
+                </a:solidFill>
+              </a:ln>
+            </p:spPr>
+            <p:style>
+              <a:lnRef idx="2">
+                <a:schemeClr val="accent1">
+                  <a:shade val="50000"/>
+                </a:schemeClr>
+              </a:lnRef>
+              <a:fillRef idx="1">
+                <a:schemeClr val="accent1"/>
+              </a:fillRef>
+              <a:effectRef idx="0">
+                <a:schemeClr val="accent1"/>
+              </a:effectRef>
+              <a:fontRef idx="minor">
+                <a:schemeClr val="lt1"/>
+              </a:fontRef>
+            </p:style>
+            <p:txBody>
+              <a:bodyPr rot="0" spcFirstLastPara="0" vertOverflow="overflow" horzOverflow="overflow" vert="horz" wrap="square" lIns="91440" tIns="45720" rIns="91440" bIns="45720" numCol="1" spcCol="0" rtlCol="0" fromWordArt="0" anchor="ctr" anchorCtr="0" forceAA="0" compatLnSpc="1">
+                <a:prstTxWarp prst="textNoShape">
+                  <a:avLst/>
+                </a:prstTxWarp>
+                <a:noAutofit/>
+              </a:bodyPr>
+              <a:lstStyle/>
+              <a:p>
+                <a:pPr algn="ctr"/>
+                <a:endParaRPr lang="zh-TW" altLang="en-US" dirty="0"/>
+              </a:p>
+            </p:txBody>
+          </p:sp>
+          <p:sp>
+            <p:nvSpPr>
+              <p:cNvPr id="77" name="乘號 76">
+                <a:extLst>
+                  <a:ext uri="{FF2B5EF4-FFF2-40B4-BE49-F238E27FC236}">
+                    <a16:creationId xmlns:a16="http://schemas.microsoft.com/office/drawing/2014/main" id="{FD21A3C2-4C45-4FF7-926A-5DE21AAFEF4F}"/>
+                  </a:ext>
+                </a:extLst>
+              </p:cNvPr>
+              <p:cNvSpPr/>
+              <p:nvPr/>
+            </p:nvSpPr>
+            <p:spPr>
+              <a:xfrm>
+                <a:off x="406078" y="1237436"/>
+                <a:ext cx="1456060" cy="1456060"/>
+              </a:xfrm>
+              <a:prstGeom prst="mathMultiply">
+                <a:avLst>
+                  <a:gd name="adj1" fmla="val 376"/>
+                </a:avLst>
+              </a:prstGeom>
+              <a:solidFill>
+                <a:schemeClr val="tx1"/>
+              </a:solidFill>
+              <a:ln w="6350">
+                <a:solidFill>
+                  <a:schemeClr val="tx1"/>
+                </a:solidFill>
+              </a:ln>
+            </p:spPr>
+            <p:style>
+              <a:lnRef idx="2">
+                <a:schemeClr val="accent1">
+                  <a:shade val="50000"/>
+                </a:schemeClr>
+              </a:lnRef>
+              <a:fillRef idx="1">
+                <a:schemeClr val="accent1"/>
+              </a:fillRef>
+              <a:effectRef idx="0">
+                <a:schemeClr val="accent1"/>
+              </a:effectRef>
+              <a:fontRef idx="minor">
+                <a:schemeClr val="lt1"/>
+              </a:fontRef>
+            </p:style>
+            <p:txBody>
+              <a:bodyPr rot="0" spcFirstLastPara="0" vertOverflow="overflow" horzOverflow="overflow" vert="horz" wrap="square" lIns="91440" tIns="45720" rIns="91440" bIns="45720" numCol="1" spcCol="0" rtlCol="0" fromWordArt="0" anchor="ctr" anchorCtr="0" forceAA="0" compatLnSpc="1">
+                <a:prstTxWarp prst="textNoShape">
+                  <a:avLst/>
+                </a:prstTxWarp>
+                <a:noAutofit/>
+              </a:bodyPr>
+              <a:lstStyle/>
+              <a:p>
+                <a:pPr algn="ctr"/>
+                <a:endParaRPr lang="zh-TW" altLang="en-US" dirty="0"/>
+              </a:p>
+            </p:txBody>
+          </p:sp>
+        </p:grpSp>
+      </p:grpSp>
       <p:grpSp>
         <p:nvGrpSpPr>
           <p:cNvPr id="13" name="群組 12">
@@ -3335,10 +6088,10 @@
         </p:nvGrpSpPr>
         <p:grpSpPr>
           <a:xfrm>
-            <a:off x="1503049" y="409214"/>
-            <a:ext cx="9185903" cy="6039573"/>
-            <a:chOff x="1510852" y="654525"/>
-            <a:chExt cx="9185903" cy="6039573"/>
+            <a:off x="433761" y="838201"/>
+            <a:ext cx="7491040" cy="4926014"/>
+            <a:chOff x="1483625" y="635659"/>
+            <a:chExt cx="9213130" cy="6058439"/>
           </a:xfrm>
         </p:grpSpPr>
         <p:sp>
@@ -3408,7 +6161,7 @@
             <p:nvPr/>
           </p:nvPicPr>
           <p:blipFill rotWithShape="1">
-            <a:blip r:embed="rId2">
+            <a:blip r:embed="rId18">
               <a:extLst>
                 <a:ext uri="{28A0092B-C50C-407E-A947-70E740481C1C}">
                   <a14:useLocalDpi xmlns:a14="http://schemas.microsoft.com/office/drawing/2010/main" val="0"/>
@@ -3420,8 +6173,8 @@
           </p:blipFill>
           <p:spPr>
             <a:xfrm>
-              <a:off x="1915063" y="880093"/>
-              <a:ext cx="8704053" cy="5727740"/>
+              <a:off x="1915063" y="880094"/>
+              <a:ext cx="8704053" cy="5727739"/>
             </a:xfrm>
             <a:prstGeom prst="rect">
               <a:avLst/>
@@ -3442,8 +6195,8 @@
           </p:nvSpPr>
           <p:spPr>
             <a:xfrm>
-              <a:off x="2510287" y="663152"/>
-              <a:ext cx="749007" cy="400110"/>
+              <a:off x="2303406" y="644286"/>
+              <a:ext cx="1162772" cy="454563"/>
             </a:xfrm>
             <a:prstGeom prst="rect">
               <a:avLst/>
@@ -3485,8 +6238,8 @@
           </p:nvSpPr>
           <p:spPr>
             <a:xfrm>
-              <a:off x="4370717" y="654525"/>
-              <a:ext cx="1426234" cy="400110"/>
+              <a:off x="3976779" y="635659"/>
+              <a:ext cx="2214108" cy="454563"/>
             </a:xfrm>
             <a:prstGeom prst="rect">
               <a:avLst/>
@@ -3528,8 +6281,8 @@
           </p:nvSpPr>
           <p:spPr>
             <a:xfrm>
-              <a:off x="6593457" y="663152"/>
-              <a:ext cx="1426234" cy="400110"/>
+              <a:off x="6199519" y="644286"/>
+              <a:ext cx="2214108" cy="454563"/>
             </a:xfrm>
             <a:prstGeom prst="rect">
               <a:avLst/>
@@ -3571,8 +6324,8 @@
           </p:nvSpPr>
           <p:spPr>
             <a:xfrm>
-              <a:off x="8876583" y="663152"/>
-              <a:ext cx="1426234" cy="400110"/>
+              <a:off x="8482647" y="644286"/>
+              <a:ext cx="2214108" cy="454563"/>
             </a:xfrm>
             <a:prstGeom prst="rect">
               <a:avLst/>
@@ -3614,8 +6367,8 @@
           </p:nvSpPr>
           <p:spPr>
             <a:xfrm rot="16200000">
-              <a:off x="1247956" y="3181054"/>
-              <a:ext cx="925901" cy="400110"/>
+              <a:off x="946295" y="3153827"/>
+              <a:ext cx="1529224" cy="454563"/>
             </a:xfrm>
             <a:prstGeom prst="rect">
               <a:avLst/>
@@ -3643,6 +6396,150 @@
           </p:txBody>
         </p:sp>
       </p:grpSp>
+      <p:sp>
+        <p:nvSpPr>
+          <p:cNvPr id="91" name="文字方塊 90">
+            <a:extLst>
+              <a:ext uri="{FF2B5EF4-FFF2-40B4-BE49-F238E27FC236}">
+                <a16:creationId xmlns:a16="http://schemas.microsoft.com/office/drawing/2014/main" id="{222275CC-8746-4A24-9EC2-87E6EB718A19}"/>
+              </a:ext>
+            </a:extLst>
+          </p:cNvPr>
+          <p:cNvSpPr txBox="1"/>
+          <p:nvPr/>
+        </p:nvSpPr>
+        <p:spPr>
+          <a:xfrm>
+            <a:off x="123825" y="457200"/>
+            <a:ext cx="409575" cy="369332"/>
+          </a:xfrm>
+          <a:prstGeom prst="rect">
+            <a:avLst/>
+          </a:prstGeom>
+          <a:noFill/>
+        </p:spPr>
+        <p:txBody>
+          <a:bodyPr wrap="square" rtlCol="0">
+            <a:spAutoFit/>
+          </a:bodyPr>
+          <a:lstStyle/>
+          <a:p>
+            <a:r>
+              <a:rPr lang="en-US" altLang="zh-TW" dirty="0"/>
+              <a:t>(a)</a:t>
+            </a:r>
+            <a:endParaRPr lang="zh-TW" altLang="en-US" dirty="0"/>
+          </a:p>
+        </p:txBody>
+      </p:sp>
+      <p:sp>
+        <p:nvSpPr>
+          <p:cNvPr id="92" name="文字方塊 91">
+            <a:extLst>
+              <a:ext uri="{FF2B5EF4-FFF2-40B4-BE49-F238E27FC236}">
+                <a16:creationId xmlns:a16="http://schemas.microsoft.com/office/drawing/2014/main" id="{40C23607-93F0-430D-99CE-D32AB785B967}"/>
+              </a:ext>
+            </a:extLst>
+          </p:cNvPr>
+          <p:cNvSpPr txBox="1"/>
+          <p:nvPr/>
+        </p:nvSpPr>
+        <p:spPr>
+          <a:xfrm>
+            <a:off x="8000147" y="457200"/>
+            <a:ext cx="409575" cy="369332"/>
+          </a:xfrm>
+          <a:prstGeom prst="rect">
+            <a:avLst/>
+          </a:prstGeom>
+          <a:noFill/>
+        </p:spPr>
+        <p:txBody>
+          <a:bodyPr wrap="square" rtlCol="0">
+            <a:spAutoFit/>
+          </a:bodyPr>
+          <a:lstStyle/>
+          <a:p>
+            <a:r>
+              <a:rPr lang="en-US" altLang="zh-TW" dirty="0"/>
+              <a:t>(b)</a:t>
+            </a:r>
+            <a:endParaRPr lang="zh-TW" altLang="en-US" dirty="0"/>
+          </a:p>
+        </p:txBody>
+      </p:sp>
+      <p:sp>
+        <p:nvSpPr>
+          <p:cNvPr id="93" name="文字方塊 92">
+            <a:extLst>
+              <a:ext uri="{FF2B5EF4-FFF2-40B4-BE49-F238E27FC236}">
+                <a16:creationId xmlns:a16="http://schemas.microsoft.com/office/drawing/2014/main" id="{3A60362D-4BAD-4D2F-90B2-31CB316F6673}"/>
+              </a:ext>
+            </a:extLst>
+          </p:cNvPr>
+          <p:cNvSpPr txBox="1"/>
+          <p:nvPr/>
+        </p:nvSpPr>
+        <p:spPr>
+          <a:xfrm>
+            <a:off x="8000147" y="2176312"/>
+            <a:ext cx="409575" cy="369332"/>
+          </a:xfrm>
+          <a:prstGeom prst="rect">
+            <a:avLst/>
+          </a:prstGeom>
+          <a:noFill/>
+        </p:spPr>
+        <p:txBody>
+          <a:bodyPr wrap="square" rtlCol="0">
+            <a:spAutoFit/>
+          </a:bodyPr>
+          <a:lstStyle/>
+          <a:p>
+            <a:r>
+              <a:rPr lang="en-US" altLang="zh-TW" dirty="0"/>
+              <a:t>(c)</a:t>
+            </a:r>
+            <a:endParaRPr lang="zh-TW" altLang="en-US" dirty="0"/>
+          </a:p>
+        </p:txBody>
+      </p:sp>
+      <p:sp>
+        <p:nvSpPr>
+          <p:cNvPr id="94" name="文字方塊 93">
+            <a:extLst>
+              <a:ext uri="{FF2B5EF4-FFF2-40B4-BE49-F238E27FC236}">
+                <a16:creationId xmlns:a16="http://schemas.microsoft.com/office/drawing/2014/main" id="{E4B7BA61-589C-45E5-A295-84E3D26F9EA7}"/>
+              </a:ext>
+            </a:extLst>
+          </p:cNvPr>
+          <p:cNvSpPr txBox="1"/>
+          <p:nvPr/>
+        </p:nvSpPr>
+        <p:spPr>
+          <a:xfrm>
+            <a:off x="8000147" y="4376882"/>
+            <a:ext cx="409575" cy="369332"/>
+          </a:xfrm>
+          <a:prstGeom prst="rect">
+            <a:avLst/>
+          </a:prstGeom>
+          <a:noFill/>
+        </p:spPr>
+        <p:txBody>
+          <a:bodyPr wrap="square" rtlCol="0">
+            <a:spAutoFit/>
+          </a:bodyPr>
+          <a:lstStyle/>
+          <a:p>
+            <a:r>
+              <a:rPr lang="en-US" altLang="zh-TW" dirty="0"/>
+              <a:t>(d)</a:t>
+            </a:r>
+            <a:endParaRPr lang="zh-TW" altLang="en-US" dirty="0"/>
+          </a:p>
+        </p:txBody>
+      </p:sp>
     </p:spTree>
     <p:extLst>
       <p:ext uri="{BB962C8B-B14F-4D97-AF65-F5344CB8AC3E}">
@@ -3659,7 +6556,7 @@
 <file path=ppt/theme/theme1.xml><?xml version="1.0" encoding="utf-8"?>
 <a:theme xmlns:a="http://schemas.openxmlformats.org/drawingml/2006/main" name="Office 佈景主題">
   <a:themeElements>
-    <a:clrScheme name="Office">
+    <a:clrScheme name="Office 佈景主題">
       <a:dk1>
         <a:sysClr val="windowText" lastClr="000000"/>
       </a:dk1>
@@ -3697,7 +6594,7 @@
         <a:srgbClr val="954F72"/>
       </a:folHlink>
     </a:clrScheme>
-    <a:fontScheme name="Office">
+    <a:fontScheme name="Office 佈景主題">
       <a:majorFont>
         <a:latin typeface="Calibri Light" panose="020F0302020204030204"/>
         <a:ea typeface=""/>
@@ -3732,23 +6629,6 @@
         <a:font script="Viet" typeface="Times New Roman"/>
         <a:font script="Uigh" typeface="Microsoft Uighur"/>
         <a:font script="Geor" typeface="Sylfaen"/>
-        <a:font script="Armn" typeface="Arial"/>
-        <a:font script="Bugi" typeface="Leelawadee UI"/>
-        <a:font script="Bopo" typeface="Microsoft JhengHei"/>
-        <a:font script="Java" typeface="Javanese Text"/>
-        <a:font script="Lisu" typeface="Segoe UI"/>
-        <a:font script="Mymr" typeface="Myanmar Text"/>
-        <a:font script="Nkoo" typeface="Ebrima"/>
-        <a:font script="Olck" typeface="Nirmala UI"/>
-        <a:font script="Osma" typeface="Ebrima"/>
-        <a:font script="Phag" typeface="Phagspa"/>
-        <a:font script="Syrn" typeface="Estrangelo Edessa"/>
-        <a:font script="Syrj" typeface="Estrangelo Edessa"/>
-        <a:font script="Syre" typeface="Estrangelo Edessa"/>
-        <a:font script="Sora" typeface="Nirmala UI"/>
-        <a:font script="Tale" typeface="Microsoft Tai Le"/>
-        <a:font script="Talu" typeface="Microsoft New Tai Lue"/>
-        <a:font script="Tfng" typeface="Ebrima"/>
       </a:majorFont>
       <a:minorFont>
         <a:latin typeface="Calibri" panose="020F0502020204030204"/>
@@ -3784,26 +6664,9 @@
         <a:font script="Viet" typeface="Arial"/>
         <a:font script="Uigh" typeface="Microsoft Uighur"/>
         <a:font script="Geor" typeface="Sylfaen"/>
-        <a:font script="Armn" typeface="Arial"/>
-        <a:font script="Bugi" typeface="Leelawadee UI"/>
-        <a:font script="Bopo" typeface="Microsoft JhengHei"/>
-        <a:font script="Java" typeface="Javanese Text"/>
-        <a:font script="Lisu" typeface="Segoe UI"/>
-        <a:font script="Mymr" typeface="Myanmar Text"/>
-        <a:font script="Nkoo" typeface="Ebrima"/>
-        <a:font script="Olck" typeface="Nirmala UI"/>
-        <a:font script="Osma" typeface="Ebrima"/>
-        <a:font script="Phag" typeface="Phagspa"/>
-        <a:font script="Syrn" typeface="Estrangelo Edessa"/>
-        <a:font script="Syrj" typeface="Estrangelo Edessa"/>
-        <a:font script="Syre" typeface="Estrangelo Edessa"/>
-        <a:font script="Sora" typeface="Nirmala UI"/>
-        <a:font script="Tale" typeface="Microsoft Tai Le"/>
-        <a:font script="Talu" typeface="Microsoft New Tai Lue"/>
-        <a:font script="Tfng" typeface="Ebrima"/>
       </a:minorFont>
     </a:fontScheme>
-    <a:fmtScheme name="Office">
+    <a:fmtScheme name="Office 佈景主題">
       <a:fillStyleLst>
         <a:solidFill>
           <a:schemeClr val="phClr"/>

--- a/Final/Figures/MoS2_band_structure.pptx
+++ b/Final/Figures/MoS2_band_structure.pptx
@@ -2,12 +2,12 @@
 <file path=ppt/presentation.xml><?xml version="1.0" encoding="utf-8"?>
 <p:presentation xmlns:a="http://schemas.openxmlformats.org/drawingml/2006/main" xmlns:r="http://schemas.openxmlformats.org/officeDocument/2006/relationships" xmlns:p="http://schemas.openxmlformats.org/presentationml/2006/main" saveSubsetFonts="1">
   <p:sldMasterIdLst>
-    <p:sldMasterId id="2147483660" r:id="rId1"/>
+    <p:sldMasterId id="2147483696" r:id="rId1"/>
   </p:sldMasterIdLst>
   <p:sldIdLst>
     <p:sldId id="256" r:id="rId2"/>
   </p:sldIdLst>
-  <p:sldSz cx="12192000" cy="5940425"/>
+  <p:sldSz cx="9906000" cy="4679950"/>
   <p:notesSz cx="6858000" cy="9144000"/>
   <p:defaultTextStyle>
     <a:defPPr>
@@ -141,15 +141,15 @@
         </p:nvSpPr>
         <p:spPr>
           <a:xfrm>
-            <a:off x="1524000" y="972195"/>
-            <a:ext cx="9144000" cy="2068148"/>
+            <a:off x="1238250" y="765909"/>
+            <a:ext cx="7429500" cy="1629316"/>
           </a:xfrm>
         </p:spPr>
         <p:txBody>
           <a:bodyPr anchor="b"/>
           <a:lstStyle>
             <a:lvl1pPr algn="ctr">
-              <a:defRPr sz="5197"/>
+              <a:defRPr sz="4094"/>
             </a:lvl1pPr>
           </a:lstStyle>
           <a:p>
@@ -173,8 +173,8 @@
         </p:nvSpPr>
         <p:spPr>
           <a:xfrm>
-            <a:off x="1524000" y="3120099"/>
-            <a:ext cx="9144000" cy="1434227"/>
+            <a:off x="1238250" y="2458058"/>
+            <a:ext cx="7429500" cy="1129904"/>
           </a:xfrm>
         </p:spPr>
         <p:txBody>
@@ -182,39 +182,39 @@
           <a:lstStyle>
             <a:lvl1pPr marL="0" indent="0" algn="ctr">
               <a:buNone/>
-              <a:defRPr sz="2079"/>
+              <a:defRPr sz="1638"/>
             </a:lvl1pPr>
-            <a:lvl2pPr marL="396027" indent="0" algn="ctr">
+            <a:lvl2pPr marL="311993" indent="0" algn="ctr">
               <a:buNone/>
-              <a:defRPr sz="1732"/>
+              <a:defRPr sz="1365"/>
             </a:lvl2pPr>
-            <a:lvl3pPr marL="792053" indent="0" algn="ctr">
+            <a:lvl3pPr marL="623987" indent="0" algn="ctr">
               <a:buNone/>
-              <a:defRPr sz="1559"/>
+              <a:defRPr sz="1228"/>
             </a:lvl3pPr>
-            <a:lvl4pPr marL="1188080" indent="0" algn="ctr">
+            <a:lvl4pPr marL="935980" indent="0" algn="ctr">
               <a:buNone/>
-              <a:defRPr sz="1386"/>
+              <a:defRPr sz="1092"/>
             </a:lvl4pPr>
-            <a:lvl5pPr marL="1584107" indent="0" algn="ctr">
+            <a:lvl5pPr marL="1247973" indent="0" algn="ctr">
               <a:buNone/>
-              <a:defRPr sz="1386"/>
+              <a:defRPr sz="1092"/>
             </a:lvl5pPr>
-            <a:lvl6pPr marL="1980133" indent="0" algn="ctr">
+            <a:lvl6pPr marL="1559966" indent="0" algn="ctr">
               <a:buNone/>
-              <a:defRPr sz="1386"/>
+              <a:defRPr sz="1092"/>
             </a:lvl6pPr>
-            <a:lvl7pPr marL="2376160" indent="0" algn="ctr">
+            <a:lvl7pPr marL="1871960" indent="0" algn="ctr">
               <a:buNone/>
-              <a:defRPr sz="1386"/>
+              <a:defRPr sz="1092"/>
             </a:lvl7pPr>
-            <a:lvl8pPr marL="2772186" indent="0" algn="ctr">
+            <a:lvl8pPr marL="2183953" indent="0" algn="ctr">
               <a:buNone/>
-              <a:defRPr sz="1386"/>
+              <a:defRPr sz="1092"/>
             </a:lvl8pPr>
-            <a:lvl9pPr marL="3168213" indent="0" algn="ctr">
+            <a:lvl9pPr marL="2495946" indent="0" algn="ctr">
               <a:buNone/>
-              <a:defRPr sz="1386"/>
+              <a:defRPr sz="1092"/>
             </a:lvl9pPr>
           </a:lstStyle>
           <a:p>
@@ -243,7 +243,7 @@
           <a:p>
             <a:fld id="{0C4F21BF-7999-4603-8982-00A319506255}" type="datetimeFigureOut">
               <a:rPr lang="zh-TW" altLang="en-US" smtClean="0"/>
-              <a:t>2026/3/31</a:t>
+              <a:t>2026/5/20</a:t>
             </a:fld>
             <a:endParaRPr lang="zh-TW" altLang="en-US"/>
           </a:p>
@@ -294,7 +294,7 @@
     </p:spTree>
     <p:extLst>
       <p:ext uri="{BB962C8B-B14F-4D97-AF65-F5344CB8AC3E}">
-        <p14:creationId xmlns:p14="http://schemas.microsoft.com/office/powerpoint/2010/main" val="3063796479"/>
+        <p14:creationId xmlns:p14="http://schemas.microsoft.com/office/powerpoint/2010/main" val="560694017"/>
       </p:ext>
     </p:extLst>
   </p:cSld>
@@ -413,7 +413,7 @@
           <a:p>
             <a:fld id="{0C4F21BF-7999-4603-8982-00A319506255}" type="datetimeFigureOut">
               <a:rPr lang="zh-TW" altLang="en-US" smtClean="0"/>
-              <a:t>2026/3/31</a:t>
+              <a:t>2026/5/20</a:t>
             </a:fld>
             <a:endParaRPr lang="zh-TW" altLang="en-US"/>
           </a:p>
@@ -464,7 +464,7 @@
     </p:spTree>
     <p:extLst>
       <p:ext uri="{BB962C8B-B14F-4D97-AF65-F5344CB8AC3E}">
-        <p14:creationId xmlns:p14="http://schemas.microsoft.com/office/powerpoint/2010/main" val="2025252021"/>
+        <p14:creationId xmlns:p14="http://schemas.microsoft.com/office/powerpoint/2010/main" val="1456221688"/>
       </p:ext>
     </p:extLst>
   </p:cSld>
@@ -503,8 +503,8 @@
         </p:nvSpPr>
         <p:spPr>
           <a:xfrm>
-            <a:off x="8724900" y="316272"/>
-            <a:ext cx="2628900" cy="5034236"/>
+            <a:off x="7088981" y="249164"/>
+            <a:ext cx="2135981" cy="3966041"/>
           </a:xfrm>
         </p:spPr>
         <p:txBody>
@@ -531,8 +531,8 @@
         </p:nvSpPr>
         <p:spPr>
           <a:xfrm>
-            <a:off x="838200" y="316272"/>
-            <a:ext cx="7734300" cy="5034236"/>
+            <a:off x="681037" y="249164"/>
+            <a:ext cx="6284119" cy="3966041"/>
           </a:xfrm>
         </p:spPr>
         <p:txBody>
@@ -593,7 +593,7 @@
           <a:p>
             <a:fld id="{0C4F21BF-7999-4603-8982-00A319506255}" type="datetimeFigureOut">
               <a:rPr lang="zh-TW" altLang="en-US" smtClean="0"/>
-              <a:t>2026/3/31</a:t>
+              <a:t>2026/5/20</a:t>
             </a:fld>
             <a:endParaRPr lang="zh-TW" altLang="en-US"/>
           </a:p>
@@ -644,7 +644,7 @@
     </p:spTree>
     <p:extLst>
       <p:ext uri="{BB962C8B-B14F-4D97-AF65-F5344CB8AC3E}">
-        <p14:creationId xmlns:p14="http://schemas.microsoft.com/office/powerpoint/2010/main" val="245731843"/>
+        <p14:creationId xmlns:p14="http://schemas.microsoft.com/office/powerpoint/2010/main" val="2772765496"/>
       </p:ext>
     </p:extLst>
   </p:cSld>
@@ -763,7 +763,7 @@
           <a:p>
             <a:fld id="{0C4F21BF-7999-4603-8982-00A319506255}" type="datetimeFigureOut">
               <a:rPr lang="zh-TW" altLang="en-US" smtClean="0"/>
-              <a:t>2026/3/31</a:t>
+              <a:t>2026/5/20</a:t>
             </a:fld>
             <a:endParaRPr lang="zh-TW" altLang="en-US"/>
           </a:p>
@@ -814,7 +814,7 @@
     </p:spTree>
     <p:extLst>
       <p:ext uri="{BB962C8B-B14F-4D97-AF65-F5344CB8AC3E}">
-        <p14:creationId xmlns:p14="http://schemas.microsoft.com/office/powerpoint/2010/main" val="4061216868"/>
+        <p14:creationId xmlns:p14="http://schemas.microsoft.com/office/powerpoint/2010/main" val="2318225527"/>
       </p:ext>
     </p:extLst>
   </p:cSld>
@@ -853,15 +853,15 @@
         </p:nvSpPr>
         <p:spPr>
           <a:xfrm>
-            <a:off x="831850" y="1480982"/>
-            <a:ext cx="10515600" cy="2471051"/>
+            <a:off x="675878" y="1166738"/>
+            <a:ext cx="8543925" cy="1946729"/>
           </a:xfrm>
         </p:spPr>
         <p:txBody>
           <a:bodyPr anchor="b"/>
           <a:lstStyle>
             <a:lvl1pPr>
-              <a:defRPr sz="5197"/>
+              <a:defRPr sz="4094"/>
             </a:lvl1pPr>
           </a:lstStyle>
           <a:p>
@@ -885,8 +885,8 @@
         </p:nvSpPr>
         <p:spPr>
           <a:xfrm>
-            <a:off x="831850" y="3975410"/>
-            <a:ext cx="10515600" cy="1299468"/>
+            <a:off x="675878" y="3131884"/>
+            <a:ext cx="8543925" cy="1023739"/>
           </a:xfrm>
         </p:spPr>
         <p:txBody>
@@ -894,7 +894,7 @@
           <a:lstStyle>
             <a:lvl1pPr marL="0" indent="0">
               <a:buNone/>
-              <a:defRPr sz="2079">
+              <a:defRPr sz="1638">
                 <a:solidFill>
                   <a:schemeClr val="tx1">
                     <a:tint val="75000"/>
@@ -902,9 +902,9 @@
                 </a:solidFill>
               </a:defRPr>
             </a:lvl1pPr>
-            <a:lvl2pPr marL="396027" indent="0">
+            <a:lvl2pPr marL="311993" indent="0">
               <a:buNone/>
-              <a:defRPr sz="1732">
+              <a:defRPr sz="1365">
                 <a:solidFill>
                   <a:schemeClr val="tx1">
                     <a:tint val="75000"/>
@@ -912,9 +912,9 @@
                 </a:solidFill>
               </a:defRPr>
             </a:lvl2pPr>
-            <a:lvl3pPr marL="792053" indent="0">
+            <a:lvl3pPr marL="623987" indent="0">
               <a:buNone/>
-              <a:defRPr sz="1559">
+              <a:defRPr sz="1228">
                 <a:solidFill>
                   <a:schemeClr val="tx1">
                     <a:tint val="75000"/>
@@ -922,9 +922,9 @@
                 </a:solidFill>
               </a:defRPr>
             </a:lvl3pPr>
-            <a:lvl4pPr marL="1188080" indent="0">
+            <a:lvl4pPr marL="935980" indent="0">
               <a:buNone/>
-              <a:defRPr sz="1386">
+              <a:defRPr sz="1092">
                 <a:solidFill>
                   <a:schemeClr val="tx1">
                     <a:tint val="75000"/>
@@ -932,9 +932,9 @@
                 </a:solidFill>
               </a:defRPr>
             </a:lvl4pPr>
-            <a:lvl5pPr marL="1584107" indent="0">
+            <a:lvl5pPr marL="1247973" indent="0">
               <a:buNone/>
-              <a:defRPr sz="1386">
+              <a:defRPr sz="1092">
                 <a:solidFill>
                   <a:schemeClr val="tx1">
                     <a:tint val="75000"/>
@@ -942,9 +942,9 @@
                 </a:solidFill>
               </a:defRPr>
             </a:lvl5pPr>
-            <a:lvl6pPr marL="1980133" indent="0">
+            <a:lvl6pPr marL="1559966" indent="0">
               <a:buNone/>
-              <a:defRPr sz="1386">
+              <a:defRPr sz="1092">
                 <a:solidFill>
                   <a:schemeClr val="tx1">
                     <a:tint val="75000"/>
@@ -952,9 +952,9 @@
                 </a:solidFill>
               </a:defRPr>
             </a:lvl6pPr>
-            <a:lvl7pPr marL="2376160" indent="0">
+            <a:lvl7pPr marL="1871960" indent="0">
               <a:buNone/>
-              <a:defRPr sz="1386">
+              <a:defRPr sz="1092">
                 <a:solidFill>
                   <a:schemeClr val="tx1">
                     <a:tint val="75000"/>
@@ -962,9 +962,9 @@
                 </a:solidFill>
               </a:defRPr>
             </a:lvl7pPr>
-            <a:lvl8pPr marL="2772186" indent="0">
+            <a:lvl8pPr marL="2183953" indent="0">
               <a:buNone/>
-              <a:defRPr sz="1386">
+              <a:defRPr sz="1092">
                 <a:solidFill>
                   <a:schemeClr val="tx1">
                     <a:tint val="75000"/>
@@ -972,9 +972,9 @@
                 </a:solidFill>
               </a:defRPr>
             </a:lvl8pPr>
-            <a:lvl9pPr marL="3168213" indent="0">
+            <a:lvl9pPr marL="2495946" indent="0">
               <a:buNone/>
-              <a:defRPr sz="1386">
+              <a:defRPr sz="1092">
                 <a:solidFill>
                   <a:schemeClr val="tx1">
                     <a:tint val="75000"/>
@@ -1009,7 +1009,7 @@
           <a:p>
             <a:fld id="{0C4F21BF-7999-4603-8982-00A319506255}" type="datetimeFigureOut">
               <a:rPr lang="zh-TW" altLang="en-US" smtClean="0"/>
-              <a:t>2026/3/31</a:t>
+              <a:t>2026/5/20</a:t>
             </a:fld>
             <a:endParaRPr lang="zh-TW" altLang="en-US"/>
           </a:p>
@@ -1060,7 +1060,7 @@
     </p:spTree>
     <p:extLst>
       <p:ext uri="{BB962C8B-B14F-4D97-AF65-F5344CB8AC3E}">
-        <p14:creationId xmlns:p14="http://schemas.microsoft.com/office/powerpoint/2010/main" val="3638080292"/>
+        <p14:creationId xmlns:p14="http://schemas.microsoft.com/office/powerpoint/2010/main" val="1768681404"/>
       </p:ext>
     </p:extLst>
   </p:cSld>
@@ -1122,8 +1122,8 @@
         </p:nvSpPr>
         <p:spPr>
           <a:xfrm>
-            <a:off x="838200" y="1581363"/>
-            <a:ext cx="5181600" cy="3769145"/>
+            <a:off x="681038" y="1245820"/>
+            <a:ext cx="4210050" cy="2969385"/>
           </a:xfrm>
         </p:spPr>
         <p:txBody>
@@ -1179,8 +1179,8 @@
         </p:nvSpPr>
         <p:spPr>
           <a:xfrm>
-            <a:off x="6172200" y="1581363"/>
-            <a:ext cx="5181600" cy="3769145"/>
+            <a:off x="5014913" y="1245820"/>
+            <a:ext cx="4210050" cy="2969385"/>
           </a:xfrm>
         </p:spPr>
         <p:txBody>
@@ -1241,7 +1241,7 @@
           <a:p>
             <a:fld id="{0C4F21BF-7999-4603-8982-00A319506255}" type="datetimeFigureOut">
               <a:rPr lang="zh-TW" altLang="en-US" smtClean="0"/>
-              <a:t>2026/3/31</a:t>
+              <a:t>2026/5/20</a:t>
             </a:fld>
             <a:endParaRPr lang="zh-TW" altLang="en-US"/>
           </a:p>
@@ -1292,7 +1292,7 @@
     </p:spTree>
     <p:extLst>
       <p:ext uri="{BB962C8B-B14F-4D97-AF65-F5344CB8AC3E}">
-        <p14:creationId xmlns:p14="http://schemas.microsoft.com/office/powerpoint/2010/main" val="1706020070"/>
+        <p14:creationId xmlns:p14="http://schemas.microsoft.com/office/powerpoint/2010/main" val="97499674"/>
       </p:ext>
     </p:extLst>
   </p:cSld>
@@ -1331,8 +1331,8 @@
         </p:nvSpPr>
         <p:spPr>
           <a:xfrm>
-            <a:off x="839788" y="316273"/>
-            <a:ext cx="10515600" cy="1148208"/>
+            <a:off x="682328" y="249164"/>
+            <a:ext cx="8543925" cy="904574"/>
           </a:xfrm>
         </p:spPr>
         <p:txBody>
@@ -1359,8 +1359,8 @@
         </p:nvSpPr>
         <p:spPr>
           <a:xfrm>
-            <a:off x="839789" y="1456229"/>
-            <a:ext cx="5157787" cy="713676"/>
+            <a:off x="682328" y="1147238"/>
+            <a:ext cx="4190702" cy="562244"/>
           </a:xfrm>
         </p:spPr>
         <p:txBody>
@@ -1368,39 +1368,39 @@
           <a:lstStyle>
             <a:lvl1pPr marL="0" indent="0">
               <a:buNone/>
-              <a:defRPr sz="2079" b="1"/>
+              <a:defRPr sz="1638" b="1"/>
             </a:lvl1pPr>
-            <a:lvl2pPr marL="396027" indent="0">
+            <a:lvl2pPr marL="311993" indent="0">
               <a:buNone/>
-              <a:defRPr sz="1732" b="1"/>
+              <a:defRPr sz="1365" b="1"/>
             </a:lvl2pPr>
-            <a:lvl3pPr marL="792053" indent="0">
+            <a:lvl3pPr marL="623987" indent="0">
               <a:buNone/>
-              <a:defRPr sz="1559" b="1"/>
+              <a:defRPr sz="1228" b="1"/>
             </a:lvl3pPr>
-            <a:lvl4pPr marL="1188080" indent="0">
+            <a:lvl4pPr marL="935980" indent="0">
               <a:buNone/>
-              <a:defRPr sz="1386" b="1"/>
+              <a:defRPr sz="1092" b="1"/>
             </a:lvl4pPr>
-            <a:lvl5pPr marL="1584107" indent="0">
+            <a:lvl5pPr marL="1247973" indent="0">
               <a:buNone/>
-              <a:defRPr sz="1386" b="1"/>
+              <a:defRPr sz="1092" b="1"/>
             </a:lvl5pPr>
-            <a:lvl6pPr marL="1980133" indent="0">
+            <a:lvl6pPr marL="1559966" indent="0">
               <a:buNone/>
-              <a:defRPr sz="1386" b="1"/>
+              <a:defRPr sz="1092" b="1"/>
             </a:lvl6pPr>
-            <a:lvl7pPr marL="2376160" indent="0">
+            <a:lvl7pPr marL="1871960" indent="0">
               <a:buNone/>
-              <a:defRPr sz="1386" b="1"/>
+              <a:defRPr sz="1092" b="1"/>
             </a:lvl7pPr>
-            <a:lvl8pPr marL="2772186" indent="0">
+            <a:lvl8pPr marL="2183953" indent="0">
               <a:buNone/>
-              <a:defRPr sz="1386" b="1"/>
+              <a:defRPr sz="1092" b="1"/>
             </a:lvl8pPr>
-            <a:lvl9pPr marL="3168213" indent="0">
+            <a:lvl9pPr marL="2495946" indent="0">
               <a:buNone/>
-              <a:defRPr sz="1386" b="1"/>
+              <a:defRPr sz="1092" b="1"/>
             </a:lvl9pPr>
           </a:lstStyle>
           <a:p>
@@ -1424,8 +1424,8 @@
         </p:nvSpPr>
         <p:spPr>
           <a:xfrm>
-            <a:off x="839789" y="2169905"/>
-            <a:ext cx="5157787" cy="3191604"/>
+            <a:off x="682328" y="1709482"/>
+            <a:ext cx="4190702" cy="2514390"/>
           </a:xfrm>
         </p:spPr>
         <p:txBody>
@@ -1481,8 +1481,8 @@
         </p:nvSpPr>
         <p:spPr>
           <a:xfrm>
-            <a:off x="6172200" y="1456229"/>
-            <a:ext cx="5183188" cy="713676"/>
+            <a:off x="5014913" y="1147238"/>
+            <a:ext cx="4211340" cy="562244"/>
           </a:xfrm>
         </p:spPr>
         <p:txBody>
@@ -1490,39 +1490,39 @@
           <a:lstStyle>
             <a:lvl1pPr marL="0" indent="0">
               <a:buNone/>
-              <a:defRPr sz="2079" b="1"/>
+              <a:defRPr sz="1638" b="1"/>
             </a:lvl1pPr>
-            <a:lvl2pPr marL="396027" indent="0">
+            <a:lvl2pPr marL="311993" indent="0">
               <a:buNone/>
-              <a:defRPr sz="1732" b="1"/>
+              <a:defRPr sz="1365" b="1"/>
             </a:lvl2pPr>
-            <a:lvl3pPr marL="792053" indent="0">
+            <a:lvl3pPr marL="623987" indent="0">
               <a:buNone/>
-              <a:defRPr sz="1559" b="1"/>
+              <a:defRPr sz="1228" b="1"/>
             </a:lvl3pPr>
-            <a:lvl4pPr marL="1188080" indent="0">
+            <a:lvl4pPr marL="935980" indent="0">
               <a:buNone/>
-              <a:defRPr sz="1386" b="1"/>
+              <a:defRPr sz="1092" b="1"/>
             </a:lvl4pPr>
-            <a:lvl5pPr marL="1584107" indent="0">
+            <a:lvl5pPr marL="1247973" indent="0">
               <a:buNone/>
-              <a:defRPr sz="1386" b="1"/>
+              <a:defRPr sz="1092" b="1"/>
             </a:lvl5pPr>
-            <a:lvl6pPr marL="1980133" indent="0">
+            <a:lvl6pPr marL="1559966" indent="0">
               <a:buNone/>
-              <a:defRPr sz="1386" b="1"/>
+              <a:defRPr sz="1092" b="1"/>
             </a:lvl6pPr>
-            <a:lvl7pPr marL="2376160" indent="0">
+            <a:lvl7pPr marL="1871960" indent="0">
               <a:buNone/>
-              <a:defRPr sz="1386" b="1"/>
+              <a:defRPr sz="1092" b="1"/>
             </a:lvl7pPr>
-            <a:lvl8pPr marL="2772186" indent="0">
+            <a:lvl8pPr marL="2183953" indent="0">
               <a:buNone/>
-              <a:defRPr sz="1386" b="1"/>
+              <a:defRPr sz="1092" b="1"/>
             </a:lvl8pPr>
-            <a:lvl9pPr marL="3168213" indent="0">
+            <a:lvl9pPr marL="2495946" indent="0">
               <a:buNone/>
-              <a:defRPr sz="1386" b="1"/>
+              <a:defRPr sz="1092" b="1"/>
             </a:lvl9pPr>
           </a:lstStyle>
           <a:p>
@@ -1546,8 +1546,8 @@
         </p:nvSpPr>
         <p:spPr>
           <a:xfrm>
-            <a:off x="6172200" y="2169905"/>
-            <a:ext cx="5183188" cy="3191604"/>
+            <a:off x="5014913" y="1709482"/>
+            <a:ext cx="4211340" cy="2514390"/>
           </a:xfrm>
         </p:spPr>
         <p:txBody>
@@ -1608,7 +1608,7 @@
           <a:p>
             <a:fld id="{0C4F21BF-7999-4603-8982-00A319506255}" type="datetimeFigureOut">
               <a:rPr lang="zh-TW" altLang="en-US" smtClean="0"/>
-              <a:t>2026/3/31</a:t>
+              <a:t>2026/5/20</a:t>
             </a:fld>
             <a:endParaRPr lang="zh-TW" altLang="en-US"/>
           </a:p>
@@ -1659,7 +1659,7 @@
     </p:spTree>
     <p:extLst>
       <p:ext uri="{BB962C8B-B14F-4D97-AF65-F5344CB8AC3E}">
-        <p14:creationId xmlns:p14="http://schemas.microsoft.com/office/powerpoint/2010/main" val="439526107"/>
+        <p14:creationId xmlns:p14="http://schemas.microsoft.com/office/powerpoint/2010/main" val="2238107180"/>
       </p:ext>
     </p:extLst>
   </p:cSld>
@@ -1726,7 +1726,7 @@
           <a:p>
             <a:fld id="{0C4F21BF-7999-4603-8982-00A319506255}" type="datetimeFigureOut">
               <a:rPr lang="zh-TW" altLang="en-US" smtClean="0"/>
-              <a:t>2026/3/31</a:t>
+              <a:t>2026/5/20</a:t>
             </a:fld>
             <a:endParaRPr lang="zh-TW" altLang="en-US"/>
           </a:p>
@@ -1777,7 +1777,7 @@
     </p:spTree>
     <p:extLst>
       <p:ext uri="{BB962C8B-B14F-4D97-AF65-F5344CB8AC3E}">
-        <p14:creationId xmlns:p14="http://schemas.microsoft.com/office/powerpoint/2010/main" val="2733208356"/>
+        <p14:creationId xmlns:p14="http://schemas.microsoft.com/office/powerpoint/2010/main" val="2192006895"/>
       </p:ext>
     </p:extLst>
   </p:cSld>
@@ -1821,7 +1821,7 @@
           <a:p>
             <a:fld id="{0C4F21BF-7999-4603-8982-00A319506255}" type="datetimeFigureOut">
               <a:rPr lang="zh-TW" altLang="en-US" smtClean="0"/>
-              <a:t>2026/3/31</a:t>
+              <a:t>2026/5/20</a:t>
             </a:fld>
             <a:endParaRPr lang="zh-TW" altLang="en-US"/>
           </a:p>
@@ -1872,7 +1872,7 @@
     </p:spTree>
     <p:extLst>
       <p:ext uri="{BB962C8B-B14F-4D97-AF65-F5344CB8AC3E}">
-        <p14:creationId xmlns:p14="http://schemas.microsoft.com/office/powerpoint/2010/main" val="3067641412"/>
+        <p14:creationId xmlns:p14="http://schemas.microsoft.com/office/powerpoint/2010/main" val="480663982"/>
       </p:ext>
     </p:extLst>
   </p:cSld>
@@ -1911,15 +1911,15 @@
         </p:nvSpPr>
         <p:spPr>
           <a:xfrm>
-            <a:off x="839789" y="396028"/>
-            <a:ext cx="3932237" cy="1386099"/>
+            <a:off x="682328" y="311997"/>
+            <a:ext cx="3194943" cy="1091988"/>
           </a:xfrm>
         </p:spPr>
         <p:txBody>
           <a:bodyPr anchor="b"/>
           <a:lstStyle>
             <a:lvl1pPr>
-              <a:defRPr sz="2772"/>
+              <a:defRPr sz="2184"/>
             </a:lvl1pPr>
           </a:lstStyle>
           <a:p>
@@ -1943,39 +1943,39 @@
         </p:nvSpPr>
         <p:spPr>
           <a:xfrm>
-            <a:off x="5183188" y="855312"/>
-            <a:ext cx="6172200" cy="4221552"/>
+            <a:off x="4211340" y="673826"/>
+            <a:ext cx="5014913" cy="3325798"/>
           </a:xfrm>
         </p:spPr>
         <p:txBody>
           <a:bodyPr/>
           <a:lstStyle>
             <a:lvl1pPr>
-              <a:defRPr sz="2772"/>
+              <a:defRPr sz="2184"/>
             </a:lvl1pPr>
             <a:lvl2pPr>
-              <a:defRPr sz="2425"/>
+              <a:defRPr sz="1911"/>
             </a:lvl2pPr>
             <a:lvl3pPr>
-              <a:defRPr sz="2079"/>
+              <a:defRPr sz="1638"/>
             </a:lvl3pPr>
             <a:lvl4pPr>
-              <a:defRPr sz="1732"/>
+              <a:defRPr sz="1365"/>
             </a:lvl4pPr>
             <a:lvl5pPr>
-              <a:defRPr sz="1732"/>
+              <a:defRPr sz="1365"/>
             </a:lvl5pPr>
             <a:lvl6pPr>
-              <a:defRPr sz="1732"/>
+              <a:defRPr sz="1365"/>
             </a:lvl6pPr>
             <a:lvl7pPr>
-              <a:defRPr sz="1732"/>
+              <a:defRPr sz="1365"/>
             </a:lvl7pPr>
             <a:lvl8pPr>
-              <a:defRPr sz="1732"/>
+              <a:defRPr sz="1365"/>
             </a:lvl8pPr>
             <a:lvl9pPr>
-              <a:defRPr sz="1732"/>
+              <a:defRPr sz="1365"/>
             </a:lvl9pPr>
           </a:lstStyle>
           <a:p>
@@ -2028,8 +2028,8 @@
         </p:nvSpPr>
         <p:spPr>
           <a:xfrm>
-            <a:off x="839789" y="1782127"/>
-            <a:ext cx="3932237" cy="3301612"/>
+            <a:off x="682328" y="1403985"/>
+            <a:ext cx="3194943" cy="2601056"/>
           </a:xfrm>
         </p:spPr>
         <p:txBody>
@@ -2037,39 +2037,39 @@
           <a:lstStyle>
             <a:lvl1pPr marL="0" indent="0">
               <a:buNone/>
-              <a:defRPr sz="1386"/>
+              <a:defRPr sz="1092"/>
             </a:lvl1pPr>
-            <a:lvl2pPr marL="396027" indent="0">
+            <a:lvl2pPr marL="311993" indent="0">
               <a:buNone/>
-              <a:defRPr sz="1213"/>
+              <a:defRPr sz="955"/>
             </a:lvl2pPr>
-            <a:lvl3pPr marL="792053" indent="0">
+            <a:lvl3pPr marL="623987" indent="0">
               <a:buNone/>
-              <a:defRPr sz="1039"/>
+              <a:defRPr sz="819"/>
             </a:lvl3pPr>
-            <a:lvl4pPr marL="1188080" indent="0">
+            <a:lvl4pPr marL="935980" indent="0">
               <a:buNone/>
-              <a:defRPr sz="866"/>
+              <a:defRPr sz="682"/>
             </a:lvl4pPr>
-            <a:lvl5pPr marL="1584107" indent="0">
+            <a:lvl5pPr marL="1247973" indent="0">
               <a:buNone/>
-              <a:defRPr sz="866"/>
+              <a:defRPr sz="682"/>
             </a:lvl5pPr>
-            <a:lvl6pPr marL="1980133" indent="0">
+            <a:lvl6pPr marL="1559966" indent="0">
               <a:buNone/>
-              <a:defRPr sz="866"/>
+              <a:defRPr sz="682"/>
             </a:lvl6pPr>
-            <a:lvl7pPr marL="2376160" indent="0">
+            <a:lvl7pPr marL="1871960" indent="0">
               <a:buNone/>
-              <a:defRPr sz="866"/>
+              <a:defRPr sz="682"/>
             </a:lvl7pPr>
-            <a:lvl8pPr marL="2772186" indent="0">
+            <a:lvl8pPr marL="2183953" indent="0">
               <a:buNone/>
-              <a:defRPr sz="866"/>
+              <a:defRPr sz="682"/>
             </a:lvl8pPr>
-            <a:lvl9pPr marL="3168213" indent="0">
+            <a:lvl9pPr marL="2495946" indent="0">
               <a:buNone/>
-              <a:defRPr sz="866"/>
+              <a:defRPr sz="682"/>
             </a:lvl9pPr>
           </a:lstStyle>
           <a:p>
@@ -2098,7 +2098,7 @@
           <a:p>
             <a:fld id="{0C4F21BF-7999-4603-8982-00A319506255}" type="datetimeFigureOut">
               <a:rPr lang="zh-TW" altLang="en-US" smtClean="0"/>
-              <a:t>2026/3/31</a:t>
+              <a:t>2026/5/20</a:t>
             </a:fld>
             <a:endParaRPr lang="zh-TW" altLang="en-US"/>
           </a:p>
@@ -2149,7 +2149,7 @@
     </p:spTree>
     <p:extLst>
       <p:ext uri="{BB962C8B-B14F-4D97-AF65-F5344CB8AC3E}">
-        <p14:creationId xmlns:p14="http://schemas.microsoft.com/office/powerpoint/2010/main" val="3440635661"/>
+        <p14:creationId xmlns:p14="http://schemas.microsoft.com/office/powerpoint/2010/main" val="2223290023"/>
       </p:ext>
     </p:extLst>
   </p:cSld>
@@ -2188,15 +2188,15 @@
         </p:nvSpPr>
         <p:spPr>
           <a:xfrm>
-            <a:off x="839789" y="396028"/>
-            <a:ext cx="3932237" cy="1386099"/>
+            <a:off x="682328" y="311997"/>
+            <a:ext cx="3194943" cy="1091988"/>
           </a:xfrm>
         </p:spPr>
         <p:txBody>
           <a:bodyPr anchor="b"/>
           <a:lstStyle>
             <a:lvl1pPr>
-              <a:defRPr sz="2772"/>
+              <a:defRPr sz="2184"/>
             </a:lvl1pPr>
           </a:lstStyle>
           <a:p>
@@ -2220,8 +2220,8 @@
         </p:nvSpPr>
         <p:spPr>
           <a:xfrm>
-            <a:off x="5183188" y="855312"/>
-            <a:ext cx="6172200" cy="4221552"/>
+            <a:off x="4211340" y="673826"/>
+            <a:ext cx="5014913" cy="3325798"/>
           </a:xfrm>
         </p:spPr>
         <p:txBody>
@@ -2229,39 +2229,39 @@
           <a:lstStyle>
             <a:lvl1pPr marL="0" indent="0">
               <a:buNone/>
-              <a:defRPr sz="2772"/>
+              <a:defRPr sz="2184"/>
             </a:lvl1pPr>
-            <a:lvl2pPr marL="396027" indent="0">
+            <a:lvl2pPr marL="311993" indent="0">
               <a:buNone/>
-              <a:defRPr sz="2425"/>
+              <a:defRPr sz="1911"/>
             </a:lvl2pPr>
-            <a:lvl3pPr marL="792053" indent="0">
+            <a:lvl3pPr marL="623987" indent="0">
               <a:buNone/>
-              <a:defRPr sz="2079"/>
+              <a:defRPr sz="1638"/>
             </a:lvl3pPr>
-            <a:lvl4pPr marL="1188080" indent="0">
+            <a:lvl4pPr marL="935980" indent="0">
               <a:buNone/>
-              <a:defRPr sz="1732"/>
+              <a:defRPr sz="1365"/>
             </a:lvl4pPr>
-            <a:lvl5pPr marL="1584107" indent="0">
+            <a:lvl5pPr marL="1247973" indent="0">
               <a:buNone/>
-              <a:defRPr sz="1732"/>
+              <a:defRPr sz="1365"/>
             </a:lvl5pPr>
-            <a:lvl6pPr marL="1980133" indent="0">
+            <a:lvl6pPr marL="1559966" indent="0">
               <a:buNone/>
-              <a:defRPr sz="1732"/>
+              <a:defRPr sz="1365"/>
             </a:lvl6pPr>
-            <a:lvl7pPr marL="2376160" indent="0">
+            <a:lvl7pPr marL="1871960" indent="0">
               <a:buNone/>
-              <a:defRPr sz="1732"/>
+              <a:defRPr sz="1365"/>
             </a:lvl7pPr>
-            <a:lvl8pPr marL="2772186" indent="0">
+            <a:lvl8pPr marL="2183953" indent="0">
               <a:buNone/>
-              <a:defRPr sz="1732"/>
+              <a:defRPr sz="1365"/>
             </a:lvl8pPr>
-            <a:lvl9pPr marL="3168213" indent="0">
+            <a:lvl9pPr marL="2495946" indent="0">
               <a:buNone/>
-              <a:defRPr sz="1732"/>
+              <a:defRPr sz="1365"/>
             </a:lvl9pPr>
           </a:lstStyle>
           <a:p>
@@ -2285,8 +2285,8 @@
         </p:nvSpPr>
         <p:spPr>
           <a:xfrm>
-            <a:off x="839789" y="1782127"/>
-            <a:ext cx="3932237" cy="3301612"/>
+            <a:off x="682328" y="1403985"/>
+            <a:ext cx="3194943" cy="2601056"/>
           </a:xfrm>
         </p:spPr>
         <p:txBody>
@@ -2294,39 +2294,39 @@
           <a:lstStyle>
             <a:lvl1pPr marL="0" indent="0">
               <a:buNone/>
-              <a:defRPr sz="1386"/>
+              <a:defRPr sz="1092"/>
             </a:lvl1pPr>
-            <a:lvl2pPr marL="396027" indent="0">
+            <a:lvl2pPr marL="311993" indent="0">
               <a:buNone/>
-              <a:defRPr sz="1213"/>
+              <a:defRPr sz="955"/>
             </a:lvl2pPr>
-            <a:lvl3pPr marL="792053" indent="0">
+            <a:lvl3pPr marL="623987" indent="0">
               <a:buNone/>
-              <a:defRPr sz="1039"/>
+              <a:defRPr sz="819"/>
             </a:lvl3pPr>
-            <a:lvl4pPr marL="1188080" indent="0">
+            <a:lvl4pPr marL="935980" indent="0">
               <a:buNone/>
-              <a:defRPr sz="866"/>
+              <a:defRPr sz="682"/>
             </a:lvl4pPr>
-            <a:lvl5pPr marL="1584107" indent="0">
+            <a:lvl5pPr marL="1247973" indent="0">
               <a:buNone/>
-              <a:defRPr sz="866"/>
+              <a:defRPr sz="682"/>
             </a:lvl5pPr>
-            <a:lvl6pPr marL="1980133" indent="0">
+            <a:lvl6pPr marL="1559966" indent="0">
               <a:buNone/>
-              <a:defRPr sz="866"/>
+              <a:defRPr sz="682"/>
             </a:lvl6pPr>
-            <a:lvl7pPr marL="2376160" indent="0">
+            <a:lvl7pPr marL="1871960" indent="0">
               <a:buNone/>
-              <a:defRPr sz="866"/>
+              <a:defRPr sz="682"/>
             </a:lvl7pPr>
-            <a:lvl8pPr marL="2772186" indent="0">
+            <a:lvl8pPr marL="2183953" indent="0">
               <a:buNone/>
-              <a:defRPr sz="866"/>
+              <a:defRPr sz="682"/>
             </a:lvl8pPr>
-            <a:lvl9pPr marL="3168213" indent="0">
+            <a:lvl9pPr marL="2495946" indent="0">
               <a:buNone/>
-              <a:defRPr sz="866"/>
+              <a:defRPr sz="682"/>
             </a:lvl9pPr>
           </a:lstStyle>
           <a:p>
@@ -2355,7 +2355,7 @@
           <a:p>
             <a:fld id="{0C4F21BF-7999-4603-8982-00A319506255}" type="datetimeFigureOut">
               <a:rPr lang="zh-TW" altLang="en-US" smtClean="0"/>
-              <a:t>2026/3/31</a:t>
+              <a:t>2026/5/20</a:t>
             </a:fld>
             <a:endParaRPr lang="zh-TW" altLang="en-US"/>
           </a:p>
@@ -2406,7 +2406,7 @@
     </p:spTree>
     <p:extLst>
       <p:ext uri="{BB962C8B-B14F-4D97-AF65-F5344CB8AC3E}">
-        <p14:creationId xmlns:p14="http://schemas.microsoft.com/office/powerpoint/2010/main" val="1157673530"/>
+        <p14:creationId xmlns:p14="http://schemas.microsoft.com/office/powerpoint/2010/main" val="670388233"/>
       </p:ext>
     </p:extLst>
   </p:cSld>
@@ -2450,8 +2450,8 @@
         </p:nvSpPr>
         <p:spPr>
           <a:xfrm>
-            <a:off x="838200" y="316273"/>
-            <a:ext cx="10515600" cy="1148208"/>
+            <a:off x="681038" y="249164"/>
+            <a:ext cx="8543925" cy="904574"/>
           </a:xfrm>
           <a:prstGeom prst="rect">
             <a:avLst/>
@@ -2483,8 +2483,8 @@
         </p:nvSpPr>
         <p:spPr>
           <a:xfrm>
-            <a:off x="838200" y="1581363"/>
-            <a:ext cx="10515600" cy="3769145"/>
+            <a:off x="681038" y="1245820"/>
+            <a:ext cx="8543925" cy="2969385"/>
           </a:xfrm>
           <a:prstGeom prst="rect">
             <a:avLst/>
@@ -2545,8 +2545,8 @@
         </p:nvSpPr>
         <p:spPr>
           <a:xfrm>
-            <a:off x="838200" y="5505894"/>
-            <a:ext cx="2743200" cy="316273"/>
+            <a:off x="681038" y="4337621"/>
+            <a:ext cx="2228850" cy="249164"/>
           </a:xfrm>
           <a:prstGeom prst="rect">
             <a:avLst/>
@@ -2556,7 +2556,7 @@
           <a:bodyPr vert="horz" lIns="91440" tIns="45720" rIns="91440" bIns="45720" rtlCol="0" anchor="ctr"/>
           <a:lstStyle>
             <a:lvl1pPr algn="l">
-              <a:defRPr sz="1039">
+              <a:defRPr sz="819">
                 <a:solidFill>
                   <a:schemeClr val="tx1">
                     <a:tint val="75000"/>
@@ -2568,7 +2568,7 @@
           <a:p>
             <a:fld id="{0C4F21BF-7999-4603-8982-00A319506255}" type="datetimeFigureOut">
               <a:rPr lang="zh-TW" altLang="en-US" smtClean="0"/>
-              <a:t>2026/3/31</a:t>
+              <a:t>2026/5/20</a:t>
             </a:fld>
             <a:endParaRPr lang="zh-TW" altLang="en-US"/>
           </a:p>
@@ -2586,8 +2586,8 @@
         </p:nvSpPr>
         <p:spPr>
           <a:xfrm>
-            <a:off x="4038600" y="5505894"/>
-            <a:ext cx="4114800" cy="316273"/>
+            <a:off x="3281363" y="4337621"/>
+            <a:ext cx="3343275" cy="249164"/>
           </a:xfrm>
           <a:prstGeom prst="rect">
             <a:avLst/>
@@ -2597,7 +2597,7 @@
           <a:bodyPr vert="horz" lIns="91440" tIns="45720" rIns="91440" bIns="45720" rtlCol="0" anchor="ctr"/>
           <a:lstStyle>
             <a:lvl1pPr algn="ctr">
-              <a:defRPr sz="1039">
+              <a:defRPr sz="819">
                 <a:solidFill>
                   <a:schemeClr val="tx1">
                     <a:tint val="75000"/>
@@ -2623,8 +2623,8 @@
         </p:nvSpPr>
         <p:spPr>
           <a:xfrm>
-            <a:off x="8610600" y="5505894"/>
-            <a:ext cx="2743200" cy="316273"/>
+            <a:off x="6996113" y="4337621"/>
+            <a:ext cx="2228850" cy="249164"/>
           </a:xfrm>
           <a:prstGeom prst="rect">
             <a:avLst/>
@@ -2634,7 +2634,7 @@
           <a:bodyPr vert="horz" lIns="91440" tIns="45720" rIns="91440" bIns="45720" rtlCol="0" anchor="ctr"/>
           <a:lstStyle>
             <a:lvl1pPr algn="r">
-              <a:defRPr sz="1039">
+              <a:defRPr sz="819">
                 <a:solidFill>
                   <a:schemeClr val="tx1">
                     <a:tint val="75000"/>
@@ -2655,27 +2655,27 @@
     </p:spTree>
     <p:extLst>
       <p:ext uri="{BB962C8B-B14F-4D97-AF65-F5344CB8AC3E}">
-        <p14:creationId xmlns:p14="http://schemas.microsoft.com/office/powerpoint/2010/main" val="3009162855"/>
+        <p14:creationId xmlns:p14="http://schemas.microsoft.com/office/powerpoint/2010/main" val="3153774477"/>
       </p:ext>
     </p:extLst>
   </p:cSld>
   <p:clrMap bg1="lt1" tx1="dk1" bg2="lt2" tx2="dk2" accent1="accent1" accent2="accent2" accent3="accent3" accent4="accent4" accent5="accent5" accent6="accent6" hlink="hlink" folHlink="folHlink"/>
   <p:sldLayoutIdLst>
-    <p:sldLayoutId id="2147483661" r:id="rId1"/>
-    <p:sldLayoutId id="2147483662" r:id="rId2"/>
-    <p:sldLayoutId id="2147483663" r:id="rId3"/>
-    <p:sldLayoutId id="2147483664" r:id="rId4"/>
-    <p:sldLayoutId id="2147483665" r:id="rId5"/>
-    <p:sldLayoutId id="2147483666" r:id="rId6"/>
-    <p:sldLayoutId id="2147483667" r:id="rId7"/>
-    <p:sldLayoutId id="2147483668" r:id="rId8"/>
-    <p:sldLayoutId id="2147483669" r:id="rId9"/>
-    <p:sldLayoutId id="2147483670" r:id="rId10"/>
-    <p:sldLayoutId id="2147483671" r:id="rId11"/>
+    <p:sldLayoutId id="2147483697" r:id="rId1"/>
+    <p:sldLayoutId id="2147483698" r:id="rId2"/>
+    <p:sldLayoutId id="2147483699" r:id="rId3"/>
+    <p:sldLayoutId id="2147483700" r:id="rId4"/>
+    <p:sldLayoutId id="2147483701" r:id="rId5"/>
+    <p:sldLayoutId id="2147483702" r:id="rId6"/>
+    <p:sldLayoutId id="2147483703" r:id="rId7"/>
+    <p:sldLayoutId id="2147483704" r:id="rId8"/>
+    <p:sldLayoutId id="2147483705" r:id="rId9"/>
+    <p:sldLayoutId id="2147483706" r:id="rId10"/>
+    <p:sldLayoutId id="2147483707" r:id="rId11"/>
   </p:sldLayoutIdLst>
   <p:txStyles>
     <p:titleStyle>
-      <a:lvl1pPr algn="l" defTabSz="792053" rtl="0" eaLnBrk="1" latinLnBrk="0" hangingPunct="1">
+      <a:lvl1pPr algn="l" defTabSz="623987" rtl="0" eaLnBrk="1" latinLnBrk="0" hangingPunct="1">
         <a:lnSpc>
           <a:spcPct val="90000"/>
         </a:lnSpc>
@@ -2683,7 +2683,7 @@
           <a:spcPct val="0"/>
         </a:spcBef>
         <a:buNone/>
-        <a:defRPr sz="3811" kern="1200">
+        <a:defRPr sz="3003" kern="1200">
           <a:solidFill>
             <a:schemeClr val="tx1"/>
           </a:solidFill>
@@ -2694,16 +2694,16 @@
       </a:lvl1pPr>
     </p:titleStyle>
     <p:bodyStyle>
-      <a:lvl1pPr marL="198013" indent="-198013" algn="l" defTabSz="792053" rtl="0" eaLnBrk="1" latinLnBrk="0" hangingPunct="1">
+      <a:lvl1pPr marL="155997" indent="-155997" algn="l" defTabSz="623987" rtl="0" eaLnBrk="1" latinLnBrk="0" hangingPunct="1">
         <a:lnSpc>
           <a:spcPct val="90000"/>
         </a:lnSpc>
         <a:spcBef>
-          <a:spcPts val="866"/>
+          <a:spcPts val="682"/>
         </a:spcBef>
         <a:buFont typeface="Arial" panose="020B0604020202020204" pitchFamily="34" charset="0"/>
         <a:buChar char="•"/>
-        <a:defRPr sz="2425" kern="1200">
+        <a:defRPr sz="1911" kern="1200">
           <a:solidFill>
             <a:schemeClr val="tx1"/>
           </a:solidFill>
@@ -2712,16 +2712,16 @@
           <a:cs typeface="+mn-cs"/>
         </a:defRPr>
       </a:lvl1pPr>
-      <a:lvl2pPr marL="594040" indent="-198013" algn="l" defTabSz="792053" rtl="0" eaLnBrk="1" latinLnBrk="0" hangingPunct="1">
+      <a:lvl2pPr marL="467990" indent="-155997" algn="l" defTabSz="623987" rtl="0" eaLnBrk="1" latinLnBrk="0" hangingPunct="1">
         <a:lnSpc>
           <a:spcPct val="90000"/>
         </a:lnSpc>
         <a:spcBef>
-          <a:spcPts val="433"/>
+          <a:spcPts val="341"/>
         </a:spcBef>
         <a:buFont typeface="Arial" panose="020B0604020202020204" pitchFamily="34" charset="0"/>
         <a:buChar char="•"/>
-        <a:defRPr sz="2079" kern="1200">
+        <a:defRPr sz="1638" kern="1200">
           <a:solidFill>
             <a:schemeClr val="tx1"/>
           </a:solidFill>
@@ -2730,16 +2730,16 @@
           <a:cs typeface="+mn-cs"/>
         </a:defRPr>
       </a:lvl2pPr>
-      <a:lvl3pPr marL="990067" indent="-198013" algn="l" defTabSz="792053" rtl="0" eaLnBrk="1" latinLnBrk="0" hangingPunct="1">
+      <a:lvl3pPr marL="779983" indent="-155997" algn="l" defTabSz="623987" rtl="0" eaLnBrk="1" latinLnBrk="0" hangingPunct="1">
         <a:lnSpc>
           <a:spcPct val="90000"/>
         </a:lnSpc>
         <a:spcBef>
-          <a:spcPts val="433"/>
+          <a:spcPts val="341"/>
         </a:spcBef>
         <a:buFont typeface="Arial" panose="020B0604020202020204" pitchFamily="34" charset="0"/>
         <a:buChar char="•"/>
-        <a:defRPr sz="1732" kern="1200">
+        <a:defRPr sz="1365" kern="1200">
           <a:solidFill>
             <a:schemeClr val="tx1"/>
           </a:solidFill>
@@ -2748,16 +2748,16 @@
           <a:cs typeface="+mn-cs"/>
         </a:defRPr>
       </a:lvl3pPr>
-      <a:lvl4pPr marL="1386093" indent="-198013" algn="l" defTabSz="792053" rtl="0" eaLnBrk="1" latinLnBrk="0" hangingPunct="1">
+      <a:lvl4pPr marL="1091976" indent="-155997" algn="l" defTabSz="623987" rtl="0" eaLnBrk="1" latinLnBrk="0" hangingPunct="1">
         <a:lnSpc>
           <a:spcPct val="90000"/>
         </a:lnSpc>
         <a:spcBef>
-          <a:spcPts val="433"/>
+          <a:spcPts val="341"/>
         </a:spcBef>
         <a:buFont typeface="Arial" panose="020B0604020202020204" pitchFamily="34" charset="0"/>
         <a:buChar char="•"/>
-        <a:defRPr sz="1559" kern="1200">
+        <a:defRPr sz="1228" kern="1200">
           <a:solidFill>
             <a:schemeClr val="tx1"/>
           </a:solidFill>
@@ -2766,16 +2766,16 @@
           <a:cs typeface="+mn-cs"/>
         </a:defRPr>
       </a:lvl4pPr>
-      <a:lvl5pPr marL="1782120" indent="-198013" algn="l" defTabSz="792053" rtl="0" eaLnBrk="1" latinLnBrk="0" hangingPunct="1">
+      <a:lvl5pPr marL="1403970" indent="-155997" algn="l" defTabSz="623987" rtl="0" eaLnBrk="1" latinLnBrk="0" hangingPunct="1">
         <a:lnSpc>
           <a:spcPct val="90000"/>
         </a:lnSpc>
         <a:spcBef>
-          <a:spcPts val="433"/>
+          <a:spcPts val="341"/>
         </a:spcBef>
         <a:buFont typeface="Arial" panose="020B0604020202020204" pitchFamily="34" charset="0"/>
         <a:buChar char="•"/>
-        <a:defRPr sz="1559" kern="1200">
+        <a:defRPr sz="1228" kern="1200">
           <a:solidFill>
             <a:schemeClr val="tx1"/>
           </a:solidFill>
@@ -2784,16 +2784,16 @@
           <a:cs typeface="+mn-cs"/>
         </a:defRPr>
       </a:lvl5pPr>
-      <a:lvl6pPr marL="2178147" indent="-198013" algn="l" defTabSz="792053" rtl="0" eaLnBrk="1" latinLnBrk="0" hangingPunct="1">
+      <a:lvl6pPr marL="1715963" indent="-155997" algn="l" defTabSz="623987" rtl="0" eaLnBrk="1" latinLnBrk="0" hangingPunct="1">
         <a:lnSpc>
           <a:spcPct val="90000"/>
         </a:lnSpc>
         <a:spcBef>
-          <a:spcPts val="433"/>
+          <a:spcPts val="341"/>
         </a:spcBef>
         <a:buFont typeface="Arial" panose="020B0604020202020204" pitchFamily="34" charset="0"/>
         <a:buChar char="•"/>
-        <a:defRPr sz="1559" kern="1200">
+        <a:defRPr sz="1228" kern="1200">
           <a:solidFill>
             <a:schemeClr val="tx1"/>
           </a:solidFill>
@@ -2802,16 +2802,16 @@
           <a:cs typeface="+mn-cs"/>
         </a:defRPr>
       </a:lvl6pPr>
-      <a:lvl7pPr marL="2574173" indent="-198013" algn="l" defTabSz="792053" rtl="0" eaLnBrk="1" latinLnBrk="0" hangingPunct="1">
+      <a:lvl7pPr marL="2027956" indent="-155997" algn="l" defTabSz="623987" rtl="0" eaLnBrk="1" latinLnBrk="0" hangingPunct="1">
         <a:lnSpc>
           <a:spcPct val="90000"/>
         </a:lnSpc>
         <a:spcBef>
-          <a:spcPts val="433"/>
+          <a:spcPts val="341"/>
         </a:spcBef>
         <a:buFont typeface="Arial" panose="020B0604020202020204" pitchFamily="34" charset="0"/>
         <a:buChar char="•"/>
-        <a:defRPr sz="1559" kern="1200">
+        <a:defRPr sz="1228" kern="1200">
           <a:solidFill>
             <a:schemeClr val="tx1"/>
           </a:solidFill>
@@ -2820,16 +2820,16 @@
           <a:cs typeface="+mn-cs"/>
         </a:defRPr>
       </a:lvl7pPr>
-      <a:lvl8pPr marL="2970200" indent="-198013" algn="l" defTabSz="792053" rtl="0" eaLnBrk="1" latinLnBrk="0" hangingPunct="1">
+      <a:lvl8pPr marL="2339950" indent="-155997" algn="l" defTabSz="623987" rtl="0" eaLnBrk="1" latinLnBrk="0" hangingPunct="1">
         <a:lnSpc>
           <a:spcPct val="90000"/>
         </a:lnSpc>
         <a:spcBef>
-          <a:spcPts val="433"/>
+          <a:spcPts val="341"/>
         </a:spcBef>
         <a:buFont typeface="Arial" panose="020B0604020202020204" pitchFamily="34" charset="0"/>
         <a:buChar char="•"/>
-        <a:defRPr sz="1559" kern="1200">
+        <a:defRPr sz="1228" kern="1200">
           <a:solidFill>
             <a:schemeClr val="tx1"/>
           </a:solidFill>
@@ -2838,16 +2838,16 @@
           <a:cs typeface="+mn-cs"/>
         </a:defRPr>
       </a:lvl8pPr>
-      <a:lvl9pPr marL="3366226" indent="-198013" algn="l" defTabSz="792053" rtl="0" eaLnBrk="1" latinLnBrk="0" hangingPunct="1">
+      <a:lvl9pPr marL="2651943" indent="-155997" algn="l" defTabSz="623987" rtl="0" eaLnBrk="1" latinLnBrk="0" hangingPunct="1">
         <a:lnSpc>
           <a:spcPct val="90000"/>
         </a:lnSpc>
         <a:spcBef>
-          <a:spcPts val="433"/>
+          <a:spcPts val="341"/>
         </a:spcBef>
         <a:buFont typeface="Arial" panose="020B0604020202020204" pitchFamily="34" charset="0"/>
         <a:buChar char="•"/>
-        <a:defRPr sz="1559" kern="1200">
+        <a:defRPr sz="1228" kern="1200">
           <a:solidFill>
             <a:schemeClr val="tx1"/>
           </a:solidFill>
@@ -2861,8 +2861,8 @@
       <a:defPPr>
         <a:defRPr lang="en-US"/>
       </a:defPPr>
-      <a:lvl1pPr marL="0" algn="l" defTabSz="792053" rtl="0" eaLnBrk="1" latinLnBrk="0" hangingPunct="1">
-        <a:defRPr sz="1559" kern="1200">
+      <a:lvl1pPr marL="0" algn="l" defTabSz="623987" rtl="0" eaLnBrk="1" latinLnBrk="0" hangingPunct="1">
+        <a:defRPr sz="1228" kern="1200">
           <a:solidFill>
             <a:schemeClr val="tx1"/>
           </a:solidFill>
@@ -2871,8 +2871,8 @@
           <a:cs typeface="+mn-cs"/>
         </a:defRPr>
       </a:lvl1pPr>
-      <a:lvl2pPr marL="396027" algn="l" defTabSz="792053" rtl="0" eaLnBrk="1" latinLnBrk="0" hangingPunct="1">
-        <a:defRPr sz="1559" kern="1200">
+      <a:lvl2pPr marL="311993" algn="l" defTabSz="623987" rtl="0" eaLnBrk="1" latinLnBrk="0" hangingPunct="1">
+        <a:defRPr sz="1228" kern="1200">
           <a:solidFill>
             <a:schemeClr val="tx1"/>
           </a:solidFill>
@@ -2881,8 +2881,8 @@
           <a:cs typeface="+mn-cs"/>
         </a:defRPr>
       </a:lvl2pPr>
-      <a:lvl3pPr marL="792053" algn="l" defTabSz="792053" rtl="0" eaLnBrk="1" latinLnBrk="0" hangingPunct="1">
-        <a:defRPr sz="1559" kern="1200">
+      <a:lvl3pPr marL="623987" algn="l" defTabSz="623987" rtl="0" eaLnBrk="1" latinLnBrk="0" hangingPunct="1">
+        <a:defRPr sz="1228" kern="1200">
           <a:solidFill>
             <a:schemeClr val="tx1"/>
           </a:solidFill>
@@ -2891,8 +2891,8 @@
           <a:cs typeface="+mn-cs"/>
         </a:defRPr>
       </a:lvl3pPr>
-      <a:lvl4pPr marL="1188080" algn="l" defTabSz="792053" rtl="0" eaLnBrk="1" latinLnBrk="0" hangingPunct="1">
-        <a:defRPr sz="1559" kern="1200">
+      <a:lvl4pPr marL="935980" algn="l" defTabSz="623987" rtl="0" eaLnBrk="1" latinLnBrk="0" hangingPunct="1">
+        <a:defRPr sz="1228" kern="1200">
           <a:solidFill>
             <a:schemeClr val="tx1"/>
           </a:solidFill>
@@ -2901,8 +2901,8 @@
           <a:cs typeface="+mn-cs"/>
         </a:defRPr>
       </a:lvl4pPr>
-      <a:lvl5pPr marL="1584107" algn="l" defTabSz="792053" rtl="0" eaLnBrk="1" latinLnBrk="0" hangingPunct="1">
-        <a:defRPr sz="1559" kern="1200">
+      <a:lvl5pPr marL="1247973" algn="l" defTabSz="623987" rtl="0" eaLnBrk="1" latinLnBrk="0" hangingPunct="1">
+        <a:defRPr sz="1228" kern="1200">
           <a:solidFill>
             <a:schemeClr val="tx1"/>
           </a:solidFill>
@@ -2911,8 +2911,8 @@
           <a:cs typeface="+mn-cs"/>
         </a:defRPr>
       </a:lvl5pPr>
-      <a:lvl6pPr marL="1980133" algn="l" defTabSz="792053" rtl="0" eaLnBrk="1" latinLnBrk="0" hangingPunct="1">
-        <a:defRPr sz="1559" kern="1200">
+      <a:lvl6pPr marL="1559966" algn="l" defTabSz="623987" rtl="0" eaLnBrk="1" latinLnBrk="0" hangingPunct="1">
+        <a:defRPr sz="1228" kern="1200">
           <a:solidFill>
             <a:schemeClr val="tx1"/>
           </a:solidFill>
@@ -2921,8 +2921,8 @@
           <a:cs typeface="+mn-cs"/>
         </a:defRPr>
       </a:lvl6pPr>
-      <a:lvl7pPr marL="2376160" algn="l" defTabSz="792053" rtl="0" eaLnBrk="1" latinLnBrk="0" hangingPunct="1">
-        <a:defRPr sz="1559" kern="1200">
+      <a:lvl7pPr marL="1871960" algn="l" defTabSz="623987" rtl="0" eaLnBrk="1" latinLnBrk="0" hangingPunct="1">
+        <a:defRPr sz="1228" kern="1200">
           <a:solidFill>
             <a:schemeClr val="tx1"/>
           </a:solidFill>
@@ -2931,8 +2931,8 @@
           <a:cs typeface="+mn-cs"/>
         </a:defRPr>
       </a:lvl7pPr>
-      <a:lvl8pPr marL="2772186" algn="l" defTabSz="792053" rtl="0" eaLnBrk="1" latinLnBrk="0" hangingPunct="1">
-        <a:defRPr sz="1559" kern="1200">
+      <a:lvl8pPr marL="2183953" algn="l" defTabSz="623987" rtl="0" eaLnBrk="1" latinLnBrk="0" hangingPunct="1">
+        <a:defRPr sz="1228" kern="1200">
           <a:solidFill>
             <a:schemeClr val="tx1"/>
           </a:solidFill>
@@ -2941,8 +2941,8 @@
           <a:cs typeface="+mn-cs"/>
         </a:defRPr>
       </a:lvl8pPr>
-      <a:lvl9pPr marL="3168213" algn="l" defTabSz="792053" rtl="0" eaLnBrk="1" latinLnBrk="0" hangingPunct="1">
-        <a:defRPr sz="1559" kern="1200">
+      <a:lvl9pPr marL="2495946" algn="l" defTabSz="623987" rtl="0" eaLnBrk="1" latinLnBrk="0" hangingPunct="1">
+        <a:defRPr sz="1228" kern="1200">
           <a:solidFill>
             <a:schemeClr val="tx1"/>
           </a:solidFill>
@@ -2973,69 +2973,12 @@
           <a:chExt cx="0" cy="0"/>
         </a:xfrm>
       </p:grpSpPr>
-      <p:sp>
-        <p:nvSpPr>
-          <p:cNvPr id="90" name="矩形 89">
+      <p:grpSp>
+        <p:nvGrpSpPr>
+          <p:cNvPr id="2" name="群組 1">
             <a:extLst>
               <a:ext uri="{FF2B5EF4-FFF2-40B4-BE49-F238E27FC236}">
-                <a16:creationId xmlns:a16="http://schemas.microsoft.com/office/drawing/2014/main" id="{51794149-3CEA-4A61-9D1D-9B37259D93E3}"/>
-              </a:ext>
-            </a:extLst>
-          </p:cNvPr>
-          <p:cNvSpPr/>
-          <p:nvPr/>
-        </p:nvSpPr>
-        <p:spPr>
-          <a:xfrm>
-            <a:off x="123826" y="17462"/>
-            <a:ext cx="12068175" cy="5734050"/>
-          </a:xfrm>
-          <a:prstGeom prst="rect">
-            <a:avLst/>
-          </a:prstGeom>
-          <a:solidFill>
-            <a:schemeClr val="bg1"/>
-          </a:solidFill>
-          <a:ln>
-            <a:noFill/>
-          </a:ln>
-        </p:spPr>
-        <p:style>
-          <a:lnRef idx="2">
-            <a:schemeClr val="accent1">
-              <a:shade val="50000"/>
-            </a:schemeClr>
-          </a:lnRef>
-          <a:fillRef idx="1">
-            <a:schemeClr val="accent1"/>
-          </a:fillRef>
-          <a:effectRef idx="0">
-            <a:schemeClr val="accent1"/>
-          </a:effectRef>
-          <a:fontRef idx="minor">
-            <a:schemeClr val="lt1"/>
-          </a:fontRef>
-        </p:style>
-        <p:txBody>
-          <a:bodyPr rot="0" spcFirstLastPara="0" vertOverflow="overflow" horzOverflow="overflow" vert="horz" wrap="square" lIns="91440" tIns="45720" rIns="91440" bIns="45720" numCol="1" spcCol="0" rtlCol="0" fromWordArt="0" anchor="ctr" anchorCtr="0" forceAA="0" compatLnSpc="1">
-            <a:prstTxWarp prst="textNoShape">
-              <a:avLst/>
-            </a:prstTxWarp>
-            <a:noAutofit/>
-          </a:bodyPr>
-          <a:lstStyle/>
-          <a:p>
-            <a:pPr algn="ctr"/>
-            <a:endParaRPr lang="zh-TW" altLang="en-US"/>
-          </a:p>
-        </p:txBody>
-      </p:sp>
-      <p:grpSp>
-        <p:nvGrpSpPr>
-          <p:cNvPr id="60" name="群組 59">
-            <a:extLst>
-              <a:ext uri="{FF2B5EF4-FFF2-40B4-BE49-F238E27FC236}">
-                <a16:creationId xmlns:a16="http://schemas.microsoft.com/office/drawing/2014/main" id="{A0E27693-9B7E-4785-8F7B-A0BD897A2C62}"/>
+                <a16:creationId xmlns:a16="http://schemas.microsoft.com/office/drawing/2014/main" id="{7EDF0231-6994-466F-B78E-ABA6D47A94E3}"/>
               </a:ext>
             </a:extLst>
           </p:cNvPr>
@@ -3044,63 +2987,18 @@
         </p:nvGrpSpPr>
         <p:grpSpPr>
           <a:xfrm>
-            <a:off x="8074370" y="236550"/>
-            <a:ext cx="4487124" cy="4487124"/>
-            <a:chOff x="-98851" y="651318"/>
-            <a:chExt cx="4487124" cy="4487124"/>
+            <a:off x="-43434" y="-42251"/>
+            <a:ext cx="10427448" cy="4764452"/>
+            <a:chOff x="-43434" y="467948"/>
+            <a:chExt cx="10427448" cy="4764452"/>
           </a:xfrm>
         </p:grpSpPr>
-        <p:pic>
-          <p:nvPicPr>
-            <p:cNvPr id="14" name="Picture 2" descr="https://www.mdpi.com/applsci/applsci-08-01157/article_deploy/html/images/applsci-08-01157-g001.png">
+        <p:sp>
+          <p:nvSpPr>
+            <p:cNvPr id="90" name="矩形 89">
               <a:extLst>
                 <a:ext uri="{FF2B5EF4-FFF2-40B4-BE49-F238E27FC236}">
-                  <a16:creationId xmlns:a16="http://schemas.microsoft.com/office/drawing/2014/main" id="{BB779D1F-F040-4DA2-BAE2-2F7A34E9CB19}"/>
-                </a:ext>
-              </a:extLst>
-            </p:cNvPr>
-            <p:cNvPicPr>
-              <a:picLocks noChangeAspect="1" noChangeArrowheads="1"/>
-            </p:cNvPicPr>
-            <p:nvPr/>
-          </p:nvPicPr>
-          <p:blipFill rotWithShape="1">
-            <a:blip r:embed="rId2">
-              <a:extLst>
-                <a:ext uri="{28A0092B-C50C-407E-A947-70E740481C1C}">
-                  <a14:useLocalDpi xmlns:a14="http://schemas.microsoft.com/office/drawing/2010/main" val="0"/>
-                </a:ext>
-              </a:extLst>
-            </a:blip>
-            <a:srcRect l="3264" t="6572" r="70352" b="56107"/>
-            <a:stretch/>
-          </p:blipFill>
-          <p:spPr bwMode="auto">
-            <a:xfrm rot="1809625">
-              <a:off x="709001" y="1827176"/>
-              <a:ext cx="3270061" cy="2593551"/>
-            </a:xfrm>
-            <a:prstGeom prst="rect">
-              <a:avLst/>
-            </a:prstGeom>
-            <a:noFill/>
-            <a:extLst>
-              <a:ext uri="{909E8E84-426E-40DD-AFC4-6F175D3DCCD1}">
-                <a14:hiddenFill xmlns:a14="http://schemas.microsoft.com/office/drawing/2010/main">
-                  <a:solidFill>
-                    <a:srgbClr val="FFFFFF"/>
-                  </a:solidFill>
-                </a14:hiddenFill>
-              </a:ext>
-            </a:extLst>
-          </p:spPr>
-        </p:pic>
-        <p:sp>
-          <p:nvSpPr>
-            <p:cNvPr id="52" name="圓形: 空心 51">
-              <a:extLst>
-                <a:ext uri="{FF2B5EF4-FFF2-40B4-BE49-F238E27FC236}">
-                  <a16:creationId xmlns:a16="http://schemas.microsoft.com/office/drawing/2014/main" id="{95ED25BA-F532-4FA5-AFA3-4E2463E8056B}"/>
+                  <a16:creationId xmlns:a16="http://schemas.microsoft.com/office/drawing/2014/main" id="{51794149-3CEA-4A61-9D1D-9B37259D93E3}"/>
                 </a:ext>
               </a:extLst>
             </p:cNvPr>
@@ -3109,13 +3007,11 @@
           </p:nvSpPr>
           <p:spPr>
             <a:xfrm>
-              <a:off x="-98851" y="651318"/>
-              <a:ext cx="4487124" cy="4487124"/>
+              <a:off x="100609" y="698499"/>
+              <a:ext cx="9805392" cy="4533901"/>
             </a:xfrm>
-            <a:prstGeom prst="donut">
-              <a:avLst>
-                <a:gd name="adj" fmla="val 24348"/>
-              </a:avLst>
+            <a:prstGeom prst="rect">
+              <a:avLst/>
             </a:prstGeom>
             <a:solidFill>
               <a:schemeClr val="bg1"/>
@@ -3141,7 +3037,7 @@
             </a:fontRef>
           </p:style>
           <p:txBody>
-            <a:bodyPr rot="0" spcFirstLastPara="0" vertOverflow="overflow" horzOverflow="overflow" vert="horz" wrap="square" lIns="91440" tIns="45720" rIns="91440" bIns="45720" numCol="1" spcCol="0" rtlCol="0" fromWordArt="0" anchor="ctr" anchorCtr="0" forceAA="0" compatLnSpc="1">
+            <a:bodyPr rot="0" spcFirstLastPara="0" vertOverflow="overflow" horzOverflow="overflow" vert="horz" wrap="square" lIns="74295" tIns="37148" rIns="74295" bIns="37148" numCol="1" spcCol="0" rtlCol="0" fromWordArt="0" anchor="ctr" anchorCtr="0" forceAA="0" compatLnSpc="1">
               <a:prstTxWarp prst="textNoShape">
                 <a:avLst/>
               </a:prstTxWarp>
@@ -3150,20 +3046,19 @@
             <a:lstStyle/>
             <a:p>
               <a:pPr algn="ctr"/>
-              <a:endParaRPr lang="zh-TW" altLang="en-US" dirty="0">
-                <a:solidFill>
-                  <a:schemeClr val="tx1"/>
-                </a:solidFill>
+              <a:endParaRPr lang="zh-TW" altLang="en-US" sz="2000">
+                <a:latin typeface="Times New Roman" panose="02020603050405020304" pitchFamily="18" charset="0"/>
+                <a:cs typeface="Times New Roman" panose="02020603050405020304" pitchFamily="18" charset="0"/>
               </a:endParaRPr>
             </a:p>
           </p:txBody>
         </p:sp>
         <p:grpSp>
           <p:nvGrpSpPr>
-            <p:cNvPr id="53" name="群組 52">
+            <p:cNvPr id="60" name="群組 59">
               <a:extLst>
                 <a:ext uri="{FF2B5EF4-FFF2-40B4-BE49-F238E27FC236}">
-                  <a16:creationId xmlns:a16="http://schemas.microsoft.com/office/drawing/2014/main" id="{B99EA0DF-4EF0-46D2-9628-2B1F6F91D90B}"/>
+                  <a16:creationId xmlns:a16="http://schemas.microsoft.com/office/drawing/2014/main" id="{A0E27693-9B7E-4785-8F7B-A0BD897A2C62}"/>
                 </a:ext>
               </a:extLst>
             </p:cNvPr>
@@ -3171,45 +3066,506 @@
             <p:nvPr/>
           </p:nvGrpSpPr>
           <p:grpSpPr>
-            <a:xfrm rot="16200000">
-              <a:off x="1839247" y="2755590"/>
-              <a:ext cx="589628" cy="333090"/>
-              <a:chOff x="1763808" y="585245"/>
-              <a:chExt cx="1828792" cy="863907"/>
+            <a:xfrm>
+              <a:off x="6738226" y="467948"/>
+              <a:ext cx="3645788" cy="3645788"/>
+              <a:chOff x="-98851" y="651318"/>
+              <a:chExt cx="4487124" cy="4487124"/>
             </a:xfrm>
           </p:grpSpPr>
-          <p:cxnSp>
-            <p:nvCxnSpPr>
-              <p:cNvPr id="54" name="直線接點 53">
+          <p:pic>
+            <p:nvPicPr>
+              <p:cNvPr id="14" name="Picture 2" descr="https://www.mdpi.com/applsci/applsci-08-01157/article_deploy/html/images/applsci-08-01157-g001.png">
                 <a:extLst>
                   <a:ext uri="{FF2B5EF4-FFF2-40B4-BE49-F238E27FC236}">
-                    <a16:creationId xmlns:a16="http://schemas.microsoft.com/office/drawing/2014/main" id="{62AF9BEC-FDCC-477A-8FC0-BEAF65E92CEE}"/>
+                    <a16:creationId xmlns:a16="http://schemas.microsoft.com/office/drawing/2014/main" id="{BB779D1F-F040-4DA2-BAE2-2F7A34E9CB19}"/>
                   </a:ext>
                 </a:extLst>
               </p:cNvPr>
-              <p:cNvCxnSpPr/>
+              <p:cNvPicPr>
+                <a:picLocks noChangeAspect="1" noChangeArrowheads="1"/>
+              </p:cNvPicPr>
+              <p:nvPr/>
+            </p:nvPicPr>
+            <p:blipFill rotWithShape="1">
+              <a:blip r:embed="rId2">
+                <a:extLst>
+                  <a:ext uri="{28A0092B-C50C-407E-A947-70E740481C1C}">
+                    <a14:useLocalDpi xmlns:a14="http://schemas.microsoft.com/office/drawing/2010/main" val="0"/>
+                  </a:ext>
+                </a:extLst>
+              </a:blip>
+              <a:srcRect l="3264" t="6572" r="70352" b="56107"/>
+              <a:stretch/>
+            </p:blipFill>
+            <p:spPr bwMode="auto">
+              <a:xfrm rot="1809625">
+                <a:off x="709001" y="1827176"/>
+                <a:ext cx="3270061" cy="2593551"/>
+              </a:xfrm>
+              <a:prstGeom prst="rect">
+                <a:avLst/>
+              </a:prstGeom>
+              <a:noFill/>
+              <a:extLst>
+                <a:ext uri="{909E8E84-426E-40DD-AFC4-6F175D3DCCD1}">
+                  <a14:hiddenFill xmlns:a14="http://schemas.microsoft.com/office/drawing/2010/main">
+                    <a:solidFill>
+                      <a:srgbClr val="FFFFFF"/>
+                    </a:solidFill>
+                  </a14:hiddenFill>
+                </a:ext>
+              </a:extLst>
+            </p:spPr>
+          </p:pic>
+          <p:sp>
+            <p:nvSpPr>
+              <p:cNvPr id="52" name="圓形: 空心 51">
+                <a:extLst>
+                  <a:ext uri="{FF2B5EF4-FFF2-40B4-BE49-F238E27FC236}">
+                    <a16:creationId xmlns:a16="http://schemas.microsoft.com/office/drawing/2014/main" id="{95ED25BA-F532-4FA5-AFA3-4E2463E8056B}"/>
+                  </a:ext>
+                </a:extLst>
+              </p:cNvPr>
+              <p:cNvSpPr/>
+              <p:nvPr/>
+            </p:nvSpPr>
+            <p:spPr>
+              <a:xfrm>
+                <a:off x="-98851" y="651318"/>
+                <a:ext cx="4487124" cy="4487124"/>
+              </a:xfrm>
+              <a:prstGeom prst="donut">
+                <a:avLst>
+                  <a:gd name="adj" fmla="val 24348"/>
+                </a:avLst>
+              </a:prstGeom>
+              <a:solidFill>
+                <a:schemeClr val="bg1"/>
+              </a:solidFill>
+              <a:ln>
+                <a:noFill/>
+              </a:ln>
+            </p:spPr>
+            <p:style>
+              <a:lnRef idx="2">
+                <a:schemeClr val="accent1">
+                  <a:shade val="50000"/>
+                </a:schemeClr>
+              </a:lnRef>
+              <a:fillRef idx="1">
+                <a:schemeClr val="accent1"/>
+              </a:fillRef>
+              <a:effectRef idx="0">
+                <a:schemeClr val="accent1"/>
+              </a:effectRef>
+              <a:fontRef idx="minor">
+                <a:schemeClr val="lt1"/>
+              </a:fontRef>
+            </p:style>
+            <p:txBody>
+              <a:bodyPr rot="0" spcFirstLastPara="0" vertOverflow="overflow" horzOverflow="overflow" vert="horz" wrap="square" lIns="74295" tIns="37148" rIns="74295" bIns="37148" numCol="1" spcCol="0" rtlCol="0" fromWordArt="0" anchor="ctr" anchorCtr="0" forceAA="0" compatLnSpc="1">
+                <a:prstTxWarp prst="textNoShape">
+                  <a:avLst/>
+                </a:prstTxWarp>
+                <a:noAutofit/>
+              </a:bodyPr>
+              <a:lstStyle/>
+              <a:p>
+                <a:pPr algn="ctr"/>
+                <a:endParaRPr lang="zh-TW" altLang="en-US" sz="2000" dirty="0">
+                  <a:solidFill>
+                    <a:schemeClr val="tx1"/>
+                  </a:solidFill>
+                  <a:latin typeface="Times New Roman" panose="02020603050405020304" pitchFamily="18" charset="0"/>
+                  <a:cs typeface="Times New Roman" panose="02020603050405020304" pitchFamily="18" charset="0"/>
+                </a:endParaRPr>
+              </a:p>
+            </p:txBody>
+          </p:sp>
+          <p:grpSp>
+            <p:nvGrpSpPr>
+              <p:cNvPr id="53" name="群組 52">
+                <a:extLst>
+                  <a:ext uri="{FF2B5EF4-FFF2-40B4-BE49-F238E27FC236}">
+                    <a16:creationId xmlns:a16="http://schemas.microsoft.com/office/drawing/2014/main" id="{B99EA0DF-4EF0-46D2-9628-2B1F6F91D90B}"/>
+                  </a:ext>
+                </a:extLst>
+              </p:cNvPr>
+              <p:cNvGrpSpPr/>
+              <p:nvPr/>
+            </p:nvGrpSpPr>
+            <p:grpSpPr>
+              <a:xfrm rot="16200000">
+                <a:off x="1839247" y="2755590"/>
+                <a:ext cx="589628" cy="333090"/>
+                <a:chOff x="1763808" y="585245"/>
+                <a:chExt cx="1828792" cy="863907"/>
+              </a:xfrm>
+            </p:grpSpPr>
+            <p:cxnSp>
+              <p:nvCxnSpPr>
+                <p:cNvPr id="54" name="直線接點 53">
+                  <a:extLst>
+                    <a:ext uri="{FF2B5EF4-FFF2-40B4-BE49-F238E27FC236}">
+                      <a16:creationId xmlns:a16="http://schemas.microsoft.com/office/drawing/2014/main" id="{62AF9BEC-FDCC-477A-8FC0-BEAF65E92CEE}"/>
+                    </a:ext>
+                  </a:extLst>
+                </p:cNvPr>
+                <p:cNvCxnSpPr/>
+                <p:nvPr/>
+              </p:nvCxnSpPr>
+              <p:spPr>
+                <a:xfrm>
+                  <a:off x="2678201" y="586088"/>
+                  <a:ext cx="914399" cy="426720"/>
+                </a:xfrm>
+                <a:prstGeom prst="line">
+                  <a:avLst/>
+                </a:prstGeom>
+                <a:ln w="9525">
+                  <a:prstDash val="sysDash"/>
+                </a:ln>
+              </p:spPr>
+              <p:style>
+                <a:lnRef idx="3">
+                  <a:schemeClr val="dk1"/>
+                </a:lnRef>
+                <a:fillRef idx="0">
+                  <a:schemeClr val="dk1"/>
+                </a:fillRef>
+                <a:effectRef idx="2">
+                  <a:schemeClr val="dk1"/>
+                </a:effectRef>
+                <a:fontRef idx="minor">
+                  <a:schemeClr val="tx1"/>
+                </a:fontRef>
+              </p:style>
+            </p:cxnSp>
+            <p:cxnSp>
+              <p:nvCxnSpPr>
+                <p:cNvPr id="55" name="直線接點 54">
+                  <a:extLst>
+                    <a:ext uri="{FF2B5EF4-FFF2-40B4-BE49-F238E27FC236}">
+                      <a16:creationId xmlns:a16="http://schemas.microsoft.com/office/drawing/2014/main" id="{2702ACC3-77E2-4B95-A6BB-83EE61921103}"/>
+                    </a:ext>
+                  </a:extLst>
+                </p:cNvPr>
+                <p:cNvCxnSpPr/>
+                <p:nvPr/>
+              </p:nvCxnSpPr>
+              <p:spPr>
+                <a:xfrm>
+                  <a:off x="1763811" y="1021595"/>
+                  <a:ext cx="914399" cy="426720"/>
+                </a:xfrm>
+                <a:prstGeom prst="line">
+                  <a:avLst/>
+                </a:prstGeom>
+                <a:ln w="9525">
+                  <a:prstDash val="sysDash"/>
+                </a:ln>
+              </p:spPr>
+              <p:style>
+                <a:lnRef idx="3">
+                  <a:schemeClr val="dk1"/>
+                </a:lnRef>
+                <a:fillRef idx="0">
+                  <a:schemeClr val="dk1"/>
+                </a:fillRef>
+                <a:effectRef idx="2">
+                  <a:schemeClr val="dk1"/>
+                </a:effectRef>
+                <a:fontRef idx="minor">
+                  <a:schemeClr val="tx1"/>
+                </a:fontRef>
+              </p:style>
+            </p:cxnSp>
+            <p:cxnSp>
+              <p:nvCxnSpPr>
+                <p:cNvPr id="56" name="直線接點 55">
+                  <a:extLst>
+                    <a:ext uri="{FF2B5EF4-FFF2-40B4-BE49-F238E27FC236}">
+                      <a16:creationId xmlns:a16="http://schemas.microsoft.com/office/drawing/2014/main" id="{B581387D-7DDE-404B-9E32-1D986E3DF29E}"/>
+                    </a:ext>
+                  </a:extLst>
+                </p:cNvPr>
+                <p:cNvCxnSpPr>
+                  <a:cxnSpLocks/>
+                </p:cNvCxnSpPr>
+                <p:nvPr/>
+              </p:nvCxnSpPr>
+              <p:spPr>
+                <a:xfrm flipV="1">
+                  <a:off x="2678201" y="1020752"/>
+                  <a:ext cx="914399" cy="428400"/>
+                </a:xfrm>
+                <a:prstGeom prst="line">
+                  <a:avLst/>
+                </a:prstGeom>
+                <a:ln w="9525">
+                  <a:prstDash val="sysDash"/>
+                </a:ln>
+              </p:spPr>
+              <p:style>
+                <a:lnRef idx="3">
+                  <a:schemeClr val="dk1"/>
+                </a:lnRef>
+                <a:fillRef idx="0">
+                  <a:schemeClr val="dk1"/>
+                </a:fillRef>
+                <a:effectRef idx="2">
+                  <a:schemeClr val="dk1"/>
+                </a:effectRef>
+                <a:fontRef idx="minor">
+                  <a:schemeClr val="tx1"/>
+                </a:fontRef>
+              </p:style>
+            </p:cxnSp>
+            <p:cxnSp>
+              <p:nvCxnSpPr>
+                <p:cNvPr id="57" name="直線接點 56">
+                  <a:extLst>
+                    <a:ext uri="{FF2B5EF4-FFF2-40B4-BE49-F238E27FC236}">
+                      <a16:creationId xmlns:a16="http://schemas.microsoft.com/office/drawing/2014/main" id="{2A771E86-1748-475E-BF31-D18696D6F3C2}"/>
+                    </a:ext>
+                  </a:extLst>
+                </p:cNvPr>
+                <p:cNvCxnSpPr>
+                  <a:cxnSpLocks/>
+                </p:cNvCxnSpPr>
+                <p:nvPr/>
+              </p:nvCxnSpPr>
+              <p:spPr>
+                <a:xfrm flipV="1">
+                  <a:off x="1763808" y="585245"/>
+                  <a:ext cx="914399" cy="428400"/>
+                </a:xfrm>
+                <a:prstGeom prst="line">
+                  <a:avLst/>
+                </a:prstGeom>
+                <a:ln w="9525">
+                  <a:prstDash val="sysDash"/>
+                </a:ln>
+              </p:spPr>
+              <p:style>
+                <a:lnRef idx="3">
+                  <a:schemeClr val="dk1"/>
+                </a:lnRef>
+                <a:fillRef idx="0">
+                  <a:schemeClr val="dk1"/>
+                </a:fillRef>
+                <a:effectRef idx="2">
+                  <a:schemeClr val="dk1"/>
+                </a:effectRef>
+                <a:fontRef idx="minor">
+                  <a:schemeClr val="tx1"/>
+                </a:fontRef>
+              </p:style>
+            </p:cxnSp>
+          </p:grpSp>
+        </p:grpSp>
+        <p:pic>
+          <p:nvPicPr>
+            <p:cNvPr id="15" name="Picture 2" descr="https://www.mdpi.com/applsci/applsci-08-01157/article_deploy/html/images/applsci-08-01157-g001.png">
+              <a:extLst>
+                <a:ext uri="{FF2B5EF4-FFF2-40B4-BE49-F238E27FC236}">
+                  <a16:creationId xmlns:a16="http://schemas.microsoft.com/office/drawing/2014/main" id="{84CEEA8B-37D1-4637-B472-26FA9690D789}"/>
+                </a:ext>
+              </a:extLst>
+            </p:cNvPr>
+            <p:cNvPicPr>
+              <a:picLocks noChangeAspect="1" noChangeArrowheads="1"/>
+            </p:cNvPicPr>
+            <p:nvPr/>
+          </p:nvPicPr>
+          <p:blipFill rotWithShape="1">
+            <a:blip r:embed="rId2">
+              <a:extLst>
+                <a:ext uri="{28A0092B-C50C-407E-A947-70E740481C1C}">
+                  <a14:useLocalDpi xmlns:a14="http://schemas.microsoft.com/office/drawing/2010/main" val="0"/>
+                </a:ext>
+              </a:extLst>
+            </a:blip>
+            <a:srcRect l="8003" t="43627" r="69001" b="47528"/>
+            <a:stretch/>
+          </p:blipFill>
+          <p:spPr bwMode="auto">
+            <a:xfrm>
+              <a:off x="7520478" y="667220"/>
+              <a:ext cx="2315714" cy="499428"/>
+            </a:xfrm>
+            <a:prstGeom prst="rect">
+              <a:avLst/>
+            </a:prstGeom>
+            <a:noFill/>
+            <a:extLst>
+              <a:ext uri="{909E8E84-426E-40DD-AFC4-6F175D3DCCD1}">
+                <a14:hiddenFill xmlns:a14="http://schemas.microsoft.com/office/drawing/2010/main">
+                  <a:solidFill>
+                    <a:srgbClr val="FFFFFF"/>
+                  </a:solidFill>
+                </a14:hiddenFill>
+              </a:ext>
+            </a:extLst>
+          </p:spPr>
+        </p:pic>
+        <p:grpSp>
+          <p:nvGrpSpPr>
+            <p:cNvPr id="65" name="群組 64">
+              <a:extLst>
+                <a:ext uri="{FF2B5EF4-FFF2-40B4-BE49-F238E27FC236}">
+                  <a16:creationId xmlns:a16="http://schemas.microsoft.com/office/drawing/2014/main" id="{9FD33F3C-2EA6-4223-8AA7-18DB949691BD}"/>
+                </a:ext>
+              </a:extLst>
+            </p:cNvPr>
+            <p:cNvGrpSpPr/>
+            <p:nvPr/>
+          </p:nvGrpSpPr>
+          <p:grpSpPr>
+            <a:xfrm>
+              <a:off x="6935613" y="2568847"/>
+              <a:ext cx="814086" cy="936698"/>
+              <a:chOff x="6095200" y="-105692"/>
+              <a:chExt cx="1153156" cy="1326837"/>
+            </a:xfrm>
+          </p:grpSpPr>
+          <mc:AlternateContent xmlns:mc="http://schemas.openxmlformats.org/markup-compatibility/2006" xmlns:a14="http://schemas.microsoft.com/office/drawing/2010/main">
+            <mc:Choice Requires="a14">
+              <p:sp>
+                <p:nvSpPr>
+                  <p:cNvPr id="64" name="文字方塊 63">
+                    <a:extLst>
+                      <a:ext uri="{FF2B5EF4-FFF2-40B4-BE49-F238E27FC236}">
+                        <a16:creationId xmlns:a16="http://schemas.microsoft.com/office/drawing/2014/main" id="{1AC21DCA-45FB-481B-8FAD-616224AF2E4F}"/>
+                      </a:ext>
+                    </a:extLst>
+                  </p:cNvPr>
+                  <p:cNvSpPr txBox="1"/>
+                  <p:nvPr/>
+                </p:nvSpPr>
+                <p:spPr>
+                  <a:xfrm>
+                    <a:off x="6095200" y="654387"/>
+                    <a:ext cx="500693" cy="566758"/>
+                  </a:xfrm>
+                  <a:prstGeom prst="rect">
+                    <a:avLst/>
+                  </a:prstGeom>
+                  <a:noFill/>
+                </p:spPr>
+                <p:txBody>
+                  <a:bodyPr wrap="square" rtlCol="0">
+                    <a:spAutoFit/>
+                  </a:bodyPr>
+                  <a:lstStyle/>
+                  <a:p>
+                    <a:pPr/>
+                    <a14:m>
+                      <m:oMathPara xmlns:m="http://schemas.openxmlformats.org/officeDocument/2006/math">
+                        <m:oMathParaPr>
+                          <m:jc m:val="centerGroup"/>
+                        </m:oMathParaPr>
+                        <m:oMath xmlns:m="http://schemas.openxmlformats.org/officeDocument/2006/math">
+                          <m:r>
+                            <a:rPr lang="en-US" altLang="zh-TW" sz="2000" i="1">
+                              <a:latin typeface="Cambria Math" panose="02040503050406030204" pitchFamily="18" charset="0"/>
+                            </a:rPr>
+                            <m:t>𝑧</m:t>
+                          </m:r>
+                        </m:oMath>
+                      </m:oMathPara>
+                    </a14:m>
+                    <a:endParaRPr lang="zh-TW" altLang="en-US" sz="2000" dirty="0">
+                      <a:latin typeface="Times New Roman" panose="02020603050405020304" pitchFamily="18" charset="0"/>
+                      <a:cs typeface="Times New Roman" panose="02020603050405020304" pitchFamily="18" charset="0"/>
+                    </a:endParaRPr>
+                  </a:p>
+                </p:txBody>
+              </p:sp>
+            </mc:Choice>
+            <mc:Fallback xmlns="">
+              <p:sp>
+                <p:nvSpPr>
+                  <p:cNvPr id="64" name="文字方塊 63">
+                    <a:extLst>
+                      <a:ext uri="{FF2B5EF4-FFF2-40B4-BE49-F238E27FC236}">
+                        <a16:creationId xmlns:a16="http://schemas.microsoft.com/office/drawing/2014/main" id="{1AC21DCA-45FB-481B-8FAD-616224AF2E4F}"/>
+                      </a:ext>
+                    </a:extLst>
+                  </p:cNvPr>
+                  <p:cNvSpPr txBox="1">
+                    <a:spLocks noRot="1" noChangeAspect="1" noMove="1" noResize="1" noEditPoints="1" noAdjustHandles="1" noChangeArrowheads="1" noChangeShapeType="1" noTextEdit="1"/>
+                  </p:cNvSpPr>
+                  <p:nvPr/>
+                </p:nvSpPr>
+                <p:spPr>
+                  <a:xfrm>
+                    <a:off x="6095200" y="654387"/>
+                    <a:ext cx="500693" cy="566758"/>
+                  </a:xfrm>
+                  <a:prstGeom prst="rect">
+                    <a:avLst/>
+                  </a:prstGeom>
+                  <a:blipFill>
+                    <a:blip r:embed="rId3"/>
+                    <a:stretch>
+                      <a:fillRect/>
+                    </a:stretch>
+                  </a:blipFill>
+                </p:spPr>
+                <p:txBody>
+                  <a:bodyPr/>
+                  <a:lstStyle/>
+                  <a:p>
+                    <a:r>
+                      <a:rPr lang="zh-TW" altLang="en-US">
+                        <a:noFill/>
+                      </a:rPr>
+                      <a:t> </a:t>
+                    </a:r>
+                  </a:p>
+                </p:txBody>
+              </p:sp>
+            </mc:Fallback>
+          </mc:AlternateContent>
+          <p:cxnSp>
+            <p:nvCxnSpPr>
+              <p:cNvPr id="44" name="直線單箭頭接點 43">
+                <a:extLst>
+                  <a:ext uri="{FF2B5EF4-FFF2-40B4-BE49-F238E27FC236}">
+                    <a16:creationId xmlns:a16="http://schemas.microsoft.com/office/drawing/2014/main" id="{EBDF0B66-0BCB-438D-B5A5-204CE09C230F}"/>
+                  </a:ext>
+                </a:extLst>
+              </p:cNvPr>
+              <p:cNvCxnSpPr>
+                <a:cxnSpLocks/>
+              </p:cNvCxnSpPr>
               <p:nvPr/>
             </p:nvCxnSpPr>
             <p:spPr>
               <a:xfrm>
-                <a:off x="2678201" y="586088"/>
-                <a:ext cx="914399" cy="426720"/>
+                <a:off x="6502870" y="782175"/>
+                <a:ext cx="363442" cy="0"/>
               </a:xfrm>
-              <a:prstGeom prst="line">
+              <a:prstGeom prst="straightConnector1">
                 <a:avLst/>
               </a:prstGeom>
-              <a:ln w="9525">
-                <a:prstDash val="sysDash"/>
+              <a:solidFill>
+                <a:schemeClr val="bg1"/>
+              </a:solidFill>
+              <a:ln>
+                <a:tailEnd type="triangle"/>
               </a:ln>
             </p:spPr>
             <p:style>
-              <a:lnRef idx="3">
+              <a:lnRef idx="2">
                 <a:schemeClr val="dk1"/>
               </a:lnRef>
               <a:fillRef idx="0">
                 <a:schemeClr val="dk1"/>
               </a:fillRef>
-              <a:effectRef idx="2">
+              <a:effectRef idx="1">
                 <a:schemeClr val="dk1"/>
               </a:effectRef>
               <a:fontRef idx="minor">
@@ -3219,49 +3575,10 @@
           </p:cxnSp>
           <p:cxnSp>
             <p:nvCxnSpPr>
-              <p:cNvPr id="55" name="直線接點 54">
+              <p:cNvPr id="45" name="直線單箭頭接點 44">
                 <a:extLst>
                   <a:ext uri="{FF2B5EF4-FFF2-40B4-BE49-F238E27FC236}">
-                    <a16:creationId xmlns:a16="http://schemas.microsoft.com/office/drawing/2014/main" id="{2702ACC3-77E2-4B95-A6BB-83EE61921103}"/>
-                  </a:ext>
-                </a:extLst>
-              </p:cNvPr>
-              <p:cNvCxnSpPr/>
-              <p:nvPr/>
-            </p:nvCxnSpPr>
-            <p:spPr>
-              <a:xfrm>
-                <a:off x="1763811" y="1021595"/>
-                <a:ext cx="914399" cy="426720"/>
-              </a:xfrm>
-              <a:prstGeom prst="line">
-                <a:avLst/>
-              </a:prstGeom>
-              <a:ln w="9525">
-                <a:prstDash val="sysDash"/>
-              </a:ln>
-            </p:spPr>
-            <p:style>
-              <a:lnRef idx="3">
-                <a:schemeClr val="dk1"/>
-              </a:lnRef>
-              <a:fillRef idx="0">
-                <a:schemeClr val="dk1"/>
-              </a:fillRef>
-              <a:effectRef idx="2">
-                <a:schemeClr val="dk1"/>
-              </a:effectRef>
-              <a:fontRef idx="minor">
-                <a:schemeClr val="tx1"/>
-              </a:fontRef>
-            </p:style>
-          </p:cxnSp>
-          <p:cxnSp>
-            <p:nvCxnSpPr>
-              <p:cNvPr id="56" name="直線接點 55">
-                <a:extLst>
-                  <a:ext uri="{FF2B5EF4-FFF2-40B4-BE49-F238E27FC236}">
-                    <a16:creationId xmlns:a16="http://schemas.microsoft.com/office/drawing/2014/main" id="{B581387D-7DDE-404B-9E32-1D986E3DF29E}"/>
+                    <a16:creationId xmlns:a16="http://schemas.microsoft.com/office/drawing/2014/main" id="{1554358E-A756-4E34-AD44-5C8E42D7A655}"/>
                   </a:ext>
                 </a:extLst>
               </p:cNvPr>
@@ -3272,24 +3589,27 @@
             </p:nvCxnSpPr>
             <p:spPr>
               <a:xfrm flipV="1">
-                <a:off x="2678201" y="1020752"/>
-                <a:ext cx="914399" cy="428400"/>
+                <a:off x="6508390" y="432919"/>
+                <a:ext cx="0" cy="355792"/>
               </a:xfrm>
-              <a:prstGeom prst="line">
+              <a:prstGeom prst="straightConnector1">
                 <a:avLst/>
               </a:prstGeom>
-              <a:ln w="9525">
-                <a:prstDash val="sysDash"/>
+              <a:solidFill>
+                <a:schemeClr val="bg1"/>
+              </a:solidFill>
+              <a:ln>
+                <a:tailEnd type="triangle"/>
               </a:ln>
             </p:spPr>
             <p:style>
-              <a:lnRef idx="3">
+              <a:lnRef idx="2">
                 <a:schemeClr val="dk1"/>
               </a:lnRef>
               <a:fillRef idx="0">
                 <a:schemeClr val="dk1"/>
               </a:fillRef>
-              <a:effectRef idx="2">
+              <a:effectRef idx="1">
                 <a:schemeClr val="dk1"/>
               </a:effectRef>
               <a:fontRef idx="minor">
@@ -3297,400 +3617,359 @@
               </a:fontRef>
             </p:style>
           </p:cxnSp>
-          <p:cxnSp>
-            <p:nvCxnSpPr>
-              <p:cNvPr id="57" name="直線接點 56">
+          <mc:AlternateContent xmlns:mc="http://schemas.openxmlformats.org/markup-compatibility/2006" xmlns:a14="http://schemas.microsoft.com/office/drawing/2010/main">
+            <mc:Choice Requires="a14">
+              <p:sp>
+                <p:nvSpPr>
+                  <p:cNvPr id="46" name="文字方塊 45">
+                    <a:extLst>
+                      <a:ext uri="{FF2B5EF4-FFF2-40B4-BE49-F238E27FC236}">
+                        <a16:creationId xmlns:a16="http://schemas.microsoft.com/office/drawing/2014/main" id="{F9381824-E8D5-4BFC-91DD-94D582F39669}"/>
+                      </a:ext>
+                    </a:extLst>
+                  </p:cNvPr>
+                  <p:cNvSpPr txBox="1"/>
+                  <p:nvPr/>
+                </p:nvSpPr>
+                <p:spPr>
+                  <a:xfrm>
+                    <a:off x="6747663" y="592474"/>
+                    <a:ext cx="500693" cy="566757"/>
+                  </a:xfrm>
+                  <a:prstGeom prst="rect">
+                    <a:avLst/>
+                  </a:prstGeom>
+                  <a:noFill/>
+                </p:spPr>
+                <p:txBody>
+                  <a:bodyPr wrap="square" rtlCol="0">
+                    <a:spAutoFit/>
+                  </a:bodyPr>
+                  <a:lstStyle/>
+                  <a:p>
+                    <a:pPr/>
+                    <a14:m>
+                      <m:oMathPara xmlns:m="http://schemas.openxmlformats.org/officeDocument/2006/math">
+                        <m:oMathParaPr>
+                          <m:jc m:val="centerGroup"/>
+                        </m:oMathParaPr>
+                        <m:oMath xmlns:m="http://schemas.openxmlformats.org/officeDocument/2006/math">
+                          <m:r>
+                            <a:rPr lang="en-US" altLang="zh-TW" sz="2000" i="1">
+                              <a:latin typeface="Cambria Math" panose="02040503050406030204" pitchFamily="18" charset="0"/>
+                            </a:rPr>
+                            <m:t>𝑥</m:t>
+                          </m:r>
+                        </m:oMath>
+                      </m:oMathPara>
+                    </a14:m>
+                    <a:endParaRPr lang="zh-TW" altLang="en-US" sz="2000" dirty="0">
+                      <a:latin typeface="Times New Roman" panose="02020603050405020304" pitchFamily="18" charset="0"/>
+                      <a:cs typeface="Times New Roman" panose="02020603050405020304" pitchFamily="18" charset="0"/>
+                    </a:endParaRPr>
+                  </a:p>
+                </p:txBody>
+              </p:sp>
+            </mc:Choice>
+            <mc:Fallback xmlns="">
+              <p:sp>
+                <p:nvSpPr>
+                  <p:cNvPr id="46" name="文字方塊 45">
+                    <a:extLst>
+                      <a:ext uri="{FF2B5EF4-FFF2-40B4-BE49-F238E27FC236}">
+                        <a16:creationId xmlns:a16="http://schemas.microsoft.com/office/drawing/2014/main" id="{F9381824-E8D5-4BFC-91DD-94D582F39669}"/>
+                      </a:ext>
+                    </a:extLst>
+                  </p:cNvPr>
+                  <p:cNvSpPr txBox="1">
+                    <a:spLocks noRot="1" noChangeAspect="1" noMove="1" noResize="1" noEditPoints="1" noAdjustHandles="1" noChangeArrowheads="1" noChangeShapeType="1" noTextEdit="1"/>
+                  </p:cNvSpPr>
+                  <p:nvPr/>
+                </p:nvSpPr>
+                <p:spPr>
+                  <a:xfrm>
+                    <a:off x="6747663" y="592474"/>
+                    <a:ext cx="500693" cy="566757"/>
+                  </a:xfrm>
+                  <a:prstGeom prst="rect">
+                    <a:avLst/>
+                  </a:prstGeom>
+                  <a:blipFill>
+                    <a:blip r:embed="rId4"/>
+                    <a:stretch>
+                      <a:fillRect/>
+                    </a:stretch>
+                  </a:blipFill>
+                </p:spPr>
+                <p:txBody>
+                  <a:bodyPr/>
+                  <a:lstStyle/>
+                  <a:p>
+                    <a:r>
+                      <a:rPr lang="zh-TW" altLang="en-US">
+                        <a:noFill/>
+                      </a:rPr>
+                      <a:t> </a:t>
+                    </a:r>
+                  </a:p>
+                </p:txBody>
+              </p:sp>
+            </mc:Fallback>
+          </mc:AlternateContent>
+          <mc:AlternateContent xmlns:mc="http://schemas.openxmlformats.org/markup-compatibility/2006" xmlns:a14="http://schemas.microsoft.com/office/drawing/2010/main">
+            <mc:Choice Requires="a14">
+              <p:sp>
+                <p:nvSpPr>
+                  <p:cNvPr id="47" name="文字方塊 46">
+                    <a:extLst>
+                      <a:ext uri="{FF2B5EF4-FFF2-40B4-BE49-F238E27FC236}">
+                        <a16:creationId xmlns:a16="http://schemas.microsoft.com/office/drawing/2014/main" id="{5E2D19B0-E246-47EA-BEFF-DC7713F756AE}"/>
+                      </a:ext>
+                    </a:extLst>
+                  </p:cNvPr>
+                  <p:cNvSpPr txBox="1"/>
+                  <p:nvPr/>
+                </p:nvSpPr>
+                <p:spPr>
+                  <a:xfrm>
+                    <a:off x="6281528" y="-105692"/>
+                    <a:ext cx="500693" cy="566758"/>
+                  </a:xfrm>
+                  <a:prstGeom prst="rect">
+                    <a:avLst/>
+                  </a:prstGeom>
+                  <a:noFill/>
+                </p:spPr>
+                <p:txBody>
+                  <a:bodyPr wrap="square" rtlCol="0">
+                    <a:spAutoFit/>
+                  </a:bodyPr>
+                  <a:lstStyle/>
+                  <a:p>
+                    <a:pPr/>
+                    <a14:m>
+                      <m:oMathPara xmlns:m="http://schemas.openxmlformats.org/officeDocument/2006/math">
+                        <m:oMathParaPr>
+                          <m:jc m:val="centerGroup"/>
+                        </m:oMathParaPr>
+                        <m:oMath xmlns:m="http://schemas.openxmlformats.org/officeDocument/2006/math">
+                          <m:r>
+                            <a:rPr lang="en-US" altLang="zh-TW" sz="2000" i="1">
+                              <a:latin typeface="Cambria Math" panose="02040503050406030204" pitchFamily="18" charset="0"/>
+                            </a:rPr>
+                            <m:t>𝑦</m:t>
+                          </m:r>
+                        </m:oMath>
+                      </m:oMathPara>
+                    </a14:m>
+                    <a:endParaRPr lang="zh-TW" altLang="en-US" sz="2000" dirty="0">
+                      <a:latin typeface="Times New Roman" panose="02020603050405020304" pitchFamily="18" charset="0"/>
+                      <a:cs typeface="Times New Roman" panose="02020603050405020304" pitchFamily="18" charset="0"/>
+                    </a:endParaRPr>
+                  </a:p>
+                </p:txBody>
+              </p:sp>
+            </mc:Choice>
+            <mc:Fallback xmlns="">
+              <p:sp>
+                <p:nvSpPr>
+                  <p:cNvPr id="47" name="文字方塊 46">
+                    <a:extLst>
+                      <a:ext uri="{FF2B5EF4-FFF2-40B4-BE49-F238E27FC236}">
+                        <a16:creationId xmlns:a16="http://schemas.microsoft.com/office/drawing/2014/main" id="{5E2D19B0-E246-47EA-BEFF-DC7713F756AE}"/>
+                      </a:ext>
+                    </a:extLst>
+                  </p:cNvPr>
+                  <p:cNvSpPr txBox="1">
+                    <a:spLocks noRot="1" noChangeAspect="1" noMove="1" noResize="1" noEditPoints="1" noAdjustHandles="1" noChangeArrowheads="1" noChangeShapeType="1" noTextEdit="1"/>
+                  </p:cNvSpPr>
+                  <p:nvPr/>
+                </p:nvSpPr>
+                <p:spPr>
+                  <a:xfrm>
+                    <a:off x="6281528" y="-105692"/>
+                    <a:ext cx="500693" cy="566758"/>
+                  </a:xfrm>
+                  <a:prstGeom prst="rect">
+                    <a:avLst/>
+                  </a:prstGeom>
+                  <a:blipFill>
+                    <a:blip r:embed="rId5"/>
+                    <a:stretch>
+                      <a:fillRect b="-9231"/>
+                    </a:stretch>
+                  </a:blipFill>
+                </p:spPr>
+                <p:txBody>
+                  <a:bodyPr/>
+                  <a:lstStyle/>
+                  <a:p>
+                    <a:r>
+                      <a:rPr lang="zh-TW" altLang="en-US">
+                        <a:noFill/>
+                      </a:rPr>
+                      <a:t> </a:t>
+                    </a:r>
+                  </a:p>
+                </p:txBody>
+              </p:sp>
+            </mc:Fallback>
+          </mc:AlternateContent>
+          <p:grpSp>
+            <p:nvGrpSpPr>
+              <p:cNvPr id="63" name="群組 62">
                 <a:extLst>
                   <a:ext uri="{FF2B5EF4-FFF2-40B4-BE49-F238E27FC236}">
-                    <a16:creationId xmlns:a16="http://schemas.microsoft.com/office/drawing/2014/main" id="{2A771E86-1748-475E-BF31-D18696D6F3C2}"/>
+                    <a16:creationId xmlns:a16="http://schemas.microsoft.com/office/drawing/2014/main" id="{86C01793-27FB-4469-B902-77A19DA60798}"/>
                   </a:ext>
                 </a:extLst>
               </p:cNvPr>
-              <p:cNvCxnSpPr>
-                <a:cxnSpLocks/>
-              </p:cNvCxnSpPr>
+              <p:cNvGrpSpPr/>
               <p:nvPr/>
-            </p:nvCxnSpPr>
-            <p:spPr>
-              <a:xfrm flipV="1">
-                <a:off x="1763808" y="585245"/>
-                <a:ext cx="914399" cy="428400"/>
+            </p:nvGrpSpPr>
+            <p:grpSpPr>
+              <a:xfrm>
+                <a:off x="6432721" y="705415"/>
+                <a:ext cx="152982" cy="152982"/>
+                <a:chOff x="5713955" y="632452"/>
+                <a:chExt cx="1065551" cy="1065551"/>
               </a:xfrm>
-              <a:prstGeom prst="line">
-                <a:avLst/>
-              </a:prstGeom>
-              <a:ln w="9525">
-                <a:prstDash val="sysDash"/>
-              </a:ln>
-            </p:spPr>
-            <p:style>
-              <a:lnRef idx="3">
-                <a:schemeClr val="dk1"/>
-              </a:lnRef>
-              <a:fillRef idx="0">
-                <a:schemeClr val="dk1"/>
-              </a:fillRef>
-              <a:effectRef idx="2">
-                <a:schemeClr val="dk1"/>
-              </a:effectRef>
-              <a:fontRef idx="minor">
-                <a:schemeClr val="tx1"/>
-              </a:fontRef>
-            </p:style>
-          </p:cxnSp>
-        </p:grpSp>
-      </p:grpSp>
-      <p:pic>
-        <p:nvPicPr>
-          <p:cNvPr id="15" name="Picture 2" descr="https://www.mdpi.com/applsci/applsci-08-01157/article_deploy/html/images/applsci-08-01157-g001.png">
-            <a:extLst>
-              <a:ext uri="{FF2B5EF4-FFF2-40B4-BE49-F238E27FC236}">
-                <a16:creationId xmlns:a16="http://schemas.microsoft.com/office/drawing/2014/main" id="{84CEEA8B-37D1-4637-B472-26FA9690D789}"/>
-              </a:ext>
-            </a:extLst>
-          </p:cNvPr>
-          <p:cNvPicPr>
-            <a:picLocks noChangeAspect="1" noChangeArrowheads="1"/>
-          </p:cNvPicPr>
-          <p:nvPr/>
-        </p:nvPicPr>
-        <p:blipFill rotWithShape="1">
-          <a:blip r:embed="rId2">
-            <a:extLst>
-              <a:ext uri="{28A0092B-C50C-407E-A947-70E740481C1C}">
-                <a14:useLocalDpi xmlns:a14="http://schemas.microsoft.com/office/drawing/2010/main" val="0"/>
-              </a:ext>
-            </a:extLst>
-          </a:blip>
-          <a:srcRect l="8003" t="43627" r="69001" b="47528"/>
-          <a:stretch/>
-        </p:blipFill>
-        <p:spPr bwMode="auto">
-          <a:xfrm>
-            <a:off x="8927726" y="374129"/>
-            <a:ext cx="2850110" cy="614681"/>
-          </a:xfrm>
-          <a:prstGeom prst="rect">
-            <a:avLst/>
-          </a:prstGeom>
-          <a:noFill/>
-          <a:extLst>
-            <a:ext uri="{909E8E84-426E-40DD-AFC4-6F175D3DCCD1}">
-              <a14:hiddenFill xmlns:a14="http://schemas.microsoft.com/office/drawing/2010/main">
-                <a:solidFill>
-                  <a:srgbClr val="FFFFFF"/>
-                </a:solidFill>
-              </a14:hiddenFill>
-            </a:ext>
-          </a:extLst>
-        </p:spPr>
-      </p:pic>
-      <p:grpSp>
-        <p:nvGrpSpPr>
-          <p:cNvPr id="65" name="群組 64">
-            <a:extLst>
-              <a:ext uri="{FF2B5EF4-FFF2-40B4-BE49-F238E27FC236}">
-                <a16:creationId xmlns:a16="http://schemas.microsoft.com/office/drawing/2014/main" id="{9FD33F3C-2EA6-4223-8AA7-18DB949691BD}"/>
-              </a:ext>
-            </a:extLst>
-          </p:cNvPr>
-          <p:cNvGrpSpPr/>
-          <p:nvPr/>
-        </p:nvGrpSpPr>
-        <p:grpSpPr>
-          <a:xfrm>
-            <a:off x="8317308" y="2975105"/>
-            <a:ext cx="1001952" cy="814592"/>
-            <a:chOff x="6095200" y="86196"/>
-            <a:chExt cx="1153156" cy="937523"/>
-          </a:xfrm>
-        </p:grpSpPr>
-        <p:cxnSp>
-          <p:nvCxnSpPr>
-            <p:cNvPr id="44" name="直線單箭頭接點 43">
-              <a:extLst>
-                <a:ext uri="{FF2B5EF4-FFF2-40B4-BE49-F238E27FC236}">
-                  <a16:creationId xmlns:a16="http://schemas.microsoft.com/office/drawing/2014/main" id="{EBDF0B66-0BCB-438D-B5A5-204CE09C230F}"/>
-                </a:ext>
-              </a:extLst>
-            </p:cNvPr>
-            <p:cNvCxnSpPr>
-              <a:cxnSpLocks/>
-            </p:cNvCxnSpPr>
-            <p:nvPr/>
-          </p:nvCxnSpPr>
-          <p:spPr>
-            <a:xfrm>
-              <a:off x="6502870" y="782175"/>
-              <a:ext cx="363442" cy="0"/>
-            </a:xfrm>
-            <a:prstGeom prst="straightConnector1">
-              <a:avLst/>
-            </a:prstGeom>
-            <a:solidFill>
-              <a:schemeClr val="bg1"/>
-            </a:solidFill>
-            <a:ln>
-              <a:tailEnd type="triangle"/>
-            </a:ln>
-          </p:spPr>
-          <p:style>
-            <a:lnRef idx="2">
-              <a:schemeClr val="dk1"/>
-            </a:lnRef>
-            <a:fillRef idx="0">
-              <a:schemeClr val="dk1"/>
-            </a:fillRef>
-            <a:effectRef idx="1">
-              <a:schemeClr val="dk1"/>
-            </a:effectRef>
-            <a:fontRef idx="minor">
-              <a:schemeClr val="tx1"/>
-            </a:fontRef>
-          </p:style>
-        </p:cxnSp>
-        <p:cxnSp>
-          <p:nvCxnSpPr>
-            <p:cNvPr id="45" name="直線單箭頭接點 44">
-              <a:extLst>
-                <a:ext uri="{FF2B5EF4-FFF2-40B4-BE49-F238E27FC236}">
-                  <a16:creationId xmlns:a16="http://schemas.microsoft.com/office/drawing/2014/main" id="{1554358E-A756-4E34-AD44-5C8E42D7A655}"/>
-                </a:ext>
-              </a:extLst>
-            </p:cNvPr>
-            <p:cNvCxnSpPr>
-              <a:cxnSpLocks/>
-            </p:cNvCxnSpPr>
-            <p:nvPr/>
-          </p:nvCxnSpPr>
-          <p:spPr>
-            <a:xfrm flipV="1">
-              <a:off x="6508390" y="432919"/>
-              <a:ext cx="0" cy="355792"/>
-            </a:xfrm>
-            <a:prstGeom prst="straightConnector1">
-              <a:avLst/>
-            </a:prstGeom>
-            <a:solidFill>
-              <a:schemeClr val="bg1"/>
-            </a:solidFill>
-            <a:ln>
-              <a:tailEnd type="triangle"/>
-            </a:ln>
-          </p:spPr>
-          <p:style>
-            <a:lnRef idx="2">
-              <a:schemeClr val="dk1"/>
-            </a:lnRef>
-            <a:fillRef idx="0">
-              <a:schemeClr val="dk1"/>
-            </a:fillRef>
-            <a:effectRef idx="1">
-              <a:schemeClr val="dk1"/>
-            </a:effectRef>
-            <a:fontRef idx="minor">
-              <a:schemeClr val="tx1"/>
-            </a:fontRef>
-          </p:style>
-        </p:cxnSp>
-        <mc:AlternateContent xmlns:mc="http://schemas.openxmlformats.org/markup-compatibility/2006">
-          <mc:Choice xmlns:a14="http://schemas.microsoft.com/office/drawing/2010/main" Requires="a14">
+            </p:grpSpPr>
             <p:sp>
               <p:nvSpPr>
-                <p:cNvPr id="46" name="文字方塊 45">
+                <p:cNvPr id="61" name="圓形: 空心 60">
                   <a:extLst>
                     <a:ext uri="{FF2B5EF4-FFF2-40B4-BE49-F238E27FC236}">
-                      <a16:creationId xmlns:a16="http://schemas.microsoft.com/office/drawing/2014/main" id="{F9381824-E8D5-4BFC-91DD-94D582F39669}"/>
+                      <a16:creationId xmlns:a16="http://schemas.microsoft.com/office/drawing/2014/main" id="{4095E452-70E7-4ED1-B8B6-9B95E719916F}"/>
                     </a:ext>
                   </a:extLst>
                 </p:cNvPr>
-                <p:cNvSpPr txBox="1"/>
+                <p:cNvSpPr/>
                 <p:nvPr/>
               </p:nvSpPr>
               <p:spPr>
                 <a:xfrm>
-                  <a:off x="6747663" y="592474"/>
-                  <a:ext cx="500693" cy="369332"/>
+                  <a:off x="5713955" y="632452"/>
+                  <a:ext cx="1065551" cy="1065551"/>
                 </a:xfrm>
-                <a:prstGeom prst="rect">
-                  <a:avLst/>
+                <a:prstGeom prst="donut">
+                  <a:avLst>
+                    <a:gd name="adj" fmla="val 38442"/>
+                  </a:avLst>
                 </a:prstGeom>
-                <a:noFill/>
+                <a:solidFill>
+                  <a:schemeClr val="bg1"/>
+                </a:solidFill>
+                <a:ln>
+                  <a:solidFill>
+                    <a:schemeClr val="tx1"/>
+                  </a:solidFill>
+                </a:ln>
               </p:spPr>
+              <p:style>
+                <a:lnRef idx="2">
+                  <a:schemeClr val="accent1">
+                    <a:shade val="50000"/>
+                  </a:schemeClr>
+                </a:lnRef>
+                <a:fillRef idx="1">
+                  <a:schemeClr val="accent1"/>
+                </a:fillRef>
+                <a:effectRef idx="0">
+                  <a:schemeClr val="accent1"/>
+                </a:effectRef>
+                <a:fontRef idx="minor">
+                  <a:schemeClr val="lt1"/>
+                </a:fontRef>
+              </p:style>
               <p:txBody>
-                <a:bodyPr wrap="square" rtlCol="0">
-                  <a:spAutoFit/>
+                <a:bodyPr rot="0" spcFirstLastPara="0" vertOverflow="overflow" horzOverflow="overflow" vert="horz" wrap="square" lIns="74295" tIns="37148" rIns="74295" bIns="37148" numCol="1" spcCol="0" rtlCol="0" fromWordArt="0" anchor="ctr" anchorCtr="0" forceAA="0" compatLnSpc="1">
+                  <a:prstTxWarp prst="textNoShape">
+                    <a:avLst/>
+                  </a:prstTxWarp>
+                  <a:noAutofit/>
                 </a:bodyPr>
                 <a:lstStyle/>
                 <a:p>
-                  <a:pPr/>
-                  <a14:m>
-                    <m:oMathPara xmlns:m="http://schemas.openxmlformats.org/officeDocument/2006/math">
-                      <m:oMathParaPr>
-                        <m:jc m:val="centerGroup"/>
-                      </m:oMathParaPr>
-                      <m:oMath xmlns:m="http://schemas.openxmlformats.org/officeDocument/2006/math">
-                        <m:r>
-                          <a:rPr lang="en-US" altLang="zh-TW" i="1">
-                            <a:latin typeface="Cambria Math" panose="02040503050406030204" pitchFamily="18" charset="0"/>
-                          </a:rPr>
-                          <m:t>𝑥</m:t>
-                        </m:r>
-                      </m:oMath>
-                    </m:oMathPara>
-                  </a14:m>
-                  <a:endParaRPr lang="zh-TW" altLang="en-US" dirty="0"/>
+                  <a:pPr algn="ctr"/>
+                  <a:endParaRPr lang="zh-TW" altLang="en-US" sz="2000" dirty="0">
+                    <a:solidFill>
+                      <a:schemeClr val="tx1"/>
+                    </a:solidFill>
+                    <a:latin typeface="Times New Roman" panose="02020603050405020304" pitchFamily="18" charset="0"/>
+                    <a:cs typeface="Times New Roman" panose="02020603050405020304" pitchFamily="18" charset="0"/>
+                  </a:endParaRPr>
                 </a:p>
               </p:txBody>
             </p:sp>
-          </mc:Choice>
-          <mc:Fallback>
             <p:sp>
               <p:nvSpPr>
-                <p:cNvPr id="46" name="文字方塊 45">
+                <p:cNvPr id="62" name="橢圓 61">
                   <a:extLst>
                     <a:ext uri="{FF2B5EF4-FFF2-40B4-BE49-F238E27FC236}">
-                      <a16:creationId xmlns:a16="http://schemas.microsoft.com/office/drawing/2014/main" id="{F9381824-E8D5-4BFC-91DD-94D582F39669}"/>
+                      <a16:creationId xmlns:a16="http://schemas.microsoft.com/office/drawing/2014/main" id="{590205C3-404B-47C5-9E3F-133C45A0FF04}"/>
                     </a:ext>
                   </a:extLst>
                 </p:cNvPr>
-                <p:cNvSpPr txBox="1">
-                  <a:spLocks noRot="1" noChangeAspect="1" noMove="1" noResize="1" noEditPoints="1" noAdjustHandles="1" noChangeArrowheads="1" noChangeShapeType="1" noTextEdit="1"/>
-                </p:cNvSpPr>
+                <p:cNvSpPr/>
                 <p:nvPr/>
               </p:nvSpPr>
               <p:spPr>
                 <a:xfrm>
-                  <a:off x="6747663" y="592474"/>
-                  <a:ext cx="500693" cy="369332"/>
+                  <a:off x="6200578" y="1119065"/>
+                  <a:ext cx="131269" cy="131269"/>
                 </a:xfrm>
-                <a:prstGeom prst="rect">
+                <a:prstGeom prst="ellipse">
                   <a:avLst/>
                 </a:prstGeom>
-                <a:blipFill>
-                  <a:blip r:embed="rId3"/>
-                  <a:stretch>
-                    <a:fillRect/>
-                  </a:stretch>
-                </a:blipFill>
+                <a:solidFill>
+                  <a:schemeClr val="tx1"/>
+                </a:solidFill>
+                <a:ln>
+                  <a:noFill/>
+                </a:ln>
               </p:spPr>
+              <p:style>
+                <a:lnRef idx="2">
+                  <a:schemeClr val="accent1">
+                    <a:shade val="50000"/>
+                  </a:schemeClr>
+                </a:lnRef>
+                <a:fillRef idx="1">
+                  <a:schemeClr val="accent1"/>
+                </a:fillRef>
+                <a:effectRef idx="0">
+                  <a:schemeClr val="accent1"/>
+                </a:effectRef>
+                <a:fontRef idx="minor">
+                  <a:schemeClr val="lt1"/>
+                </a:fontRef>
+              </p:style>
               <p:txBody>
-                <a:bodyPr/>
+                <a:bodyPr rot="0" spcFirstLastPara="0" vertOverflow="overflow" horzOverflow="overflow" vert="horz" wrap="square" lIns="74295" tIns="37148" rIns="74295" bIns="37148" numCol="1" spcCol="0" rtlCol="0" fromWordArt="0" anchor="ctr" anchorCtr="0" forceAA="0" compatLnSpc="1">
+                  <a:prstTxWarp prst="textNoShape">
+                    <a:avLst/>
+                  </a:prstTxWarp>
+                  <a:noAutofit/>
+                </a:bodyPr>
                 <a:lstStyle/>
                 <a:p>
-                  <a:r>
-                    <a:rPr lang="zh-TW" altLang="en-US">
-                      <a:noFill/>
-                    </a:rPr>
-                    <a:t> </a:t>
-                  </a:r>
+                  <a:pPr algn="ctr"/>
+                  <a:endParaRPr lang="zh-TW" altLang="en-US" sz="2000">
+                    <a:latin typeface="Times New Roman" panose="02020603050405020304" pitchFamily="18" charset="0"/>
+                    <a:cs typeface="Times New Roman" panose="02020603050405020304" pitchFamily="18" charset="0"/>
+                  </a:endParaRPr>
                 </a:p>
               </p:txBody>
             </p:sp>
-          </mc:Fallback>
-        </mc:AlternateContent>
-        <mc:AlternateContent xmlns:mc="http://schemas.openxmlformats.org/markup-compatibility/2006">
-          <mc:Choice xmlns:a14="http://schemas.microsoft.com/office/drawing/2010/main" Requires="a14">
-            <p:sp>
-              <p:nvSpPr>
-                <p:cNvPr id="47" name="文字方塊 46">
-                  <a:extLst>
-                    <a:ext uri="{FF2B5EF4-FFF2-40B4-BE49-F238E27FC236}">
-                      <a16:creationId xmlns:a16="http://schemas.microsoft.com/office/drawing/2014/main" id="{5E2D19B0-E246-47EA-BEFF-DC7713F756AE}"/>
-                    </a:ext>
-                  </a:extLst>
-                </p:cNvPr>
-                <p:cNvSpPr txBox="1"/>
-                <p:nvPr/>
-              </p:nvSpPr>
-              <p:spPr>
-                <a:xfrm>
-                  <a:off x="6281529" y="86196"/>
-                  <a:ext cx="500693" cy="369332"/>
-                </a:xfrm>
-                <a:prstGeom prst="rect">
-                  <a:avLst/>
-                </a:prstGeom>
-                <a:noFill/>
-              </p:spPr>
-              <p:txBody>
-                <a:bodyPr wrap="square" rtlCol="0">
-                  <a:spAutoFit/>
-                </a:bodyPr>
-                <a:lstStyle/>
-                <a:p>
-                  <a:pPr/>
-                  <a14:m>
-                    <m:oMathPara xmlns:m="http://schemas.openxmlformats.org/officeDocument/2006/math">
-                      <m:oMathParaPr>
-                        <m:jc m:val="centerGroup"/>
-                      </m:oMathParaPr>
-                      <m:oMath xmlns:m="http://schemas.openxmlformats.org/officeDocument/2006/math">
-                        <m:r>
-                          <a:rPr lang="en-US" altLang="zh-TW" i="1">
-                            <a:latin typeface="Cambria Math" panose="02040503050406030204" pitchFamily="18" charset="0"/>
-                          </a:rPr>
-                          <m:t>𝑦</m:t>
-                        </m:r>
-                      </m:oMath>
-                    </m:oMathPara>
-                  </a14:m>
-                  <a:endParaRPr lang="zh-TW" altLang="en-US" dirty="0"/>
-                </a:p>
-              </p:txBody>
-            </p:sp>
-          </mc:Choice>
-          <mc:Fallback>
-            <p:sp>
-              <p:nvSpPr>
-                <p:cNvPr id="47" name="文字方塊 46">
-                  <a:extLst>
-                    <a:ext uri="{FF2B5EF4-FFF2-40B4-BE49-F238E27FC236}">
-                      <a16:creationId xmlns:a16="http://schemas.microsoft.com/office/drawing/2014/main" id="{5E2D19B0-E246-47EA-BEFF-DC7713F756AE}"/>
-                    </a:ext>
-                  </a:extLst>
-                </p:cNvPr>
-                <p:cNvSpPr txBox="1">
-                  <a:spLocks noRot="1" noChangeAspect="1" noMove="1" noResize="1" noEditPoints="1" noAdjustHandles="1" noChangeArrowheads="1" noChangeShapeType="1" noTextEdit="1"/>
-                </p:cNvSpPr>
-                <p:nvPr/>
-              </p:nvSpPr>
-              <p:spPr>
-                <a:xfrm>
-                  <a:off x="6281529" y="86196"/>
-                  <a:ext cx="500693" cy="369332"/>
-                </a:xfrm>
-                <a:prstGeom prst="rect">
-                  <a:avLst/>
-                </a:prstGeom>
-                <a:blipFill>
-                  <a:blip r:embed="rId4"/>
-                  <a:stretch>
-                    <a:fillRect b="-22642"/>
-                  </a:stretch>
-                </a:blipFill>
-              </p:spPr>
-              <p:txBody>
-                <a:bodyPr/>
-                <a:lstStyle/>
-                <a:p>
-                  <a:r>
-                    <a:rPr lang="zh-TW" altLang="en-US">
-                      <a:noFill/>
-                    </a:rPr>
-                    <a:t> </a:t>
-                  </a:r>
-                </a:p>
-              </p:txBody>
-            </p:sp>
-          </mc:Fallback>
-        </mc:AlternateContent>
+          </p:grpSp>
+        </p:grpSp>
         <p:grpSp>
           <p:nvGrpSpPr>
-            <p:cNvPr id="63" name="群組 62">
+            <p:cNvPr id="3" name="群組 2">
               <a:extLst>
                 <a:ext uri="{FF2B5EF4-FFF2-40B4-BE49-F238E27FC236}">
-                  <a16:creationId xmlns:a16="http://schemas.microsoft.com/office/drawing/2014/main" id="{86C01793-27FB-4469-B902-77A19DA60798}"/>
+                  <a16:creationId xmlns:a16="http://schemas.microsoft.com/office/drawing/2014/main" id="{5FDA83A2-C41F-4A11-8390-268C85ADC071}"/>
                 </a:ext>
               </a:extLst>
             </p:cNvPr>
@@ -3699,18 +3978,18 @@
           </p:nvGrpSpPr>
           <p:grpSpPr>
             <a:xfrm>
-              <a:off x="6473200" y="745891"/>
-              <a:ext cx="77620" cy="77620"/>
-              <a:chOff x="5995892" y="914379"/>
-              <a:chExt cx="540639" cy="540639"/>
+              <a:off x="7852741" y="3143777"/>
+              <a:ext cx="1776730" cy="1578221"/>
+              <a:chOff x="4630105" y="42452"/>
+              <a:chExt cx="1879637" cy="1669627"/>
             </a:xfrm>
           </p:grpSpPr>
           <p:sp>
             <p:nvSpPr>
-              <p:cNvPr id="61" name="圓形: 空心 60">
+              <p:cNvPr id="18" name="六邊形 17">
                 <a:extLst>
                   <a:ext uri="{FF2B5EF4-FFF2-40B4-BE49-F238E27FC236}">
-                    <a16:creationId xmlns:a16="http://schemas.microsoft.com/office/drawing/2014/main" id="{4095E452-70E7-4ED1-B8B6-9B95E719916F}"/>
+                    <a16:creationId xmlns:a16="http://schemas.microsoft.com/office/drawing/2014/main" id="{F0697EBA-83D2-4D22-8B5F-6081014D393C}"/>
                   </a:ext>
                 </a:extLst>
               </p:cNvPr>
@@ -3719,12 +3998,13 @@
             </p:nvSpPr>
             <p:spPr>
               <a:xfrm>
-                <a:off x="5995892" y="914379"/>
-                <a:ext cx="540639" cy="540639"/>
+                <a:off x="4630105" y="432916"/>
+                <a:ext cx="1483948" cy="1279163"/>
               </a:xfrm>
-              <a:prstGeom prst="donut">
+              <a:prstGeom prst="hexagon">
                 <a:avLst>
-                  <a:gd name="adj" fmla="val 38442"/>
+                  <a:gd name="adj" fmla="val 29067"/>
+                  <a:gd name="vf" fmla="val 115470"/>
                 </a:avLst>
               </a:prstGeom>
               <a:solidFill>
@@ -3753,1816 +4033,25 @@
               </a:fontRef>
             </p:style>
             <p:txBody>
-              <a:bodyPr rot="0" spcFirstLastPara="0" vertOverflow="overflow" horzOverflow="overflow" vert="horz" wrap="square" lIns="91440" tIns="45720" rIns="91440" bIns="45720" numCol="1" spcCol="0" rtlCol="0" fromWordArt="0" anchor="ctr" anchorCtr="0" forceAA="0" compatLnSpc="1">
-                <a:prstTxWarp prst="textNoShape">
-                  <a:avLst/>
-                </a:prstTxWarp>
-                <a:noAutofit/>
-              </a:bodyPr>
+              <a:bodyPr rtlCol="0" anchor="ctr"/>
               <a:lstStyle/>
               <a:p>
                 <a:pPr algn="ctr"/>
-                <a:endParaRPr lang="zh-TW" altLang="en-US" dirty="0">
-                  <a:solidFill>
-                    <a:schemeClr val="tx1"/>
-                  </a:solidFill>
+                <a:endParaRPr lang="zh-TW" altLang="en-US" sz="2000" dirty="0">
+                  <a:latin typeface="Times New Roman" panose="02020603050405020304" pitchFamily="18" charset="0"/>
+                  <a:cs typeface="Times New Roman" panose="02020603050405020304" pitchFamily="18" charset="0"/>
                 </a:endParaRPr>
               </a:p>
             </p:txBody>
           </p:sp>
-          <p:sp>
-            <p:nvSpPr>
-              <p:cNvPr id="62" name="橢圓 61">
-                <a:extLst>
-                  <a:ext uri="{FF2B5EF4-FFF2-40B4-BE49-F238E27FC236}">
-                    <a16:creationId xmlns:a16="http://schemas.microsoft.com/office/drawing/2014/main" id="{590205C3-404B-47C5-9E3F-133C45A0FF04}"/>
-                  </a:ext>
-                </a:extLst>
-              </p:cNvPr>
-              <p:cNvSpPr/>
-              <p:nvPr/>
-            </p:nvSpPr>
-            <p:spPr>
-              <a:xfrm>
-                <a:off x="6200578" y="1119065"/>
-                <a:ext cx="131269" cy="131269"/>
-              </a:xfrm>
-              <a:prstGeom prst="ellipse">
-                <a:avLst/>
-              </a:prstGeom>
-              <a:solidFill>
-                <a:schemeClr val="tx1"/>
-              </a:solidFill>
-              <a:ln>
-                <a:noFill/>
-              </a:ln>
-            </p:spPr>
-            <p:style>
-              <a:lnRef idx="2">
-                <a:schemeClr val="accent1">
-                  <a:shade val="50000"/>
-                </a:schemeClr>
-              </a:lnRef>
-              <a:fillRef idx="1">
-                <a:schemeClr val="accent1"/>
-              </a:fillRef>
-              <a:effectRef idx="0">
-                <a:schemeClr val="accent1"/>
-              </a:effectRef>
-              <a:fontRef idx="minor">
-                <a:schemeClr val="lt1"/>
-              </a:fontRef>
-            </p:style>
-            <p:txBody>
-              <a:bodyPr rot="0" spcFirstLastPara="0" vertOverflow="overflow" horzOverflow="overflow" vert="horz" wrap="square" lIns="91440" tIns="45720" rIns="91440" bIns="45720" numCol="1" spcCol="0" rtlCol="0" fromWordArt="0" anchor="ctr" anchorCtr="0" forceAA="0" compatLnSpc="1">
-                <a:prstTxWarp prst="textNoShape">
-                  <a:avLst/>
-                </a:prstTxWarp>
-                <a:noAutofit/>
-              </a:bodyPr>
-              <a:lstStyle/>
-              <a:p>
-                <a:pPr algn="ctr"/>
-                <a:endParaRPr lang="zh-TW" altLang="en-US"/>
-              </a:p>
-            </p:txBody>
-          </p:sp>
-        </p:grpSp>
-        <mc:AlternateContent xmlns:mc="http://schemas.openxmlformats.org/markup-compatibility/2006">
-          <mc:Choice xmlns:a14="http://schemas.microsoft.com/office/drawing/2010/main" Requires="a14">
-            <p:sp>
-              <p:nvSpPr>
-                <p:cNvPr id="64" name="文字方塊 63">
-                  <a:extLst>
-                    <a:ext uri="{FF2B5EF4-FFF2-40B4-BE49-F238E27FC236}">
-                      <a16:creationId xmlns:a16="http://schemas.microsoft.com/office/drawing/2014/main" id="{1AC21DCA-45FB-481B-8FAD-616224AF2E4F}"/>
-                    </a:ext>
-                  </a:extLst>
-                </p:cNvPr>
-                <p:cNvSpPr txBox="1"/>
-                <p:nvPr/>
-              </p:nvSpPr>
-              <p:spPr>
-                <a:xfrm>
-                  <a:off x="6095200" y="654387"/>
-                  <a:ext cx="500693" cy="369332"/>
-                </a:xfrm>
-                <a:prstGeom prst="rect">
-                  <a:avLst/>
-                </a:prstGeom>
-                <a:noFill/>
-              </p:spPr>
-              <p:txBody>
-                <a:bodyPr wrap="square" rtlCol="0">
-                  <a:spAutoFit/>
-                </a:bodyPr>
-                <a:lstStyle/>
-                <a:p>
-                  <a:pPr/>
-                  <a14:m>
-                    <m:oMathPara xmlns:m="http://schemas.openxmlformats.org/officeDocument/2006/math">
-                      <m:oMathParaPr>
-                        <m:jc m:val="centerGroup"/>
-                      </m:oMathParaPr>
-                      <m:oMath xmlns:m="http://schemas.openxmlformats.org/officeDocument/2006/math">
-                        <m:r>
-                          <a:rPr lang="en-US" altLang="zh-TW" i="1">
-                            <a:latin typeface="Cambria Math" panose="02040503050406030204" pitchFamily="18" charset="0"/>
-                          </a:rPr>
-                          <m:t>𝑧</m:t>
-                        </m:r>
-                      </m:oMath>
-                    </m:oMathPara>
-                  </a14:m>
-                  <a:endParaRPr lang="zh-TW" altLang="en-US" dirty="0"/>
-                </a:p>
-              </p:txBody>
-            </p:sp>
-          </mc:Choice>
-          <mc:Fallback>
-            <p:sp>
-              <p:nvSpPr>
-                <p:cNvPr id="64" name="文字方塊 63">
-                  <a:extLst>
-                    <a:ext uri="{FF2B5EF4-FFF2-40B4-BE49-F238E27FC236}">
-                      <a16:creationId xmlns:a16="http://schemas.microsoft.com/office/drawing/2014/main" id="{1AC21DCA-45FB-481B-8FAD-616224AF2E4F}"/>
-                    </a:ext>
-                  </a:extLst>
-                </p:cNvPr>
-                <p:cNvSpPr txBox="1">
-                  <a:spLocks noRot="1" noChangeAspect="1" noMove="1" noResize="1" noEditPoints="1" noAdjustHandles="1" noChangeArrowheads="1" noChangeShapeType="1" noTextEdit="1"/>
-                </p:cNvSpPr>
-                <p:nvPr/>
-              </p:nvSpPr>
-              <p:spPr>
-                <a:xfrm>
-                  <a:off x="6095200" y="654387"/>
-                  <a:ext cx="500693" cy="369332"/>
-                </a:xfrm>
-                <a:prstGeom prst="rect">
-                  <a:avLst/>
-                </a:prstGeom>
-                <a:blipFill>
-                  <a:blip r:embed="rId5"/>
-                  <a:stretch>
-                    <a:fillRect/>
-                  </a:stretch>
-                </a:blipFill>
-              </p:spPr>
-              <p:txBody>
-                <a:bodyPr/>
-                <a:lstStyle/>
-                <a:p>
-                  <a:r>
-                    <a:rPr lang="zh-TW" altLang="en-US">
-                      <a:noFill/>
-                    </a:rPr>
-                    <a:t> </a:t>
-                  </a:r>
-                </a:p>
-              </p:txBody>
-            </p:sp>
-          </mc:Fallback>
-        </mc:AlternateContent>
-      </p:grpSp>
-      <p:grpSp>
-        <p:nvGrpSpPr>
-          <p:cNvPr id="3" name="群組 2">
-            <a:extLst>
-              <a:ext uri="{FF2B5EF4-FFF2-40B4-BE49-F238E27FC236}">
-                <a16:creationId xmlns:a16="http://schemas.microsoft.com/office/drawing/2014/main" id="{5FDA83A2-C41F-4A11-8390-268C85ADC071}"/>
-              </a:ext>
-            </a:extLst>
-          </p:cNvPr>
-          <p:cNvGrpSpPr/>
-          <p:nvPr/>
-        </p:nvGrpSpPr>
-        <p:grpSpPr>
-          <a:xfrm>
-            <a:off x="9446082" y="3630795"/>
-            <a:ext cx="2186744" cy="1883192"/>
-            <a:chOff x="4630105" y="93366"/>
-            <a:chExt cx="1879637" cy="1618713"/>
-          </a:xfrm>
-        </p:grpSpPr>
-        <p:sp>
-          <p:nvSpPr>
-            <p:cNvPr id="18" name="六邊形 17">
-              <a:extLst>
-                <a:ext uri="{FF2B5EF4-FFF2-40B4-BE49-F238E27FC236}">
-                  <a16:creationId xmlns:a16="http://schemas.microsoft.com/office/drawing/2014/main" id="{F0697EBA-83D2-4D22-8B5F-6081014D393C}"/>
-                </a:ext>
-              </a:extLst>
-            </p:cNvPr>
-            <p:cNvSpPr/>
-            <p:nvPr/>
-          </p:nvSpPr>
-          <p:spPr>
-            <a:xfrm>
-              <a:off x="4630105" y="432916"/>
-              <a:ext cx="1483948" cy="1279163"/>
-            </a:xfrm>
-            <a:prstGeom prst="hexagon">
-              <a:avLst>
-                <a:gd name="adj" fmla="val 29067"/>
-                <a:gd name="vf" fmla="val 115470"/>
-              </a:avLst>
-            </a:prstGeom>
-            <a:solidFill>
-              <a:schemeClr val="bg1"/>
-            </a:solidFill>
-            <a:ln>
-              <a:solidFill>
-                <a:schemeClr val="tx1"/>
-              </a:solidFill>
-            </a:ln>
-          </p:spPr>
-          <p:style>
-            <a:lnRef idx="2">
-              <a:schemeClr val="accent1">
-                <a:shade val="50000"/>
-              </a:schemeClr>
-            </a:lnRef>
-            <a:fillRef idx="1">
-              <a:schemeClr val="accent1"/>
-            </a:fillRef>
-            <a:effectRef idx="0">
-              <a:schemeClr val="accent1"/>
-            </a:effectRef>
-            <a:fontRef idx="minor">
-              <a:schemeClr val="lt1"/>
-            </a:fontRef>
-          </p:style>
-          <p:txBody>
-            <a:bodyPr rtlCol="0" anchor="ctr"/>
-            <a:lstStyle/>
-            <a:p>
-              <a:pPr algn="ctr"/>
-              <a:endParaRPr lang="zh-TW" altLang="en-US" dirty="0"/>
-            </a:p>
-          </p:txBody>
-        </p:sp>
-        <mc:AlternateContent xmlns:mc="http://schemas.openxmlformats.org/markup-compatibility/2006">
-          <mc:Choice xmlns:a14="http://schemas.microsoft.com/office/drawing/2010/main" Requires="a14">
-            <p:sp>
-              <p:nvSpPr>
-                <p:cNvPr id="23" name="文字方塊 22">
-                  <a:extLst>
-                    <a:ext uri="{FF2B5EF4-FFF2-40B4-BE49-F238E27FC236}">
-                      <a16:creationId xmlns:a16="http://schemas.microsoft.com/office/drawing/2014/main" id="{4A972CE0-B624-471F-AEE8-237ADA8C4A64}"/>
-                    </a:ext>
-                  </a:extLst>
-                </p:cNvPr>
-                <p:cNvSpPr txBox="1"/>
-                <p:nvPr/>
-              </p:nvSpPr>
-              <p:spPr>
-                <a:xfrm>
-                  <a:off x="6009049" y="1044766"/>
-                  <a:ext cx="500693" cy="294333"/>
-                </a:xfrm>
-                <a:prstGeom prst="rect">
-                  <a:avLst/>
-                </a:prstGeom>
-                <a:noFill/>
-              </p:spPr>
-              <p:txBody>
-                <a:bodyPr wrap="square" rtlCol="0">
-                  <a:spAutoFit/>
-                </a:bodyPr>
-                <a:lstStyle/>
-                <a:p>
-                  <a:pPr/>
-                  <a14:m>
-                    <m:oMathPara xmlns:m="http://schemas.openxmlformats.org/officeDocument/2006/math">
-                      <m:oMathParaPr>
-                        <m:jc m:val="centerGroup"/>
-                      </m:oMathParaPr>
-                      <m:oMath xmlns:m="http://schemas.openxmlformats.org/officeDocument/2006/math">
-                        <m:r>
-                          <a:rPr lang="en-US" altLang="zh-TW" i="1">
-                            <a:latin typeface="Cambria Math" panose="02040503050406030204" pitchFamily="18" charset="0"/>
-                          </a:rPr>
-                          <m:t>𝐾</m:t>
-                        </m:r>
-                      </m:oMath>
-                    </m:oMathPara>
-                  </a14:m>
-                  <a:endParaRPr lang="zh-TW" altLang="en-US" dirty="0"/>
-                </a:p>
-              </p:txBody>
-            </p:sp>
-          </mc:Choice>
-          <mc:Fallback>
-            <p:sp>
-              <p:nvSpPr>
-                <p:cNvPr id="23" name="文字方塊 22">
-                  <a:extLst>
-                    <a:ext uri="{FF2B5EF4-FFF2-40B4-BE49-F238E27FC236}">
-                      <a16:creationId xmlns:a16="http://schemas.microsoft.com/office/drawing/2014/main" id="{4A972CE0-B624-471F-AEE8-237ADA8C4A64}"/>
-                    </a:ext>
-                  </a:extLst>
-                </p:cNvPr>
-                <p:cNvSpPr txBox="1">
-                  <a:spLocks noRot="1" noChangeAspect="1" noMove="1" noResize="1" noEditPoints="1" noAdjustHandles="1" noChangeArrowheads="1" noChangeShapeType="1" noTextEdit="1"/>
-                </p:cNvSpPr>
-                <p:nvPr/>
-              </p:nvSpPr>
-              <p:spPr>
-                <a:xfrm>
-                  <a:off x="6009049" y="1044766"/>
-                  <a:ext cx="500693" cy="294333"/>
-                </a:xfrm>
-                <a:prstGeom prst="rect">
-                  <a:avLst/>
-                </a:prstGeom>
-                <a:blipFill>
-                  <a:blip r:embed="rId6"/>
-                  <a:stretch>
-                    <a:fillRect/>
-                  </a:stretch>
-                </a:blipFill>
-              </p:spPr>
-              <p:txBody>
-                <a:bodyPr/>
-                <a:lstStyle/>
-                <a:p>
-                  <a:r>
-                    <a:rPr lang="zh-TW" altLang="en-US">
-                      <a:noFill/>
-                    </a:rPr>
-                    <a:t> </a:t>
-                  </a:r>
-                </a:p>
-              </p:txBody>
-            </p:sp>
-          </mc:Fallback>
-        </mc:AlternateContent>
-        <mc:AlternateContent xmlns:mc="http://schemas.openxmlformats.org/markup-compatibility/2006">
-          <mc:Choice xmlns:a14="http://schemas.microsoft.com/office/drawing/2010/main" Requires="a14">
-            <p:sp>
-              <p:nvSpPr>
-                <p:cNvPr id="24" name="文字方塊 23">
-                  <a:extLst>
-                    <a:ext uri="{FF2B5EF4-FFF2-40B4-BE49-F238E27FC236}">
-                      <a16:creationId xmlns:a16="http://schemas.microsoft.com/office/drawing/2014/main" id="{A5D18D05-50DF-4D1E-AAFB-B58A0119A134}"/>
-                    </a:ext>
-                  </a:extLst>
-                </p:cNvPr>
-                <p:cNvSpPr txBox="1"/>
-                <p:nvPr/>
-              </p:nvSpPr>
-              <p:spPr>
-                <a:xfrm>
-                  <a:off x="5510827" y="93366"/>
-                  <a:ext cx="500693" cy="294333"/>
-                </a:xfrm>
-                <a:prstGeom prst="rect">
-                  <a:avLst/>
-                </a:prstGeom>
-                <a:noFill/>
-              </p:spPr>
-              <p:txBody>
-                <a:bodyPr wrap="square" rtlCol="0">
-                  <a:spAutoFit/>
-                </a:bodyPr>
-                <a:lstStyle/>
-                <a:p>
-                  <a:pPr/>
-                  <a14:m>
-                    <m:oMathPara xmlns:m="http://schemas.openxmlformats.org/officeDocument/2006/math">
-                      <m:oMathParaPr>
-                        <m:jc m:val="centerGroup"/>
-                      </m:oMathParaPr>
-                      <m:oMath xmlns:m="http://schemas.openxmlformats.org/officeDocument/2006/math">
-                        <m:r>
-                          <a:rPr lang="en-US" altLang="zh-TW" i="1">
-                            <a:latin typeface="Cambria Math" panose="02040503050406030204" pitchFamily="18" charset="0"/>
-                          </a:rPr>
-                          <m:t>𝐾</m:t>
-                        </m:r>
-                        <m:r>
-                          <a:rPr lang="en-US" altLang="zh-TW" i="1">
-                            <a:latin typeface="Cambria Math" panose="02040503050406030204" pitchFamily="18" charset="0"/>
-                          </a:rPr>
-                          <m:t>’</m:t>
-                        </m:r>
-                      </m:oMath>
-                    </m:oMathPara>
-                  </a14:m>
-                  <a:endParaRPr lang="zh-TW" altLang="en-US" dirty="0"/>
-                </a:p>
-              </p:txBody>
-            </p:sp>
-          </mc:Choice>
-          <mc:Fallback>
-            <p:sp>
-              <p:nvSpPr>
-                <p:cNvPr id="24" name="文字方塊 23">
-                  <a:extLst>
-                    <a:ext uri="{FF2B5EF4-FFF2-40B4-BE49-F238E27FC236}">
-                      <a16:creationId xmlns:a16="http://schemas.microsoft.com/office/drawing/2014/main" id="{A5D18D05-50DF-4D1E-AAFB-B58A0119A134}"/>
-                    </a:ext>
-                  </a:extLst>
-                </p:cNvPr>
-                <p:cNvSpPr txBox="1">
-                  <a:spLocks noRot="1" noChangeAspect="1" noMove="1" noResize="1" noEditPoints="1" noAdjustHandles="1" noChangeArrowheads="1" noChangeShapeType="1" noTextEdit="1"/>
-                </p:cNvSpPr>
-                <p:nvPr/>
-              </p:nvSpPr>
-              <p:spPr>
-                <a:xfrm>
-                  <a:off x="5510827" y="93366"/>
-                  <a:ext cx="500693" cy="294333"/>
-                </a:xfrm>
-                <a:prstGeom prst="rect">
-                  <a:avLst/>
-                </a:prstGeom>
-                <a:blipFill>
-                  <a:blip r:embed="rId7"/>
-                  <a:stretch>
-                    <a:fillRect/>
-                  </a:stretch>
-                </a:blipFill>
-              </p:spPr>
-              <p:txBody>
-                <a:bodyPr/>
-                <a:lstStyle/>
-                <a:p>
-                  <a:r>
-                    <a:rPr lang="zh-TW" altLang="en-US">
-                      <a:noFill/>
-                    </a:rPr>
-                    <a:t> </a:t>
-                  </a:r>
-                </a:p>
-              </p:txBody>
-            </p:sp>
-          </mc:Fallback>
-        </mc:AlternateContent>
-        <mc:AlternateContent xmlns:mc="http://schemas.openxmlformats.org/markup-compatibility/2006">
-          <mc:Choice xmlns:a14="http://schemas.microsoft.com/office/drawing/2010/main" Requires="a14">
-            <p:sp>
-              <p:nvSpPr>
-                <p:cNvPr id="25" name="文字方塊 24">
-                  <a:extLst>
-                    <a:ext uri="{FF2B5EF4-FFF2-40B4-BE49-F238E27FC236}">
-                      <a16:creationId xmlns:a16="http://schemas.microsoft.com/office/drawing/2014/main" id="{9889234A-4146-4DFD-A384-1D93E5EBD06B}"/>
-                    </a:ext>
-                  </a:extLst>
-                </p:cNvPr>
-                <p:cNvSpPr txBox="1"/>
-                <p:nvPr/>
-              </p:nvSpPr>
-              <p:spPr>
-                <a:xfrm>
-                  <a:off x="5830031" y="479920"/>
-                  <a:ext cx="500693" cy="294333"/>
-                </a:xfrm>
-                <a:prstGeom prst="rect">
-                  <a:avLst/>
-                </a:prstGeom>
-                <a:noFill/>
-              </p:spPr>
-              <p:txBody>
-                <a:bodyPr wrap="square" rtlCol="0">
-                  <a:spAutoFit/>
-                </a:bodyPr>
-                <a:lstStyle/>
-                <a:p>
-                  <a:pPr/>
-                  <a14:m>
-                    <m:oMathPara xmlns:m="http://schemas.openxmlformats.org/officeDocument/2006/math">
-                      <m:oMathParaPr>
-                        <m:jc m:val="centerGroup"/>
-                      </m:oMathParaPr>
-                      <m:oMath xmlns:m="http://schemas.openxmlformats.org/officeDocument/2006/math">
-                        <m:r>
-                          <a:rPr lang="en-US" altLang="zh-TW" i="1">
-                            <a:latin typeface="Cambria Math" panose="02040503050406030204" pitchFamily="18" charset="0"/>
-                          </a:rPr>
-                          <m:t>𝑀</m:t>
-                        </m:r>
-                      </m:oMath>
-                    </m:oMathPara>
-                  </a14:m>
-                  <a:endParaRPr lang="zh-TW" altLang="en-US" dirty="0"/>
-                </a:p>
-              </p:txBody>
-            </p:sp>
-          </mc:Choice>
-          <mc:Fallback>
-            <p:sp>
-              <p:nvSpPr>
-                <p:cNvPr id="25" name="文字方塊 24">
-                  <a:extLst>
-                    <a:ext uri="{FF2B5EF4-FFF2-40B4-BE49-F238E27FC236}">
-                      <a16:creationId xmlns:a16="http://schemas.microsoft.com/office/drawing/2014/main" id="{9889234A-4146-4DFD-A384-1D93E5EBD06B}"/>
-                    </a:ext>
-                  </a:extLst>
-                </p:cNvPr>
-                <p:cNvSpPr txBox="1">
-                  <a:spLocks noRot="1" noChangeAspect="1" noMove="1" noResize="1" noEditPoints="1" noAdjustHandles="1" noChangeArrowheads="1" noChangeShapeType="1" noTextEdit="1"/>
-                </p:cNvSpPr>
-                <p:nvPr/>
-              </p:nvSpPr>
-              <p:spPr>
-                <a:xfrm>
-                  <a:off x="5830031" y="479920"/>
-                  <a:ext cx="500693" cy="294333"/>
-                </a:xfrm>
-                <a:prstGeom prst="rect">
-                  <a:avLst/>
-                </a:prstGeom>
-                <a:blipFill>
-                  <a:blip r:embed="rId8"/>
-                  <a:stretch>
-                    <a:fillRect/>
-                  </a:stretch>
-                </a:blipFill>
-              </p:spPr>
-              <p:txBody>
-                <a:bodyPr/>
-                <a:lstStyle/>
-                <a:p>
-                  <a:r>
-                    <a:rPr lang="zh-TW" altLang="en-US">
-                      <a:noFill/>
-                    </a:rPr>
-                    <a:t> </a:t>
-                  </a:r>
-                </a:p>
-              </p:txBody>
-            </p:sp>
-          </mc:Fallback>
-        </mc:AlternateContent>
-        <p:sp>
-          <p:nvSpPr>
-            <p:cNvPr id="26" name="橢圓 25">
-              <a:extLst>
-                <a:ext uri="{FF2B5EF4-FFF2-40B4-BE49-F238E27FC236}">
-                  <a16:creationId xmlns:a16="http://schemas.microsoft.com/office/drawing/2014/main" id="{123D994E-8905-46CD-8FAE-24B0A3D5508E}"/>
-                </a:ext>
-              </a:extLst>
-            </p:cNvPr>
-            <p:cNvSpPr/>
-            <p:nvPr/>
-          </p:nvSpPr>
-          <p:spPr>
-            <a:xfrm rot="1800318">
-              <a:off x="5704815" y="395314"/>
-              <a:ext cx="72000" cy="72000"/>
-            </a:xfrm>
-            <a:prstGeom prst="ellipse">
-              <a:avLst/>
-            </a:prstGeom>
-            <a:solidFill>
-              <a:schemeClr val="tx1"/>
-            </a:solidFill>
-            <a:ln w="6350">
-              <a:solidFill>
-                <a:schemeClr val="tx1"/>
-              </a:solidFill>
-            </a:ln>
-          </p:spPr>
-          <p:style>
-            <a:lnRef idx="2">
-              <a:schemeClr val="dk1">
-                <a:shade val="50000"/>
-              </a:schemeClr>
-            </a:lnRef>
-            <a:fillRef idx="1">
-              <a:schemeClr val="dk1"/>
-            </a:fillRef>
-            <a:effectRef idx="0">
-              <a:schemeClr val="dk1"/>
-            </a:effectRef>
-            <a:fontRef idx="minor">
-              <a:schemeClr val="lt1"/>
-            </a:fontRef>
-          </p:style>
-          <p:txBody>
-            <a:bodyPr rtlCol="0" anchor="ctr"/>
-            <a:lstStyle/>
-            <a:p>
-              <a:pPr algn="ctr"/>
-              <a:endParaRPr lang="zh-TW" altLang="en-US" dirty="0"/>
-            </a:p>
-          </p:txBody>
-        </p:sp>
-        <p:sp>
-          <p:nvSpPr>
-            <p:cNvPr id="27" name="橢圓 26">
-              <a:extLst>
-                <a:ext uri="{FF2B5EF4-FFF2-40B4-BE49-F238E27FC236}">
-                  <a16:creationId xmlns:a16="http://schemas.microsoft.com/office/drawing/2014/main" id="{9FDB16D7-52BC-493A-B1B4-54F5D3236A58}"/>
-                </a:ext>
-              </a:extLst>
-            </p:cNvPr>
-            <p:cNvSpPr/>
-            <p:nvPr/>
-          </p:nvSpPr>
-          <p:spPr>
-            <a:xfrm rot="1800318">
-              <a:off x="6073550" y="1034866"/>
-              <a:ext cx="72000" cy="72000"/>
-            </a:xfrm>
-            <a:prstGeom prst="ellipse">
-              <a:avLst/>
-            </a:prstGeom>
-            <a:solidFill>
-              <a:schemeClr val="tx1"/>
-            </a:solidFill>
-            <a:ln w="6350">
-              <a:solidFill>
-                <a:schemeClr val="tx1"/>
-              </a:solidFill>
-            </a:ln>
-          </p:spPr>
-          <p:style>
-            <a:lnRef idx="2">
-              <a:schemeClr val="dk1">
-                <a:shade val="50000"/>
-              </a:schemeClr>
-            </a:lnRef>
-            <a:fillRef idx="1">
-              <a:schemeClr val="dk1"/>
-            </a:fillRef>
-            <a:effectRef idx="0">
-              <a:schemeClr val="dk1"/>
-            </a:effectRef>
-            <a:fontRef idx="minor">
-              <a:schemeClr val="lt1"/>
-            </a:fontRef>
-          </p:style>
-          <p:txBody>
-            <a:bodyPr rtlCol="0" anchor="ctr"/>
-            <a:lstStyle/>
-            <a:p>
-              <a:pPr algn="ctr"/>
-              <a:endParaRPr lang="zh-TW" altLang="en-US" dirty="0"/>
-            </a:p>
-          </p:txBody>
-        </p:sp>
-        <mc:AlternateContent xmlns:mc="http://schemas.openxmlformats.org/markup-compatibility/2006">
-          <mc:Choice xmlns:a14="http://schemas.microsoft.com/office/drawing/2010/main" Requires="a14">
-            <p:sp>
-              <p:nvSpPr>
-                <p:cNvPr id="28" name="文字方塊 27">
-                  <a:extLst>
-                    <a:ext uri="{FF2B5EF4-FFF2-40B4-BE49-F238E27FC236}">
-                      <a16:creationId xmlns:a16="http://schemas.microsoft.com/office/drawing/2014/main" id="{283E8ED5-0F51-4EE2-9FDC-01B1883EA98B}"/>
-                    </a:ext>
-                  </a:extLst>
-                </p:cNvPr>
-                <p:cNvSpPr txBox="1"/>
-                <p:nvPr/>
-              </p:nvSpPr>
-              <p:spPr>
-                <a:xfrm>
-                  <a:off x="4942271" y="1044766"/>
-                  <a:ext cx="500693" cy="294333"/>
-                </a:xfrm>
-                <a:prstGeom prst="rect">
-                  <a:avLst/>
-                </a:prstGeom>
-                <a:noFill/>
-              </p:spPr>
-              <p:txBody>
-                <a:bodyPr wrap="square" rtlCol="0">
-                  <a:spAutoFit/>
-                </a:bodyPr>
-                <a:lstStyle/>
-                <a:p>
-                  <a:pPr/>
-                  <a14:m>
-                    <m:oMathPara xmlns:m="http://schemas.openxmlformats.org/officeDocument/2006/math">
-                      <m:oMathParaPr>
-                        <m:jc m:val="centerGroup"/>
-                      </m:oMathParaPr>
-                      <m:oMath xmlns:m="http://schemas.openxmlformats.org/officeDocument/2006/math">
-                        <m:r>
-                          <m:rPr>
-                            <m:sty m:val="p"/>
-                          </m:rPr>
-                          <a:rPr lang="en-US" altLang="zh-TW">
-                            <a:latin typeface="Cambria Math" panose="02040503050406030204" pitchFamily="18" charset="0"/>
-                          </a:rPr>
-                          <m:t>Γ</m:t>
-                        </m:r>
-                      </m:oMath>
-                    </m:oMathPara>
-                  </a14:m>
-                  <a:endParaRPr lang="zh-TW" altLang="en-US" dirty="0"/>
-                </a:p>
-              </p:txBody>
-            </p:sp>
-          </mc:Choice>
-          <mc:Fallback>
-            <p:sp>
-              <p:nvSpPr>
-                <p:cNvPr id="28" name="文字方塊 27">
-                  <a:extLst>
-                    <a:ext uri="{FF2B5EF4-FFF2-40B4-BE49-F238E27FC236}">
-                      <a16:creationId xmlns:a16="http://schemas.microsoft.com/office/drawing/2014/main" id="{283E8ED5-0F51-4EE2-9FDC-01B1883EA98B}"/>
-                    </a:ext>
-                  </a:extLst>
-                </p:cNvPr>
-                <p:cNvSpPr txBox="1">
-                  <a:spLocks noRot="1" noChangeAspect="1" noMove="1" noResize="1" noEditPoints="1" noAdjustHandles="1" noChangeArrowheads="1" noChangeShapeType="1" noTextEdit="1"/>
-                </p:cNvSpPr>
-                <p:nvPr/>
-              </p:nvSpPr>
-              <p:spPr>
-                <a:xfrm>
-                  <a:off x="4942271" y="1044766"/>
-                  <a:ext cx="500693" cy="294333"/>
-                </a:xfrm>
-                <a:prstGeom prst="rect">
-                  <a:avLst/>
-                </a:prstGeom>
-                <a:blipFill>
-                  <a:blip r:embed="rId9"/>
-                  <a:stretch>
-                    <a:fillRect/>
-                  </a:stretch>
-                </a:blipFill>
-              </p:spPr>
-              <p:txBody>
-                <a:bodyPr/>
-                <a:lstStyle/>
-                <a:p>
-                  <a:r>
-                    <a:rPr lang="zh-TW" altLang="en-US">
-                      <a:noFill/>
-                    </a:rPr>
-                    <a:t> </a:t>
-                  </a:r>
-                </a:p>
-              </p:txBody>
-            </p:sp>
-          </mc:Fallback>
-        </mc:AlternateContent>
-        <p:sp>
-          <p:nvSpPr>
-            <p:cNvPr id="29" name="橢圓 28">
-              <a:extLst>
-                <a:ext uri="{FF2B5EF4-FFF2-40B4-BE49-F238E27FC236}">
-                  <a16:creationId xmlns:a16="http://schemas.microsoft.com/office/drawing/2014/main" id="{4305C0AF-4D0C-479E-BADB-A00EC0C525F7}"/>
-                </a:ext>
-              </a:extLst>
-            </p:cNvPr>
-            <p:cNvSpPr/>
-            <p:nvPr/>
-          </p:nvSpPr>
-          <p:spPr>
-            <a:xfrm rot="1800318">
-              <a:off x="5889183" y="715090"/>
-              <a:ext cx="72000" cy="72000"/>
-            </a:xfrm>
-            <a:prstGeom prst="ellipse">
-              <a:avLst/>
-            </a:prstGeom>
-            <a:solidFill>
-              <a:schemeClr val="tx1"/>
-            </a:solidFill>
-            <a:ln w="6350">
-              <a:solidFill>
-                <a:schemeClr val="tx1"/>
-              </a:solidFill>
-            </a:ln>
-          </p:spPr>
-          <p:style>
-            <a:lnRef idx="2">
-              <a:schemeClr val="dk1">
-                <a:shade val="50000"/>
-              </a:schemeClr>
-            </a:lnRef>
-            <a:fillRef idx="1">
-              <a:schemeClr val="dk1"/>
-            </a:fillRef>
-            <a:effectRef idx="0">
-              <a:schemeClr val="dk1"/>
-            </a:effectRef>
-            <a:fontRef idx="minor">
-              <a:schemeClr val="lt1"/>
-            </a:fontRef>
-          </p:style>
-          <p:txBody>
-            <a:bodyPr rtlCol="0" anchor="ctr"/>
-            <a:lstStyle/>
-            <a:p>
-              <a:pPr algn="ctr"/>
-              <a:endParaRPr lang="zh-TW" altLang="en-US" dirty="0"/>
-            </a:p>
-          </p:txBody>
-        </p:sp>
-        <p:sp>
-          <p:nvSpPr>
-            <p:cNvPr id="30" name="橢圓 29">
-              <a:extLst>
-                <a:ext uri="{FF2B5EF4-FFF2-40B4-BE49-F238E27FC236}">
-                  <a16:creationId xmlns:a16="http://schemas.microsoft.com/office/drawing/2014/main" id="{83BDADA2-A496-476E-A8BC-AD2B3166E19F}"/>
-                </a:ext>
-              </a:extLst>
-            </p:cNvPr>
-            <p:cNvSpPr/>
-            <p:nvPr/>
-          </p:nvSpPr>
-          <p:spPr>
-            <a:xfrm rot="1800318">
-              <a:off x="5336079" y="1034866"/>
-              <a:ext cx="72000" cy="72000"/>
-            </a:xfrm>
-            <a:prstGeom prst="ellipse">
-              <a:avLst/>
-            </a:prstGeom>
-            <a:solidFill>
-              <a:schemeClr val="tx1"/>
-            </a:solidFill>
-            <a:ln w="6350">
-              <a:solidFill>
-                <a:schemeClr val="tx1"/>
-              </a:solidFill>
-            </a:ln>
-          </p:spPr>
-          <p:style>
-            <a:lnRef idx="2">
-              <a:schemeClr val="dk1">
-                <a:shade val="50000"/>
-              </a:schemeClr>
-            </a:lnRef>
-            <a:fillRef idx="1">
-              <a:schemeClr val="dk1"/>
-            </a:fillRef>
-            <a:effectRef idx="0">
-              <a:schemeClr val="dk1"/>
-            </a:effectRef>
-            <a:fontRef idx="minor">
-              <a:schemeClr val="lt1"/>
-            </a:fontRef>
-          </p:style>
-          <p:txBody>
-            <a:bodyPr rtlCol="0" anchor="ctr"/>
-            <a:lstStyle/>
-            <a:p>
-              <a:pPr algn="ctr"/>
-              <a:endParaRPr lang="zh-TW" altLang="en-US" dirty="0"/>
-            </a:p>
-          </p:txBody>
-        </p:sp>
-        <p:sp>
-          <p:nvSpPr>
-            <p:cNvPr id="31" name="橢圓 30">
-              <a:extLst>
-                <a:ext uri="{FF2B5EF4-FFF2-40B4-BE49-F238E27FC236}">
-                  <a16:creationId xmlns:a16="http://schemas.microsoft.com/office/drawing/2014/main" id="{439E7B51-CDCD-4B79-8B92-358AA3EAEF51}"/>
-                </a:ext>
-              </a:extLst>
-            </p:cNvPr>
-            <p:cNvSpPr/>
-            <p:nvPr/>
-          </p:nvSpPr>
-          <p:spPr>
-            <a:xfrm rot="1800318">
-              <a:off x="5520447" y="715905"/>
-              <a:ext cx="72000" cy="72000"/>
-            </a:xfrm>
-            <a:prstGeom prst="ellipse">
-              <a:avLst/>
-            </a:prstGeom>
-            <a:solidFill>
-              <a:schemeClr val="tx1"/>
-            </a:solidFill>
-            <a:ln w="6350">
-              <a:solidFill>
-                <a:schemeClr val="tx1"/>
-              </a:solidFill>
-            </a:ln>
-          </p:spPr>
-          <p:style>
-            <a:lnRef idx="2">
-              <a:schemeClr val="dk1">
-                <a:shade val="50000"/>
-              </a:schemeClr>
-            </a:lnRef>
-            <a:fillRef idx="1">
-              <a:schemeClr val="dk1"/>
-            </a:fillRef>
-            <a:effectRef idx="0">
-              <a:schemeClr val="dk1"/>
-            </a:effectRef>
-            <a:fontRef idx="minor">
-              <a:schemeClr val="lt1"/>
-            </a:fontRef>
-          </p:style>
-          <p:txBody>
-            <a:bodyPr rtlCol="0" anchor="ctr"/>
-            <a:lstStyle/>
-            <a:p>
-              <a:pPr algn="ctr"/>
-              <a:endParaRPr lang="zh-TW" altLang="en-US" dirty="0"/>
-            </a:p>
-          </p:txBody>
-        </p:sp>
-        <p:sp>
-          <p:nvSpPr>
-            <p:cNvPr id="32" name="橢圓 31">
-              <a:extLst>
-                <a:ext uri="{FF2B5EF4-FFF2-40B4-BE49-F238E27FC236}">
-                  <a16:creationId xmlns:a16="http://schemas.microsoft.com/office/drawing/2014/main" id="{14C492AD-7AB9-49BB-A7CA-6E2AAF76DFD2}"/>
-                </a:ext>
-              </a:extLst>
-            </p:cNvPr>
-            <p:cNvSpPr/>
-            <p:nvPr/>
-          </p:nvSpPr>
-          <p:spPr>
-            <a:xfrm rot="1800318">
-              <a:off x="5704815" y="1034866"/>
-              <a:ext cx="72000" cy="72000"/>
-            </a:xfrm>
-            <a:prstGeom prst="ellipse">
-              <a:avLst/>
-            </a:prstGeom>
-            <a:solidFill>
-              <a:schemeClr val="tx1"/>
-            </a:solidFill>
-            <a:ln w="6350">
-              <a:solidFill>
-                <a:schemeClr val="tx1"/>
-              </a:solidFill>
-            </a:ln>
-          </p:spPr>
-          <p:style>
-            <a:lnRef idx="2">
-              <a:schemeClr val="dk1">
-                <a:shade val="50000"/>
-              </a:schemeClr>
-            </a:lnRef>
-            <a:fillRef idx="1">
-              <a:schemeClr val="dk1"/>
-            </a:fillRef>
-            <a:effectRef idx="0">
-              <a:schemeClr val="dk1"/>
-            </a:effectRef>
-            <a:fontRef idx="minor">
-              <a:schemeClr val="lt1"/>
-            </a:fontRef>
-          </p:style>
-          <p:txBody>
-            <a:bodyPr rtlCol="0" anchor="ctr"/>
-            <a:lstStyle/>
-            <a:p>
-              <a:pPr algn="ctr"/>
-              <a:endParaRPr lang="zh-TW" altLang="en-US" dirty="0"/>
-            </a:p>
-          </p:txBody>
-        </p:sp>
-        <mc:AlternateContent xmlns:mc="http://schemas.openxmlformats.org/markup-compatibility/2006">
-          <mc:Choice xmlns:a14="http://schemas.microsoft.com/office/drawing/2010/main" Requires="a14">
-            <p:sp>
-              <p:nvSpPr>
-                <p:cNvPr id="33" name="文字方塊 32">
-                  <a:extLst>
-                    <a:ext uri="{FF2B5EF4-FFF2-40B4-BE49-F238E27FC236}">
-                      <a16:creationId xmlns:a16="http://schemas.microsoft.com/office/drawing/2014/main" id="{5749DBA2-3861-4B36-B154-DD4BD215C4D4}"/>
-                    </a:ext>
-                  </a:extLst>
-                </p:cNvPr>
-                <p:cNvSpPr txBox="1"/>
-                <p:nvPr/>
-              </p:nvSpPr>
-              <p:spPr>
-                <a:xfrm>
-                  <a:off x="5177253" y="479920"/>
-                  <a:ext cx="500693" cy="294333"/>
-                </a:xfrm>
-                <a:prstGeom prst="rect">
-                  <a:avLst/>
-                </a:prstGeom>
-                <a:noFill/>
-              </p:spPr>
-              <p:txBody>
-                <a:bodyPr wrap="square" rtlCol="0">
-                  <a:spAutoFit/>
-                </a:bodyPr>
-                <a:lstStyle/>
-                <a:p>
-                  <a:pPr/>
-                  <a14:m>
-                    <m:oMathPara xmlns:m="http://schemas.openxmlformats.org/officeDocument/2006/math">
-                      <m:oMathParaPr>
-                        <m:jc m:val="centerGroup"/>
-                      </m:oMathParaPr>
-                      <m:oMath xmlns:m="http://schemas.openxmlformats.org/officeDocument/2006/math">
-                        <m:r>
-                          <a:rPr lang="en-US" altLang="zh-TW" i="1">
-                            <a:latin typeface="Cambria Math" panose="02040503050406030204" pitchFamily="18" charset="0"/>
-                          </a:rPr>
-                          <m:t>𝑄</m:t>
-                        </m:r>
-                        <m:r>
-                          <a:rPr lang="en-US" altLang="zh-TW" i="1">
-                            <a:latin typeface="Cambria Math" panose="02040503050406030204" pitchFamily="18" charset="0"/>
-                          </a:rPr>
-                          <m:t>’</m:t>
-                        </m:r>
-                      </m:oMath>
-                    </m:oMathPara>
-                  </a14:m>
-                  <a:endParaRPr lang="zh-TW" altLang="en-US" dirty="0"/>
-                </a:p>
-              </p:txBody>
-            </p:sp>
-          </mc:Choice>
-          <mc:Fallback>
-            <p:sp>
-              <p:nvSpPr>
-                <p:cNvPr id="33" name="文字方塊 32">
-                  <a:extLst>
-                    <a:ext uri="{FF2B5EF4-FFF2-40B4-BE49-F238E27FC236}">
-                      <a16:creationId xmlns:a16="http://schemas.microsoft.com/office/drawing/2014/main" id="{5749DBA2-3861-4B36-B154-DD4BD215C4D4}"/>
-                    </a:ext>
-                  </a:extLst>
-                </p:cNvPr>
-                <p:cNvSpPr txBox="1">
-                  <a:spLocks noRot="1" noChangeAspect="1" noMove="1" noResize="1" noEditPoints="1" noAdjustHandles="1" noChangeArrowheads="1" noChangeShapeType="1" noTextEdit="1"/>
-                </p:cNvSpPr>
-                <p:nvPr/>
-              </p:nvSpPr>
-              <p:spPr>
-                <a:xfrm>
-                  <a:off x="5177253" y="479920"/>
-                  <a:ext cx="500693" cy="294333"/>
-                </a:xfrm>
-                <a:prstGeom prst="rect">
-                  <a:avLst/>
-                </a:prstGeom>
-                <a:blipFill>
-                  <a:blip r:embed="rId10"/>
-                  <a:stretch>
-                    <a:fillRect b="-17544"/>
-                  </a:stretch>
-                </a:blipFill>
-              </p:spPr>
-              <p:txBody>
-                <a:bodyPr/>
-                <a:lstStyle/>
-                <a:p>
-                  <a:r>
-                    <a:rPr lang="zh-TW" altLang="en-US">
-                      <a:noFill/>
-                    </a:rPr>
-                    <a:t> </a:t>
-                  </a:r>
-                </a:p>
-              </p:txBody>
-            </p:sp>
-          </mc:Fallback>
-        </mc:AlternateContent>
-        <mc:AlternateContent xmlns:mc="http://schemas.openxmlformats.org/markup-compatibility/2006">
-          <mc:Choice xmlns:a14="http://schemas.microsoft.com/office/drawing/2010/main" Requires="a14">
-            <p:sp>
-              <p:nvSpPr>
-                <p:cNvPr id="34" name="文字方塊 33">
-                  <a:extLst>
-                    <a:ext uri="{FF2B5EF4-FFF2-40B4-BE49-F238E27FC236}">
-                      <a16:creationId xmlns:a16="http://schemas.microsoft.com/office/drawing/2014/main" id="{174AD440-EBE8-40B0-A2C0-B223506D29B0}"/>
-                    </a:ext>
-                  </a:extLst>
-                </p:cNvPr>
-                <p:cNvSpPr txBox="1"/>
-                <p:nvPr/>
-              </p:nvSpPr>
-              <p:spPr>
-                <a:xfrm>
-                  <a:off x="5510827" y="1044766"/>
-                  <a:ext cx="500693" cy="294333"/>
-                </a:xfrm>
-                <a:prstGeom prst="rect">
-                  <a:avLst/>
-                </a:prstGeom>
-                <a:noFill/>
-              </p:spPr>
-              <p:txBody>
-                <a:bodyPr wrap="square" rtlCol="0">
-                  <a:spAutoFit/>
-                </a:bodyPr>
-                <a:lstStyle/>
-                <a:p>
-                  <a:pPr/>
-                  <a14:m>
-                    <m:oMathPara xmlns:m="http://schemas.openxmlformats.org/officeDocument/2006/math">
-                      <m:oMathParaPr>
-                        <m:jc m:val="centerGroup"/>
-                      </m:oMathParaPr>
-                      <m:oMath xmlns:m="http://schemas.openxmlformats.org/officeDocument/2006/math">
-                        <m:r>
-                          <a:rPr lang="en-US" altLang="zh-TW" i="1">
-                            <a:latin typeface="Cambria Math" panose="02040503050406030204" pitchFamily="18" charset="0"/>
-                          </a:rPr>
-                          <m:t>𝑄</m:t>
-                        </m:r>
-                      </m:oMath>
-                    </m:oMathPara>
-                  </a14:m>
-                  <a:endParaRPr lang="zh-TW" altLang="en-US" dirty="0"/>
-                </a:p>
-              </p:txBody>
-            </p:sp>
-          </mc:Choice>
-          <mc:Fallback>
-            <p:sp>
-              <p:nvSpPr>
-                <p:cNvPr id="34" name="文字方塊 33">
-                  <a:extLst>
-                    <a:ext uri="{FF2B5EF4-FFF2-40B4-BE49-F238E27FC236}">
-                      <a16:creationId xmlns:a16="http://schemas.microsoft.com/office/drawing/2014/main" id="{174AD440-EBE8-40B0-A2C0-B223506D29B0}"/>
-                    </a:ext>
-                  </a:extLst>
-                </p:cNvPr>
-                <p:cNvSpPr txBox="1">
-                  <a:spLocks noRot="1" noChangeAspect="1" noMove="1" noResize="1" noEditPoints="1" noAdjustHandles="1" noChangeArrowheads="1" noChangeShapeType="1" noTextEdit="1"/>
-                </p:cNvSpPr>
-                <p:nvPr/>
-              </p:nvSpPr>
-              <p:spPr>
-                <a:xfrm>
-                  <a:off x="5510827" y="1044766"/>
-                  <a:ext cx="500693" cy="294333"/>
-                </a:xfrm>
-                <a:prstGeom prst="rect">
-                  <a:avLst/>
-                </a:prstGeom>
-                <a:blipFill>
-                  <a:blip r:embed="rId11"/>
-                  <a:stretch>
-                    <a:fillRect b="-19643"/>
-                  </a:stretch>
-                </a:blipFill>
-              </p:spPr>
-              <p:txBody>
-                <a:bodyPr/>
-                <a:lstStyle/>
-                <a:p>
-                  <a:r>
-                    <a:rPr lang="zh-TW" altLang="en-US">
-                      <a:noFill/>
-                    </a:rPr>
-                    <a:t> </a:t>
-                  </a:r>
-                </a:p>
-              </p:txBody>
-            </p:sp>
-          </mc:Fallback>
-        </mc:AlternateContent>
-      </p:grpSp>
-      <p:grpSp>
-        <p:nvGrpSpPr>
-          <p:cNvPr id="79" name="群組 78">
-            <a:extLst>
-              <a:ext uri="{FF2B5EF4-FFF2-40B4-BE49-F238E27FC236}">
-                <a16:creationId xmlns:a16="http://schemas.microsoft.com/office/drawing/2014/main" id="{E588A180-2FB7-4D06-B54F-8C8BE4B436B6}"/>
-              </a:ext>
-            </a:extLst>
-          </p:cNvPr>
-          <p:cNvGrpSpPr/>
-          <p:nvPr/>
-        </p:nvGrpSpPr>
-        <p:grpSpPr>
-          <a:xfrm>
-            <a:off x="8317308" y="4909152"/>
-            <a:ext cx="1001952" cy="814592"/>
-            <a:chOff x="6095200" y="86196"/>
-            <a:chExt cx="1153156" cy="937523"/>
-          </a:xfrm>
-        </p:grpSpPr>
-        <p:cxnSp>
-          <p:nvCxnSpPr>
-            <p:cNvPr id="80" name="直線單箭頭接點 79">
-              <a:extLst>
-                <a:ext uri="{FF2B5EF4-FFF2-40B4-BE49-F238E27FC236}">
-                  <a16:creationId xmlns:a16="http://schemas.microsoft.com/office/drawing/2014/main" id="{80C7D949-C218-4433-B52A-F2DE23D67403}"/>
-                </a:ext>
-              </a:extLst>
-            </p:cNvPr>
-            <p:cNvCxnSpPr>
-              <a:cxnSpLocks/>
-            </p:cNvCxnSpPr>
-            <p:nvPr/>
-          </p:nvCxnSpPr>
-          <p:spPr>
-            <a:xfrm>
-              <a:off x="6502870" y="782175"/>
-              <a:ext cx="363442" cy="0"/>
-            </a:xfrm>
-            <a:prstGeom prst="straightConnector1">
-              <a:avLst/>
-            </a:prstGeom>
-            <a:solidFill>
-              <a:schemeClr val="bg1"/>
-            </a:solidFill>
-            <a:ln>
-              <a:tailEnd type="triangle"/>
-            </a:ln>
-          </p:spPr>
-          <p:style>
-            <a:lnRef idx="2">
-              <a:schemeClr val="dk1"/>
-            </a:lnRef>
-            <a:fillRef idx="0">
-              <a:schemeClr val="dk1"/>
-            </a:fillRef>
-            <a:effectRef idx="1">
-              <a:schemeClr val="dk1"/>
-            </a:effectRef>
-            <a:fontRef idx="minor">
-              <a:schemeClr val="tx1"/>
-            </a:fontRef>
-          </p:style>
-        </p:cxnSp>
-        <p:cxnSp>
-          <p:nvCxnSpPr>
-            <p:cNvPr id="81" name="直線單箭頭接點 80">
-              <a:extLst>
-                <a:ext uri="{FF2B5EF4-FFF2-40B4-BE49-F238E27FC236}">
-                  <a16:creationId xmlns:a16="http://schemas.microsoft.com/office/drawing/2014/main" id="{DFD5C945-0593-467A-B538-CF53EC4B4390}"/>
-                </a:ext>
-              </a:extLst>
-            </p:cNvPr>
-            <p:cNvCxnSpPr>
-              <a:cxnSpLocks/>
-            </p:cNvCxnSpPr>
-            <p:nvPr/>
-          </p:nvCxnSpPr>
-          <p:spPr>
-            <a:xfrm flipV="1">
-              <a:off x="6508390" y="432919"/>
-              <a:ext cx="0" cy="355792"/>
-            </a:xfrm>
-            <a:prstGeom prst="straightConnector1">
-              <a:avLst/>
-            </a:prstGeom>
-            <a:solidFill>
-              <a:schemeClr val="bg1"/>
-            </a:solidFill>
-            <a:ln>
-              <a:tailEnd type="triangle"/>
-            </a:ln>
-          </p:spPr>
-          <p:style>
-            <a:lnRef idx="2">
-              <a:schemeClr val="dk1"/>
-            </a:lnRef>
-            <a:fillRef idx="0">
-              <a:schemeClr val="dk1"/>
-            </a:fillRef>
-            <a:effectRef idx="1">
-              <a:schemeClr val="dk1"/>
-            </a:effectRef>
-            <a:fontRef idx="minor">
-              <a:schemeClr val="tx1"/>
-            </a:fontRef>
-          </p:style>
-        </p:cxnSp>
-        <mc:AlternateContent xmlns:mc="http://schemas.openxmlformats.org/markup-compatibility/2006">
-          <mc:Choice xmlns:a14="http://schemas.microsoft.com/office/drawing/2010/main" Requires="a14">
-            <p:sp>
-              <p:nvSpPr>
-                <p:cNvPr id="82" name="文字方塊 81">
-                  <a:extLst>
-                    <a:ext uri="{FF2B5EF4-FFF2-40B4-BE49-F238E27FC236}">
-                      <a16:creationId xmlns:a16="http://schemas.microsoft.com/office/drawing/2014/main" id="{A85838C4-7CEB-42A7-9F9D-8F4611F3AD3B}"/>
-                    </a:ext>
-                  </a:extLst>
-                </p:cNvPr>
-                <p:cNvSpPr txBox="1"/>
-                <p:nvPr/>
-              </p:nvSpPr>
-              <p:spPr>
-                <a:xfrm>
-                  <a:off x="6747663" y="592474"/>
-                  <a:ext cx="500693" cy="369332"/>
-                </a:xfrm>
-                <a:prstGeom prst="rect">
-                  <a:avLst/>
-                </a:prstGeom>
-                <a:noFill/>
-              </p:spPr>
-              <p:txBody>
-                <a:bodyPr wrap="square" rtlCol="0">
-                  <a:spAutoFit/>
-                </a:bodyPr>
-                <a:lstStyle/>
-                <a:p>
-                  <a:pPr/>
-                  <a14:m>
-                    <m:oMathPara xmlns:m="http://schemas.openxmlformats.org/officeDocument/2006/math">
-                      <m:oMathParaPr>
-                        <m:jc m:val="centerGroup"/>
-                      </m:oMathParaPr>
-                      <m:oMath xmlns:m="http://schemas.openxmlformats.org/officeDocument/2006/math">
-                        <m:sSub>
-                          <m:sSubPr>
-                            <m:ctrlPr>
-                              <a:rPr lang="en-US" altLang="zh-TW" i="1">
-                                <a:latin typeface="Cambria Math" panose="02040503050406030204" pitchFamily="18" charset="0"/>
-                              </a:rPr>
-                            </m:ctrlPr>
-                          </m:sSubPr>
-                          <m:e>
-                            <m:r>
-                              <a:rPr lang="en-US" altLang="zh-TW" i="1">
-                                <a:latin typeface="Cambria Math" panose="02040503050406030204" pitchFamily="18" charset="0"/>
-                              </a:rPr>
-                              <m:t>𝑘</m:t>
-                            </m:r>
-                          </m:e>
-                          <m:sub>
-                            <m:r>
-                              <a:rPr lang="en-US" altLang="zh-TW" i="1">
-                                <a:latin typeface="Cambria Math" panose="02040503050406030204" pitchFamily="18" charset="0"/>
-                              </a:rPr>
-                              <m:t>𝑥</m:t>
-                            </m:r>
-                          </m:sub>
-                        </m:sSub>
-                      </m:oMath>
-                    </m:oMathPara>
-                  </a14:m>
-                  <a:endParaRPr lang="zh-TW" altLang="en-US" dirty="0"/>
-                </a:p>
-              </p:txBody>
-            </p:sp>
-          </mc:Choice>
-          <mc:Fallback>
-            <p:sp>
-              <p:nvSpPr>
-                <p:cNvPr id="82" name="文字方塊 81">
-                  <a:extLst>
-                    <a:ext uri="{FF2B5EF4-FFF2-40B4-BE49-F238E27FC236}">
-                      <a16:creationId xmlns:a16="http://schemas.microsoft.com/office/drawing/2014/main" id="{A85838C4-7CEB-42A7-9F9D-8F4611F3AD3B}"/>
-                    </a:ext>
-                  </a:extLst>
-                </p:cNvPr>
-                <p:cNvSpPr txBox="1">
-                  <a:spLocks noRot="1" noChangeAspect="1" noMove="1" noResize="1" noEditPoints="1" noAdjustHandles="1" noChangeArrowheads="1" noChangeShapeType="1" noTextEdit="1"/>
-                </p:cNvSpPr>
-                <p:nvPr/>
-              </p:nvSpPr>
-              <p:spPr>
-                <a:xfrm>
-                  <a:off x="6747663" y="592474"/>
-                  <a:ext cx="500693" cy="369332"/>
-                </a:xfrm>
-                <a:prstGeom prst="rect">
-                  <a:avLst/>
-                </a:prstGeom>
-                <a:blipFill>
-                  <a:blip r:embed="rId12"/>
-                  <a:stretch>
-                    <a:fillRect b="-9434"/>
-                  </a:stretch>
-                </a:blipFill>
-              </p:spPr>
-              <p:txBody>
-                <a:bodyPr/>
-                <a:lstStyle/>
-                <a:p>
-                  <a:r>
-                    <a:rPr lang="zh-TW" altLang="en-US">
-                      <a:noFill/>
-                    </a:rPr>
-                    <a:t> </a:t>
-                  </a:r>
-                </a:p>
-              </p:txBody>
-            </p:sp>
-          </mc:Fallback>
-        </mc:AlternateContent>
-        <mc:AlternateContent xmlns:mc="http://schemas.openxmlformats.org/markup-compatibility/2006">
-          <mc:Choice xmlns:a14="http://schemas.microsoft.com/office/drawing/2010/main" Requires="a14">
-            <p:sp>
-              <p:nvSpPr>
-                <p:cNvPr id="83" name="文字方塊 82">
-                  <a:extLst>
-                    <a:ext uri="{FF2B5EF4-FFF2-40B4-BE49-F238E27FC236}">
-                      <a16:creationId xmlns:a16="http://schemas.microsoft.com/office/drawing/2014/main" id="{3519F496-065B-4C4E-8ED7-71C585DD926B}"/>
-                    </a:ext>
-                  </a:extLst>
-                </p:cNvPr>
-                <p:cNvSpPr txBox="1"/>
-                <p:nvPr/>
-              </p:nvSpPr>
-              <p:spPr>
-                <a:xfrm>
-                  <a:off x="6281529" y="86196"/>
-                  <a:ext cx="500693" cy="391261"/>
-                </a:xfrm>
-                <a:prstGeom prst="rect">
-                  <a:avLst/>
-                </a:prstGeom>
-                <a:noFill/>
-              </p:spPr>
-              <p:txBody>
-                <a:bodyPr wrap="square" rtlCol="0">
-                  <a:spAutoFit/>
-                </a:bodyPr>
-                <a:lstStyle/>
-                <a:p>
-                  <a:pPr/>
-                  <a14:m>
-                    <m:oMathPara xmlns:m="http://schemas.openxmlformats.org/officeDocument/2006/math">
-                      <m:oMathParaPr>
-                        <m:jc m:val="centerGroup"/>
-                      </m:oMathParaPr>
-                      <m:oMath xmlns:m="http://schemas.openxmlformats.org/officeDocument/2006/math">
-                        <m:sSub>
-                          <m:sSubPr>
-                            <m:ctrlPr>
-                              <a:rPr lang="en-US" altLang="zh-TW" i="1">
-                                <a:latin typeface="Cambria Math" panose="02040503050406030204" pitchFamily="18" charset="0"/>
-                              </a:rPr>
-                            </m:ctrlPr>
-                          </m:sSubPr>
-                          <m:e>
-                            <m:r>
-                              <a:rPr lang="en-US" altLang="zh-TW" i="1">
-                                <a:latin typeface="Cambria Math" panose="02040503050406030204" pitchFamily="18" charset="0"/>
-                              </a:rPr>
-                              <m:t>𝑘</m:t>
-                            </m:r>
-                          </m:e>
-                          <m:sub>
-                            <m:r>
-                              <a:rPr lang="en-US" altLang="zh-TW" i="1">
-                                <a:latin typeface="Cambria Math" panose="02040503050406030204" pitchFamily="18" charset="0"/>
-                              </a:rPr>
-                              <m:t>𝑦</m:t>
-                            </m:r>
-                          </m:sub>
-                        </m:sSub>
-                      </m:oMath>
-                    </m:oMathPara>
-                  </a14:m>
-                  <a:endParaRPr lang="zh-TW" altLang="en-US" dirty="0"/>
-                </a:p>
-              </p:txBody>
-            </p:sp>
-          </mc:Choice>
-          <mc:Fallback>
-            <p:sp>
-              <p:nvSpPr>
-                <p:cNvPr id="83" name="文字方塊 82">
-                  <a:extLst>
-                    <a:ext uri="{FF2B5EF4-FFF2-40B4-BE49-F238E27FC236}">
-                      <a16:creationId xmlns:a16="http://schemas.microsoft.com/office/drawing/2014/main" id="{3519F496-065B-4C4E-8ED7-71C585DD926B}"/>
-                    </a:ext>
-                  </a:extLst>
-                </p:cNvPr>
-                <p:cNvSpPr txBox="1">
-                  <a:spLocks noRot="1" noChangeAspect="1" noMove="1" noResize="1" noEditPoints="1" noAdjustHandles="1" noChangeArrowheads="1" noChangeShapeType="1" noTextEdit="1"/>
-                </p:cNvSpPr>
-                <p:nvPr/>
-              </p:nvSpPr>
-              <p:spPr>
-                <a:xfrm>
-                  <a:off x="6281529" y="86196"/>
-                  <a:ext cx="500693" cy="391261"/>
-                </a:xfrm>
-                <a:prstGeom prst="rect">
-                  <a:avLst/>
-                </a:prstGeom>
-                <a:blipFill>
-                  <a:blip r:embed="rId13"/>
-                  <a:stretch>
-                    <a:fillRect b="-19643"/>
-                  </a:stretch>
-                </a:blipFill>
-              </p:spPr>
-              <p:txBody>
-                <a:bodyPr/>
-                <a:lstStyle/>
-                <a:p>
-                  <a:r>
-                    <a:rPr lang="zh-TW" altLang="en-US">
-                      <a:noFill/>
-                    </a:rPr>
-                    <a:t> </a:t>
-                  </a:r>
-                </a:p>
-              </p:txBody>
-            </p:sp>
-          </mc:Fallback>
-        </mc:AlternateContent>
-        <p:grpSp>
-          <p:nvGrpSpPr>
-            <p:cNvPr id="84" name="群組 83">
-              <a:extLst>
-                <a:ext uri="{FF2B5EF4-FFF2-40B4-BE49-F238E27FC236}">
-                  <a16:creationId xmlns:a16="http://schemas.microsoft.com/office/drawing/2014/main" id="{495DF09D-1858-4C50-8BC1-76A72A31389C}"/>
-                </a:ext>
-              </a:extLst>
-            </p:cNvPr>
-            <p:cNvGrpSpPr/>
-            <p:nvPr/>
-          </p:nvGrpSpPr>
-          <p:grpSpPr>
-            <a:xfrm>
-              <a:off x="6473200" y="745891"/>
-              <a:ext cx="77620" cy="77620"/>
-              <a:chOff x="5995892" y="914379"/>
-              <a:chExt cx="540639" cy="540639"/>
-            </a:xfrm>
-          </p:grpSpPr>
-          <p:sp>
-            <p:nvSpPr>
-              <p:cNvPr id="86" name="圓形: 空心 85">
-                <a:extLst>
-                  <a:ext uri="{FF2B5EF4-FFF2-40B4-BE49-F238E27FC236}">
-                    <a16:creationId xmlns:a16="http://schemas.microsoft.com/office/drawing/2014/main" id="{ACE52A13-FB9D-4060-9C97-8A67AFE54A4A}"/>
-                  </a:ext>
-                </a:extLst>
-              </p:cNvPr>
-              <p:cNvSpPr/>
-              <p:nvPr/>
-            </p:nvSpPr>
-            <p:spPr>
-              <a:xfrm>
-                <a:off x="5995892" y="914379"/>
-                <a:ext cx="540639" cy="540639"/>
-              </a:xfrm>
-              <a:prstGeom prst="donut">
-                <a:avLst>
-                  <a:gd name="adj" fmla="val 38442"/>
-                </a:avLst>
-              </a:prstGeom>
-              <a:solidFill>
-                <a:schemeClr val="bg1"/>
-              </a:solidFill>
-              <a:ln>
-                <a:solidFill>
-                  <a:schemeClr val="tx1"/>
-                </a:solidFill>
-              </a:ln>
-            </p:spPr>
-            <p:style>
-              <a:lnRef idx="2">
-                <a:schemeClr val="accent1">
-                  <a:shade val="50000"/>
-                </a:schemeClr>
-              </a:lnRef>
-              <a:fillRef idx="1">
-                <a:schemeClr val="accent1"/>
-              </a:fillRef>
-              <a:effectRef idx="0">
-                <a:schemeClr val="accent1"/>
-              </a:effectRef>
-              <a:fontRef idx="minor">
-                <a:schemeClr val="lt1"/>
-              </a:fontRef>
-            </p:style>
-            <p:txBody>
-              <a:bodyPr rot="0" spcFirstLastPara="0" vertOverflow="overflow" horzOverflow="overflow" vert="horz" wrap="square" lIns="91440" tIns="45720" rIns="91440" bIns="45720" numCol="1" spcCol="0" rtlCol="0" fromWordArt="0" anchor="ctr" anchorCtr="0" forceAA="0" compatLnSpc="1">
-                <a:prstTxWarp prst="textNoShape">
-                  <a:avLst/>
-                </a:prstTxWarp>
-                <a:noAutofit/>
-              </a:bodyPr>
-              <a:lstStyle/>
-              <a:p>
-                <a:pPr algn="ctr"/>
-                <a:endParaRPr lang="zh-TW" altLang="en-US" dirty="0">
-                  <a:solidFill>
-                    <a:schemeClr val="tx1"/>
-                  </a:solidFill>
-                </a:endParaRPr>
-              </a:p>
-            </p:txBody>
-          </p:sp>
-          <p:sp>
-            <p:nvSpPr>
-              <p:cNvPr id="87" name="橢圓 86">
-                <a:extLst>
-                  <a:ext uri="{FF2B5EF4-FFF2-40B4-BE49-F238E27FC236}">
-                    <a16:creationId xmlns:a16="http://schemas.microsoft.com/office/drawing/2014/main" id="{149EA94D-64FC-4D0B-8973-99184378A3FF}"/>
-                  </a:ext>
-                </a:extLst>
-              </p:cNvPr>
-              <p:cNvSpPr/>
-              <p:nvPr/>
-            </p:nvSpPr>
-            <p:spPr>
-              <a:xfrm>
-                <a:off x="6200578" y="1119065"/>
-                <a:ext cx="131269" cy="131269"/>
-              </a:xfrm>
-              <a:prstGeom prst="ellipse">
-                <a:avLst/>
-              </a:prstGeom>
-              <a:solidFill>
-                <a:schemeClr val="tx1"/>
-              </a:solidFill>
-              <a:ln>
-                <a:noFill/>
-              </a:ln>
-            </p:spPr>
-            <p:style>
-              <a:lnRef idx="2">
-                <a:schemeClr val="accent1">
-                  <a:shade val="50000"/>
-                </a:schemeClr>
-              </a:lnRef>
-              <a:fillRef idx="1">
-                <a:schemeClr val="accent1"/>
-              </a:fillRef>
-              <a:effectRef idx="0">
-                <a:schemeClr val="accent1"/>
-              </a:effectRef>
-              <a:fontRef idx="minor">
-                <a:schemeClr val="lt1"/>
-              </a:fontRef>
-            </p:style>
-            <p:txBody>
-              <a:bodyPr rot="0" spcFirstLastPara="0" vertOverflow="overflow" horzOverflow="overflow" vert="horz" wrap="square" lIns="91440" tIns="45720" rIns="91440" bIns="45720" numCol="1" spcCol="0" rtlCol="0" fromWordArt="0" anchor="ctr" anchorCtr="0" forceAA="0" compatLnSpc="1">
-                <a:prstTxWarp prst="textNoShape">
-                  <a:avLst/>
-                </a:prstTxWarp>
-                <a:noAutofit/>
-              </a:bodyPr>
-              <a:lstStyle/>
-              <a:p>
-                <a:pPr algn="ctr"/>
-                <a:endParaRPr lang="zh-TW" altLang="en-US"/>
-              </a:p>
-            </p:txBody>
-          </p:sp>
-        </p:grpSp>
-        <mc:AlternateContent xmlns:mc="http://schemas.openxmlformats.org/markup-compatibility/2006">
-          <mc:Choice xmlns:a14="http://schemas.microsoft.com/office/drawing/2010/main" Requires="a14">
-            <p:sp>
-              <p:nvSpPr>
-                <p:cNvPr id="85" name="文字方塊 84">
-                  <a:extLst>
-                    <a:ext uri="{FF2B5EF4-FFF2-40B4-BE49-F238E27FC236}">
-                      <a16:creationId xmlns:a16="http://schemas.microsoft.com/office/drawing/2014/main" id="{7F292124-D26C-4A4D-B471-6E640C42DA47}"/>
-                    </a:ext>
-                  </a:extLst>
-                </p:cNvPr>
-                <p:cNvSpPr txBox="1"/>
-                <p:nvPr/>
-              </p:nvSpPr>
-              <p:spPr>
-                <a:xfrm>
-                  <a:off x="6095200" y="654387"/>
-                  <a:ext cx="500693" cy="369332"/>
-                </a:xfrm>
-                <a:prstGeom prst="rect">
-                  <a:avLst/>
-                </a:prstGeom>
-                <a:noFill/>
-              </p:spPr>
-              <p:txBody>
-                <a:bodyPr wrap="square" rtlCol="0">
-                  <a:spAutoFit/>
-                </a:bodyPr>
-                <a:lstStyle/>
-                <a:p>
-                  <a:pPr/>
-                  <a14:m>
-                    <m:oMathPara xmlns:m="http://schemas.openxmlformats.org/officeDocument/2006/math">
-                      <m:oMathParaPr>
-                        <m:jc m:val="centerGroup"/>
-                      </m:oMathParaPr>
-                      <m:oMath xmlns:m="http://schemas.openxmlformats.org/officeDocument/2006/math">
-                        <m:sSub>
-                          <m:sSubPr>
-                            <m:ctrlPr>
-                              <a:rPr lang="en-US" altLang="zh-TW" i="1">
-                                <a:latin typeface="Cambria Math" panose="02040503050406030204" pitchFamily="18" charset="0"/>
-                              </a:rPr>
-                            </m:ctrlPr>
-                          </m:sSubPr>
-                          <m:e>
-                            <m:r>
-                              <a:rPr lang="en-US" altLang="zh-TW" i="1">
-                                <a:latin typeface="Cambria Math" panose="02040503050406030204" pitchFamily="18" charset="0"/>
-                              </a:rPr>
-                              <m:t>𝑘</m:t>
-                            </m:r>
-                          </m:e>
-                          <m:sub>
-                            <m:r>
-                              <a:rPr lang="en-US" altLang="zh-TW" i="1">
-                                <a:latin typeface="Cambria Math" panose="02040503050406030204" pitchFamily="18" charset="0"/>
-                              </a:rPr>
-                              <m:t>𝑧</m:t>
-                            </m:r>
-                          </m:sub>
-                        </m:sSub>
-                      </m:oMath>
-                    </m:oMathPara>
-                  </a14:m>
-                  <a:endParaRPr lang="zh-TW" altLang="en-US" dirty="0"/>
-                </a:p>
-              </p:txBody>
-            </p:sp>
-          </mc:Choice>
-          <mc:Fallback>
-            <p:sp>
-              <p:nvSpPr>
-                <p:cNvPr id="85" name="文字方塊 84">
-                  <a:extLst>
-                    <a:ext uri="{FF2B5EF4-FFF2-40B4-BE49-F238E27FC236}">
-                      <a16:creationId xmlns:a16="http://schemas.microsoft.com/office/drawing/2014/main" id="{7F292124-D26C-4A4D-B471-6E640C42DA47}"/>
-                    </a:ext>
-                  </a:extLst>
-                </p:cNvPr>
-                <p:cNvSpPr txBox="1">
-                  <a:spLocks noRot="1" noChangeAspect="1" noMove="1" noResize="1" noEditPoints="1" noAdjustHandles="1" noChangeArrowheads="1" noChangeShapeType="1" noTextEdit="1"/>
-                </p:cNvSpPr>
-                <p:nvPr/>
-              </p:nvSpPr>
-              <p:spPr>
-                <a:xfrm>
-                  <a:off x="6095200" y="654387"/>
-                  <a:ext cx="500693" cy="369332"/>
-                </a:xfrm>
-                <a:prstGeom prst="rect">
-                  <a:avLst/>
-                </a:prstGeom>
-                <a:blipFill>
-                  <a:blip r:embed="rId14"/>
-                  <a:stretch>
-                    <a:fillRect b="-9434"/>
-                  </a:stretch>
-                </a:blipFill>
-              </p:spPr>
-              <p:txBody>
-                <a:bodyPr/>
-                <a:lstStyle/>
-                <a:p>
-                  <a:r>
-                    <a:rPr lang="zh-TW" altLang="en-US">
-                      <a:noFill/>
-                    </a:rPr>
-                    <a:t> </a:t>
-                  </a:r>
-                </a:p>
-              </p:txBody>
-            </p:sp>
-          </mc:Fallback>
-        </mc:AlternateContent>
-      </p:grpSp>
-      <p:grpSp>
-        <p:nvGrpSpPr>
-          <p:cNvPr id="88" name="群組 87">
-            <a:extLst>
-              <a:ext uri="{FF2B5EF4-FFF2-40B4-BE49-F238E27FC236}">
-                <a16:creationId xmlns:a16="http://schemas.microsoft.com/office/drawing/2014/main" id="{73EED529-FC4A-4D4B-BB11-FD5158CE3413}"/>
-              </a:ext>
-            </a:extLst>
-          </p:cNvPr>
-          <p:cNvGrpSpPr/>
-          <p:nvPr/>
-        </p:nvGrpSpPr>
-        <p:grpSpPr>
-          <a:xfrm>
-            <a:off x="8317308" y="550732"/>
-            <a:ext cx="1001952" cy="814592"/>
-            <a:chOff x="1884085" y="953133"/>
-            <a:chExt cx="1153156" cy="937523"/>
-          </a:xfrm>
-        </p:grpSpPr>
-        <p:grpSp>
-          <p:nvGrpSpPr>
-            <p:cNvPr id="66" name="群組 65">
-              <a:extLst>
-                <a:ext uri="{FF2B5EF4-FFF2-40B4-BE49-F238E27FC236}">
-                  <a16:creationId xmlns:a16="http://schemas.microsoft.com/office/drawing/2014/main" id="{D3C30B12-C841-478A-8023-FFA4E768F38A}"/>
-                </a:ext>
-              </a:extLst>
-            </p:cNvPr>
-            <p:cNvGrpSpPr/>
-            <p:nvPr/>
-          </p:nvGrpSpPr>
-          <p:grpSpPr>
-            <a:xfrm>
-              <a:off x="1884085" y="953133"/>
-              <a:ext cx="1153156" cy="937523"/>
-              <a:chOff x="6095200" y="86196"/>
-              <a:chExt cx="1153156" cy="937523"/>
-            </a:xfrm>
-          </p:grpSpPr>
-          <mc:AlternateContent xmlns:mc="http://schemas.openxmlformats.org/markup-compatibility/2006">
-            <mc:Choice xmlns:a14="http://schemas.microsoft.com/office/drawing/2010/main" Requires="a14">
+          <mc:AlternateContent xmlns:mc="http://schemas.openxmlformats.org/markup-compatibility/2006" xmlns:a14="http://schemas.microsoft.com/office/drawing/2010/main">
+            <mc:Choice Requires="a14">
               <p:sp>
                 <p:nvSpPr>
-                  <p:cNvPr id="72" name="文字方塊 71">
+                  <p:cNvPr id="23" name="文字方塊 22">
                     <a:extLst>
                       <a:ext uri="{FF2B5EF4-FFF2-40B4-BE49-F238E27FC236}">
-                        <a16:creationId xmlns:a16="http://schemas.microsoft.com/office/drawing/2014/main" id="{79885C87-960B-4533-8B78-16664E820A61}"/>
+                        <a16:creationId xmlns:a16="http://schemas.microsoft.com/office/drawing/2014/main" id="{4A972CE0-B624-471F-AEE8-237ADA8C4A64}"/>
                       </a:ext>
                     </a:extLst>
                   </p:cNvPr>
@@ -5571,8 +4060,8 @@
                 </p:nvSpPr>
                 <p:spPr>
                   <a:xfrm>
-                    <a:off x="6095200" y="654387"/>
-                    <a:ext cx="500693" cy="369332"/>
+                    <a:off x="6009049" y="1044766"/>
+                    <a:ext cx="500693" cy="423283"/>
                   </a:xfrm>
                   <a:prstGeom prst="rect">
                     <a:avLst/>
@@ -5593,7 +4082,1590 @@
                         </m:oMathParaPr>
                         <m:oMath xmlns:m="http://schemas.openxmlformats.org/officeDocument/2006/math">
                           <m:r>
-                            <a:rPr lang="en-US" altLang="zh-TW" i="1">
+                            <a:rPr lang="en-US" altLang="zh-TW" sz="2000" i="1">
+                              <a:latin typeface="Cambria Math" panose="02040503050406030204" pitchFamily="18" charset="0"/>
+                            </a:rPr>
+                            <m:t>𝐾</m:t>
+                          </m:r>
+                        </m:oMath>
+                      </m:oMathPara>
+                    </a14:m>
+                    <a:endParaRPr lang="zh-TW" altLang="en-US" sz="2000" dirty="0">
+                      <a:latin typeface="Times New Roman" panose="02020603050405020304" pitchFamily="18" charset="0"/>
+                      <a:cs typeface="Times New Roman" panose="02020603050405020304" pitchFamily="18" charset="0"/>
+                    </a:endParaRPr>
+                  </a:p>
+                </p:txBody>
+              </p:sp>
+            </mc:Choice>
+            <mc:Fallback xmlns="">
+              <p:sp>
+                <p:nvSpPr>
+                  <p:cNvPr id="23" name="文字方塊 22">
+                    <a:extLst>
+                      <a:ext uri="{FF2B5EF4-FFF2-40B4-BE49-F238E27FC236}">
+                        <a16:creationId xmlns:a16="http://schemas.microsoft.com/office/drawing/2014/main" id="{4A972CE0-B624-471F-AEE8-237ADA8C4A64}"/>
+                      </a:ext>
+                    </a:extLst>
+                  </p:cNvPr>
+                  <p:cNvSpPr txBox="1">
+                    <a:spLocks noRot="1" noChangeAspect="1" noMove="1" noResize="1" noEditPoints="1" noAdjustHandles="1" noChangeArrowheads="1" noChangeShapeType="1" noTextEdit="1"/>
+                  </p:cNvSpPr>
+                  <p:nvPr/>
+                </p:nvSpPr>
+                <p:spPr>
+                  <a:xfrm>
+                    <a:off x="6009049" y="1044766"/>
+                    <a:ext cx="500693" cy="423283"/>
+                  </a:xfrm>
+                  <a:prstGeom prst="rect">
+                    <a:avLst/>
+                  </a:prstGeom>
+                  <a:blipFill>
+                    <a:blip r:embed="rId6"/>
+                    <a:stretch>
+                      <a:fillRect/>
+                    </a:stretch>
+                  </a:blipFill>
+                </p:spPr>
+                <p:txBody>
+                  <a:bodyPr/>
+                  <a:lstStyle/>
+                  <a:p>
+                    <a:r>
+                      <a:rPr lang="zh-TW" altLang="en-US">
+                        <a:noFill/>
+                      </a:rPr>
+                      <a:t> </a:t>
+                    </a:r>
+                  </a:p>
+                </p:txBody>
+              </p:sp>
+            </mc:Fallback>
+          </mc:AlternateContent>
+          <mc:AlternateContent xmlns:mc="http://schemas.openxmlformats.org/markup-compatibility/2006">
+            <mc:Choice xmlns:a14="http://schemas.microsoft.com/office/drawing/2010/main" Requires="a14">
+              <p:sp>
+                <p:nvSpPr>
+                  <p:cNvPr id="24" name="文字方塊 23">
+                    <a:extLst>
+                      <a:ext uri="{FF2B5EF4-FFF2-40B4-BE49-F238E27FC236}">
+                        <a16:creationId xmlns:a16="http://schemas.microsoft.com/office/drawing/2014/main" id="{A5D18D05-50DF-4D1E-AAFB-B58A0119A134}"/>
+                      </a:ext>
+                    </a:extLst>
+                  </p:cNvPr>
+                  <p:cNvSpPr txBox="1"/>
+                  <p:nvPr/>
+                </p:nvSpPr>
+                <p:spPr>
+                  <a:xfrm>
+                    <a:off x="5551558" y="42452"/>
+                    <a:ext cx="500693" cy="423283"/>
+                  </a:xfrm>
+                  <a:prstGeom prst="rect">
+                    <a:avLst/>
+                  </a:prstGeom>
+                  <a:noFill/>
+                </p:spPr>
+                <p:txBody>
+                  <a:bodyPr wrap="square" rtlCol="0">
+                    <a:spAutoFit/>
+                  </a:bodyPr>
+                  <a:lstStyle/>
+                  <a:p>
+                    <a:pPr/>
+                    <a14:m>
+                      <m:oMathPara xmlns:m="http://schemas.openxmlformats.org/officeDocument/2006/math">
+                        <m:oMathParaPr>
+                          <m:jc m:val="centerGroup"/>
+                        </m:oMathParaPr>
+                        <m:oMath xmlns:m="http://schemas.openxmlformats.org/officeDocument/2006/math">
+                          <m:r>
+                            <a:rPr lang="en-US" altLang="zh-TW" sz="2000" i="1">
+                              <a:latin typeface="Cambria Math" panose="02040503050406030204" pitchFamily="18" charset="0"/>
+                            </a:rPr>
+                            <m:t>𝐾</m:t>
+                          </m:r>
+                          <m:r>
+                            <a:rPr lang="en-US" altLang="zh-TW" sz="2000" i="1">
+                              <a:latin typeface="Cambria Math" panose="02040503050406030204" pitchFamily="18" charset="0"/>
+                            </a:rPr>
+                            <m:t>’</m:t>
+                          </m:r>
+                        </m:oMath>
+                      </m:oMathPara>
+                    </a14:m>
+                    <a:endParaRPr lang="zh-TW" altLang="en-US" sz="2000" dirty="0">
+                      <a:latin typeface="Times New Roman" panose="02020603050405020304" pitchFamily="18" charset="0"/>
+                      <a:cs typeface="Times New Roman" panose="02020603050405020304" pitchFamily="18" charset="0"/>
+                    </a:endParaRPr>
+                  </a:p>
+                </p:txBody>
+              </p:sp>
+            </mc:Choice>
+            <mc:Fallback>
+              <p:sp>
+                <p:nvSpPr>
+                  <p:cNvPr id="24" name="文字方塊 23">
+                    <a:extLst>
+                      <a:ext uri="{FF2B5EF4-FFF2-40B4-BE49-F238E27FC236}">
+                        <a16:creationId xmlns:a16="http://schemas.microsoft.com/office/drawing/2014/main" id="{A5D18D05-50DF-4D1E-AAFB-B58A0119A134}"/>
+                      </a:ext>
+                    </a:extLst>
+                  </p:cNvPr>
+                  <p:cNvSpPr txBox="1">
+                    <a:spLocks noRot="1" noChangeAspect="1" noMove="1" noResize="1" noEditPoints="1" noAdjustHandles="1" noChangeArrowheads="1" noChangeShapeType="1" noTextEdit="1"/>
+                  </p:cNvSpPr>
+                  <p:nvPr/>
+                </p:nvSpPr>
+                <p:spPr>
+                  <a:xfrm>
+                    <a:off x="5551558" y="42452"/>
+                    <a:ext cx="500693" cy="423283"/>
+                  </a:xfrm>
+                  <a:prstGeom prst="rect">
+                    <a:avLst/>
+                  </a:prstGeom>
+                  <a:blipFill>
+                    <a:blip r:embed="rId7"/>
+                    <a:stretch>
+                      <a:fillRect/>
+                    </a:stretch>
+                  </a:blipFill>
+                </p:spPr>
+                <p:txBody>
+                  <a:bodyPr/>
+                  <a:lstStyle/>
+                  <a:p>
+                    <a:r>
+                      <a:rPr lang="zh-TW" altLang="en-US">
+                        <a:noFill/>
+                      </a:rPr>
+                      <a:t> </a:t>
+                    </a:r>
+                  </a:p>
+                </p:txBody>
+              </p:sp>
+            </mc:Fallback>
+          </mc:AlternateContent>
+          <mc:AlternateContent xmlns:mc="http://schemas.openxmlformats.org/markup-compatibility/2006" xmlns:a14="http://schemas.microsoft.com/office/drawing/2010/main">
+            <mc:Choice Requires="a14">
+              <p:sp>
+                <p:nvSpPr>
+                  <p:cNvPr id="25" name="文字方塊 24">
+                    <a:extLst>
+                      <a:ext uri="{FF2B5EF4-FFF2-40B4-BE49-F238E27FC236}">
+                        <a16:creationId xmlns:a16="http://schemas.microsoft.com/office/drawing/2014/main" id="{9889234A-4146-4DFD-A384-1D93E5EBD06B}"/>
+                      </a:ext>
+                    </a:extLst>
+                  </p:cNvPr>
+                  <p:cNvSpPr txBox="1"/>
+                  <p:nvPr/>
+                </p:nvSpPr>
+                <p:spPr>
+                  <a:xfrm>
+                    <a:off x="5830031" y="479919"/>
+                    <a:ext cx="500693" cy="423283"/>
+                  </a:xfrm>
+                  <a:prstGeom prst="rect">
+                    <a:avLst/>
+                  </a:prstGeom>
+                  <a:noFill/>
+                </p:spPr>
+                <p:txBody>
+                  <a:bodyPr wrap="square" rtlCol="0">
+                    <a:spAutoFit/>
+                  </a:bodyPr>
+                  <a:lstStyle/>
+                  <a:p>
+                    <a:pPr/>
+                    <a14:m>
+                      <m:oMathPara xmlns:m="http://schemas.openxmlformats.org/officeDocument/2006/math">
+                        <m:oMathParaPr>
+                          <m:jc m:val="centerGroup"/>
+                        </m:oMathParaPr>
+                        <m:oMath xmlns:m="http://schemas.openxmlformats.org/officeDocument/2006/math">
+                          <m:r>
+                            <a:rPr lang="en-US" altLang="zh-TW" sz="2000" i="1">
+                              <a:latin typeface="Cambria Math" panose="02040503050406030204" pitchFamily="18" charset="0"/>
+                            </a:rPr>
+                            <m:t>𝑀</m:t>
+                          </m:r>
+                        </m:oMath>
+                      </m:oMathPara>
+                    </a14:m>
+                    <a:endParaRPr lang="zh-TW" altLang="en-US" sz="2000" dirty="0">
+                      <a:latin typeface="Times New Roman" panose="02020603050405020304" pitchFamily="18" charset="0"/>
+                      <a:cs typeface="Times New Roman" panose="02020603050405020304" pitchFamily="18" charset="0"/>
+                    </a:endParaRPr>
+                  </a:p>
+                </p:txBody>
+              </p:sp>
+            </mc:Choice>
+            <mc:Fallback xmlns="">
+              <p:sp>
+                <p:nvSpPr>
+                  <p:cNvPr id="25" name="文字方塊 24">
+                    <a:extLst>
+                      <a:ext uri="{FF2B5EF4-FFF2-40B4-BE49-F238E27FC236}">
+                        <a16:creationId xmlns:a16="http://schemas.microsoft.com/office/drawing/2014/main" id="{9889234A-4146-4DFD-A384-1D93E5EBD06B}"/>
+                      </a:ext>
+                    </a:extLst>
+                  </p:cNvPr>
+                  <p:cNvSpPr txBox="1">
+                    <a:spLocks noRot="1" noChangeAspect="1" noMove="1" noResize="1" noEditPoints="1" noAdjustHandles="1" noChangeArrowheads="1" noChangeShapeType="1" noTextEdit="1"/>
+                  </p:cNvSpPr>
+                  <p:nvPr/>
+                </p:nvSpPr>
+                <p:spPr>
+                  <a:xfrm>
+                    <a:off x="5830031" y="479919"/>
+                    <a:ext cx="500693" cy="423283"/>
+                  </a:xfrm>
+                  <a:prstGeom prst="rect">
+                    <a:avLst/>
+                  </a:prstGeom>
+                  <a:blipFill>
+                    <a:blip r:embed="rId8"/>
+                    <a:stretch>
+                      <a:fillRect/>
+                    </a:stretch>
+                  </a:blipFill>
+                </p:spPr>
+                <p:txBody>
+                  <a:bodyPr/>
+                  <a:lstStyle/>
+                  <a:p>
+                    <a:r>
+                      <a:rPr lang="zh-TW" altLang="en-US">
+                        <a:noFill/>
+                      </a:rPr>
+                      <a:t> </a:t>
+                    </a:r>
+                  </a:p>
+                </p:txBody>
+              </p:sp>
+            </mc:Fallback>
+          </mc:AlternateContent>
+          <p:sp>
+            <p:nvSpPr>
+              <p:cNvPr id="26" name="橢圓 25">
+                <a:extLst>
+                  <a:ext uri="{FF2B5EF4-FFF2-40B4-BE49-F238E27FC236}">
+                    <a16:creationId xmlns:a16="http://schemas.microsoft.com/office/drawing/2014/main" id="{123D994E-8905-46CD-8FAE-24B0A3D5508E}"/>
+                  </a:ext>
+                </a:extLst>
+              </p:cNvPr>
+              <p:cNvSpPr/>
+              <p:nvPr/>
+            </p:nvSpPr>
+            <p:spPr>
+              <a:xfrm rot="1800318">
+                <a:off x="5704815" y="395314"/>
+                <a:ext cx="72000" cy="72000"/>
+              </a:xfrm>
+              <a:prstGeom prst="ellipse">
+                <a:avLst/>
+              </a:prstGeom>
+              <a:solidFill>
+                <a:schemeClr val="tx1"/>
+              </a:solidFill>
+              <a:ln w="6350">
+                <a:solidFill>
+                  <a:schemeClr val="tx1"/>
+                </a:solidFill>
+              </a:ln>
+            </p:spPr>
+            <p:style>
+              <a:lnRef idx="2">
+                <a:schemeClr val="dk1">
+                  <a:shade val="50000"/>
+                </a:schemeClr>
+              </a:lnRef>
+              <a:fillRef idx="1">
+                <a:schemeClr val="dk1"/>
+              </a:fillRef>
+              <a:effectRef idx="0">
+                <a:schemeClr val="dk1"/>
+              </a:effectRef>
+              <a:fontRef idx="minor">
+                <a:schemeClr val="lt1"/>
+              </a:fontRef>
+            </p:style>
+            <p:txBody>
+              <a:bodyPr rtlCol="0" anchor="ctr"/>
+              <a:lstStyle/>
+              <a:p>
+                <a:pPr algn="ctr"/>
+                <a:endParaRPr lang="zh-TW" altLang="en-US" sz="2000" dirty="0">
+                  <a:latin typeface="Times New Roman" panose="02020603050405020304" pitchFamily="18" charset="0"/>
+                  <a:cs typeface="Times New Roman" panose="02020603050405020304" pitchFamily="18" charset="0"/>
+                </a:endParaRPr>
+              </a:p>
+            </p:txBody>
+          </p:sp>
+          <p:sp>
+            <p:nvSpPr>
+              <p:cNvPr id="27" name="橢圓 26">
+                <a:extLst>
+                  <a:ext uri="{FF2B5EF4-FFF2-40B4-BE49-F238E27FC236}">
+                    <a16:creationId xmlns:a16="http://schemas.microsoft.com/office/drawing/2014/main" id="{9FDB16D7-52BC-493A-B1B4-54F5D3236A58}"/>
+                  </a:ext>
+                </a:extLst>
+              </p:cNvPr>
+              <p:cNvSpPr/>
+              <p:nvPr/>
+            </p:nvSpPr>
+            <p:spPr>
+              <a:xfrm rot="1800318">
+                <a:off x="6073550" y="1034866"/>
+                <a:ext cx="72000" cy="72000"/>
+              </a:xfrm>
+              <a:prstGeom prst="ellipse">
+                <a:avLst/>
+              </a:prstGeom>
+              <a:solidFill>
+                <a:schemeClr val="tx1"/>
+              </a:solidFill>
+              <a:ln w="6350">
+                <a:solidFill>
+                  <a:schemeClr val="tx1"/>
+                </a:solidFill>
+              </a:ln>
+            </p:spPr>
+            <p:style>
+              <a:lnRef idx="2">
+                <a:schemeClr val="dk1">
+                  <a:shade val="50000"/>
+                </a:schemeClr>
+              </a:lnRef>
+              <a:fillRef idx="1">
+                <a:schemeClr val="dk1"/>
+              </a:fillRef>
+              <a:effectRef idx="0">
+                <a:schemeClr val="dk1"/>
+              </a:effectRef>
+              <a:fontRef idx="minor">
+                <a:schemeClr val="lt1"/>
+              </a:fontRef>
+            </p:style>
+            <p:txBody>
+              <a:bodyPr rtlCol="0" anchor="ctr"/>
+              <a:lstStyle/>
+              <a:p>
+                <a:pPr algn="ctr"/>
+                <a:endParaRPr lang="zh-TW" altLang="en-US" sz="2000" dirty="0">
+                  <a:latin typeface="Times New Roman" panose="02020603050405020304" pitchFamily="18" charset="0"/>
+                  <a:cs typeface="Times New Roman" panose="02020603050405020304" pitchFamily="18" charset="0"/>
+                </a:endParaRPr>
+              </a:p>
+            </p:txBody>
+          </p:sp>
+          <mc:AlternateContent xmlns:mc="http://schemas.openxmlformats.org/markup-compatibility/2006" xmlns:a14="http://schemas.microsoft.com/office/drawing/2010/main">
+            <mc:Choice Requires="a14">
+              <p:sp>
+                <p:nvSpPr>
+                  <p:cNvPr id="28" name="文字方塊 27">
+                    <a:extLst>
+                      <a:ext uri="{FF2B5EF4-FFF2-40B4-BE49-F238E27FC236}">
+                        <a16:creationId xmlns:a16="http://schemas.microsoft.com/office/drawing/2014/main" id="{283E8ED5-0F51-4EE2-9FDC-01B1883EA98B}"/>
+                      </a:ext>
+                    </a:extLst>
+                  </p:cNvPr>
+                  <p:cNvSpPr txBox="1"/>
+                  <p:nvPr/>
+                </p:nvSpPr>
+                <p:spPr>
+                  <a:xfrm>
+                    <a:off x="4942271" y="1044766"/>
+                    <a:ext cx="500693" cy="423283"/>
+                  </a:xfrm>
+                  <a:prstGeom prst="rect">
+                    <a:avLst/>
+                  </a:prstGeom>
+                  <a:noFill/>
+                </p:spPr>
+                <p:txBody>
+                  <a:bodyPr wrap="square" rtlCol="0">
+                    <a:spAutoFit/>
+                  </a:bodyPr>
+                  <a:lstStyle/>
+                  <a:p>
+                    <a:pPr/>
+                    <a14:m>
+                      <m:oMathPara xmlns:m="http://schemas.openxmlformats.org/officeDocument/2006/math">
+                        <m:oMathParaPr>
+                          <m:jc m:val="centerGroup"/>
+                        </m:oMathParaPr>
+                        <m:oMath xmlns:m="http://schemas.openxmlformats.org/officeDocument/2006/math">
+                          <m:r>
+                            <m:rPr>
+                              <m:sty m:val="p"/>
+                            </m:rPr>
+                            <a:rPr lang="en-US" altLang="zh-TW" sz="2000">
+                              <a:latin typeface="Cambria Math" panose="02040503050406030204" pitchFamily="18" charset="0"/>
+                            </a:rPr>
+                            <m:t>Γ</m:t>
+                          </m:r>
+                        </m:oMath>
+                      </m:oMathPara>
+                    </a14:m>
+                    <a:endParaRPr lang="zh-TW" altLang="en-US" sz="2000" dirty="0">
+                      <a:latin typeface="Times New Roman" panose="02020603050405020304" pitchFamily="18" charset="0"/>
+                      <a:cs typeface="Times New Roman" panose="02020603050405020304" pitchFamily="18" charset="0"/>
+                    </a:endParaRPr>
+                  </a:p>
+                </p:txBody>
+              </p:sp>
+            </mc:Choice>
+            <mc:Fallback xmlns="">
+              <p:sp>
+                <p:nvSpPr>
+                  <p:cNvPr id="28" name="文字方塊 27">
+                    <a:extLst>
+                      <a:ext uri="{FF2B5EF4-FFF2-40B4-BE49-F238E27FC236}">
+                        <a16:creationId xmlns:a16="http://schemas.microsoft.com/office/drawing/2014/main" id="{283E8ED5-0F51-4EE2-9FDC-01B1883EA98B}"/>
+                      </a:ext>
+                    </a:extLst>
+                  </p:cNvPr>
+                  <p:cNvSpPr txBox="1">
+                    <a:spLocks noRot="1" noChangeAspect="1" noMove="1" noResize="1" noEditPoints="1" noAdjustHandles="1" noChangeArrowheads="1" noChangeShapeType="1" noTextEdit="1"/>
+                  </p:cNvSpPr>
+                  <p:nvPr/>
+                </p:nvSpPr>
+                <p:spPr>
+                  <a:xfrm>
+                    <a:off x="4942271" y="1044766"/>
+                    <a:ext cx="500693" cy="423283"/>
+                  </a:xfrm>
+                  <a:prstGeom prst="rect">
+                    <a:avLst/>
+                  </a:prstGeom>
+                  <a:blipFill>
+                    <a:blip r:embed="rId9"/>
+                    <a:stretch>
+                      <a:fillRect/>
+                    </a:stretch>
+                  </a:blipFill>
+                </p:spPr>
+                <p:txBody>
+                  <a:bodyPr/>
+                  <a:lstStyle/>
+                  <a:p>
+                    <a:r>
+                      <a:rPr lang="zh-TW" altLang="en-US">
+                        <a:noFill/>
+                      </a:rPr>
+                      <a:t> </a:t>
+                    </a:r>
+                  </a:p>
+                </p:txBody>
+              </p:sp>
+            </mc:Fallback>
+          </mc:AlternateContent>
+          <p:sp>
+            <p:nvSpPr>
+              <p:cNvPr id="29" name="橢圓 28">
+                <a:extLst>
+                  <a:ext uri="{FF2B5EF4-FFF2-40B4-BE49-F238E27FC236}">
+                    <a16:creationId xmlns:a16="http://schemas.microsoft.com/office/drawing/2014/main" id="{4305C0AF-4D0C-479E-BADB-A00EC0C525F7}"/>
+                  </a:ext>
+                </a:extLst>
+              </p:cNvPr>
+              <p:cNvSpPr/>
+              <p:nvPr/>
+            </p:nvSpPr>
+            <p:spPr>
+              <a:xfrm rot="1800318">
+                <a:off x="5889183" y="715090"/>
+                <a:ext cx="72000" cy="72000"/>
+              </a:xfrm>
+              <a:prstGeom prst="ellipse">
+                <a:avLst/>
+              </a:prstGeom>
+              <a:solidFill>
+                <a:schemeClr val="tx1"/>
+              </a:solidFill>
+              <a:ln w="6350">
+                <a:solidFill>
+                  <a:schemeClr val="tx1"/>
+                </a:solidFill>
+              </a:ln>
+            </p:spPr>
+            <p:style>
+              <a:lnRef idx="2">
+                <a:schemeClr val="dk1">
+                  <a:shade val="50000"/>
+                </a:schemeClr>
+              </a:lnRef>
+              <a:fillRef idx="1">
+                <a:schemeClr val="dk1"/>
+              </a:fillRef>
+              <a:effectRef idx="0">
+                <a:schemeClr val="dk1"/>
+              </a:effectRef>
+              <a:fontRef idx="minor">
+                <a:schemeClr val="lt1"/>
+              </a:fontRef>
+            </p:style>
+            <p:txBody>
+              <a:bodyPr rtlCol="0" anchor="ctr"/>
+              <a:lstStyle/>
+              <a:p>
+                <a:pPr algn="ctr"/>
+                <a:endParaRPr lang="zh-TW" altLang="en-US" sz="2000" dirty="0">
+                  <a:latin typeface="Times New Roman" panose="02020603050405020304" pitchFamily="18" charset="0"/>
+                  <a:cs typeface="Times New Roman" panose="02020603050405020304" pitchFamily="18" charset="0"/>
+                </a:endParaRPr>
+              </a:p>
+            </p:txBody>
+          </p:sp>
+          <p:sp>
+            <p:nvSpPr>
+              <p:cNvPr id="30" name="橢圓 29">
+                <a:extLst>
+                  <a:ext uri="{FF2B5EF4-FFF2-40B4-BE49-F238E27FC236}">
+                    <a16:creationId xmlns:a16="http://schemas.microsoft.com/office/drawing/2014/main" id="{83BDADA2-A496-476E-A8BC-AD2B3166E19F}"/>
+                  </a:ext>
+                </a:extLst>
+              </p:cNvPr>
+              <p:cNvSpPr/>
+              <p:nvPr/>
+            </p:nvSpPr>
+            <p:spPr>
+              <a:xfrm rot="1800318">
+                <a:off x="5336079" y="1034866"/>
+                <a:ext cx="72000" cy="72000"/>
+              </a:xfrm>
+              <a:prstGeom prst="ellipse">
+                <a:avLst/>
+              </a:prstGeom>
+              <a:solidFill>
+                <a:schemeClr val="tx1"/>
+              </a:solidFill>
+              <a:ln w="6350">
+                <a:solidFill>
+                  <a:schemeClr val="tx1"/>
+                </a:solidFill>
+              </a:ln>
+            </p:spPr>
+            <p:style>
+              <a:lnRef idx="2">
+                <a:schemeClr val="dk1">
+                  <a:shade val="50000"/>
+                </a:schemeClr>
+              </a:lnRef>
+              <a:fillRef idx="1">
+                <a:schemeClr val="dk1"/>
+              </a:fillRef>
+              <a:effectRef idx="0">
+                <a:schemeClr val="dk1"/>
+              </a:effectRef>
+              <a:fontRef idx="minor">
+                <a:schemeClr val="lt1"/>
+              </a:fontRef>
+            </p:style>
+            <p:txBody>
+              <a:bodyPr rtlCol="0" anchor="ctr"/>
+              <a:lstStyle/>
+              <a:p>
+                <a:pPr algn="ctr"/>
+                <a:endParaRPr lang="zh-TW" altLang="en-US" sz="2000" dirty="0">
+                  <a:latin typeface="Times New Roman" panose="02020603050405020304" pitchFamily="18" charset="0"/>
+                  <a:cs typeface="Times New Roman" panose="02020603050405020304" pitchFamily="18" charset="0"/>
+                </a:endParaRPr>
+              </a:p>
+            </p:txBody>
+          </p:sp>
+          <p:sp>
+            <p:nvSpPr>
+              <p:cNvPr id="31" name="橢圓 30">
+                <a:extLst>
+                  <a:ext uri="{FF2B5EF4-FFF2-40B4-BE49-F238E27FC236}">
+                    <a16:creationId xmlns:a16="http://schemas.microsoft.com/office/drawing/2014/main" id="{439E7B51-CDCD-4B79-8B92-358AA3EAEF51}"/>
+                  </a:ext>
+                </a:extLst>
+              </p:cNvPr>
+              <p:cNvSpPr/>
+              <p:nvPr/>
+            </p:nvSpPr>
+            <p:spPr>
+              <a:xfrm rot="1800318">
+                <a:off x="5520447" y="715905"/>
+                <a:ext cx="72000" cy="72000"/>
+              </a:xfrm>
+              <a:prstGeom prst="ellipse">
+                <a:avLst/>
+              </a:prstGeom>
+              <a:solidFill>
+                <a:schemeClr val="tx1"/>
+              </a:solidFill>
+              <a:ln w="6350">
+                <a:solidFill>
+                  <a:schemeClr val="tx1"/>
+                </a:solidFill>
+              </a:ln>
+            </p:spPr>
+            <p:style>
+              <a:lnRef idx="2">
+                <a:schemeClr val="dk1">
+                  <a:shade val="50000"/>
+                </a:schemeClr>
+              </a:lnRef>
+              <a:fillRef idx="1">
+                <a:schemeClr val="dk1"/>
+              </a:fillRef>
+              <a:effectRef idx="0">
+                <a:schemeClr val="dk1"/>
+              </a:effectRef>
+              <a:fontRef idx="minor">
+                <a:schemeClr val="lt1"/>
+              </a:fontRef>
+            </p:style>
+            <p:txBody>
+              <a:bodyPr rtlCol="0" anchor="ctr"/>
+              <a:lstStyle/>
+              <a:p>
+                <a:pPr algn="ctr"/>
+                <a:endParaRPr lang="zh-TW" altLang="en-US" sz="2000" dirty="0">
+                  <a:latin typeface="Times New Roman" panose="02020603050405020304" pitchFamily="18" charset="0"/>
+                  <a:cs typeface="Times New Roman" panose="02020603050405020304" pitchFamily="18" charset="0"/>
+                </a:endParaRPr>
+              </a:p>
+            </p:txBody>
+          </p:sp>
+          <p:sp>
+            <p:nvSpPr>
+              <p:cNvPr id="32" name="橢圓 31">
+                <a:extLst>
+                  <a:ext uri="{FF2B5EF4-FFF2-40B4-BE49-F238E27FC236}">
+                    <a16:creationId xmlns:a16="http://schemas.microsoft.com/office/drawing/2014/main" id="{14C492AD-7AB9-49BB-A7CA-6E2AAF76DFD2}"/>
+                  </a:ext>
+                </a:extLst>
+              </p:cNvPr>
+              <p:cNvSpPr/>
+              <p:nvPr/>
+            </p:nvSpPr>
+            <p:spPr>
+              <a:xfrm rot="1800318">
+                <a:off x="5704815" y="1034866"/>
+                <a:ext cx="72000" cy="72000"/>
+              </a:xfrm>
+              <a:prstGeom prst="ellipse">
+                <a:avLst/>
+              </a:prstGeom>
+              <a:solidFill>
+                <a:schemeClr val="tx1"/>
+              </a:solidFill>
+              <a:ln w="6350">
+                <a:solidFill>
+                  <a:schemeClr val="tx1"/>
+                </a:solidFill>
+              </a:ln>
+            </p:spPr>
+            <p:style>
+              <a:lnRef idx="2">
+                <a:schemeClr val="dk1">
+                  <a:shade val="50000"/>
+                </a:schemeClr>
+              </a:lnRef>
+              <a:fillRef idx="1">
+                <a:schemeClr val="dk1"/>
+              </a:fillRef>
+              <a:effectRef idx="0">
+                <a:schemeClr val="dk1"/>
+              </a:effectRef>
+              <a:fontRef idx="minor">
+                <a:schemeClr val="lt1"/>
+              </a:fontRef>
+            </p:style>
+            <p:txBody>
+              <a:bodyPr rtlCol="0" anchor="ctr"/>
+              <a:lstStyle/>
+              <a:p>
+                <a:pPr algn="ctr"/>
+                <a:endParaRPr lang="zh-TW" altLang="en-US" sz="2000" dirty="0">
+                  <a:latin typeface="Times New Roman" panose="02020603050405020304" pitchFamily="18" charset="0"/>
+                  <a:cs typeface="Times New Roman" panose="02020603050405020304" pitchFamily="18" charset="0"/>
+                </a:endParaRPr>
+              </a:p>
+            </p:txBody>
+          </p:sp>
+          <mc:AlternateContent xmlns:mc="http://schemas.openxmlformats.org/markup-compatibility/2006" xmlns:a14="http://schemas.microsoft.com/office/drawing/2010/main">
+            <mc:Choice Requires="a14">
+              <p:sp>
+                <p:nvSpPr>
+                  <p:cNvPr id="33" name="文字方塊 32">
+                    <a:extLst>
+                      <a:ext uri="{FF2B5EF4-FFF2-40B4-BE49-F238E27FC236}">
+                        <a16:creationId xmlns:a16="http://schemas.microsoft.com/office/drawing/2014/main" id="{5749DBA2-3861-4B36-B154-DD4BD215C4D4}"/>
+                      </a:ext>
+                    </a:extLst>
+                  </p:cNvPr>
+                  <p:cNvSpPr txBox="1"/>
+                  <p:nvPr/>
+                </p:nvSpPr>
+                <p:spPr>
+                  <a:xfrm>
+                    <a:off x="5177253" y="479919"/>
+                    <a:ext cx="500693" cy="423283"/>
+                  </a:xfrm>
+                  <a:prstGeom prst="rect">
+                    <a:avLst/>
+                  </a:prstGeom>
+                  <a:noFill/>
+                </p:spPr>
+                <p:txBody>
+                  <a:bodyPr wrap="square" rtlCol="0">
+                    <a:spAutoFit/>
+                  </a:bodyPr>
+                  <a:lstStyle/>
+                  <a:p>
+                    <a:pPr/>
+                    <a14:m>
+                      <m:oMathPara xmlns:m="http://schemas.openxmlformats.org/officeDocument/2006/math">
+                        <m:oMathParaPr>
+                          <m:jc m:val="centerGroup"/>
+                        </m:oMathParaPr>
+                        <m:oMath xmlns:m="http://schemas.openxmlformats.org/officeDocument/2006/math">
+                          <m:r>
+                            <a:rPr lang="en-US" altLang="zh-TW" sz="2000" i="1">
+                              <a:latin typeface="Cambria Math" panose="02040503050406030204" pitchFamily="18" charset="0"/>
+                            </a:rPr>
+                            <m:t>𝑄</m:t>
+                          </m:r>
+                          <m:r>
+                            <a:rPr lang="en-US" altLang="zh-TW" sz="2000" i="1">
+                              <a:latin typeface="Cambria Math" panose="02040503050406030204" pitchFamily="18" charset="0"/>
+                            </a:rPr>
+                            <m:t>’</m:t>
+                          </m:r>
+                        </m:oMath>
+                      </m:oMathPara>
+                    </a14:m>
+                    <a:endParaRPr lang="zh-TW" altLang="en-US" sz="2000" dirty="0">
+                      <a:latin typeface="Times New Roman" panose="02020603050405020304" pitchFamily="18" charset="0"/>
+                      <a:cs typeface="Times New Roman" panose="02020603050405020304" pitchFamily="18" charset="0"/>
+                    </a:endParaRPr>
+                  </a:p>
+                </p:txBody>
+              </p:sp>
+            </mc:Choice>
+            <mc:Fallback xmlns="">
+              <p:sp>
+                <p:nvSpPr>
+                  <p:cNvPr id="33" name="文字方塊 32">
+                    <a:extLst>
+                      <a:ext uri="{FF2B5EF4-FFF2-40B4-BE49-F238E27FC236}">
+                        <a16:creationId xmlns:a16="http://schemas.microsoft.com/office/drawing/2014/main" id="{5749DBA2-3861-4B36-B154-DD4BD215C4D4}"/>
+                      </a:ext>
+                    </a:extLst>
+                  </p:cNvPr>
+                  <p:cNvSpPr txBox="1">
+                    <a:spLocks noRot="1" noChangeAspect="1" noMove="1" noResize="1" noEditPoints="1" noAdjustHandles="1" noChangeArrowheads="1" noChangeShapeType="1" noTextEdit="1"/>
+                  </p:cNvSpPr>
+                  <p:nvPr/>
+                </p:nvSpPr>
+                <p:spPr>
+                  <a:xfrm>
+                    <a:off x="5177253" y="479919"/>
+                    <a:ext cx="500693" cy="423283"/>
+                  </a:xfrm>
+                  <a:prstGeom prst="rect">
+                    <a:avLst/>
+                  </a:prstGeom>
+                  <a:blipFill>
+                    <a:blip r:embed="rId10"/>
+                    <a:stretch>
+                      <a:fillRect b="-12308"/>
+                    </a:stretch>
+                  </a:blipFill>
+                </p:spPr>
+                <p:txBody>
+                  <a:bodyPr/>
+                  <a:lstStyle/>
+                  <a:p>
+                    <a:r>
+                      <a:rPr lang="zh-TW" altLang="en-US">
+                        <a:noFill/>
+                      </a:rPr>
+                      <a:t> </a:t>
+                    </a:r>
+                  </a:p>
+                </p:txBody>
+              </p:sp>
+            </mc:Fallback>
+          </mc:AlternateContent>
+          <mc:AlternateContent xmlns:mc="http://schemas.openxmlformats.org/markup-compatibility/2006" xmlns:a14="http://schemas.microsoft.com/office/drawing/2010/main">
+            <mc:Choice Requires="a14">
+              <p:sp>
+                <p:nvSpPr>
+                  <p:cNvPr id="34" name="文字方塊 33">
+                    <a:extLst>
+                      <a:ext uri="{FF2B5EF4-FFF2-40B4-BE49-F238E27FC236}">
+                        <a16:creationId xmlns:a16="http://schemas.microsoft.com/office/drawing/2014/main" id="{174AD440-EBE8-40B0-A2C0-B223506D29B0}"/>
+                      </a:ext>
+                    </a:extLst>
+                  </p:cNvPr>
+                  <p:cNvSpPr txBox="1"/>
+                  <p:nvPr/>
+                </p:nvSpPr>
+                <p:spPr>
+                  <a:xfrm>
+                    <a:off x="5510827" y="1044766"/>
+                    <a:ext cx="500693" cy="423283"/>
+                  </a:xfrm>
+                  <a:prstGeom prst="rect">
+                    <a:avLst/>
+                  </a:prstGeom>
+                  <a:noFill/>
+                </p:spPr>
+                <p:txBody>
+                  <a:bodyPr wrap="square" rtlCol="0">
+                    <a:spAutoFit/>
+                  </a:bodyPr>
+                  <a:lstStyle/>
+                  <a:p>
+                    <a:pPr/>
+                    <a14:m>
+                      <m:oMathPara xmlns:m="http://schemas.openxmlformats.org/officeDocument/2006/math">
+                        <m:oMathParaPr>
+                          <m:jc m:val="centerGroup"/>
+                        </m:oMathParaPr>
+                        <m:oMath xmlns:m="http://schemas.openxmlformats.org/officeDocument/2006/math">
+                          <m:r>
+                            <a:rPr lang="en-US" altLang="zh-TW" sz="2000" i="1">
+                              <a:latin typeface="Cambria Math" panose="02040503050406030204" pitchFamily="18" charset="0"/>
+                            </a:rPr>
+                            <m:t>𝑄</m:t>
+                          </m:r>
+                        </m:oMath>
+                      </m:oMathPara>
+                    </a14:m>
+                    <a:endParaRPr lang="zh-TW" altLang="en-US" sz="2000" dirty="0">
+                      <a:latin typeface="Times New Roman" panose="02020603050405020304" pitchFamily="18" charset="0"/>
+                      <a:cs typeface="Times New Roman" panose="02020603050405020304" pitchFamily="18" charset="0"/>
+                    </a:endParaRPr>
+                  </a:p>
+                </p:txBody>
+              </p:sp>
+            </mc:Choice>
+            <mc:Fallback xmlns="">
+              <p:sp>
+                <p:nvSpPr>
+                  <p:cNvPr id="34" name="文字方塊 33">
+                    <a:extLst>
+                      <a:ext uri="{FF2B5EF4-FFF2-40B4-BE49-F238E27FC236}">
+                        <a16:creationId xmlns:a16="http://schemas.microsoft.com/office/drawing/2014/main" id="{174AD440-EBE8-40B0-A2C0-B223506D29B0}"/>
+                      </a:ext>
+                    </a:extLst>
+                  </p:cNvPr>
+                  <p:cNvSpPr txBox="1">
+                    <a:spLocks noRot="1" noChangeAspect="1" noMove="1" noResize="1" noEditPoints="1" noAdjustHandles="1" noChangeArrowheads="1" noChangeShapeType="1" noTextEdit="1"/>
+                  </p:cNvSpPr>
+                  <p:nvPr/>
+                </p:nvSpPr>
+                <p:spPr>
+                  <a:xfrm>
+                    <a:off x="5510827" y="1044766"/>
+                    <a:ext cx="500693" cy="423283"/>
+                  </a:xfrm>
+                  <a:prstGeom prst="rect">
+                    <a:avLst/>
+                  </a:prstGeom>
+                  <a:blipFill>
+                    <a:blip r:embed="rId11"/>
+                    <a:stretch>
+                      <a:fillRect b="-10606"/>
+                    </a:stretch>
+                  </a:blipFill>
+                </p:spPr>
+                <p:txBody>
+                  <a:bodyPr/>
+                  <a:lstStyle/>
+                  <a:p>
+                    <a:r>
+                      <a:rPr lang="zh-TW" altLang="en-US">
+                        <a:noFill/>
+                      </a:rPr>
+                      <a:t> </a:t>
+                    </a:r>
+                  </a:p>
+                </p:txBody>
+              </p:sp>
+            </mc:Fallback>
+          </mc:AlternateContent>
+        </p:grpSp>
+        <p:grpSp>
+          <p:nvGrpSpPr>
+            <p:cNvPr id="79" name="群組 78">
+              <a:extLst>
+                <a:ext uri="{FF2B5EF4-FFF2-40B4-BE49-F238E27FC236}">
+                  <a16:creationId xmlns:a16="http://schemas.microsoft.com/office/drawing/2014/main" id="{E588A180-2FB7-4D06-B54F-8C8BE4B436B6}"/>
+                </a:ext>
+              </a:extLst>
+            </p:cNvPr>
+            <p:cNvGrpSpPr/>
+            <p:nvPr/>
+          </p:nvGrpSpPr>
+          <p:grpSpPr>
+            <a:xfrm>
+              <a:off x="6935613" y="4146186"/>
+              <a:ext cx="814086" cy="930772"/>
+              <a:chOff x="6095200" y="-97298"/>
+              <a:chExt cx="1153156" cy="1318443"/>
+            </a:xfrm>
+          </p:grpSpPr>
+          <mc:AlternateContent xmlns:mc="http://schemas.openxmlformats.org/markup-compatibility/2006" xmlns:a14="http://schemas.microsoft.com/office/drawing/2010/main">
+            <mc:Choice Requires="a14">
+              <p:sp>
+                <p:nvSpPr>
+                  <p:cNvPr id="85" name="文字方塊 84">
+                    <a:extLst>
+                      <a:ext uri="{FF2B5EF4-FFF2-40B4-BE49-F238E27FC236}">
+                        <a16:creationId xmlns:a16="http://schemas.microsoft.com/office/drawing/2014/main" id="{7F292124-D26C-4A4D-B471-6E640C42DA47}"/>
+                      </a:ext>
+                    </a:extLst>
+                  </p:cNvPr>
+                  <p:cNvSpPr txBox="1"/>
+                  <p:nvPr/>
+                </p:nvSpPr>
+                <p:spPr>
+                  <a:xfrm>
+                    <a:off x="6095200" y="654387"/>
+                    <a:ext cx="500693" cy="566758"/>
+                  </a:xfrm>
+                  <a:prstGeom prst="rect">
+                    <a:avLst/>
+                  </a:prstGeom>
+                  <a:noFill/>
+                </p:spPr>
+                <p:txBody>
+                  <a:bodyPr wrap="square" rtlCol="0">
+                    <a:spAutoFit/>
+                  </a:bodyPr>
+                  <a:lstStyle/>
+                  <a:p>
+                    <a:pPr/>
+                    <a14:m>
+                      <m:oMathPara xmlns:m="http://schemas.openxmlformats.org/officeDocument/2006/math">
+                        <m:oMathParaPr>
+                          <m:jc m:val="centerGroup"/>
+                        </m:oMathParaPr>
+                        <m:oMath xmlns:m="http://schemas.openxmlformats.org/officeDocument/2006/math">
+                          <m:sSub>
+                            <m:sSubPr>
+                              <m:ctrlPr>
+                                <a:rPr lang="en-US" altLang="zh-TW" sz="2000" i="1">
+                                  <a:latin typeface="Cambria Math" panose="02040503050406030204" pitchFamily="18" charset="0"/>
+                                </a:rPr>
+                              </m:ctrlPr>
+                            </m:sSubPr>
+                            <m:e>
+                              <m:r>
+                                <a:rPr lang="en-US" altLang="zh-TW" sz="2000" i="1">
+                                  <a:latin typeface="Cambria Math" panose="02040503050406030204" pitchFamily="18" charset="0"/>
+                                </a:rPr>
+                                <m:t>𝑘</m:t>
+                              </m:r>
+                            </m:e>
+                            <m:sub>
+                              <m:r>
+                                <a:rPr lang="en-US" altLang="zh-TW" sz="2000" i="1">
+                                  <a:latin typeface="Cambria Math" panose="02040503050406030204" pitchFamily="18" charset="0"/>
+                                </a:rPr>
+                                <m:t>𝑧</m:t>
+                              </m:r>
+                            </m:sub>
+                          </m:sSub>
+                        </m:oMath>
+                      </m:oMathPara>
+                    </a14:m>
+                    <a:endParaRPr lang="zh-TW" altLang="en-US" sz="2000" dirty="0">
+                      <a:latin typeface="Times New Roman" panose="02020603050405020304" pitchFamily="18" charset="0"/>
+                      <a:cs typeface="Times New Roman" panose="02020603050405020304" pitchFamily="18" charset="0"/>
+                    </a:endParaRPr>
+                  </a:p>
+                </p:txBody>
+              </p:sp>
+            </mc:Choice>
+            <mc:Fallback xmlns="">
+              <p:sp>
+                <p:nvSpPr>
+                  <p:cNvPr id="85" name="文字方塊 84">
+                    <a:extLst>
+                      <a:ext uri="{FF2B5EF4-FFF2-40B4-BE49-F238E27FC236}">
+                        <a16:creationId xmlns:a16="http://schemas.microsoft.com/office/drawing/2014/main" id="{7F292124-D26C-4A4D-B471-6E640C42DA47}"/>
+                      </a:ext>
+                    </a:extLst>
+                  </p:cNvPr>
+                  <p:cNvSpPr txBox="1">
+                    <a:spLocks noRot="1" noChangeAspect="1" noMove="1" noResize="1" noEditPoints="1" noAdjustHandles="1" noChangeArrowheads="1" noChangeShapeType="1" noTextEdit="1"/>
+                  </p:cNvSpPr>
+                  <p:nvPr/>
+                </p:nvSpPr>
+                <p:spPr>
+                  <a:xfrm>
+                    <a:off x="6095200" y="654387"/>
+                    <a:ext cx="500693" cy="566758"/>
+                  </a:xfrm>
+                  <a:prstGeom prst="rect">
+                    <a:avLst/>
+                  </a:prstGeom>
+                  <a:blipFill>
+                    <a:blip r:embed="rId12"/>
+                    <a:stretch>
+                      <a:fillRect r="-6897"/>
+                    </a:stretch>
+                  </a:blipFill>
+                </p:spPr>
+                <p:txBody>
+                  <a:bodyPr/>
+                  <a:lstStyle/>
+                  <a:p>
+                    <a:r>
+                      <a:rPr lang="zh-TW" altLang="en-US">
+                        <a:noFill/>
+                      </a:rPr>
+                      <a:t> </a:t>
+                    </a:r>
+                  </a:p>
+                </p:txBody>
+              </p:sp>
+            </mc:Fallback>
+          </mc:AlternateContent>
+          <p:cxnSp>
+            <p:nvCxnSpPr>
+              <p:cNvPr id="80" name="直線單箭頭接點 79">
+                <a:extLst>
+                  <a:ext uri="{FF2B5EF4-FFF2-40B4-BE49-F238E27FC236}">
+                    <a16:creationId xmlns:a16="http://schemas.microsoft.com/office/drawing/2014/main" id="{80C7D949-C218-4433-B52A-F2DE23D67403}"/>
+                  </a:ext>
+                </a:extLst>
+              </p:cNvPr>
+              <p:cNvCxnSpPr>
+                <a:cxnSpLocks/>
+              </p:cNvCxnSpPr>
+              <p:nvPr/>
+            </p:nvCxnSpPr>
+            <p:spPr>
+              <a:xfrm>
+                <a:off x="6502870" y="782175"/>
+                <a:ext cx="363442" cy="0"/>
+              </a:xfrm>
+              <a:prstGeom prst="straightConnector1">
+                <a:avLst/>
+              </a:prstGeom>
+              <a:solidFill>
+                <a:schemeClr val="bg1"/>
+              </a:solidFill>
+              <a:ln>
+                <a:tailEnd type="triangle"/>
+              </a:ln>
+            </p:spPr>
+            <p:style>
+              <a:lnRef idx="2">
+                <a:schemeClr val="dk1"/>
+              </a:lnRef>
+              <a:fillRef idx="0">
+                <a:schemeClr val="dk1"/>
+              </a:fillRef>
+              <a:effectRef idx="1">
+                <a:schemeClr val="dk1"/>
+              </a:effectRef>
+              <a:fontRef idx="minor">
+                <a:schemeClr val="tx1"/>
+              </a:fontRef>
+            </p:style>
+          </p:cxnSp>
+          <p:cxnSp>
+            <p:nvCxnSpPr>
+              <p:cNvPr id="81" name="直線單箭頭接點 80">
+                <a:extLst>
+                  <a:ext uri="{FF2B5EF4-FFF2-40B4-BE49-F238E27FC236}">
+                    <a16:creationId xmlns:a16="http://schemas.microsoft.com/office/drawing/2014/main" id="{DFD5C945-0593-467A-B538-CF53EC4B4390}"/>
+                  </a:ext>
+                </a:extLst>
+              </p:cNvPr>
+              <p:cNvCxnSpPr>
+                <a:cxnSpLocks/>
+              </p:cNvCxnSpPr>
+              <p:nvPr/>
+            </p:nvCxnSpPr>
+            <p:spPr>
+              <a:xfrm flipV="1">
+                <a:off x="6508390" y="432919"/>
+                <a:ext cx="0" cy="355792"/>
+              </a:xfrm>
+              <a:prstGeom prst="straightConnector1">
+                <a:avLst/>
+              </a:prstGeom>
+              <a:solidFill>
+                <a:schemeClr val="bg1"/>
+              </a:solidFill>
+              <a:ln>
+                <a:tailEnd type="triangle"/>
+              </a:ln>
+            </p:spPr>
+            <p:style>
+              <a:lnRef idx="2">
+                <a:schemeClr val="dk1"/>
+              </a:lnRef>
+              <a:fillRef idx="0">
+                <a:schemeClr val="dk1"/>
+              </a:fillRef>
+              <a:effectRef idx="1">
+                <a:schemeClr val="dk1"/>
+              </a:effectRef>
+              <a:fontRef idx="minor">
+                <a:schemeClr val="tx1"/>
+              </a:fontRef>
+            </p:style>
+          </p:cxnSp>
+          <mc:AlternateContent xmlns:mc="http://schemas.openxmlformats.org/markup-compatibility/2006" xmlns:a14="http://schemas.microsoft.com/office/drawing/2010/main">
+            <mc:Choice Requires="a14">
+              <p:sp>
+                <p:nvSpPr>
+                  <p:cNvPr id="82" name="文字方塊 81">
+                    <a:extLst>
+                      <a:ext uri="{FF2B5EF4-FFF2-40B4-BE49-F238E27FC236}">
+                        <a16:creationId xmlns:a16="http://schemas.microsoft.com/office/drawing/2014/main" id="{A85838C4-7CEB-42A7-9F9D-8F4611F3AD3B}"/>
+                      </a:ext>
+                    </a:extLst>
+                  </p:cNvPr>
+                  <p:cNvSpPr txBox="1"/>
+                  <p:nvPr/>
+                </p:nvSpPr>
+                <p:spPr>
+                  <a:xfrm>
+                    <a:off x="6747663" y="592474"/>
+                    <a:ext cx="500693" cy="566757"/>
+                  </a:xfrm>
+                  <a:prstGeom prst="rect">
+                    <a:avLst/>
+                  </a:prstGeom>
+                  <a:noFill/>
+                </p:spPr>
+                <p:txBody>
+                  <a:bodyPr wrap="square" rtlCol="0">
+                    <a:spAutoFit/>
+                  </a:bodyPr>
+                  <a:lstStyle/>
+                  <a:p>
+                    <a:pPr/>
+                    <a14:m>
+                      <m:oMathPara xmlns:m="http://schemas.openxmlformats.org/officeDocument/2006/math">
+                        <m:oMathParaPr>
+                          <m:jc m:val="centerGroup"/>
+                        </m:oMathParaPr>
+                        <m:oMath xmlns:m="http://schemas.openxmlformats.org/officeDocument/2006/math">
+                          <m:sSub>
+                            <m:sSubPr>
+                              <m:ctrlPr>
+                                <a:rPr lang="en-US" altLang="zh-TW" sz="2000" i="1">
+                                  <a:latin typeface="Cambria Math" panose="02040503050406030204" pitchFamily="18" charset="0"/>
+                                </a:rPr>
+                              </m:ctrlPr>
+                            </m:sSubPr>
+                            <m:e>
+                              <m:r>
+                                <a:rPr lang="en-US" altLang="zh-TW" sz="2000" i="1">
+                                  <a:latin typeface="Cambria Math" panose="02040503050406030204" pitchFamily="18" charset="0"/>
+                                </a:rPr>
+                                <m:t>𝑘</m:t>
+                              </m:r>
+                            </m:e>
+                            <m:sub>
+                              <m:r>
+                                <a:rPr lang="en-US" altLang="zh-TW" sz="2000" i="1">
+                                  <a:latin typeface="Cambria Math" panose="02040503050406030204" pitchFamily="18" charset="0"/>
+                                </a:rPr>
+                                <m:t>𝑥</m:t>
+                              </m:r>
+                            </m:sub>
+                          </m:sSub>
+                        </m:oMath>
+                      </m:oMathPara>
+                    </a14:m>
+                    <a:endParaRPr lang="zh-TW" altLang="en-US" sz="2000" dirty="0">
+                      <a:latin typeface="Times New Roman" panose="02020603050405020304" pitchFamily="18" charset="0"/>
+                      <a:cs typeface="Times New Roman" panose="02020603050405020304" pitchFamily="18" charset="0"/>
+                    </a:endParaRPr>
+                  </a:p>
+                </p:txBody>
+              </p:sp>
+            </mc:Choice>
+            <mc:Fallback xmlns="">
+              <p:sp>
+                <p:nvSpPr>
+                  <p:cNvPr id="82" name="文字方塊 81">
+                    <a:extLst>
+                      <a:ext uri="{FF2B5EF4-FFF2-40B4-BE49-F238E27FC236}">
+                        <a16:creationId xmlns:a16="http://schemas.microsoft.com/office/drawing/2014/main" id="{A85838C4-7CEB-42A7-9F9D-8F4611F3AD3B}"/>
+                      </a:ext>
+                    </a:extLst>
+                  </p:cNvPr>
+                  <p:cNvSpPr txBox="1">
+                    <a:spLocks noRot="1" noChangeAspect="1" noMove="1" noResize="1" noEditPoints="1" noAdjustHandles="1" noChangeArrowheads="1" noChangeShapeType="1" noTextEdit="1"/>
+                  </p:cNvSpPr>
+                  <p:nvPr/>
+                </p:nvSpPr>
+                <p:spPr>
+                  <a:xfrm>
+                    <a:off x="6747663" y="592474"/>
+                    <a:ext cx="500693" cy="566757"/>
+                  </a:xfrm>
+                  <a:prstGeom prst="rect">
+                    <a:avLst/>
+                  </a:prstGeom>
+                  <a:blipFill>
+                    <a:blip r:embed="rId13"/>
+                    <a:stretch>
+                      <a:fillRect r="-10345"/>
+                    </a:stretch>
+                  </a:blipFill>
+                </p:spPr>
+                <p:txBody>
+                  <a:bodyPr/>
+                  <a:lstStyle/>
+                  <a:p>
+                    <a:r>
+                      <a:rPr lang="zh-TW" altLang="en-US">
+                        <a:noFill/>
+                      </a:rPr>
+                      <a:t> </a:t>
+                    </a:r>
+                  </a:p>
+                </p:txBody>
+              </p:sp>
+            </mc:Fallback>
+          </mc:AlternateContent>
+          <mc:AlternateContent xmlns:mc="http://schemas.openxmlformats.org/markup-compatibility/2006" xmlns:a14="http://schemas.microsoft.com/office/drawing/2010/main">
+            <mc:Choice Requires="a14">
+              <p:sp>
+                <p:nvSpPr>
+                  <p:cNvPr id="83" name="文字方塊 82">
+                    <a:extLst>
+                      <a:ext uri="{FF2B5EF4-FFF2-40B4-BE49-F238E27FC236}">
+                        <a16:creationId xmlns:a16="http://schemas.microsoft.com/office/drawing/2014/main" id="{3519F496-065B-4C4E-8ED7-71C585DD926B}"/>
+                      </a:ext>
+                    </a:extLst>
+                  </p:cNvPr>
+                  <p:cNvSpPr txBox="1"/>
+                  <p:nvPr/>
+                </p:nvSpPr>
+                <p:spPr>
+                  <a:xfrm>
+                    <a:off x="6281528" y="-97298"/>
+                    <a:ext cx="500693" cy="600999"/>
+                  </a:xfrm>
+                  <a:prstGeom prst="rect">
+                    <a:avLst/>
+                  </a:prstGeom>
+                  <a:noFill/>
+                </p:spPr>
+                <p:txBody>
+                  <a:bodyPr wrap="square" rtlCol="0">
+                    <a:spAutoFit/>
+                  </a:bodyPr>
+                  <a:lstStyle/>
+                  <a:p>
+                    <a:pPr/>
+                    <a14:m>
+                      <m:oMathPara xmlns:m="http://schemas.openxmlformats.org/officeDocument/2006/math">
+                        <m:oMathParaPr>
+                          <m:jc m:val="centerGroup"/>
+                        </m:oMathParaPr>
+                        <m:oMath xmlns:m="http://schemas.openxmlformats.org/officeDocument/2006/math">
+                          <m:sSub>
+                            <m:sSubPr>
+                              <m:ctrlPr>
+                                <a:rPr lang="en-US" altLang="zh-TW" sz="2000" i="1">
+                                  <a:latin typeface="Cambria Math" panose="02040503050406030204" pitchFamily="18" charset="0"/>
+                                </a:rPr>
+                              </m:ctrlPr>
+                            </m:sSubPr>
+                            <m:e>
+                              <m:r>
+                                <a:rPr lang="en-US" altLang="zh-TW" sz="2000" i="1">
+                                  <a:latin typeface="Cambria Math" panose="02040503050406030204" pitchFamily="18" charset="0"/>
+                                </a:rPr>
+                                <m:t>𝑘</m:t>
+                              </m:r>
+                            </m:e>
+                            <m:sub>
+                              <m:r>
+                                <a:rPr lang="en-US" altLang="zh-TW" sz="2000" i="1">
+                                  <a:latin typeface="Cambria Math" panose="02040503050406030204" pitchFamily="18" charset="0"/>
+                                </a:rPr>
+                                <m:t>𝑦</m:t>
+                              </m:r>
+                            </m:sub>
+                          </m:sSub>
+                        </m:oMath>
+                      </m:oMathPara>
+                    </a14:m>
+                    <a:endParaRPr lang="zh-TW" altLang="en-US" sz="2000" dirty="0">
+                      <a:latin typeface="Times New Roman" panose="02020603050405020304" pitchFamily="18" charset="0"/>
+                      <a:cs typeface="Times New Roman" panose="02020603050405020304" pitchFamily="18" charset="0"/>
+                    </a:endParaRPr>
+                  </a:p>
+                </p:txBody>
+              </p:sp>
+            </mc:Choice>
+            <mc:Fallback xmlns="">
+              <p:sp>
+                <p:nvSpPr>
+                  <p:cNvPr id="83" name="文字方塊 82">
+                    <a:extLst>
+                      <a:ext uri="{FF2B5EF4-FFF2-40B4-BE49-F238E27FC236}">
+                        <a16:creationId xmlns:a16="http://schemas.microsoft.com/office/drawing/2014/main" id="{3519F496-065B-4C4E-8ED7-71C585DD926B}"/>
+                      </a:ext>
+                    </a:extLst>
+                  </p:cNvPr>
+                  <p:cNvSpPr txBox="1">
+                    <a:spLocks noRot="1" noChangeAspect="1" noMove="1" noResize="1" noEditPoints="1" noAdjustHandles="1" noChangeArrowheads="1" noChangeShapeType="1" noTextEdit="1"/>
+                  </p:cNvSpPr>
+                  <p:nvPr/>
+                </p:nvSpPr>
+                <p:spPr>
+                  <a:xfrm>
+                    <a:off x="6281528" y="-97298"/>
+                    <a:ext cx="500693" cy="600999"/>
+                  </a:xfrm>
+                  <a:prstGeom prst="rect">
+                    <a:avLst/>
+                  </a:prstGeom>
+                  <a:blipFill>
+                    <a:blip r:embed="rId14"/>
+                    <a:stretch>
+                      <a:fillRect r="-18966" b="-5714"/>
+                    </a:stretch>
+                  </a:blipFill>
+                </p:spPr>
+                <p:txBody>
+                  <a:bodyPr/>
+                  <a:lstStyle/>
+                  <a:p>
+                    <a:r>
+                      <a:rPr lang="zh-TW" altLang="en-US">
+                        <a:noFill/>
+                      </a:rPr>
+                      <a:t> </a:t>
+                    </a:r>
+                  </a:p>
+                </p:txBody>
+              </p:sp>
+            </mc:Fallback>
+          </mc:AlternateContent>
+          <p:grpSp>
+            <p:nvGrpSpPr>
+              <p:cNvPr id="84" name="群組 83">
+                <a:extLst>
+                  <a:ext uri="{FF2B5EF4-FFF2-40B4-BE49-F238E27FC236}">
+                    <a16:creationId xmlns:a16="http://schemas.microsoft.com/office/drawing/2014/main" id="{495DF09D-1858-4C50-8BC1-76A72A31389C}"/>
+                  </a:ext>
+                </a:extLst>
+              </p:cNvPr>
+              <p:cNvGrpSpPr/>
+              <p:nvPr/>
+            </p:nvGrpSpPr>
+            <p:grpSpPr>
+              <a:xfrm>
+                <a:off x="6436095" y="705414"/>
+                <a:ext cx="152982" cy="152983"/>
+                <a:chOff x="5737446" y="632449"/>
+                <a:chExt cx="1065551" cy="1065563"/>
+              </a:xfrm>
+            </p:grpSpPr>
+            <p:sp>
+              <p:nvSpPr>
+                <p:cNvPr id="86" name="圓形: 空心 85">
+                  <a:extLst>
+                    <a:ext uri="{FF2B5EF4-FFF2-40B4-BE49-F238E27FC236}">
+                      <a16:creationId xmlns:a16="http://schemas.microsoft.com/office/drawing/2014/main" id="{ACE52A13-FB9D-4060-9C97-8A67AFE54A4A}"/>
+                    </a:ext>
+                  </a:extLst>
+                </p:cNvPr>
+                <p:cNvSpPr/>
+                <p:nvPr/>
+              </p:nvSpPr>
+              <p:spPr>
+                <a:xfrm>
+                  <a:off x="5737446" y="632449"/>
+                  <a:ext cx="1065551" cy="1065563"/>
+                </a:xfrm>
+                <a:prstGeom prst="donut">
+                  <a:avLst>
+                    <a:gd name="adj" fmla="val 38442"/>
+                  </a:avLst>
+                </a:prstGeom>
+                <a:solidFill>
+                  <a:schemeClr val="bg1"/>
+                </a:solidFill>
+                <a:ln>
+                  <a:solidFill>
+                    <a:schemeClr val="tx1"/>
+                  </a:solidFill>
+                </a:ln>
+              </p:spPr>
+              <p:style>
+                <a:lnRef idx="2">
+                  <a:schemeClr val="accent1">
+                    <a:shade val="50000"/>
+                  </a:schemeClr>
+                </a:lnRef>
+                <a:fillRef idx="1">
+                  <a:schemeClr val="accent1"/>
+                </a:fillRef>
+                <a:effectRef idx="0">
+                  <a:schemeClr val="accent1"/>
+                </a:effectRef>
+                <a:fontRef idx="minor">
+                  <a:schemeClr val="lt1"/>
+                </a:fontRef>
+              </p:style>
+              <p:txBody>
+                <a:bodyPr rot="0" spcFirstLastPara="0" vertOverflow="overflow" horzOverflow="overflow" vert="horz" wrap="square" lIns="74295" tIns="37148" rIns="74295" bIns="37148" numCol="1" spcCol="0" rtlCol="0" fromWordArt="0" anchor="ctr" anchorCtr="0" forceAA="0" compatLnSpc="1">
+                  <a:prstTxWarp prst="textNoShape">
+                    <a:avLst/>
+                  </a:prstTxWarp>
+                  <a:noAutofit/>
+                </a:bodyPr>
+                <a:lstStyle/>
+                <a:p>
+                  <a:pPr algn="ctr"/>
+                  <a:endParaRPr lang="zh-TW" altLang="en-US" sz="2000" dirty="0">
+                    <a:solidFill>
+                      <a:schemeClr val="tx1"/>
+                    </a:solidFill>
+                    <a:latin typeface="Times New Roman" panose="02020603050405020304" pitchFamily="18" charset="0"/>
+                    <a:cs typeface="Times New Roman" panose="02020603050405020304" pitchFamily="18" charset="0"/>
+                  </a:endParaRPr>
+                </a:p>
+              </p:txBody>
+            </p:sp>
+            <p:sp>
+              <p:nvSpPr>
+                <p:cNvPr id="87" name="橢圓 86">
+                  <a:extLst>
+                    <a:ext uri="{FF2B5EF4-FFF2-40B4-BE49-F238E27FC236}">
+                      <a16:creationId xmlns:a16="http://schemas.microsoft.com/office/drawing/2014/main" id="{149EA94D-64FC-4D0B-8973-99184378A3FF}"/>
+                    </a:ext>
+                  </a:extLst>
+                </p:cNvPr>
+                <p:cNvSpPr/>
+                <p:nvPr/>
+              </p:nvSpPr>
+              <p:spPr>
+                <a:xfrm>
+                  <a:off x="6200578" y="1119065"/>
+                  <a:ext cx="131269" cy="131269"/>
+                </a:xfrm>
+                <a:prstGeom prst="ellipse">
+                  <a:avLst/>
+                </a:prstGeom>
+                <a:solidFill>
+                  <a:schemeClr val="tx1"/>
+                </a:solidFill>
+                <a:ln>
+                  <a:noFill/>
+                </a:ln>
+              </p:spPr>
+              <p:style>
+                <a:lnRef idx="2">
+                  <a:schemeClr val="accent1">
+                    <a:shade val="50000"/>
+                  </a:schemeClr>
+                </a:lnRef>
+                <a:fillRef idx="1">
+                  <a:schemeClr val="accent1"/>
+                </a:fillRef>
+                <a:effectRef idx="0">
+                  <a:schemeClr val="accent1"/>
+                </a:effectRef>
+                <a:fontRef idx="minor">
+                  <a:schemeClr val="lt1"/>
+                </a:fontRef>
+              </p:style>
+              <p:txBody>
+                <a:bodyPr rot="0" spcFirstLastPara="0" vertOverflow="overflow" horzOverflow="overflow" vert="horz" wrap="square" lIns="74295" tIns="37148" rIns="74295" bIns="37148" numCol="1" spcCol="0" rtlCol="0" fromWordArt="0" anchor="ctr" anchorCtr="0" forceAA="0" compatLnSpc="1">
+                  <a:prstTxWarp prst="textNoShape">
+                    <a:avLst/>
+                  </a:prstTxWarp>
+                  <a:noAutofit/>
+                </a:bodyPr>
+                <a:lstStyle/>
+                <a:p>
+                  <a:pPr algn="ctr"/>
+                  <a:endParaRPr lang="zh-TW" altLang="en-US" sz="2000">
+                    <a:latin typeface="Times New Roman" panose="02020603050405020304" pitchFamily="18" charset="0"/>
+                    <a:cs typeface="Times New Roman" panose="02020603050405020304" pitchFamily="18" charset="0"/>
+                  </a:endParaRPr>
+                </a:p>
+              </p:txBody>
+            </p:sp>
+          </p:grpSp>
+        </p:grpSp>
+        <p:grpSp>
+          <p:nvGrpSpPr>
+            <p:cNvPr id="66" name="群組 65">
+              <a:extLst>
+                <a:ext uri="{FF2B5EF4-FFF2-40B4-BE49-F238E27FC236}">
+                  <a16:creationId xmlns:a16="http://schemas.microsoft.com/office/drawing/2014/main" id="{D3C30B12-C841-478A-8023-FFA4E768F38A}"/>
+                </a:ext>
+              </a:extLst>
+            </p:cNvPr>
+            <p:cNvGrpSpPr/>
+            <p:nvPr/>
+          </p:nvGrpSpPr>
+          <p:grpSpPr>
+            <a:xfrm>
+              <a:off x="6935615" y="644199"/>
+              <a:ext cx="814087" cy="891542"/>
+              <a:chOff x="6095200" y="-41730"/>
+              <a:chExt cx="1153156" cy="1262874"/>
+            </a:xfrm>
+          </p:grpSpPr>
+          <mc:AlternateContent xmlns:mc="http://schemas.openxmlformats.org/markup-compatibility/2006" xmlns:a14="http://schemas.microsoft.com/office/drawing/2010/main">
+            <mc:Choice Requires="a14">
+              <p:sp>
+                <p:nvSpPr>
+                  <p:cNvPr id="72" name="文字方塊 71">
+                    <a:extLst>
+                      <a:ext uri="{FF2B5EF4-FFF2-40B4-BE49-F238E27FC236}">
+                        <a16:creationId xmlns:a16="http://schemas.microsoft.com/office/drawing/2014/main" id="{79885C87-960B-4533-8B78-16664E820A61}"/>
+                      </a:ext>
+                    </a:extLst>
+                  </p:cNvPr>
+                  <p:cNvSpPr txBox="1"/>
+                  <p:nvPr/>
+                </p:nvSpPr>
+                <p:spPr>
+                  <a:xfrm>
+                    <a:off x="6095200" y="654386"/>
+                    <a:ext cx="500693" cy="566758"/>
+                  </a:xfrm>
+                  <a:prstGeom prst="rect">
+                    <a:avLst/>
+                  </a:prstGeom>
+                  <a:noFill/>
+                </p:spPr>
+                <p:txBody>
+                  <a:bodyPr wrap="square" rtlCol="0">
+                    <a:spAutoFit/>
+                  </a:bodyPr>
+                  <a:lstStyle/>
+                  <a:p>
+                    <a:pPr/>
+                    <a14:m>
+                      <m:oMathPara xmlns:m="http://schemas.openxmlformats.org/officeDocument/2006/math">
+                        <m:oMathParaPr>
+                          <m:jc m:val="centerGroup"/>
+                        </m:oMathParaPr>
+                        <m:oMath xmlns:m="http://schemas.openxmlformats.org/officeDocument/2006/math">
+                          <m:r>
+                            <a:rPr lang="en-US" altLang="zh-TW" sz="2000" i="1">
                               <a:latin typeface="Cambria Math" panose="02040503050406030204" pitchFamily="18" charset="0"/>
                             </a:rPr>
                             <m:t>𝑦</m:t>
@@ -5601,12 +5673,15 @@
                         </m:oMath>
                       </m:oMathPara>
                     </a14:m>
-                    <a:endParaRPr lang="zh-TW" altLang="en-US" dirty="0"/>
+                    <a:endParaRPr lang="zh-TW" altLang="en-US" sz="2000" dirty="0">
+                      <a:latin typeface="Times New Roman" panose="02020603050405020304" pitchFamily="18" charset="0"/>
+                      <a:cs typeface="Times New Roman" panose="02020603050405020304" pitchFamily="18" charset="0"/>
+                    </a:endParaRPr>
                   </a:p>
                 </p:txBody>
               </p:sp>
             </mc:Choice>
-            <mc:Fallback>
+            <mc:Fallback xmlns="">
               <p:sp>
                 <p:nvSpPr>
                   <p:cNvPr id="72" name="文字方塊 71">
@@ -5623,8 +5698,8 @@
                 </p:nvSpPr>
                 <p:spPr>
                   <a:xfrm>
-                    <a:off x="6095200" y="654387"/>
-                    <a:ext cx="500693" cy="369332"/>
+                    <a:off x="6095200" y="654386"/>
+                    <a:ext cx="500693" cy="566758"/>
                   </a:xfrm>
                   <a:prstGeom prst="rect">
                     <a:avLst/>
@@ -5632,7 +5707,7 @@
                   <a:blipFill>
                     <a:blip r:embed="rId15"/>
                     <a:stretch>
-                      <a:fillRect b="-22642"/>
+                      <a:fillRect b="-9231"/>
                     </a:stretch>
                   </a:blipFill>
                 </p:spPr>
@@ -5739,8 +5814,8 @@
               </a:fontRef>
             </p:style>
           </p:cxnSp>
-          <mc:AlternateContent xmlns:mc="http://schemas.openxmlformats.org/markup-compatibility/2006">
-            <mc:Choice xmlns:a14="http://schemas.microsoft.com/office/drawing/2010/main" Requires="a14">
+          <mc:AlternateContent xmlns:mc="http://schemas.openxmlformats.org/markup-compatibility/2006" xmlns:a14="http://schemas.microsoft.com/office/drawing/2010/main">
+            <mc:Choice Requires="a14">
               <p:sp>
                 <p:nvSpPr>
                   <p:cNvPr id="69" name="文字方塊 68">
@@ -5755,8 +5830,8 @@
                 </p:nvSpPr>
                 <p:spPr>
                   <a:xfrm>
-                    <a:off x="6747663" y="592474"/>
-                    <a:ext cx="500693" cy="369332"/>
+                    <a:off x="6747663" y="592473"/>
+                    <a:ext cx="500693" cy="566758"/>
                   </a:xfrm>
                   <a:prstGeom prst="rect">
                     <a:avLst/>
@@ -5777,7 +5852,7 @@
                         </m:oMathParaPr>
                         <m:oMath xmlns:m="http://schemas.openxmlformats.org/officeDocument/2006/math">
                           <m:r>
-                            <a:rPr lang="en-US" altLang="zh-TW" i="1">
+                            <a:rPr lang="en-US" altLang="zh-TW" sz="2000" i="1">
                               <a:latin typeface="Cambria Math" panose="02040503050406030204" pitchFamily="18" charset="0"/>
                             </a:rPr>
                             <m:t>𝑥</m:t>
@@ -5785,12 +5860,15 @@
                         </m:oMath>
                       </m:oMathPara>
                     </a14:m>
-                    <a:endParaRPr lang="zh-TW" altLang="en-US" dirty="0"/>
+                    <a:endParaRPr lang="zh-TW" altLang="en-US" sz="2000" dirty="0">
+                      <a:latin typeface="Times New Roman" panose="02020603050405020304" pitchFamily="18" charset="0"/>
+                      <a:cs typeface="Times New Roman" panose="02020603050405020304" pitchFamily="18" charset="0"/>
+                    </a:endParaRPr>
                   </a:p>
                 </p:txBody>
               </p:sp>
             </mc:Choice>
-            <mc:Fallback>
+            <mc:Fallback xmlns="">
               <p:sp>
                 <p:nvSpPr>
                   <p:cNvPr id="69" name="文字方塊 68">
@@ -5807,8 +5885,8 @@
                 </p:nvSpPr>
                 <p:spPr>
                   <a:xfrm>
-                    <a:off x="6747663" y="592474"/>
-                    <a:ext cx="500693" cy="369332"/>
+                    <a:off x="6747663" y="592473"/>
+                    <a:ext cx="500693" cy="566758"/>
                   </a:xfrm>
                   <a:prstGeom prst="rect">
                     <a:avLst/>
@@ -5835,8 +5913,8 @@
               </p:sp>
             </mc:Fallback>
           </mc:AlternateContent>
-          <mc:AlternateContent xmlns:mc="http://schemas.openxmlformats.org/markup-compatibility/2006">
-            <mc:Choice xmlns:a14="http://schemas.microsoft.com/office/drawing/2010/main" Requires="a14">
+          <mc:AlternateContent xmlns:mc="http://schemas.openxmlformats.org/markup-compatibility/2006" xmlns:a14="http://schemas.microsoft.com/office/drawing/2010/main">
+            <mc:Choice Requires="a14">
               <p:sp>
                 <p:nvSpPr>
                   <p:cNvPr id="70" name="文字方塊 69">
@@ -5851,8 +5929,8 @@
                 </p:nvSpPr>
                 <p:spPr>
                   <a:xfrm>
-                    <a:off x="6281529" y="86196"/>
-                    <a:ext cx="500693" cy="369332"/>
+                    <a:off x="6281528" y="-41730"/>
+                    <a:ext cx="500693" cy="566758"/>
                   </a:xfrm>
                   <a:prstGeom prst="rect">
                     <a:avLst/>
@@ -5873,7 +5951,7 @@
                         </m:oMathParaPr>
                         <m:oMath xmlns:m="http://schemas.openxmlformats.org/officeDocument/2006/math">
                           <m:r>
-                            <a:rPr lang="en-US" altLang="zh-TW" i="1">
+                            <a:rPr lang="en-US" altLang="zh-TW" sz="2000" i="1">
                               <a:latin typeface="Cambria Math" panose="02040503050406030204" pitchFamily="18" charset="0"/>
                             </a:rPr>
                             <m:t>𝑧</m:t>
@@ -5881,12 +5959,15 @@
                         </m:oMath>
                       </m:oMathPara>
                     </a14:m>
-                    <a:endParaRPr lang="zh-TW" altLang="en-US" dirty="0"/>
+                    <a:endParaRPr lang="zh-TW" altLang="en-US" sz="2000" dirty="0">
+                      <a:latin typeface="Times New Roman" panose="02020603050405020304" pitchFamily="18" charset="0"/>
+                      <a:cs typeface="Times New Roman" panose="02020603050405020304" pitchFamily="18" charset="0"/>
+                    </a:endParaRPr>
                   </a:p>
                 </p:txBody>
               </p:sp>
             </mc:Choice>
-            <mc:Fallback>
+            <mc:Fallback xmlns="">
               <p:sp>
                 <p:nvSpPr>
                   <p:cNvPr id="70" name="文字方塊 69">
@@ -5903,8 +5984,8 @@
                 </p:nvSpPr>
                 <p:spPr>
                   <a:xfrm>
-                    <a:off x="6281529" y="86196"/>
-                    <a:ext cx="500693" cy="369332"/>
+                    <a:off x="6281528" y="-41730"/>
+                    <a:ext cx="500693" cy="566758"/>
                   </a:xfrm>
                   <a:prstGeom prst="rect">
                     <a:avLst/>
@@ -5932,12 +6013,138 @@
             </mc:Fallback>
           </mc:AlternateContent>
         </p:grpSp>
+        <p:sp>
+          <p:nvSpPr>
+            <p:cNvPr id="76" name="橢圓 75">
+              <a:extLst>
+                <a:ext uri="{FF2B5EF4-FFF2-40B4-BE49-F238E27FC236}">
+                  <a16:creationId xmlns:a16="http://schemas.microsoft.com/office/drawing/2014/main" id="{99874BD5-0A9D-4A6D-80FA-8D320A783253}"/>
+                </a:ext>
+              </a:extLst>
+            </p:cNvPr>
+            <p:cNvSpPr/>
+            <p:nvPr/>
+          </p:nvSpPr>
+          <p:spPr>
+            <a:xfrm>
+              <a:off x="7180174" y="1172372"/>
+              <a:ext cx="108001" cy="108001"/>
+            </a:xfrm>
+            <a:prstGeom prst="ellipse">
+              <a:avLst/>
+            </a:prstGeom>
+            <a:solidFill>
+              <a:schemeClr val="bg1"/>
+            </a:solidFill>
+            <a:ln w="9525">
+              <a:solidFill>
+                <a:schemeClr val="tx1"/>
+              </a:solidFill>
+            </a:ln>
+          </p:spPr>
+          <p:style>
+            <a:lnRef idx="2">
+              <a:schemeClr val="accent1">
+                <a:shade val="50000"/>
+              </a:schemeClr>
+            </a:lnRef>
+            <a:fillRef idx="1">
+              <a:schemeClr val="accent1"/>
+            </a:fillRef>
+            <a:effectRef idx="0">
+              <a:schemeClr val="accent1"/>
+            </a:effectRef>
+            <a:fontRef idx="minor">
+              <a:schemeClr val="lt1"/>
+            </a:fontRef>
+          </p:style>
+          <p:txBody>
+            <a:bodyPr rot="0" spcFirstLastPara="0" vertOverflow="overflow" horzOverflow="overflow" vert="horz" wrap="square" lIns="74295" tIns="37148" rIns="74295" bIns="37148" numCol="1" spcCol="0" rtlCol="0" fromWordArt="0" anchor="ctr" anchorCtr="0" forceAA="0" compatLnSpc="1">
+              <a:prstTxWarp prst="textNoShape">
+                <a:avLst/>
+              </a:prstTxWarp>
+              <a:noAutofit/>
+            </a:bodyPr>
+            <a:lstStyle/>
+            <a:p>
+              <a:pPr algn="ctr"/>
+              <a:endParaRPr lang="zh-TW" altLang="en-US" sz="2000" dirty="0">
+                <a:latin typeface="Times New Roman" panose="02020603050405020304" pitchFamily="18" charset="0"/>
+                <a:cs typeface="Times New Roman" panose="02020603050405020304" pitchFamily="18" charset="0"/>
+              </a:endParaRPr>
+            </a:p>
+          </p:txBody>
+        </p:sp>
+        <p:sp>
+          <p:nvSpPr>
+            <p:cNvPr id="77" name="乘號 76">
+              <a:extLst>
+                <a:ext uri="{FF2B5EF4-FFF2-40B4-BE49-F238E27FC236}">
+                  <a16:creationId xmlns:a16="http://schemas.microsoft.com/office/drawing/2014/main" id="{FD21A3C2-4C45-4FF7-926A-5DE21AAFEF4F}"/>
+                </a:ext>
+              </a:extLst>
+            </p:cNvPr>
+            <p:cNvSpPr/>
+            <p:nvPr/>
+          </p:nvSpPr>
+          <p:spPr>
+            <a:xfrm>
+              <a:off x="7165846" y="1164431"/>
+              <a:ext cx="136654" cy="123880"/>
+            </a:xfrm>
+            <a:prstGeom prst="mathMultiply">
+              <a:avLst>
+                <a:gd name="adj1" fmla="val 376"/>
+              </a:avLst>
+            </a:prstGeom>
+            <a:solidFill>
+              <a:schemeClr val="tx1"/>
+            </a:solidFill>
+            <a:ln w="6350">
+              <a:solidFill>
+                <a:schemeClr val="tx1"/>
+              </a:solidFill>
+            </a:ln>
+          </p:spPr>
+          <p:style>
+            <a:lnRef idx="2">
+              <a:schemeClr val="accent1">
+                <a:shade val="50000"/>
+              </a:schemeClr>
+            </a:lnRef>
+            <a:fillRef idx="1">
+              <a:schemeClr val="accent1"/>
+            </a:fillRef>
+            <a:effectRef idx="0">
+              <a:schemeClr val="accent1"/>
+            </a:effectRef>
+            <a:fontRef idx="minor">
+              <a:schemeClr val="lt1"/>
+            </a:fontRef>
+          </p:style>
+          <p:txBody>
+            <a:bodyPr rot="0" spcFirstLastPara="0" vertOverflow="overflow" horzOverflow="overflow" vert="horz" wrap="square" lIns="74295" tIns="37148" rIns="74295" bIns="37148" numCol="1" spcCol="0" rtlCol="0" fromWordArt="0" anchor="ctr" anchorCtr="0" forceAA="0" compatLnSpc="1">
+              <a:prstTxWarp prst="textNoShape">
+                <a:avLst/>
+              </a:prstTxWarp>
+              <a:noAutofit/>
+            </a:bodyPr>
+            <a:lstStyle/>
+            <a:p>
+              <a:pPr algn="ctr"/>
+              <a:endParaRPr lang="zh-TW" altLang="en-US" sz="2000" dirty="0">
+                <a:latin typeface="Times New Roman" panose="02020603050405020304" pitchFamily="18" charset="0"/>
+                <a:cs typeface="Times New Roman" panose="02020603050405020304" pitchFamily="18" charset="0"/>
+              </a:endParaRPr>
+            </a:p>
+          </p:txBody>
+        </p:sp>
         <p:grpSp>
           <p:nvGrpSpPr>
-            <p:cNvPr id="78" name="群組 77">
+            <p:cNvPr id="13" name="群組 12">
               <a:extLst>
                 <a:ext uri="{FF2B5EF4-FFF2-40B4-BE49-F238E27FC236}">
-                  <a16:creationId xmlns:a16="http://schemas.microsoft.com/office/drawing/2014/main" id="{8612E472-0341-4444-B726-C876552B0738}"/>
+                  <a16:creationId xmlns:a16="http://schemas.microsoft.com/office/drawing/2014/main" id="{F50863B7-43C0-41E1-BDE4-A077FED16DAB}"/>
                 </a:ext>
               </a:extLst>
             </p:cNvPr>
@@ -5946,18 +6153,18 @@
           </p:nvGrpSpPr>
           <p:grpSpPr>
             <a:xfrm>
-              <a:off x="2265833" y="1610990"/>
-              <a:ext cx="79200" cy="79200"/>
-              <a:chOff x="406078" y="1237436"/>
-              <a:chExt cx="1456060" cy="1456060"/>
+              <a:off x="-43434" y="780429"/>
+              <a:ext cx="6596081" cy="4300514"/>
+              <a:chOff x="1211211" y="524630"/>
+              <a:chExt cx="9984532" cy="6509717"/>
             </a:xfrm>
           </p:grpSpPr>
           <p:sp>
             <p:nvSpPr>
-              <p:cNvPr id="76" name="橢圓 75">
+              <p:cNvPr id="12" name="矩形 11">
                 <a:extLst>
                   <a:ext uri="{FF2B5EF4-FFF2-40B4-BE49-F238E27FC236}">
-                    <a16:creationId xmlns:a16="http://schemas.microsoft.com/office/drawing/2014/main" id="{99874BD5-0A9D-4A6D-80FA-8D320A783253}"/>
+                    <a16:creationId xmlns:a16="http://schemas.microsoft.com/office/drawing/2014/main" id="{92880606-AA17-462B-82D0-1F146FA2C58A}"/>
                   </a:ext>
                 </a:extLst>
               </p:cNvPr>
@@ -5966,19 +6173,17 @@
             </p:nvSpPr>
             <p:spPr>
               <a:xfrm>
-                <a:off x="595101" y="1426459"/>
-                <a:ext cx="1078014" cy="1078014"/>
+                <a:off x="1535502" y="655608"/>
+                <a:ext cx="9161253" cy="6038490"/>
               </a:xfrm>
-              <a:prstGeom prst="ellipse">
+              <a:prstGeom prst="rect">
                 <a:avLst/>
               </a:prstGeom>
               <a:solidFill>
                 <a:schemeClr val="bg1"/>
               </a:solidFill>
-              <a:ln w="9525">
-                <a:solidFill>
-                  <a:schemeClr val="tx1"/>
-                </a:solidFill>
+              <a:ln>
+                <a:noFill/>
               </a:ln>
             </p:spPr>
             <p:style>
@@ -5998,195 +6203,273 @@
               </a:fontRef>
             </p:style>
             <p:txBody>
-              <a:bodyPr rot="0" spcFirstLastPara="0" vertOverflow="overflow" horzOverflow="overflow" vert="horz" wrap="square" lIns="91440" tIns="45720" rIns="91440" bIns="45720" numCol="1" spcCol="0" rtlCol="0" fromWordArt="0" anchor="ctr" anchorCtr="0" forceAA="0" compatLnSpc="1">
-                <a:prstTxWarp prst="textNoShape">
-                  <a:avLst/>
-                </a:prstTxWarp>
-                <a:noAutofit/>
+              <a:bodyPr rtlCol="0" anchor="ctr"/>
+              <a:lstStyle/>
+              <a:p>
+                <a:pPr algn="ctr"/>
+                <a:endParaRPr lang="zh-TW" altLang="en-US" sz="2000">
+                  <a:latin typeface="Times New Roman" panose="02020603050405020304" pitchFamily="18" charset="0"/>
+                  <a:cs typeface="Times New Roman" panose="02020603050405020304" pitchFamily="18" charset="0"/>
+                </a:endParaRPr>
+              </a:p>
+            </p:txBody>
+          </p:sp>
+          <p:pic>
+            <p:nvPicPr>
+              <p:cNvPr id="6" name="圖片 5">
+                <a:extLst>
+                  <a:ext uri="{FF2B5EF4-FFF2-40B4-BE49-F238E27FC236}">
+                    <a16:creationId xmlns:a16="http://schemas.microsoft.com/office/drawing/2014/main" id="{C19DBC62-3059-4DD9-BB31-B2E00EBCC63F}"/>
+                  </a:ext>
+                </a:extLst>
+              </p:cNvPr>
+              <p:cNvPicPr>
+                <a:picLocks noChangeAspect="1"/>
+              </p:cNvPicPr>
+              <p:nvPr/>
+            </p:nvPicPr>
+            <p:blipFill rotWithShape="1">
+              <a:blip r:embed="rId18">
+                <a:extLst>
+                  <a:ext uri="{28A0092B-C50C-407E-A947-70E740481C1C}">
+                    <a14:useLocalDpi xmlns:a14="http://schemas.microsoft.com/office/drawing/2010/main" val="0"/>
+                  </a:ext>
+                </a:extLst>
+              </a:blip>
+              <a:srcRect l="3293" t="7368"/>
+              <a:stretch/>
+            </p:blipFill>
+            <p:spPr>
+              <a:xfrm>
+                <a:off x="1915063" y="1053110"/>
+                <a:ext cx="9089276" cy="5981237"/>
+              </a:xfrm>
+              <a:prstGeom prst="rect">
+                <a:avLst/>
+              </a:prstGeom>
+            </p:spPr>
+          </p:pic>
+          <p:sp>
+            <p:nvSpPr>
+              <p:cNvPr id="7" name="文字方塊 6">
+                <a:extLst>
+                  <a:ext uri="{FF2B5EF4-FFF2-40B4-BE49-F238E27FC236}">
+                    <a16:creationId xmlns:a16="http://schemas.microsoft.com/office/drawing/2014/main" id="{D73DE3EC-6A51-412D-B4BF-FC0F69DF4AB8}"/>
+                  </a:ext>
+                </a:extLst>
+              </p:cNvPr>
+              <p:cNvSpPr txBox="1"/>
+              <p:nvPr/>
+            </p:nvSpPr>
+            <p:spPr>
+              <a:xfrm>
+                <a:off x="2238161" y="524630"/>
+                <a:ext cx="1477932" cy="768707"/>
+              </a:xfrm>
+              <a:prstGeom prst="rect">
+                <a:avLst/>
+              </a:prstGeom>
+              <a:noFill/>
+            </p:spPr>
+            <p:txBody>
+              <a:bodyPr wrap="square" rtlCol="0">
+                <a:spAutoFit/>
               </a:bodyPr>
               <a:lstStyle/>
               <a:p>
                 <a:pPr algn="ctr"/>
-                <a:endParaRPr lang="zh-TW" altLang="en-US" dirty="0"/>
+                <a:r>
+                  <a:rPr lang="en-US" altLang="zh-TW" sz="2700" dirty="0">
+                    <a:latin typeface="Times New Roman" panose="02020603050405020304" pitchFamily="18" charset="0"/>
+                    <a:cs typeface="Times New Roman" panose="02020603050405020304" pitchFamily="18" charset="0"/>
+                  </a:rPr>
+                  <a:t>Bulk</a:t>
+                </a:r>
+                <a:endParaRPr lang="zh-TW" altLang="en-US" sz="2700" dirty="0">
+                  <a:latin typeface="Times New Roman" panose="02020603050405020304" pitchFamily="18" charset="0"/>
+                  <a:cs typeface="Times New Roman" panose="02020603050405020304" pitchFamily="18" charset="0"/>
+                </a:endParaRPr>
               </a:p>
             </p:txBody>
           </p:sp>
           <p:sp>
             <p:nvSpPr>
-              <p:cNvPr id="77" name="乘號 76">
+              <p:cNvPr id="8" name="文字方塊 7">
                 <a:extLst>
                   <a:ext uri="{FF2B5EF4-FFF2-40B4-BE49-F238E27FC236}">
-                    <a16:creationId xmlns:a16="http://schemas.microsoft.com/office/drawing/2014/main" id="{FD21A3C2-4C45-4FF7-926A-5DE21AAFEF4F}"/>
+                    <a16:creationId xmlns:a16="http://schemas.microsoft.com/office/drawing/2014/main" id="{59692366-D237-4840-90EC-D60BC3D25066}"/>
                   </a:ext>
                 </a:extLst>
               </p:cNvPr>
-              <p:cNvSpPr/>
+              <p:cNvSpPr txBox="1"/>
               <p:nvPr/>
             </p:nvSpPr>
             <p:spPr>
               <a:xfrm>
-                <a:off x="406078" y="1237436"/>
-                <a:ext cx="1456060" cy="1456060"/>
+                <a:off x="3861478" y="524630"/>
+                <a:ext cx="2814223" cy="768707"/>
               </a:xfrm>
-              <a:prstGeom prst="mathMultiply">
-                <a:avLst>
-                  <a:gd name="adj1" fmla="val 376"/>
-                </a:avLst>
+              <a:prstGeom prst="rect">
+                <a:avLst/>
               </a:prstGeom>
-              <a:solidFill>
-                <a:schemeClr val="tx1"/>
-              </a:solidFill>
-              <a:ln w="6350">
-                <a:solidFill>
-                  <a:schemeClr val="tx1"/>
-                </a:solidFill>
-              </a:ln>
+              <a:noFill/>
             </p:spPr>
-            <p:style>
-              <a:lnRef idx="2">
-                <a:schemeClr val="accent1">
-                  <a:shade val="50000"/>
-                </a:schemeClr>
-              </a:lnRef>
-              <a:fillRef idx="1">
-                <a:schemeClr val="accent1"/>
-              </a:fillRef>
-              <a:effectRef idx="0">
-                <a:schemeClr val="accent1"/>
-              </a:effectRef>
-              <a:fontRef idx="minor">
-                <a:schemeClr val="lt1"/>
-              </a:fontRef>
-            </p:style>
             <p:txBody>
-              <a:bodyPr rot="0" spcFirstLastPara="0" vertOverflow="overflow" horzOverflow="overflow" vert="horz" wrap="square" lIns="91440" tIns="45720" rIns="91440" bIns="45720" numCol="1" spcCol="0" rtlCol="0" fromWordArt="0" anchor="ctr" anchorCtr="0" forceAA="0" compatLnSpc="1">
-                <a:prstTxWarp prst="textNoShape">
-                  <a:avLst/>
-                </a:prstTxWarp>
-                <a:noAutofit/>
+              <a:bodyPr wrap="square" rtlCol="0">
+                <a:spAutoFit/>
               </a:bodyPr>
               <a:lstStyle/>
               <a:p>
                 <a:pPr algn="ctr"/>
-                <a:endParaRPr lang="zh-TW" altLang="en-US" dirty="0"/>
+                <a:r>
+                  <a:rPr lang="en-US" altLang="zh-TW" sz="2700" dirty="0" err="1">
+                    <a:latin typeface="Times New Roman" panose="02020603050405020304" pitchFamily="18" charset="0"/>
+                    <a:cs typeface="Times New Roman" panose="02020603050405020304" pitchFamily="18" charset="0"/>
+                  </a:rPr>
+                  <a:t>Quadrilayer</a:t>
+                </a:r>
+                <a:endParaRPr lang="zh-TW" altLang="en-US" sz="2700" dirty="0">
+                  <a:latin typeface="Times New Roman" panose="02020603050405020304" pitchFamily="18" charset="0"/>
+                  <a:cs typeface="Times New Roman" panose="02020603050405020304" pitchFamily="18" charset="0"/>
+                </a:endParaRPr>
+              </a:p>
+            </p:txBody>
+          </p:sp>
+          <p:sp>
+            <p:nvSpPr>
+              <p:cNvPr id="9" name="文字方塊 8">
+                <a:extLst>
+                  <a:ext uri="{FF2B5EF4-FFF2-40B4-BE49-F238E27FC236}">
+                    <a16:creationId xmlns:a16="http://schemas.microsoft.com/office/drawing/2014/main" id="{0BDB668E-1E46-40E1-BDD6-8ED8D59CBC1E}"/>
+                  </a:ext>
+                </a:extLst>
+              </p:cNvPr>
+              <p:cNvSpPr txBox="1"/>
+              <p:nvPr/>
+            </p:nvSpPr>
+            <p:spPr>
+              <a:xfrm>
+                <a:off x="6568991" y="524630"/>
+                <a:ext cx="2214108" cy="768707"/>
+              </a:xfrm>
+              <a:prstGeom prst="rect">
+                <a:avLst/>
+              </a:prstGeom>
+              <a:noFill/>
+            </p:spPr>
+            <p:txBody>
+              <a:bodyPr wrap="square" rtlCol="0">
+                <a:spAutoFit/>
+              </a:bodyPr>
+              <a:lstStyle/>
+              <a:p>
+                <a:pPr algn="ctr"/>
+                <a:r>
+                  <a:rPr lang="en-US" altLang="zh-TW" sz="2700" dirty="0">
+                    <a:latin typeface="Times New Roman" panose="02020603050405020304" pitchFamily="18" charset="0"/>
+                    <a:cs typeface="Times New Roman" panose="02020603050405020304" pitchFamily="18" charset="0"/>
+                  </a:rPr>
+                  <a:t>Bilayer</a:t>
+                </a:r>
+                <a:endParaRPr lang="zh-TW" altLang="en-US" sz="2700" dirty="0">
+                  <a:latin typeface="Times New Roman" panose="02020603050405020304" pitchFamily="18" charset="0"/>
+                  <a:cs typeface="Times New Roman" panose="02020603050405020304" pitchFamily="18" charset="0"/>
+                </a:endParaRPr>
+              </a:p>
+            </p:txBody>
+          </p:sp>
+          <p:sp>
+            <p:nvSpPr>
+              <p:cNvPr id="10" name="文字方塊 9">
+                <a:extLst>
+                  <a:ext uri="{FF2B5EF4-FFF2-40B4-BE49-F238E27FC236}">
+                    <a16:creationId xmlns:a16="http://schemas.microsoft.com/office/drawing/2014/main" id="{D9E8E7A6-99BD-4EDE-B9AC-66C93843D161}"/>
+                  </a:ext>
+                </a:extLst>
+              </p:cNvPr>
+              <p:cNvSpPr txBox="1"/>
+              <p:nvPr/>
+            </p:nvSpPr>
+            <p:spPr>
+              <a:xfrm>
+                <a:off x="8530360" y="524630"/>
+                <a:ext cx="2665383" cy="768707"/>
+              </a:xfrm>
+              <a:prstGeom prst="rect">
+                <a:avLst/>
+              </a:prstGeom>
+              <a:noFill/>
+            </p:spPr>
+            <p:txBody>
+              <a:bodyPr wrap="square" rtlCol="0">
+                <a:spAutoFit/>
+              </a:bodyPr>
+              <a:lstStyle/>
+              <a:p>
+                <a:pPr algn="ctr"/>
+                <a:r>
+                  <a:rPr lang="en-US" altLang="zh-TW" sz="2700" dirty="0">
+                    <a:latin typeface="Times New Roman" panose="02020603050405020304" pitchFamily="18" charset="0"/>
+                    <a:cs typeface="Times New Roman" panose="02020603050405020304" pitchFamily="18" charset="0"/>
+                  </a:rPr>
+                  <a:t>Monolayer</a:t>
+                </a:r>
+                <a:endParaRPr lang="zh-TW" altLang="en-US" sz="2700" dirty="0">
+                  <a:latin typeface="Times New Roman" panose="02020603050405020304" pitchFamily="18" charset="0"/>
+                  <a:cs typeface="Times New Roman" panose="02020603050405020304" pitchFamily="18" charset="0"/>
+                </a:endParaRPr>
+              </a:p>
+            </p:txBody>
+          </p:sp>
+          <p:sp>
+            <p:nvSpPr>
+              <p:cNvPr id="11" name="文字方塊 10">
+                <a:extLst>
+                  <a:ext uri="{FF2B5EF4-FFF2-40B4-BE49-F238E27FC236}">
+                    <a16:creationId xmlns:a16="http://schemas.microsoft.com/office/drawing/2014/main" id="{CC849950-3412-4CFB-83BE-CD1FDB918AD8}"/>
+                  </a:ext>
+                </a:extLst>
+              </p:cNvPr>
+              <p:cNvSpPr txBox="1"/>
+              <p:nvPr/>
+            </p:nvSpPr>
+            <p:spPr>
+              <a:xfrm rot="16200000">
+                <a:off x="555653" y="2836802"/>
+                <a:ext cx="2079824" cy="768707"/>
+              </a:xfrm>
+              <a:prstGeom prst="rect">
+                <a:avLst/>
+              </a:prstGeom>
+              <a:noFill/>
+            </p:spPr>
+            <p:txBody>
+              <a:bodyPr wrap="square" rtlCol="0">
+                <a:spAutoFit/>
+              </a:bodyPr>
+              <a:lstStyle/>
+              <a:p>
+                <a:r>
+                  <a:rPr lang="en-US" altLang="zh-TW" sz="2700" dirty="0">
+                    <a:latin typeface="Times New Roman" panose="02020603050405020304" pitchFamily="18" charset="0"/>
+                    <a:cs typeface="Times New Roman" panose="02020603050405020304" pitchFamily="18" charset="0"/>
+                  </a:rPr>
+                  <a:t>Energy</a:t>
+                </a:r>
+                <a:endParaRPr lang="zh-TW" altLang="en-US" sz="2700" dirty="0">
+                  <a:latin typeface="Times New Roman" panose="02020603050405020304" pitchFamily="18" charset="0"/>
+                  <a:cs typeface="Times New Roman" panose="02020603050405020304" pitchFamily="18" charset="0"/>
+                </a:endParaRPr>
               </a:p>
             </p:txBody>
           </p:sp>
         </p:grpSp>
-      </p:grpSp>
-      <p:grpSp>
-        <p:nvGrpSpPr>
-          <p:cNvPr id="13" name="群組 12">
-            <a:extLst>
-              <a:ext uri="{FF2B5EF4-FFF2-40B4-BE49-F238E27FC236}">
-                <a16:creationId xmlns:a16="http://schemas.microsoft.com/office/drawing/2014/main" id="{F50863B7-43C0-41E1-BDE4-A077FED16DAB}"/>
-              </a:ext>
-            </a:extLst>
-          </p:cNvPr>
-          <p:cNvGrpSpPr/>
-          <p:nvPr/>
-        </p:nvGrpSpPr>
-        <p:grpSpPr>
-          <a:xfrm>
-            <a:off x="433761" y="838201"/>
-            <a:ext cx="7491040" cy="4926014"/>
-            <a:chOff x="1483625" y="635659"/>
-            <a:chExt cx="9213130" cy="6058439"/>
-          </a:xfrm>
-        </p:grpSpPr>
         <p:sp>
           <p:nvSpPr>
-            <p:cNvPr id="12" name="矩形 11">
+            <p:cNvPr id="91" name="文字方塊 90">
               <a:extLst>
                 <a:ext uri="{FF2B5EF4-FFF2-40B4-BE49-F238E27FC236}">
-                  <a16:creationId xmlns:a16="http://schemas.microsoft.com/office/drawing/2014/main" id="{92880606-AA17-462B-82D0-1F146FA2C58A}"/>
-                </a:ext>
-              </a:extLst>
-            </p:cNvPr>
-            <p:cNvSpPr/>
-            <p:nvPr/>
-          </p:nvSpPr>
-          <p:spPr>
-            <a:xfrm>
-              <a:off x="1535502" y="655608"/>
-              <a:ext cx="9161253" cy="6038490"/>
-            </a:xfrm>
-            <a:prstGeom prst="rect">
-              <a:avLst/>
-            </a:prstGeom>
-            <a:solidFill>
-              <a:schemeClr val="bg1"/>
-            </a:solidFill>
-            <a:ln>
-              <a:noFill/>
-            </a:ln>
-          </p:spPr>
-          <p:style>
-            <a:lnRef idx="2">
-              <a:schemeClr val="accent1">
-                <a:shade val="50000"/>
-              </a:schemeClr>
-            </a:lnRef>
-            <a:fillRef idx="1">
-              <a:schemeClr val="accent1"/>
-            </a:fillRef>
-            <a:effectRef idx="0">
-              <a:schemeClr val="accent1"/>
-            </a:effectRef>
-            <a:fontRef idx="minor">
-              <a:schemeClr val="lt1"/>
-            </a:fontRef>
-          </p:style>
-          <p:txBody>
-            <a:bodyPr rtlCol="0" anchor="ctr"/>
-            <a:lstStyle/>
-            <a:p>
-              <a:pPr algn="ctr"/>
-              <a:endParaRPr lang="zh-TW" altLang="en-US"/>
-            </a:p>
-          </p:txBody>
-        </p:sp>
-        <p:pic>
-          <p:nvPicPr>
-            <p:cNvPr id="6" name="圖片 5">
-              <a:extLst>
-                <a:ext uri="{FF2B5EF4-FFF2-40B4-BE49-F238E27FC236}">
-                  <a16:creationId xmlns:a16="http://schemas.microsoft.com/office/drawing/2014/main" id="{C19DBC62-3059-4DD9-BB31-B2E00EBCC63F}"/>
-                </a:ext>
-              </a:extLst>
-            </p:cNvPr>
-            <p:cNvPicPr>
-              <a:picLocks noChangeAspect="1"/>
-            </p:cNvPicPr>
-            <p:nvPr/>
-          </p:nvPicPr>
-          <p:blipFill rotWithShape="1">
-            <a:blip r:embed="rId18">
-              <a:extLst>
-                <a:ext uri="{28A0092B-C50C-407E-A947-70E740481C1C}">
-                  <a14:useLocalDpi xmlns:a14="http://schemas.microsoft.com/office/drawing/2010/main" val="0"/>
-                </a:ext>
-              </a:extLst>
-            </a:blip>
-            <a:srcRect l="3293" t="7368"/>
-            <a:stretch/>
-          </p:blipFill>
-          <p:spPr>
-            <a:xfrm>
-              <a:off x="1915063" y="880094"/>
-              <a:ext cx="8704053" cy="5727739"/>
-            </a:xfrm>
-            <a:prstGeom prst="rect">
-              <a:avLst/>
-            </a:prstGeom>
-          </p:spPr>
-        </p:pic>
-        <p:sp>
-          <p:nvSpPr>
-            <p:cNvPr id="7" name="文字方塊 6">
-              <a:extLst>
-                <a:ext uri="{FF2B5EF4-FFF2-40B4-BE49-F238E27FC236}">
-                  <a16:creationId xmlns:a16="http://schemas.microsoft.com/office/drawing/2014/main" id="{D73DE3EC-6A51-412D-B4BF-FC0F69DF4AB8}"/>
+                  <a16:creationId xmlns:a16="http://schemas.microsoft.com/office/drawing/2014/main" id="{222275CC-8746-4A24-9EC2-87E6EB718A19}"/>
                 </a:ext>
               </a:extLst>
             </p:cNvPr>
@@ -6195,180 +6478,8 @@
           </p:nvSpPr>
           <p:spPr>
             <a:xfrm>
-              <a:off x="2303406" y="644286"/>
-              <a:ext cx="1162772" cy="454563"/>
-            </a:xfrm>
-            <a:prstGeom prst="rect">
-              <a:avLst/>
-            </a:prstGeom>
-            <a:noFill/>
-          </p:spPr>
-          <p:txBody>
-            <a:bodyPr wrap="square" rtlCol="0">
-              <a:spAutoFit/>
-            </a:bodyPr>
-            <a:lstStyle/>
-            <a:p>
-              <a:pPr algn="ctr"/>
-              <a:r>
-                <a:rPr lang="en-US" altLang="zh-TW" sz="2000" dirty="0">
-                  <a:latin typeface="Times New Roman" panose="02020603050405020304" pitchFamily="18" charset="0"/>
-                  <a:cs typeface="Times New Roman" panose="02020603050405020304" pitchFamily="18" charset="0"/>
-                </a:rPr>
-                <a:t>Bulk</a:t>
-              </a:r>
-              <a:endParaRPr lang="zh-TW" altLang="en-US" sz="2000" dirty="0">
-                <a:latin typeface="Times New Roman" panose="02020603050405020304" pitchFamily="18" charset="0"/>
-                <a:cs typeface="Times New Roman" panose="02020603050405020304" pitchFamily="18" charset="0"/>
-              </a:endParaRPr>
-            </a:p>
-          </p:txBody>
-        </p:sp>
-        <p:sp>
-          <p:nvSpPr>
-            <p:cNvPr id="8" name="文字方塊 7">
-              <a:extLst>
-                <a:ext uri="{FF2B5EF4-FFF2-40B4-BE49-F238E27FC236}">
-                  <a16:creationId xmlns:a16="http://schemas.microsoft.com/office/drawing/2014/main" id="{59692366-D237-4840-90EC-D60BC3D25066}"/>
-                </a:ext>
-              </a:extLst>
-            </p:cNvPr>
-            <p:cNvSpPr txBox="1"/>
-            <p:nvPr/>
-          </p:nvSpPr>
-          <p:spPr>
-            <a:xfrm>
-              <a:off x="3976779" y="635659"/>
-              <a:ext cx="2214108" cy="454563"/>
-            </a:xfrm>
-            <a:prstGeom prst="rect">
-              <a:avLst/>
-            </a:prstGeom>
-            <a:noFill/>
-          </p:spPr>
-          <p:txBody>
-            <a:bodyPr wrap="square" rtlCol="0">
-              <a:spAutoFit/>
-            </a:bodyPr>
-            <a:lstStyle/>
-            <a:p>
-              <a:pPr algn="ctr"/>
-              <a:r>
-                <a:rPr lang="en-US" altLang="zh-TW" sz="2000" dirty="0" err="1">
-                  <a:latin typeface="Times New Roman" panose="02020603050405020304" pitchFamily="18" charset="0"/>
-                  <a:cs typeface="Times New Roman" panose="02020603050405020304" pitchFamily="18" charset="0"/>
-                </a:rPr>
-                <a:t>Quadrilayer</a:t>
-              </a:r>
-              <a:endParaRPr lang="zh-TW" altLang="en-US" sz="2000" dirty="0">
-                <a:latin typeface="Times New Roman" panose="02020603050405020304" pitchFamily="18" charset="0"/>
-                <a:cs typeface="Times New Roman" panose="02020603050405020304" pitchFamily="18" charset="0"/>
-              </a:endParaRPr>
-            </a:p>
-          </p:txBody>
-        </p:sp>
-        <p:sp>
-          <p:nvSpPr>
-            <p:cNvPr id="9" name="文字方塊 8">
-              <a:extLst>
-                <a:ext uri="{FF2B5EF4-FFF2-40B4-BE49-F238E27FC236}">
-                  <a16:creationId xmlns:a16="http://schemas.microsoft.com/office/drawing/2014/main" id="{0BDB668E-1E46-40E1-BDD6-8ED8D59CBC1E}"/>
-                </a:ext>
-              </a:extLst>
-            </p:cNvPr>
-            <p:cNvSpPr txBox="1"/>
-            <p:nvPr/>
-          </p:nvSpPr>
-          <p:spPr>
-            <a:xfrm>
-              <a:off x="6199519" y="644286"/>
-              <a:ext cx="2214108" cy="454563"/>
-            </a:xfrm>
-            <a:prstGeom prst="rect">
-              <a:avLst/>
-            </a:prstGeom>
-            <a:noFill/>
-          </p:spPr>
-          <p:txBody>
-            <a:bodyPr wrap="square" rtlCol="0">
-              <a:spAutoFit/>
-            </a:bodyPr>
-            <a:lstStyle/>
-            <a:p>
-              <a:pPr algn="ctr"/>
-              <a:r>
-                <a:rPr lang="en-US" altLang="zh-TW" sz="2000" dirty="0">
-                  <a:latin typeface="Times New Roman" panose="02020603050405020304" pitchFamily="18" charset="0"/>
-                  <a:cs typeface="Times New Roman" panose="02020603050405020304" pitchFamily="18" charset="0"/>
-                </a:rPr>
-                <a:t>Bilayer</a:t>
-              </a:r>
-              <a:endParaRPr lang="zh-TW" altLang="en-US" sz="2000" dirty="0">
-                <a:latin typeface="Times New Roman" panose="02020603050405020304" pitchFamily="18" charset="0"/>
-                <a:cs typeface="Times New Roman" panose="02020603050405020304" pitchFamily="18" charset="0"/>
-              </a:endParaRPr>
-            </a:p>
-          </p:txBody>
-        </p:sp>
-        <p:sp>
-          <p:nvSpPr>
-            <p:cNvPr id="10" name="文字方塊 9">
-              <a:extLst>
-                <a:ext uri="{FF2B5EF4-FFF2-40B4-BE49-F238E27FC236}">
-                  <a16:creationId xmlns:a16="http://schemas.microsoft.com/office/drawing/2014/main" id="{D9E8E7A6-99BD-4EDE-B9AC-66C93843D161}"/>
-                </a:ext>
-              </a:extLst>
-            </p:cNvPr>
-            <p:cNvSpPr txBox="1"/>
-            <p:nvPr/>
-          </p:nvSpPr>
-          <p:spPr>
-            <a:xfrm>
-              <a:off x="8482647" y="644286"/>
-              <a:ext cx="2214108" cy="454563"/>
-            </a:xfrm>
-            <a:prstGeom prst="rect">
-              <a:avLst/>
-            </a:prstGeom>
-            <a:noFill/>
-          </p:spPr>
-          <p:txBody>
-            <a:bodyPr wrap="square" rtlCol="0">
-              <a:spAutoFit/>
-            </a:bodyPr>
-            <a:lstStyle/>
-            <a:p>
-              <a:pPr algn="ctr"/>
-              <a:r>
-                <a:rPr lang="en-US" altLang="zh-TW" sz="2000" dirty="0">
-                  <a:latin typeface="Times New Roman" panose="02020603050405020304" pitchFamily="18" charset="0"/>
-                  <a:cs typeface="Times New Roman" panose="02020603050405020304" pitchFamily="18" charset="0"/>
-                </a:rPr>
-                <a:t>Monolayer</a:t>
-              </a:r>
-              <a:endParaRPr lang="zh-TW" altLang="en-US" sz="2000" dirty="0">
-                <a:latin typeface="Times New Roman" panose="02020603050405020304" pitchFamily="18" charset="0"/>
-                <a:cs typeface="Times New Roman" panose="02020603050405020304" pitchFamily="18" charset="0"/>
-              </a:endParaRPr>
-            </a:p>
-          </p:txBody>
-        </p:sp>
-        <p:sp>
-          <p:nvSpPr>
-            <p:cNvPr id="11" name="文字方塊 10">
-              <a:extLst>
-                <a:ext uri="{FF2B5EF4-FFF2-40B4-BE49-F238E27FC236}">
-                  <a16:creationId xmlns:a16="http://schemas.microsoft.com/office/drawing/2014/main" id="{CC849950-3412-4CFB-83BE-CD1FDB918AD8}"/>
-                </a:ext>
-              </a:extLst>
-            </p:cNvPr>
-            <p:cNvSpPr txBox="1"/>
-            <p:nvPr/>
-          </p:nvSpPr>
-          <p:spPr>
-            <a:xfrm rot="16200000">
-              <a:off x="946295" y="3153827"/>
-              <a:ext cx="1529224" cy="454563"/>
+              <a:off x="11708" y="658515"/>
+              <a:ext cx="572568" cy="400110"/>
             </a:xfrm>
             <a:prstGeom prst="rect">
               <a:avLst/>
@@ -6386,7 +6497,133 @@
                   <a:latin typeface="Times New Roman" panose="02020603050405020304" pitchFamily="18" charset="0"/>
                   <a:cs typeface="Times New Roman" panose="02020603050405020304" pitchFamily="18" charset="0"/>
                 </a:rPr>
-                <a:t>Energy</a:t>
+                <a:t>(a)</a:t>
+              </a:r>
+              <a:endParaRPr lang="zh-TW" altLang="en-US" sz="2000" dirty="0">
+                <a:latin typeface="Times New Roman" panose="02020603050405020304" pitchFamily="18" charset="0"/>
+                <a:cs typeface="Times New Roman" panose="02020603050405020304" pitchFamily="18" charset="0"/>
+              </a:endParaRPr>
+            </a:p>
+          </p:txBody>
+        </p:sp>
+        <p:sp>
+          <p:nvSpPr>
+            <p:cNvPr id="92" name="文字方塊 91">
+              <a:extLst>
+                <a:ext uri="{FF2B5EF4-FFF2-40B4-BE49-F238E27FC236}">
+                  <a16:creationId xmlns:a16="http://schemas.microsoft.com/office/drawing/2014/main" id="{40C23607-93F0-430D-99CE-D32AB785B967}"/>
+                </a:ext>
+              </a:extLst>
+            </p:cNvPr>
+            <p:cNvSpPr txBox="1"/>
+            <p:nvPr/>
+          </p:nvSpPr>
+          <p:spPr>
+            <a:xfrm>
+              <a:off x="6502400" y="658515"/>
+              <a:ext cx="508300" cy="400110"/>
+            </a:xfrm>
+            <a:prstGeom prst="rect">
+              <a:avLst/>
+            </a:prstGeom>
+            <a:noFill/>
+          </p:spPr>
+          <p:txBody>
+            <a:bodyPr wrap="square" rtlCol="0">
+              <a:spAutoFit/>
+            </a:bodyPr>
+            <a:lstStyle/>
+            <a:p>
+              <a:r>
+                <a:rPr lang="en-US" altLang="zh-TW" sz="2000" dirty="0">
+                  <a:latin typeface="Times New Roman" panose="02020603050405020304" pitchFamily="18" charset="0"/>
+                  <a:cs typeface="Times New Roman" panose="02020603050405020304" pitchFamily="18" charset="0"/>
+                </a:rPr>
+                <a:t>(b)</a:t>
+              </a:r>
+              <a:endParaRPr lang="zh-TW" altLang="en-US" sz="2000" dirty="0">
+                <a:latin typeface="Times New Roman" panose="02020603050405020304" pitchFamily="18" charset="0"/>
+                <a:cs typeface="Times New Roman" panose="02020603050405020304" pitchFamily="18" charset="0"/>
+              </a:endParaRPr>
+            </a:p>
+          </p:txBody>
+        </p:sp>
+        <p:sp>
+          <p:nvSpPr>
+            <p:cNvPr id="93" name="文字方塊 92">
+              <a:extLst>
+                <a:ext uri="{FF2B5EF4-FFF2-40B4-BE49-F238E27FC236}">
+                  <a16:creationId xmlns:a16="http://schemas.microsoft.com/office/drawing/2014/main" id="{3A60362D-4BAD-4D2F-90B2-31CB316F6673}"/>
+                </a:ext>
+              </a:extLst>
+            </p:cNvPr>
+            <p:cNvSpPr txBox="1"/>
+            <p:nvPr/>
+          </p:nvSpPr>
+          <p:spPr>
+            <a:xfrm>
+              <a:off x="6502400" y="2055294"/>
+              <a:ext cx="508300" cy="400110"/>
+            </a:xfrm>
+            <a:prstGeom prst="rect">
+              <a:avLst/>
+            </a:prstGeom>
+            <a:noFill/>
+          </p:spPr>
+          <p:txBody>
+            <a:bodyPr wrap="square" rtlCol="0">
+              <a:spAutoFit/>
+            </a:bodyPr>
+            <a:lstStyle/>
+            <a:p>
+              <a:r>
+                <a:rPr lang="en-US" altLang="zh-TW" sz="2000" dirty="0">
+                  <a:latin typeface="Times New Roman" panose="02020603050405020304" pitchFamily="18" charset="0"/>
+                  <a:cs typeface="Times New Roman" panose="02020603050405020304" pitchFamily="18" charset="0"/>
+                </a:rPr>
+                <a:t>(c)</a:t>
+              </a:r>
+              <a:endParaRPr lang="zh-TW" altLang="en-US" sz="2000" dirty="0">
+                <a:latin typeface="Times New Roman" panose="02020603050405020304" pitchFamily="18" charset="0"/>
+                <a:cs typeface="Times New Roman" panose="02020603050405020304" pitchFamily="18" charset="0"/>
+              </a:endParaRPr>
+            </a:p>
+          </p:txBody>
+        </p:sp>
+        <p:sp>
+          <p:nvSpPr>
+            <p:cNvPr id="94" name="文字方塊 93">
+              <a:extLst>
+                <a:ext uri="{FF2B5EF4-FFF2-40B4-BE49-F238E27FC236}">
+                  <a16:creationId xmlns:a16="http://schemas.microsoft.com/office/drawing/2014/main" id="{E4B7BA61-589C-45E5-A295-84E3D26F9EA7}"/>
+                </a:ext>
+              </a:extLst>
+            </p:cNvPr>
+            <p:cNvSpPr txBox="1"/>
+            <p:nvPr/>
+          </p:nvSpPr>
+          <p:spPr>
+            <a:xfrm>
+              <a:off x="6502400" y="3843257"/>
+              <a:ext cx="508300" cy="400110"/>
+            </a:xfrm>
+            <a:prstGeom prst="rect">
+              <a:avLst/>
+            </a:prstGeom>
+            <a:noFill/>
+          </p:spPr>
+          <p:txBody>
+            <a:bodyPr wrap="square" rtlCol="0">
+              <a:spAutoFit/>
+            </a:bodyPr>
+            <a:lstStyle/>
+            <a:p>
+              <a:r>
+                <a:rPr lang="en-US" altLang="zh-TW" sz="2000" dirty="0">
+                  <a:latin typeface="Times New Roman" panose="02020603050405020304" pitchFamily="18" charset="0"/>
+                  <a:cs typeface="Times New Roman" panose="02020603050405020304" pitchFamily="18" charset="0"/>
+                </a:rPr>
+                <a:t>(d)</a:t>
               </a:r>
               <a:endParaRPr lang="zh-TW" altLang="en-US" sz="2000" dirty="0">
                 <a:latin typeface="Times New Roman" panose="02020603050405020304" pitchFamily="18" charset="0"/>
@@ -6396,150 +6633,6 @@
           </p:txBody>
         </p:sp>
       </p:grpSp>
-      <p:sp>
-        <p:nvSpPr>
-          <p:cNvPr id="91" name="文字方塊 90">
-            <a:extLst>
-              <a:ext uri="{FF2B5EF4-FFF2-40B4-BE49-F238E27FC236}">
-                <a16:creationId xmlns:a16="http://schemas.microsoft.com/office/drawing/2014/main" id="{222275CC-8746-4A24-9EC2-87E6EB718A19}"/>
-              </a:ext>
-            </a:extLst>
-          </p:cNvPr>
-          <p:cNvSpPr txBox="1"/>
-          <p:nvPr/>
-        </p:nvSpPr>
-        <p:spPr>
-          <a:xfrm>
-            <a:off x="123825" y="457200"/>
-            <a:ext cx="409575" cy="369332"/>
-          </a:xfrm>
-          <a:prstGeom prst="rect">
-            <a:avLst/>
-          </a:prstGeom>
-          <a:noFill/>
-        </p:spPr>
-        <p:txBody>
-          <a:bodyPr wrap="square" rtlCol="0">
-            <a:spAutoFit/>
-          </a:bodyPr>
-          <a:lstStyle/>
-          <a:p>
-            <a:r>
-              <a:rPr lang="en-US" altLang="zh-TW" dirty="0"/>
-              <a:t>(a)</a:t>
-            </a:r>
-            <a:endParaRPr lang="zh-TW" altLang="en-US" dirty="0"/>
-          </a:p>
-        </p:txBody>
-      </p:sp>
-      <p:sp>
-        <p:nvSpPr>
-          <p:cNvPr id="92" name="文字方塊 91">
-            <a:extLst>
-              <a:ext uri="{FF2B5EF4-FFF2-40B4-BE49-F238E27FC236}">
-                <a16:creationId xmlns:a16="http://schemas.microsoft.com/office/drawing/2014/main" id="{40C23607-93F0-430D-99CE-D32AB785B967}"/>
-              </a:ext>
-            </a:extLst>
-          </p:cNvPr>
-          <p:cNvSpPr txBox="1"/>
-          <p:nvPr/>
-        </p:nvSpPr>
-        <p:spPr>
-          <a:xfrm>
-            <a:off x="8000147" y="457200"/>
-            <a:ext cx="409575" cy="369332"/>
-          </a:xfrm>
-          <a:prstGeom prst="rect">
-            <a:avLst/>
-          </a:prstGeom>
-          <a:noFill/>
-        </p:spPr>
-        <p:txBody>
-          <a:bodyPr wrap="square" rtlCol="0">
-            <a:spAutoFit/>
-          </a:bodyPr>
-          <a:lstStyle/>
-          <a:p>
-            <a:r>
-              <a:rPr lang="en-US" altLang="zh-TW" dirty="0"/>
-              <a:t>(b)</a:t>
-            </a:r>
-            <a:endParaRPr lang="zh-TW" altLang="en-US" dirty="0"/>
-          </a:p>
-        </p:txBody>
-      </p:sp>
-      <p:sp>
-        <p:nvSpPr>
-          <p:cNvPr id="93" name="文字方塊 92">
-            <a:extLst>
-              <a:ext uri="{FF2B5EF4-FFF2-40B4-BE49-F238E27FC236}">
-                <a16:creationId xmlns:a16="http://schemas.microsoft.com/office/drawing/2014/main" id="{3A60362D-4BAD-4D2F-90B2-31CB316F6673}"/>
-              </a:ext>
-            </a:extLst>
-          </p:cNvPr>
-          <p:cNvSpPr txBox="1"/>
-          <p:nvPr/>
-        </p:nvSpPr>
-        <p:spPr>
-          <a:xfrm>
-            <a:off x="8000147" y="2176312"/>
-            <a:ext cx="409575" cy="369332"/>
-          </a:xfrm>
-          <a:prstGeom prst="rect">
-            <a:avLst/>
-          </a:prstGeom>
-          <a:noFill/>
-        </p:spPr>
-        <p:txBody>
-          <a:bodyPr wrap="square" rtlCol="0">
-            <a:spAutoFit/>
-          </a:bodyPr>
-          <a:lstStyle/>
-          <a:p>
-            <a:r>
-              <a:rPr lang="en-US" altLang="zh-TW" dirty="0"/>
-              <a:t>(c)</a:t>
-            </a:r>
-            <a:endParaRPr lang="zh-TW" altLang="en-US" dirty="0"/>
-          </a:p>
-        </p:txBody>
-      </p:sp>
-      <p:sp>
-        <p:nvSpPr>
-          <p:cNvPr id="94" name="文字方塊 93">
-            <a:extLst>
-              <a:ext uri="{FF2B5EF4-FFF2-40B4-BE49-F238E27FC236}">
-                <a16:creationId xmlns:a16="http://schemas.microsoft.com/office/drawing/2014/main" id="{E4B7BA61-589C-45E5-A295-84E3D26F9EA7}"/>
-              </a:ext>
-            </a:extLst>
-          </p:cNvPr>
-          <p:cNvSpPr txBox="1"/>
-          <p:nvPr/>
-        </p:nvSpPr>
-        <p:spPr>
-          <a:xfrm>
-            <a:off x="8000147" y="4376882"/>
-            <a:ext cx="409575" cy="369332"/>
-          </a:xfrm>
-          <a:prstGeom prst="rect">
-            <a:avLst/>
-          </a:prstGeom>
-          <a:noFill/>
-        </p:spPr>
-        <p:txBody>
-          <a:bodyPr wrap="square" rtlCol="0">
-            <a:spAutoFit/>
-          </a:bodyPr>
-          <a:lstStyle/>
-          <a:p>
-            <a:r>
-              <a:rPr lang="en-US" altLang="zh-TW" dirty="0"/>
-              <a:t>(d)</a:t>
-            </a:r>
-            <a:endParaRPr lang="zh-TW" altLang="en-US" dirty="0"/>
-          </a:p>
-        </p:txBody>
-      </p:sp>
     </p:spTree>
     <p:extLst>
       <p:ext uri="{BB962C8B-B14F-4D97-AF65-F5344CB8AC3E}">

--- a/Final/Figures/MoS2_band_structure.pptx
+++ b/Final/Figures/MoS2_band_structure.pptx
@@ -6,6 +6,7 @@
   </p:sldMasterIdLst>
   <p:sldIdLst>
     <p:sldId id="256" r:id="rId2"/>
+    <p:sldId id="257" r:id="rId3"/>
   </p:sldIdLst>
   <p:sldSz cx="9906000" cy="4679950"/>
   <p:notesSz cx="6858000" cy="9144000"/>
@@ -243,7 +244,7 @@
           <a:p>
             <a:fld id="{0C4F21BF-7999-4603-8982-00A319506255}" type="datetimeFigureOut">
               <a:rPr lang="zh-TW" altLang="en-US" smtClean="0"/>
-              <a:t>2026/5/20</a:t>
+              <a:t>2026/7/4</a:t>
             </a:fld>
             <a:endParaRPr lang="zh-TW" altLang="en-US"/>
           </a:p>
@@ -413,7 +414,7 @@
           <a:p>
             <a:fld id="{0C4F21BF-7999-4603-8982-00A319506255}" type="datetimeFigureOut">
               <a:rPr lang="zh-TW" altLang="en-US" smtClean="0"/>
-              <a:t>2026/5/20</a:t>
+              <a:t>2026/7/4</a:t>
             </a:fld>
             <a:endParaRPr lang="zh-TW" altLang="en-US"/>
           </a:p>
@@ -593,7 +594,7 @@
           <a:p>
             <a:fld id="{0C4F21BF-7999-4603-8982-00A319506255}" type="datetimeFigureOut">
               <a:rPr lang="zh-TW" altLang="en-US" smtClean="0"/>
-              <a:t>2026/5/20</a:t>
+              <a:t>2026/7/4</a:t>
             </a:fld>
             <a:endParaRPr lang="zh-TW" altLang="en-US"/>
           </a:p>
@@ -763,7 +764,7 @@
           <a:p>
             <a:fld id="{0C4F21BF-7999-4603-8982-00A319506255}" type="datetimeFigureOut">
               <a:rPr lang="zh-TW" altLang="en-US" smtClean="0"/>
-              <a:t>2026/5/20</a:t>
+              <a:t>2026/7/4</a:t>
             </a:fld>
             <a:endParaRPr lang="zh-TW" altLang="en-US"/>
           </a:p>
@@ -1009,7 +1010,7 @@
           <a:p>
             <a:fld id="{0C4F21BF-7999-4603-8982-00A319506255}" type="datetimeFigureOut">
               <a:rPr lang="zh-TW" altLang="en-US" smtClean="0"/>
-              <a:t>2026/5/20</a:t>
+              <a:t>2026/7/4</a:t>
             </a:fld>
             <a:endParaRPr lang="zh-TW" altLang="en-US"/>
           </a:p>
@@ -1241,7 +1242,7 @@
           <a:p>
             <a:fld id="{0C4F21BF-7999-4603-8982-00A319506255}" type="datetimeFigureOut">
               <a:rPr lang="zh-TW" altLang="en-US" smtClean="0"/>
-              <a:t>2026/5/20</a:t>
+              <a:t>2026/7/4</a:t>
             </a:fld>
             <a:endParaRPr lang="zh-TW" altLang="en-US"/>
           </a:p>
@@ -1608,7 +1609,7 @@
           <a:p>
             <a:fld id="{0C4F21BF-7999-4603-8982-00A319506255}" type="datetimeFigureOut">
               <a:rPr lang="zh-TW" altLang="en-US" smtClean="0"/>
-              <a:t>2026/5/20</a:t>
+              <a:t>2026/7/4</a:t>
             </a:fld>
             <a:endParaRPr lang="zh-TW" altLang="en-US"/>
           </a:p>
@@ -1726,7 +1727,7 @@
           <a:p>
             <a:fld id="{0C4F21BF-7999-4603-8982-00A319506255}" type="datetimeFigureOut">
               <a:rPr lang="zh-TW" altLang="en-US" smtClean="0"/>
-              <a:t>2026/5/20</a:t>
+              <a:t>2026/7/4</a:t>
             </a:fld>
             <a:endParaRPr lang="zh-TW" altLang="en-US"/>
           </a:p>
@@ -1821,7 +1822,7 @@
           <a:p>
             <a:fld id="{0C4F21BF-7999-4603-8982-00A319506255}" type="datetimeFigureOut">
               <a:rPr lang="zh-TW" altLang="en-US" smtClean="0"/>
-              <a:t>2026/5/20</a:t>
+              <a:t>2026/7/4</a:t>
             </a:fld>
             <a:endParaRPr lang="zh-TW" altLang="en-US"/>
           </a:p>
@@ -2098,7 +2099,7 @@
           <a:p>
             <a:fld id="{0C4F21BF-7999-4603-8982-00A319506255}" type="datetimeFigureOut">
               <a:rPr lang="zh-TW" altLang="en-US" smtClean="0"/>
-              <a:t>2026/5/20</a:t>
+              <a:t>2026/7/4</a:t>
             </a:fld>
             <a:endParaRPr lang="zh-TW" altLang="en-US"/>
           </a:p>
@@ -2355,7 +2356,7 @@
           <a:p>
             <a:fld id="{0C4F21BF-7999-4603-8982-00A319506255}" type="datetimeFigureOut">
               <a:rPr lang="zh-TW" altLang="en-US" smtClean="0"/>
-              <a:t>2026/5/20</a:t>
+              <a:t>2026/7/4</a:t>
             </a:fld>
             <a:endParaRPr lang="zh-TW" altLang="en-US"/>
           </a:p>
@@ -2568,7 +2569,7 @@
           <a:p>
             <a:fld id="{0C4F21BF-7999-4603-8982-00A319506255}" type="datetimeFigureOut">
               <a:rPr lang="zh-TW" altLang="en-US" smtClean="0"/>
-              <a:t>2026/5/20</a:t>
+              <a:t>2026/7/4</a:t>
             </a:fld>
             <a:endParaRPr lang="zh-TW" altLang="en-US"/>
           </a:p>
@@ -4143,8 +4144,8 @@
               </p:sp>
             </mc:Fallback>
           </mc:AlternateContent>
-          <mc:AlternateContent xmlns:mc="http://schemas.openxmlformats.org/markup-compatibility/2006">
-            <mc:Choice xmlns:a14="http://schemas.microsoft.com/office/drawing/2010/main" Requires="a14">
+          <mc:AlternateContent xmlns:mc="http://schemas.openxmlformats.org/markup-compatibility/2006" xmlns:a14="http://schemas.microsoft.com/office/drawing/2010/main">
+            <mc:Choice Requires="a14">
               <p:sp>
                 <p:nvSpPr>
                   <p:cNvPr id="24" name="文字方塊 23">
@@ -4203,7 +4204,7 @@
                 </p:txBody>
               </p:sp>
             </mc:Choice>
-            <mc:Fallback>
+            <mc:Fallback xmlns="">
               <p:sp>
                 <p:nvSpPr>
                   <p:cNvPr id="24" name="文字方塊 23">
@@ -6646,6 +6647,3528 @@
 </p:sld>
 </file>
 
+<file path=ppt/slides/slide2.xml><?xml version="1.0" encoding="utf-8"?>
+<p:sld xmlns:a="http://schemas.openxmlformats.org/drawingml/2006/main" xmlns:r="http://schemas.openxmlformats.org/officeDocument/2006/relationships" xmlns:p="http://schemas.openxmlformats.org/presentationml/2006/main" show="0">
+  <p:cSld>
+    <p:spTree>
+      <p:nvGrpSpPr>
+        <p:cNvPr id="1" name=""/>
+        <p:cNvGrpSpPr/>
+        <p:nvPr/>
+      </p:nvGrpSpPr>
+      <p:grpSpPr>
+        <a:xfrm>
+          <a:off x="0" y="0"/>
+          <a:ext cx="0" cy="0"/>
+          <a:chOff x="0" y="0"/>
+          <a:chExt cx="0" cy="0"/>
+        </a:xfrm>
+      </p:grpSpPr>
+      <p:grpSp>
+        <p:nvGrpSpPr>
+          <p:cNvPr id="2" name="群組 1">
+            <a:extLst>
+              <a:ext uri="{FF2B5EF4-FFF2-40B4-BE49-F238E27FC236}">
+                <a16:creationId xmlns:a16="http://schemas.microsoft.com/office/drawing/2014/main" id="{7EDF0231-6994-466F-B78E-ABA6D47A94E3}"/>
+              </a:ext>
+            </a:extLst>
+          </p:cNvPr>
+          <p:cNvGrpSpPr/>
+          <p:nvPr/>
+        </p:nvGrpSpPr>
+        <p:grpSpPr>
+          <a:xfrm>
+            <a:off x="-43434" y="-42251"/>
+            <a:ext cx="10427448" cy="4764452"/>
+            <a:chOff x="-43434" y="467948"/>
+            <a:chExt cx="10427448" cy="4764452"/>
+          </a:xfrm>
+        </p:grpSpPr>
+        <p:sp>
+          <p:nvSpPr>
+            <p:cNvPr id="90" name="矩形 89">
+              <a:extLst>
+                <a:ext uri="{FF2B5EF4-FFF2-40B4-BE49-F238E27FC236}">
+                  <a16:creationId xmlns:a16="http://schemas.microsoft.com/office/drawing/2014/main" id="{51794149-3CEA-4A61-9D1D-9B37259D93E3}"/>
+                </a:ext>
+              </a:extLst>
+            </p:cNvPr>
+            <p:cNvSpPr/>
+            <p:nvPr/>
+          </p:nvSpPr>
+          <p:spPr>
+            <a:xfrm>
+              <a:off x="100609" y="698499"/>
+              <a:ext cx="9805392" cy="4533901"/>
+            </a:xfrm>
+            <a:prstGeom prst="rect">
+              <a:avLst/>
+            </a:prstGeom>
+            <a:solidFill>
+              <a:schemeClr val="bg1"/>
+            </a:solidFill>
+            <a:ln>
+              <a:noFill/>
+            </a:ln>
+          </p:spPr>
+          <p:style>
+            <a:lnRef idx="2">
+              <a:schemeClr val="accent1">
+                <a:shade val="50000"/>
+              </a:schemeClr>
+            </a:lnRef>
+            <a:fillRef idx="1">
+              <a:schemeClr val="accent1"/>
+            </a:fillRef>
+            <a:effectRef idx="0">
+              <a:schemeClr val="accent1"/>
+            </a:effectRef>
+            <a:fontRef idx="minor">
+              <a:schemeClr val="lt1"/>
+            </a:fontRef>
+          </p:style>
+          <p:txBody>
+            <a:bodyPr rot="0" spcFirstLastPara="0" vertOverflow="overflow" horzOverflow="overflow" vert="horz" wrap="square" lIns="74295" tIns="37148" rIns="74295" bIns="37148" numCol="1" spcCol="0" rtlCol="0" fromWordArt="0" anchor="ctr" anchorCtr="0" forceAA="0" compatLnSpc="1">
+              <a:prstTxWarp prst="textNoShape">
+                <a:avLst/>
+              </a:prstTxWarp>
+              <a:noAutofit/>
+            </a:bodyPr>
+            <a:lstStyle/>
+            <a:p>
+              <a:pPr algn="ctr"/>
+              <a:endParaRPr lang="zh-TW" altLang="en-US" sz="2000">
+                <a:latin typeface="Times New Roman" panose="02020603050405020304" pitchFamily="18" charset="0"/>
+                <a:cs typeface="Times New Roman" panose="02020603050405020304" pitchFamily="18" charset="0"/>
+              </a:endParaRPr>
+            </a:p>
+          </p:txBody>
+        </p:sp>
+        <p:grpSp>
+          <p:nvGrpSpPr>
+            <p:cNvPr id="60" name="群組 59">
+              <a:extLst>
+                <a:ext uri="{FF2B5EF4-FFF2-40B4-BE49-F238E27FC236}">
+                  <a16:creationId xmlns:a16="http://schemas.microsoft.com/office/drawing/2014/main" id="{A0E27693-9B7E-4785-8F7B-A0BD897A2C62}"/>
+                </a:ext>
+              </a:extLst>
+            </p:cNvPr>
+            <p:cNvGrpSpPr/>
+            <p:nvPr/>
+          </p:nvGrpSpPr>
+          <p:grpSpPr>
+            <a:xfrm>
+              <a:off x="6738226" y="467948"/>
+              <a:ext cx="3645788" cy="3645788"/>
+              <a:chOff x="-98851" y="651318"/>
+              <a:chExt cx="4487124" cy="4487124"/>
+            </a:xfrm>
+          </p:grpSpPr>
+          <p:pic>
+            <p:nvPicPr>
+              <p:cNvPr id="14" name="Picture 2" descr="https://www.mdpi.com/applsci/applsci-08-01157/article_deploy/html/images/applsci-08-01157-g001.png">
+                <a:extLst>
+                  <a:ext uri="{FF2B5EF4-FFF2-40B4-BE49-F238E27FC236}">
+                    <a16:creationId xmlns:a16="http://schemas.microsoft.com/office/drawing/2014/main" id="{BB779D1F-F040-4DA2-BAE2-2F7A34E9CB19}"/>
+                  </a:ext>
+                </a:extLst>
+              </p:cNvPr>
+              <p:cNvPicPr>
+                <a:picLocks noChangeAspect="1" noChangeArrowheads="1"/>
+              </p:cNvPicPr>
+              <p:nvPr/>
+            </p:nvPicPr>
+            <p:blipFill rotWithShape="1">
+              <a:blip r:embed="rId2">
+                <a:extLst>
+                  <a:ext uri="{28A0092B-C50C-407E-A947-70E740481C1C}">
+                    <a14:useLocalDpi xmlns:a14="http://schemas.microsoft.com/office/drawing/2010/main" val="0"/>
+                  </a:ext>
+                </a:extLst>
+              </a:blip>
+              <a:srcRect l="3264" t="6572" r="70352" b="56107"/>
+              <a:stretch/>
+            </p:blipFill>
+            <p:spPr bwMode="auto">
+              <a:xfrm rot="1809625">
+                <a:off x="709001" y="1827176"/>
+                <a:ext cx="3270061" cy="2593551"/>
+              </a:xfrm>
+              <a:prstGeom prst="rect">
+                <a:avLst/>
+              </a:prstGeom>
+              <a:noFill/>
+              <a:extLst>
+                <a:ext uri="{909E8E84-426E-40DD-AFC4-6F175D3DCCD1}">
+                  <a14:hiddenFill xmlns:a14="http://schemas.microsoft.com/office/drawing/2010/main">
+                    <a:solidFill>
+                      <a:srgbClr val="FFFFFF"/>
+                    </a:solidFill>
+                  </a14:hiddenFill>
+                </a:ext>
+              </a:extLst>
+            </p:spPr>
+          </p:pic>
+          <p:sp>
+            <p:nvSpPr>
+              <p:cNvPr id="52" name="圓形: 空心 51">
+                <a:extLst>
+                  <a:ext uri="{FF2B5EF4-FFF2-40B4-BE49-F238E27FC236}">
+                    <a16:creationId xmlns:a16="http://schemas.microsoft.com/office/drawing/2014/main" id="{95ED25BA-F532-4FA5-AFA3-4E2463E8056B}"/>
+                  </a:ext>
+                </a:extLst>
+              </p:cNvPr>
+              <p:cNvSpPr/>
+              <p:nvPr/>
+            </p:nvSpPr>
+            <p:spPr>
+              <a:xfrm>
+                <a:off x="-98851" y="651318"/>
+                <a:ext cx="4487124" cy="4487124"/>
+              </a:xfrm>
+              <a:prstGeom prst="donut">
+                <a:avLst>
+                  <a:gd name="adj" fmla="val 24348"/>
+                </a:avLst>
+              </a:prstGeom>
+              <a:solidFill>
+                <a:schemeClr val="bg1"/>
+              </a:solidFill>
+              <a:ln>
+                <a:noFill/>
+              </a:ln>
+            </p:spPr>
+            <p:style>
+              <a:lnRef idx="2">
+                <a:schemeClr val="accent1">
+                  <a:shade val="50000"/>
+                </a:schemeClr>
+              </a:lnRef>
+              <a:fillRef idx="1">
+                <a:schemeClr val="accent1"/>
+              </a:fillRef>
+              <a:effectRef idx="0">
+                <a:schemeClr val="accent1"/>
+              </a:effectRef>
+              <a:fontRef idx="minor">
+                <a:schemeClr val="lt1"/>
+              </a:fontRef>
+            </p:style>
+            <p:txBody>
+              <a:bodyPr rot="0" spcFirstLastPara="0" vertOverflow="overflow" horzOverflow="overflow" vert="horz" wrap="square" lIns="74295" tIns="37148" rIns="74295" bIns="37148" numCol="1" spcCol="0" rtlCol="0" fromWordArt="0" anchor="ctr" anchorCtr="0" forceAA="0" compatLnSpc="1">
+                <a:prstTxWarp prst="textNoShape">
+                  <a:avLst/>
+                </a:prstTxWarp>
+                <a:noAutofit/>
+              </a:bodyPr>
+              <a:lstStyle/>
+              <a:p>
+                <a:pPr algn="ctr"/>
+                <a:endParaRPr lang="zh-TW" altLang="en-US" sz="2000" dirty="0">
+                  <a:solidFill>
+                    <a:schemeClr val="tx1"/>
+                  </a:solidFill>
+                  <a:latin typeface="Times New Roman" panose="02020603050405020304" pitchFamily="18" charset="0"/>
+                  <a:cs typeface="Times New Roman" panose="02020603050405020304" pitchFamily="18" charset="0"/>
+                </a:endParaRPr>
+              </a:p>
+            </p:txBody>
+          </p:sp>
+          <p:grpSp>
+            <p:nvGrpSpPr>
+              <p:cNvPr id="53" name="群組 52">
+                <a:extLst>
+                  <a:ext uri="{FF2B5EF4-FFF2-40B4-BE49-F238E27FC236}">
+                    <a16:creationId xmlns:a16="http://schemas.microsoft.com/office/drawing/2014/main" id="{B99EA0DF-4EF0-46D2-9628-2B1F6F91D90B}"/>
+                  </a:ext>
+                </a:extLst>
+              </p:cNvPr>
+              <p:cNvGrpSpPr/>
+              <p:nvPr/>
+            </p:nvGrpSpPr>
+            <p:grpSpPr>
+              <a:xfrm rot="16200000">
+                <a:off x="1839247" y="2755590"/>
+                <a:ext cx="589628" cy="333090"/>
+                <a:chOff x="1763808" y="585245"/>
+                <a:chExt cx="1828792" cy="863907"/>
+              </a:xfrm>
+            </p:grpSpPr>
+            <p:cxnSp>
+              <p:nvCxnSpPr>
+                <p:cNvPr id="54" name="直線接點 53">
+                  <a:extLst>
+                    <a:ext uri="{FF2B5EF4-FFF2-40B4-BE49-F238E27FC236}">
+                      <a16:creationId xmlns:a16="http://schemas.microsoft.com/office/drawing/2014/main" id="{62AF9BEC-FDCC-477A-8FC0-BEAF65E92CEE}"/>
+                    </a:ext>
+                  </a:extLst>
+                </p:cNvPr>
+                <p:cNvCxnSpPr/>
+                <p:nvPr/>
+              </p:nvCxnSpPr>
+              <p:spPr>
+                <a:xfrm>
+                  <a:off x="2678201" y="586088"/>
+                  <a:ext cx="914399" cy="426720"/>
+                </a:xfrm>
+                <a:prstGeom prst="line">
+                  <a:avLst/>
+                </a:prstGeom>
+                <a:ln w="9525">
+                  <a:prstDash val="sysDash"/>
+                </a:ln>
+              </p:spPr>
+              <p:style>
+                <a:lnRef idx="3">
+                  <a:schemeClr val="dk1"/>
+                </a:lnRef>
+                <a:fillRef idx="0">
+                  <a:schemeClr val="dk1"/>
+                </a:fillRef>
+                <a:effectRef idx="2">
+                  <a:schemeClr val="dk1"/>
+                </a:effectRef>
+                <a:fontRef idx="minor">
+                  <a:schemeClr val="tx1"/>
+                </a:fontRef>
+              </p:style>
+            </p:cxnSp>
+            <p:cxnSp>
+              <p:nvCxnSpPr>
+                <p:cNvPr id="55" name="直線接點 54">
+                  <a:extLst>
+                    <a:ext uri="{FF2B5EF4-FFF2-40B4-BE49-F238E27FC236}">
+                      <a16:creationId xmlns:a16="http://schemas.microsoft.com/office/drawing/2014/main" id="{2702ACC3-77E2-4B95-A6BB-83EE61921103}"/>
+                    </a:ext>
+                  </a:extLst>
+                </p:cNvPr>
+                <p:cNvCxnSpPr/>
+                <p:nvPr/>
+              </p:nvCxnSpPr>
+              <p:spPr>
+                <a:xfrm>
+                  <a:off x="1763811" y="1021595"/>
+                  <a:ext cx="914399" cy="426720"/>
+                </a:xfrm>
+                <a:prstGeom prst="line">
+                  <a:avLst/>
+                </a:prstGeom>
+                <a:ln w="9525">
+                  <a:prstDash val="sysDash"/>
+                </a:ln>
+              </p:spPr>
+              <p:style>
+                <a:lnRef idx="3">
+                  <a:schemeClr val="dk1"/>
+                </a:lnRef>
+                <a:fillRef idx="0">
+                  <a:schemeClr val="dk1"/>
+                </a:fillRef>
+                <a:effectRef idx="2">
+                  <a:schemeClr val="dk1"/>
+                </a:effectRef>
+                <a:fontRef idx="minor">
+                  <a:schemeClr val="tx1"/>
+                </a:fontRef>
+              </p:style>
+            </p:cxnSp>
+            <p:cxnSp>
+              <p:nvCxnSpPr>
+                <p:cNvPr id="56" name="直線接點 55">
+                  <a:extLst>
+                    <a:ext uri="{FF2B5EF4-FFF2-40B4-BE49-F238E27FC236}">
+                      <a16:creationId xmlns:a16="http://schemas.microsoft.com/office/drawing/2014/main" id="{B581387D-7DDE-404B-9E32-1D986E3DF29E}"/>
+                    </a:ext>
+                  </a:extLst>
+                </p:cNvPr>
+                <p:cNvCxnSpPr>
+                  <a:cxnSpLocks/>
+                </p:cNvCxnSpPr>
+                <p:nvPr/>
+              </p:nvCxnSpPr>
+              <p:spPr>
+                <a:xfrm flipV="1">
+                  <a:off x="2678201" y="1020752"/>
+                  <a:ext cx="914399" cy="428400"/>
+                </a:xfrm>
+                <a:prstGeom prst="line">
+                  <a:avLst/>
+                </a:prstGeom>
+                <a:ln w="9525">
+                  <a:prstDash val="sysDash"/>
+                </a:ln>
+              </p:spPr>
+              <p:style>
+                <a:lnRef idx="3">
+                  <a:schemeClr val="dk1"/>
+                </a:lnRef>
+                <a:fillRef idx="0">
+                  <a:schemeClr val="dk1"/>
+                </a:fillRef>
+                <a:effectRef idx="2">
+                  <a:schemeClr val="dk1"/>
+                </a:effectRef>
+                <a:fontRef idx="minor">
+                  <a:schemeClr val="tx1"/>
+                </a:fontRef>
+              </p:style>
+            </p:cxnSp>
+            <p:cxnSp>
+              <p:nvCxnSpPr>
+                <p:cNvPr id="57" name="直線接點 56">
+                  <a:extLst>
+                    <a:ext uri="{FF2B5EF4-FFF2-40B4-BE49-F238E27FC236}">
+                      <a16:creationId xmlns:a16="http://schemas.microsoft.com/office/drawing/2014/main" id="{2A771E86-1748-475E-BF31-D18696D6F3C2}"/>
+                    </a:ext>
+                  </a:extLst>
+                </p:cNvPr>
+                <p:cNvCxnSpPr>
+                  <a:cxnSpLocks/>
+                </p:cNvCxnSpPr>
+                <p:nvPr/>
+              </p:nvCxnSpPr>
+              <p:spPr>
+                <a:xfrm flipV="1">
+                  <a:off x="1763808" y="585245"/>
+                  <a:ext cx="914399" cy="428400"/>
+                </a:xfrm>
+                <a:prstGeom prst="line">
+                  <a:avLst/>
+                </a:prstGeom>
+                <a:ln w="9525">
+                  <a:prstDash val="sysDash"/>
+                </a:ln>
+              </p:spPr>
+              <p:style>
+                <a:lnRef idx="3">
+                  <a:schemeClr val="dk1"/>
+                </a:lnRef>
+                <a:fillRef idx="0">
+                  <a:schemeClr val="dk1"/>
+                </a:fillRef>
+                <a:effectRef idx="2">
+                  <a:schemeClr val="dk1"/>
+                </a:effectRef>
+                <a:fontRef idx="minor">
+                  <a:schemeClr val="tx1"/>
+                </a:fontRef>
+              </p:style>
+            </p:cxnSp>
+          </p:grpSp>
+        </p:grpSp>
+        <p:pic>
+          <p:nvPicPr>
+            <p:cNvPr id="15" name="Picture 2" descr="https://www.mdpi.com/applsci/applsci-08-01157/article_deploy/html/images/applsci-08-01157-g001.png">
+              <a:extLst>
+                <a:ext uri="{FF2B5EF4-FFF2-40B4-BE49-F238E27FC236}">
+                  <a16:creationId xmlns:a16="http://schemas.microsoft.com/office/drawing/2014/main" id="{84CEEA8B-37D1-4637-B472-26FA9690D789}"/>
+                </a:ext>
+              </a:extLst>
+            </p:cNvPr>
+            <p:cNvPicPr>
+              <a:picLocks noChangeAspect="1" noChangeArrowheads="1"/>
+            </p:cNvPicPr>
+            <p:nvPr/>
+          </p:nvPicPr>
+          <p:blipFill rotWithShape="1">
+            <a:blip r:embed="rId2">
+              <a:extLst>
+                <a:ext uri="{28A0092B-C50C-407E-A947-70E740481C1C}">
+                  <a14:useLocalDpi xmlns:a14="http://schemas.microsoft.com/office/drawing/2010/main" val="0"/>
+                </a:ext>
+              </a:extLst>
+            </a:blip>
+            <a:srcRect l="8003" t="43627" r="69001" b="47528"/>
+            <a:stretch/>
+          </p:blipFill>
+          <p:spPr bwMode="auto">
+            <a:xfrm>
+              <a:off x="7520478" y="667220"/>
+              <a:ext cx="2315714" cy="499428"/>
+            </a:xfrm>
+            <a:prstGeom prst="rect">
+              <a:avLst/>
+            </a:prstGeom>
+            <a:noFill/>
+            <a:extLst>
+              <a:ext uri="{909E8E84-426E-40DD-AFC4-6F175D3DCCD1}">
+                <a14:hiddenFill xmlns:a14="http://schemas.microsoft.com/office/drawing/2010/main">
+                  <a:solidFill>
+                    <a:srgbClr val="FFFFFF"/>
+                  </a:solidFill>
+                </a14:hiddenFill>
+              </a:ext>
+            </a:extLst>
+          </p:spPr>
+        </p:pic>
+        <p:grpSp>
+          <p:nvGrpSpPr>
+            <p:cNvPr id="65" name="群組 64">
+              <a:extLst>
+                <a:ext uri="{FF2B5EF4-FFF2-40B4-BE49-F238E27FC236}">
+                  <a16:creationId xmlns:a16="http://schemas.microsoft.com/office/drawing/2014/main" id="{9FD33F3C-2EA6-4223-8AA7-18DB949691BD}"/>
+                </a:ext>
+              </a:extLst>
+            </p:cNvPr>
+            <p:cNvGrpSpPr/>
+            <p:nvPr/>
+          </p:nvGrpSpPr>
+          <p:grpSpPr>
+            <a:xfrm>
+              <a:off x="6935613" y="2568847"/>
+              <a:ext cx="814086" cy="936698"/>
+              <a:chOff x="6095200" y="-105692"/>
+              <a:chExt cx="1153156" cy="1326837"/>
+            </a:xfrm>
+          </p:grpSpPr>
+          <mc:AlternateContent xmlns:mc="http://schemas.openxmlformats.org/markup-compatibility/2006" xmlns:a14="http://schemas.microsoft.com/office/drawing/2010/main">
+            <mc:Choice Requires="a14">
+              <p:sp>
+                <p:nvSpPr>
+                  <p:cNvPr id="64" name="文字方塊 63">
+                    <a:extLst>
+                      <a:ext uri="{FF2B5EF4-FFF2-40B4-BE49-F238E27FC236}">
+                        <a16:creationId xmlns:a16="http://schemas.microsoft.com/office/drawing/2014/main" id="{1AC21DCA-45FB-481B-8FAD-616224AF2E4F}"/>
+                      </a:ext>
+                    </a:extLst>
+                  </p:cNvPr>
+                  <p:cNvSpPr txBox="1"/>
+                  <p:nvPr/>
+                </p:nvSpPr>
+                <p:spPr>
+                  <a:xfrm>
+                    <a:off x="6095200" y="654387"/>
+                    <a:ext cx="500693" cy="566758"/>
+                  </a:xfrm>
+                  <a:prstGeom prst="rect">
+                    <a:avLst/>
+                  </a:prstGeom>
+                  <a:noFill/>
+                </p:spPr>
+                <p:txBody>
+                  <a:bodyPr wrap="square" rtlCol="0">
+                    <a:spAutoFit/>
+                  </a:bodyPr>
+                  <a:lstStyle/>
+                  <a:p>
+                    <a:pPr/>
+                    <a14:m>
+                      <m:oMathPara xmlns:m="http://schemas.openxmlformats.org/officeDocument/2006/math">
+                        <m:oMathParaPr>
+                          <m:jc m:val="centerGroup"/>
+                        </m:oMathParaPr>
+                        <m:oMath xmlns:m="http://schemas.openxmlformats.org/officeDocument/2006/math">
+                          <m:r>
+                            <a:rPr lang="en-US" altLang="zh-TW" sz="2000" i="1">
+                              <a:latin typeface="Cambria Math" panose="02040503050406030204" pitchFamily="18" charset="0"/>
+                            </a:rPr>
+                            <m:t>𝑧</m:t>
+                          </m:r>
+                        </m:oMath>
+                      </m:oMathPara>
+                    </a14:m>
+                    <a:endParaRPr lang="zh-TW" altLang="en-US" sz="2000" dirty="0">
+                      <a:latin typeface="Times New Roman" panose="02020603050405020304" pitchFamily="18" charset="0"/>
+                      <a:cs typeface="Times New Roman" panose="02020603050405020304" pitchFamily="18" charset="0"/>
+                    </a:endParaRPr>
+                  </a:p>
+                </p:txBody>
+              </p:sp>
+            </mc:Choice>
+            <mc:Fallback xmlns="">
+              <p:sp>
+                <p:nvSpPr>
+                  <p:cNvPr id="64" name="文字方塊 63">
+                    <a:extLst>
+                      <a:ext uri="{FF2B5EF4-FFF2-40B4-BE49-F238E27FC236}">
+                        <a16:creationId xmlns:a16="http://schemas.microsoft.com/office/drawing/2014/main" id="{1AC21DCA-45FB-481B-8FAD-616224AF2E4F}"/>
+                      </a:ext>
+                    </a:extLst>
+                  </p:cNvPr>
+                  <p:cNvSpPr txBox="1">
+                    <a:spLocks noRot="1" noChangeAspect="1" noMove="1" noResize="1" noEditPoints="1" noAdjustHandles="1" noChangeArrowheads="1" noChangeShapeType="1" noTextEdit="1"/>
+                  </p:cNvSpPr>
+                  <p:nvPr/>
+                </p:nvSpPr>
+                <p:spPr>
+                  <a:xfrm>
+                    <a:off x="6095200" y="654387"/>
+                    <a:ext cx="500693" cy="566758"/>
+                  </a:xfrm>
+                  <a:prstGeom prst="rect">
+                    <a:avLst/>
+                  </a:prstGeom>
+                  <a:blipFill>
+                    <a:blip r:embed="rId3"/>
+                    <a:stretch>
+                      <a:fillRect/>
+                    </a:stretch>
+                  </a:blipFill>
+                </p:spPr>
+                <p:txBody>
+                  <a:bodyPr/>
+                  <a:lstStyle/>
+                  <a:p>
+                    <a:r>
+                      <a:rPr lang="zh-TW" altLang="en-US">
+                        <a:noFill/>
+                      </a:rPr>
+                      <a:t> </a:t>
+                    </a:r>
+                  </a:p>
+                </p:txBody>
+              </p:sp>
+            </mc:Fallback>
+          </mc:AlternateContent>
+          <p:cxnSp>
+            <p:nvCxnSpPr>
+              <p:cNvPr id="44" name="直線單箭頭接點 43">
+                <a:extLst>
+                  <a:ext uri="{FF2B5EF4-FFF2-40B4-BE49-F238E27FC236}">
+                    <a16:creationId xmlns:a16="http://schemas.microsoft.com/office/drawing/2014/main" id="{EBDF0B66-0BCB-438D-B5A5-204CE09C230F}"/>
+                  </a:ext>
+                </a:extLst>
+              </p:cNvPr>
+              <p:cNvCxnSpPr>
+                <a:cxnSpLocks/>
+              </p:cNvCxnSpPr>
+              <p:nvPr/>
+            </p:nvCxnSpPr>
+            <p:spPr>
+              <a:xfrm>
+                <a:off x="6502870" y="782175"/>
+                <a:ext cx="363442" cy="0"/>
+              </a:xfrm>
+              <a:prstGeom prst="straightConnector1">
+                <a:avLst/>
+              </a:prstGeom>
+              <a:solidFill>
+                <a:schemeClr val="bg1"/>
+              </a:solidFill>
+              <a:ln>
+                <a:tailEnd type="triangle"/>
+              </a:ln>
+            </p:spPr>
+            <p:style>
+              <a:lnRef idx="2">
+                <a:schemeClr val="dk1"/>
+              </a:lnRef>
+              <a:fillRef idx="0">
+                <a:schemeClr val="dk1"/>
+              </a:fillRef>
+              <a:effectRef idx="1">
+                <a:schemeClr val="dk1"/>
+              </a:effectRef>
+              <a:fontRef idx="minor">
+                <a:schemeClr val="tx1"/>
+              </a:fontRef>
+            </p:style>
+          </p:cxnSp>
+          <p:cxnSp>
+            <p:nvCxnSpPr>
+              <p:cNvPr id="45" name="直線單箭頭接點 44">
+                <a:extLst>
+                  <a:ext uri="{FF2B5EF4-FFF2-40B4-BE49-F238E27FC236}">
+                    <a16:creationId xmlns:a16="http://schemas.microsoft.com/office/drawing/2014/main" id="{1554358E-A756-4E34-AD44-5C8E42D7A655}"/>
+                  </a:ext>
+                </a:extLst>
+              </p:cNvPr>
+              <p:cNvCxnSpPr>
+                <a:cxnSpLocks/>
+              </p:cNvCxnSpPr>
+              <p:nvPr/>
+            </p:nvCxnSpPr>
+            <p:spPr>
+              <a:xfrm flipV="1">
+                <a:off x="6508390" y="432919"/>
+                <a:ext cx="0" cy="355792"/>
+              </a:xfrm>
+              <a:prstGeom prst="straightConnector1">
+                <a:avLst/>
+              </a:prstGeom>
+              <a:solidFill>
+                <a:schemeClr val="bg1"/>
+              </a:solidFill>
+              <a:ln>
+                <a:tailEnd type="triangle"/>
+              </a:ln>
+            </p:spPr>
+            <p:style>
+              <a:lnRef idx="2">
+                <a:schemeClr val="dk1"/>
+              </a:lnRef>
+              <a:fillRef idx="0">
+                <a:schemeClr val="dk1"/>
+              </a:fillRef>
+              <a:effectRef idx="1">
+                <a:schemeClr val="dk1"/>
+              </a:effectRef>
+              <a:fontRef idx="minor">
+                <a:schemeClr val="tx1"/>
+              </a:fontRef>
+            </p:style>
+          </p:cxnSp>
+          <mc:AlternateContent xmlns:mc="http://schemas.openxmlformats.org/markup-compatibility/2006" xmlns:a14="http://schemas.microsoft.com/office/drawing/2010/main">
+            <mc:Choice Requires="a14">
+              <p:sp>
+                <p:nvSpPr>
+                  <p:cNvPr id="46" name="文字方塊 45">
+                    <a:extLst>
+                      <a:ext uri="{FF2B5EF4-FFF2-40B4-BE49-F238E27FC236}">
+                        <a16:creationId xmlns:a16="http://schemas.microsoft.com/office/drawing/2014/main" id="{F9381824-E8D5-4BFC-91DD-94D582F39669}"/>
+                      </a:ext>
+                    </a:extLst>
+                  </p:cNvPr>
+                  <p:cNvSpPr txBox="1"/>
+                  <p:nvPr/>
+                </p:nvSpPr>
+                <p:spPr>
+                  <a:xfrm>
+                    <a:off x="6747663" y="592474"/>
+                    <a:ext cx="500693" cy="566757"/>
+                  </a:xfrm>
+                  <a:prstGeom prst="rect">
+                    <a:avLst/>
+                  </a:prstGeom>
+                  <a:noFill/>
+                </p:spPr>
+                <p:txBody>
+                  <a:bodyPr wrap="square" rtlCol="0">
+                    <a:spAutoFit/>
+                  </a:bodyPr>
+                  <a:lstStyle/>
+                  <a:p>
+                    <a:pPr/>
+                    <a14:m>
+                      <m:oMathPara xmlns:m="http://schemas.openxmlformats.org/officeDocument/2006/math">
+                        <m:oMathParaPr>
+                          <m:jc m:val="centerGroup"/>
+                        </m:oMathParaPr>
+                        <m:oMath xmlns:m="http://schemas.openxmlformats.org/officeDocument/2006/math">
+                          <m:r>
+                            <a:rPr lang="en-US" altLang="zh-TW" sz="2000" i="1">
+                              <a:latin typeface="Cambria Math" panose="02040503050406030204" pitchFamily="18" charset="0"/>
+                            </a:rPr>
+                            <m:t>𝑥</m:t>
+                          </m:r>
+                        </m:oMath>
+                      </m:oMathPara>
+                    </a14:m>
+                    <a:endParaRPr lang="zh-TW" altLang="en-US" sz="2000" dirty="0">
+                      <a:latin typeface="Times New Roman" panose="02020603050405020304" pitchFamily="18" charset="0"/>
+                      <a:cs typeface="Times New Roman" panose="02020603050405020304" pitchFamily="18" charset="0"/>
+                    </a:endParaRPr>
+                  </a:p>
+                </p:txBody>
+              </p:sp>
+            </mc:Choice>
+            <mc:Fallback xmlns="">
+              <p:sp>
+                <p:nvSpPr>
+                  <p:cNvPr id="46" name="文字方塊 45">
+                    <a:extLst>
+                      <a:ext uri="{FF2B5EF4-FFF2-40B4-BE49-F238E27FC236}">
+                        <a16:creationId xmlns:a16="http://schemas.microsoft.com/office/drawing/2014/main" id="{F9381824-E8D5-4BFC-91DD-94D582F39669}"/>
+                      </a:ext>
+                    </a:extLst>
+                  </p:cNvPr>
+                  <p:cNvSpPr txBox="1">
+                    <a:spLocks noRot="1" noChangeAspect="1" noMove="1" noResize="1" noEditPoints="1" noAdjustHandles="1" noChangeArrowheads="1" noChangeShapeType="1" noTextEdit="1"/>
+                  </p:cNvSpPr>
+                  <p:nvPr/>
+                </p:nvSpPr>
+                <p:spPr>
+                  <a:xfrm>
+                    <a:off x="6747663" y="592474"/>
+                    <a:ext cx="500693" cy="566757"/>
+                  </a:xfrm>
+                  <a:prstGeom prst="rect">
+                    <a:avLst/>
+                  </a:prstGeom>
+                  <a:blipFill>
+                    <a:blip r:embed="rId4"/>
+                    <a:stretch>
+                      <a:fillRect/>
+                    </a:stretch>
+                  </a:blipFill>
+                </p:spPr>
+                <p:txBody>
+                  <a:bodyPr/>
+                  <a:lstStyle/>
+                  <a:p>
+                    <a:r>
+                      <a:rPr lang="zh-TW" altLang="en-US">
+                        <a:noFill/>
+                      </a:rPr>
+                      <a:t> </a:t>
+                    </a:r>
+                  </a:p>
+                </p:txBody>
+              </p:sp>
+            </mc:Fallback>
+          </mc:AlternateContent>
+          <mc:AlternateContent xmlns:mc="http://schemas.openxmlformats.org/markup-compatibility/2006" xmlns:a14="http://schemas.microsoft.com/office/drawing/2010/main">
+            <mc:Choice Requires="a14">
+              <p:sp>
+                <p:nvSpPr>
+                  <p:cNvPr id="47" name="文字方塊 46">
+                    <a:extLst>
+                      <a:ext uri="{FF2B5EF4-FFF2-40B4-BE49-F238E27FC236}">
+                        <a16:creationId xmlns:a16="http://schemas.microsoft.com/office/drawing/2014/main" id="{5E2D19B0-E246-47EA-BEFF-DC7713F756AE}"/>
+                      </a:ext>
+                    </a:extLst>
+                  </p:cNvPr>
+                  <p:cNvSpPr txBox="1"/>
+                  <p:nvPr/>
+                </p:nvSpPr>
+                <p:spPr>
+                  <a:xfrm>
+                    <a:off x="6281528" y="-105692"/>
+                    <a:ext cx="500693" cy="566758"/>
+                  </a:xfrm>
+                  <a:prstGeom prst="rect">
+                    <a:avLst/>
+                  </a:prstGeom>
+                  <a:noFill/>
+                </p:spPr>
+                <p:txBody>
+                  <a:bodyPr wrap="square" rtlCol="0">
+                    <a:spAutoFit/>
+                  </a:bodyPr>
+                  <a:lstStyle/>
+                  <a:p>
+                    <a:pPr/>
+                    <a14:m>
+                      <m:oMathPara xmlns:m="http://schemas.openxmlformats.org/officeDocument/2006/math">
+                        <m:oMathParaPr>
+                          <m:jc m:val="centerGroup"/>
+                        </m:oMathParaPr>
+                        <m:oMath xmlns:m="http://schemas.openxmlformats.org/officeDocument/2006/math">
+                          <m:r>
+                            <a:rPr lang="en-US" altLang="zh-TW" sz="2000" i="1">
+                              <a:latin typeface="Cambria Math" panose="02040503050406030204" pitchFamily="18" charset="0"/>
+                            </a:rPr>
+                            <m:t>𝑦</m:t>
+                          </m:r>
+                        </m:oMath>
+                      </m:oMathPara>
+                    </a14:m>
+                    <a:endParaRPr lang="zh-TW" altLang="en-US" sz="2000" dirty="0">
+                      <a:latin typeface="Times New Roman" panose="02020603050405020304" pitchFamily="18" charset="0"/>
+                      <a:cs typeface="Times New Roman" panose="02020603050405020304" pitchFamily="18" charset="0"/>
+                    </a:endParaRPr>
+                  </a:p>
+                </p:txBody>
+              </p:sp>
+            </mc:Choice>
+            <mc:Fallback xmlns="">
+              <p:sp>
+                <p:nvSpPr>
+                  <p:cNvPr id="47" name="文字方塊 46">
+                    <a:extLst>
+                      <a:ext uri="{FF2B5EF4-FFF2-40B4-BE49-F238E27FC236}">
+                        <a16:creationId xmlns:a16="http://schemas.microsoft.com/office/drawing/2014/main" id="{5E2D19B0-E246-47EA-BEFF-DC7713F756AE}"/>
+                      </a:ext>
+                    </a:extLst>
+                  </p:cNvPr>
+                  <p:cNvSpPr txBox="1">
+                    <a:spLocks noRot="1" noChangeAspect="1" noMove="1" noResize="1" noEditPoints="1" noAdjustHandles="1" noChangeArrowheads="1" noChangeShapeType="1" noTextEdit="1"/>
+                  </p:cNvSpPr>
+                  <p:nvPr/>
+                </p:nvSpPr>
+                <p:spPr>
+                  <a:xfrm>
+                    <a:off x="6281528" y="-105692"/>
+                    <a:ext cx="500693" cy="566758"/>
+                  </a:xfrm>
+                  <a:prstGeom prst="rect">
+                    <a:avLst/>
+                  </a:prstGeom>
+                  <a:blipFill>
+                    <a:blip r:embed="rId5"/>
+                    <a:stretch>
+                      <a:fillRect b="-9231"/>
+                    </a:stretch>
+                  </a:blipFill>
+                </p:spPr>
+                <p:txBody>
+                  <a:bodyPr/>
+                  <a:lstStyle/>
+                  <a:p>
+                    <a:r>
+                      <a:rPr lang="zh-TW" altLang="en-US">
+                        <a:noFill/>
+                      </a:rPr>
+                      <a:t> </a:t>
+                    </a:r>
+                  </a:p>
+                </p:txBody>
+              </p:sp>
+            </mc:Fallback>
+          </mc:AlternateContent>
+          <p:grpSp>
+            <p:nvGrpSpPr>
+              <p:cNvPr id="63" name="群組 62">
+                <a:extLst>
+                  <a:ext uri="{FF2B5EF4-FFF2-40B4-BE49-F238E27FC236}">
+                    <a16:creationId xmlns:a16="http://schemas.microsoft.com/office/drawing/2014/main" id="{86C01793-27FB-4469-B902-77A19DA60798}"/>
+                  </a:ext>
+                </a:extLst>
+              </p:cNvPr>
+              <p:cNvGrpSpPr/>
+              <p:nvPr/>
+            </p:nvGrpSpPr>
+            <p:grpSpPr>
+              <a:xfrm>
+                <a:off x="6432721" y="705415"/>
+                <a:ext cx="152982" cy="152982"/>
+                <a:chOff x="5713955" y="632452"/>
+                <a:chExt cx="1065551" cy="1065551"/>
+              </a:xfrm>
+            </p:grpSpPr>
+            <p:sp>
+              <p:nvSpPr>
+                <p:cNvPr id="61" name="圓形: 空心 60">
+                  <a:extLst>
+                    <a:ext uri="{FF2B5EF4-FFF2-40B4-BE49-F238E27FC236}">
+                      <a16:creationId xmlns:a16="http://schemas.microsoft.com/office/drawing/2014/main" id="{4095E452-70E7-4ED1-B8B6-9B95E719916F}"/>
+                    </a:ext>
+                  </a:extLst>
+                </p:cNvPr>
+                <p:cNvSpPr/>
+                <p:nvPr/>
+              </p:nvSpPr>
+              <p:spPr>
+                <a:xfrm>
+                  <a:off x="5713955" y="632452"/>
+                  <a:ext cx="1065551" cy="1065551"/>
+                </a:xfrm>
+                <a:prstGeom prst="donut">
+                  <a:avLst>
+                    <a:gd name="adj" fmla="val 38442"/>
+                  </a:avLst>
+                </a:prstGeom>
+                <a:solidFill>
+                  <a:schemeClr val="bg1"/>
+                </a:solidFill>
+                <a:ln>
+                  <a:solidFill>
+                    <a:schemeClr val="tx1"/>
+                  </a:solidFill>
+                </a:ln>
+              </p:spPr>
+              <p:style>
+                <a:lnRef idx="2">
+                  <a:schemeClr val="accent1">
+                    <a:shade val="50000"/>
+                  </a:schemeClr>
+                </a:lnRef>
+                <a:fillRef idx="1">
+                  <a:schemeClr val="accent1"/>
+                </a:fillRef>
+                <a:effectRef idx="0">
+                  <a:schemeClr val="accent1"/>
+                </a:effectRef>
+                <a:fontRef idx="minor">
+                  <a:schemeClr val="lt1"/>
+                </a:fontRef>
+              </p:style>
+              <p:txBody>
+                <a:bodyPr rot="0" spcFirstLastPara="0" vertOverflow="overflow" horzOverflow="overflow" vert="horz" wrap="square" lIns="74295" tIns="37148" rIns="74295" bIns="37148" numCol="1" spcCol="0" rtlCol="0" fromWordArt="0" anchor="ctr" anchorCtr="0" forceAA="0" compatLnSpc="1">
+                  <a:prstTxWarp prst="textNoShape">
+                    <a:avLst/>
+                  </a:prstTxWarp>
+                  <a:noAutofit/>
+                </a:bodyPr>
+                <a:lstStyle/>
+                <a:p>
+                  <a:pPr algn="ctr"/>
+                  <a:endParaRPr lang="zh-TW" altLang="en-US" sz="2000" dirty="0">
+                    <a:solidFill>
+                      <a:schemeClr val="tx1"/>
+                    </a:solidFill>
+                    <a:latin typeface="Times New Roman" panose="02020603050405020304" pitchFamily="18" charset="0"/>
+                    <a:cs typeface="Times New Roman" panose="02020603050405020304" pitchFamily="18" charset="0"/>
+                  </a:endParaRPr>
+                </a:p>
+              </p:txBody>
+            </p:sp>
+            <p:sp>
+              <p:nvSpPr>
+                <p:cNvPr id="62" name="橢圓 61">
+                  <a:extLst>
+                    <a:ext uri="{FF2B5EF4-FFF2-40B4-BE49-F238E27FC236}">
+                      <a16:creationId xmlns:a16="http://schemas.microsoft.com/office/drawing/2014/main" id="{590205C3-404B-47C5-9E3F-133C45A0FF04}"/>
+                    </a:ext>
+                  </a:extLst>
+                </p:cNvPr>
+                <p:cNvSpPr/>
+                <p:nvPr/>
+              </p:nvSpPr>
+              <p:spPr>
+                <a:xfrm>
+                  <a:off x="6200578" y="1119065"/>
+                  <a:ext cx="131269" cy="131269"/>
+                </a:xfrm>
+                <a:prstGeom prst="ellipse">
+                  <a:avLst/>
+                </a:prstGeom>
+                <a:solidFill>
+                  <a:schemeClr val="tx1"/>
+                </a:solidFill>
+                <a:ln>
+                  <a:noFill/>
+                </a:ln>
+              </p:spPr>
+              <p:style>
+                <a:lnRef idx="2">
+                  <a:schemeClr val="accent1">
+                    <a:shade val="50000"/>
+                  </a:schemeClr>
+                </a:lnRef>
+                <a:fillRef idx="1">
+                  <a:schemeClr val="accent1"/>
+                </a:fillRef>
+                <a:effectRef idx="0">
+                  <a:schemeClr val="accent1"/>
+                </a:effectRef>
+                <a:fontRef idx="minor">
+                  <a:schemeClr val="lt1"/>
+                </a:fontRef>
+              </p:style>
+              <p:txBody>
+                <a:bodyPr rot="0" spcFirstLastPara="0" vertOverflow="overflow" horzOverflow="overflow" vert="horz" wrap="square" lIns="74295" tIns="37148" rIns="74295" bIns="37148" numCol="1" spcCol="0" rtlCol="0" fromWordArt="0" anchor="ctr" anchorCtr="0" forceAA="0" compatLnSpc="1">
+                  <a:prstTxWarp prst="textNoShape">
+                    <a:avLst/>
+                  </a:prstTxWarp>
+                  <a:noAutofit/>
+                </a:bodyPr>
+                <a:lstStyle/>
+                <a:p>
+                  <a:pPr algn="ctr"/>
+                  <a:endParaRPr lang="zh-TW" altLang="en-US" sz="2000">
+                    <a:latin typeface="Times New Roman" panose="02020603050405020304" pitchFamily="18" charset="0"/>
+                    <a:cs typeface="Times New Roman" panose="02020603050405020304" pitchFamily="18" charset="0"/>
+                  </a:endParaRPr>
+                </a:p>
+              </p:txBody>
+            </p:sp>
+          </p:grpSp>
+        </p:grpSp>
+        <p:grpSp>
+          <p:nvGrpSpPr>
+            <p:cNvPr id="3" name="群組 2">
+              <a:extLst>
+                <a:ext uri="{FF2B5EF4-FFF2-40B4-BE49-F238E27FC236}">
+                  <a16:creationId xmlns:a16="http://schemas.microsoft.com/office/drawing/2014/main" id="{5FDA83A2-C41F-4A11-8390-268C85ADC071}"/>
+                </a:ext>
+              </a:extLst>
+            </p:cNvPr>
+            <p:cNvGrpSpPr/>
+            <p:nvPr/>
+          </p:nvGrpSpPr>
+          <p:grpSpPr>
+            <a:xfrm>
+              <a:off x="7852741" y="3143777"/>
+              <a:ext cx="1776730" cy="1578221"/>
+              <a:chOff x="4630105" y="42452"/>
+              <a:chExt cx="1879637" cy="1669627"/>
+            </a:xfrm>
+          </p:grpSpPr>
+          <p:sp>
+            <p:nvSpPr>
+              <p:cNvPr id="18" name="六邊形 17">
+                <a:extLst>
+                  <a:ext uri="{FF2B5EF4-FFF2-40B4-BE49-F238E27FC236}">
+                    <a16:creationId xmlns:a16="http://schemas.microsoft.com/office/drawing/2014/main" id="{F0697EBA-83D2-4D22-8B5F-6081014D393C}"/>
+                  </a:ext>
+                </a:extLst>
+              </p:cNvPr>
+              <p:cNvSpPr/>
+              <p:nvPr/>
+            </p:nvSpPr>
+            <p:spPr>
+              <a:xfrm>
+                <a:off x="4630105" y="432916"/>
+                <a:ext cx="1483948" cy="1279163"/>
+              </a:xfrm>
+              <a:prstGeom prst="hexagon">
+                <a:avLst>
+                  <a:gd name="adj" fmla="val 29067"/>
+                  <a:gd name="vf" fmla="val 115470"/>
+                </a:avLst>
+              </a:prstGeom>
+              <a:solidFill>
+                <a:schemeClr val="bg1"/>
+              </a:solidFill>
+              <a:ln>
+                <a:solidFill>
+                  <a:schemeClr val="tx1"/>
+                </a:solidFill>
+              </a:ln>
+            </p:spPr>
+            <p:style>
+              <a:lnRef idx="2">
+                <a:schemeClr val="accent1">
+                  <a:shade val="50000"/>
+                </a:schemeClr>
+              </a:lnRef>
+              <a:fillRef idx="1">
+                <a:schemeClr val="accent1"/>
+              </a:fillRef>
+              <a:effectRef idx="0">
+                <a:schemeClr val="accent1"/>
+              </a:effectRef>
+              <a:fontRef idx="minor">
+                <a:schemeClr val="lt1"/>
+              </a:fontRef>
+            </p:style>
+            <p:txBody>
+              <a:bodyPr rtlCol="0" anchor="ctr"/>
+              <a:lstStyle/>
+              <a:p>
+                <a:pPr algn="ctr"/>
+                <a:endParaRPr lang="zh-TW" altLang="en-US" sz="2000" dirty="0">
+                  <a:latin typeface="Times New Roman" panose="02020603050405020304" pitchFamily="18" charset="0"/>
+                  <a:cs typeface="Times New Roman" panose="02020603050405020304" pitchFamily="18" charset="0"/>
+                </a:endParaRPr>
+              </a:p>
+            </p:txBody>
+          </p:sp>
+          <mc:AlternateContent xmlns:mc="http://schemas.openxmlformats.org/markup-compatibility/2006" xmlns:a14="http://schemas.microsoft.com/office/drawing/2010/main">
+            <mc:Choice Requires="a14">
+              <p:sp>
+                <p:nvSpPr>
+                  <p:cNvPr id="23" name="文字方塊 22">
+                    <a:extLst>
+                      <a:ext uri="{FF2B5EF4-FFF2-40B4-BE49-F238E27FC236}">
+                        <a16:creationId xmlns:a16="http://schemas.microsoft.com/office/drawing/2014/main" id="{4A972CE0-B624-471F-AEE8-237ADA8C4A64}"/>
+                      </a:ext>
+                    </a:extLst>
+                  </p:cNvPr>
+                  <p:cNvSpPr txBox="1"/>
+                  <p:nvPr/>
+                </p:nvSpPr>
+                <p:spPr>
+                  <a:xfrm>
+                    <a:off x="6009049" y="1044766"/>
+                    <a:ext cx="500693" cy="423283"/>
+                  </a:xfrm>
+                  <a:prstGeom prst="rect">
+                    <a:avLst/>
+                  </a:prstGeom>
+                  <a:noFill/>
+                </p:spPr>
+                <p:txBody>
+                  <a:bodyPr wrap="square" rtlCol="0">
+                    <a:spAutoFit/>
+                  </a:bodyPr>
+                  <a:lstStyle/>
+                  <a:p>
+                    <a:pPr/>
+                    <a14:m>
+                      <m:oMathPara xmlns:m="http://schemas.openxmlformats.org/officeDocument/2006/math">
+                        <m:oMathParaPr>
+                          <m:jc m:val="centerGroup"/>
+                        </m:oMathParaPr>
+                        <m:oMath xmlns:m="http://schemas.openxmlformats.org/officeDocument/2006/math">
+                          <m:r>
+                            <a:rPr lang="en-US" altLang="zh-TW" sz="2000" i="1">
+                              <a:latin typeface="Cambria Math" panose="02040503050406030204" pitchFamily="18" charset="0"/>
+                            </a:rPr>
+                            <m:t>𝐾</m:t>
+                          </m:r>
+                        </m:oMath>
+                      </m:oMathPara>
+                    </a14:m>
+                    <a:endParaRPr lang="zh-TW" altLang="en-US" sz="2000" dirty="0">
+                      <a:latin typeface="Times New Roman" panose="02020603050405020304" pitchFamily="18" charset="0"/>
+                      <a:cs typeface="Times New Roman" panose="02020603050405020304" pitchFamily="18" charset="0"/>
+                    </a:endParaRPr>
+                  </a:p>
+                </p:txBody>
+              </p:sp>
+            </mc:Choice>
+            <mc:Fallback xmlns="">
+              <p:sp>
+                <p:nvSpPr>
+                  <p:cNvPr id="23" name="文字方塊 22">
+                    <a:extLst>
+                      <a:ext uri="{FF2B5EF4-FFF2-40B4-BE49-F238E27FC236}">
+                        <a16:creationId xmlns:a16="http://schemas.microsoft.com/office/drawing/2014/main" id="{4A972CE0-B624-471F-AEE8-237ADA8C4A64}"/>
+                      </a:ext>
+                    </a:extLst>
+                  </p:cNvPr>
+                  <p:cNvSpPr txBox="1">
+                    <a:spLocks noRot="1" noChangeAspect="1" noMove="1" noResize="1" noEditPoints="1" noAdjustHandles="1" noChangeArrowheads="1" noChangeShapeType="1" noTextEdit="1"/>
+                  </p:cNvSpPr>
+                  <p:nvPr/>
+                </p:nvSpPr>
+                <p:spPr>
+                  <a:xfrm>
+                    <a:off x="6009049" y="1044766"/>
+                    <a:ext cx="500693" cy="423283"/>
+                  </a:xfrm>
+                  <a:prstGeom prst="rect">
+                    <a:avLst/>
+                  </a:prstGeom>
+                  <a:blipFill>
+                    <a:blip r:embed="rId6"/>
+                    <a:stretch>
+                      <a:fillRect/>
+                    </a:stretch>
+                  </a:blipFill>
+                </p:spPr>
+                <p:txBody>
+                  <a:bodyPr/>
+                  <a:lstStyle/>
+                  <a:p>
+                    <a:r>
+                      <a:rPr lang="zh-TW" altLang="en-US">
+                        <a:noFill/>
+                      </a:rPr>
+                      <a:t> </a:t>
+                    </a:r>
+                  </a:p>
+                </p:txBody>
+              </p:sp>
+            </mc:Fallback>
+          </mc:AlternateContent>
+          <mc:AlternateContent xmlns:mc="http://schemas.openxmlformats.org/markup-compatibility/2006" xmlns:a14="http://schemas.microsoft.com/office/drawing/2010/main">
+            <mc:Choice Requires="a14">
+              <p:sp>
+                <p:nvSpPr>
+                  <p:cNvPr id="24" name="文字方塊 23">
+                    <a:extLst>
+                      <a:ext uri="{FF2B5EF4-FFF2-40B4-BE49-F238E27FC236}">
+                        <a16:creationId xmlns:a16="http://schemas.microsoft.com/office/drawing/2014/main" id="{A5D18D05-50DF-4D1E-AAFB-B58A0119A134}"/>
+                      </a:ext>
+                    </a:extLst>
+                  </p:cNvPr>
+                  <p:cNvSpPr txBox="1"/>
+                  <p:nvPr/>
+                </p:nvSpPr>
+                <p:spPr>
+                  <a:xfrm>
+                    <a:off x="5551558" y="42452"/>
+                    <a:ext cx="500693" cy="423283"/>
+                  </a:xfrm>
+                  <a:prstGeom prst="rect">
+                    <a:avLst/>
+                  </a:prstGeom>
+                  <a:noFill/>
+                </p:spPr>
+                <p:txBody>
+                  <a:bodyPr wrap="square" rtlCol="0">
+                    <a:spAutoFit/>
+                  </a:bodyPr>
+                  <a:lstStyle/>
+                  <a:p>
+                    <a:pPr/>
+                    <a14:m>
+                      <m:oMathPara xmlns:m="http://schemas.openxmlformats.org/officeDocument/2006/math">
+                        <m:oMathParaPr>
+                          <m:jc m:val="centerGroup"/>
+                        </m:oMathParaPr>
+                        <m:oMath xmlns:m="http://schemas.openxmlformats.org/officeDocument/2006/math">
+                          <m:r>
+                            <a:rPr lang="en-US" altLang="zh-TW" sz="2000" i="1">
+                              <a:latin typeface="Cambria Math" panose="02040503050406030204" pitchFamily="18" charset="0"/>
+                            </a:rPr>
+                            <m:t>𝐾</m:t>
+                          </m:r>
+                          <m:r>
+                            <a:rPr lang="en-US" altLang="zh-TW" sz="2000" i="1">
+                              <a:latin typeface="Cambria Math" panose="02040503050406030204" pitchFamily="18" charset="0"/>
+                            </a:rPr>
+                            <m:t>’</m:t>
+                          </m:r>
+                        </m:oMath>
+                      </m:oMathPara>
+                    </a14:m>
+                    <a:endParaRPr lang="zh-TW" altLang="en-US" sz="2000" dirty="0">
+                      <a:latin typeface="Times New Roman" panose="02020603050405020304" pitchFamily="18" charset="0"/>
+                      <a:cs typeface="Times New Roman" panose="02020603050405020304" pitchFamily="18" charset="0"/>
+                    </a:endParaRPr>
+                  </a:p>
+                </p:txBody>
+              </p:sp>
+            </mc:Choice>
+            <mc:Fallback xmlns="">
+              <p:sp>
+                <p:nvSpPr>
+                  <p:cNvPr id="24" name="文字方塊 23">
+                    <a:extLst>
+                      <a:ext uri="{FF2B5EF4-FFF2-40B4-BE49-F238E27FC236}">
+                        <a16:creationId xmlns:a16="http://schemas.microsoft.com/office/drawing/2014/main" id="{A5D18D05-50DF-4D1E-AAFB-B58A0119A134}"/>
+                      </a:ext>
+                    </a:extLst>
+                  </p:cNvPr>
+                  <p:cNvSpPr txBox="1">
+                    <a:spLocks noRot="1" noChangeAspect="1" noMove="1" noResize="1" noEditPoints="1" noAdjustHandles="1" noChangeArrowheads="1" noChangeShapeType="1" noTextEdit="1"/>
+                  </p:cNvSpPr>
+                  <p:nvPr/>
+                </p:nvSpPr>
+                <p:spPr>
+                  <a:xfrm>
+                    <a:off x="5551558" y="42452"/>
+                    <a:ext cx="500693" cy="423283"/>
+                  </a:xfrm>
+                  <a:prstGeom prst="rect">
+                    <a:avLst/>
+                  </a:prstGeom>
+                  <a:blipFill>
+                    <a:blip r:embed="rId7"/>
+                    <a:stretch>
+                      <a:fillRect/>
+                    </a:stretch>
+                  </a:blipFill>
+                </p:spPr>
+                <p:txBody>
+                  <a:bodyPr/>
+                  <a:lstStyle/>
+                  <a:p>
+                    <a:r>
+                      <a:rPr lang="zh-TW" altLang="en-US">
+                        <a:noFill/>
+                      </a:rPr>
+                      <a:t> </a:t>
+                    </a:r>
+                  </a:p>
+                </p:txBody>
+              </p:sp>
+            </mc:Fallback>
+          </mc:AlternateContent>
+          <mc:AlternateContent xmlns:mc="http://schemas.openxmlformats.org/markup-compatibility/2006" xmlns:a14="http://schemas.microsoft.com/office/drawing/2010/main">
+            <mc:Choice Requires="a14">
+              <p:sp>
+                <p:nvSpPr>
+                  <p:cNvPr id="25" name="文字方塊 24">
+                    <a:extLst>
+                      <a:ext uri="{FF2B5EF4-FFF2-40B4-BE49-F238E27FC236}">
+                        <a16:creationId xmlns:a16="http://schemas.microsoft.com/office/drawing/2014/main" id="{9889234A-4146-4DFD-A384-1D93E5EBD06B}"/>
+                      </a:ext>
+                    </a:extLst>
+                  </p:cNvPr>
+                  <p:cNvSpPr txBox="1"/>
+                  <p:nvPr/>
+                </p:nvSpPr>
+                <p:spPr>
+                  <a:xfrm>
+                    <a:off x="5830031" y="479919"/>
+                    <a:ext cx="500693" cy="423283"/>
+                  </a:xfrm>
+                  <a:prstGeom prst="rect">
+                    <a:avLst/>
+                  </a:prstGeom>
+                  <a:noFill/>
+                </p:spPr>
+                <p:txBody>
+                  <a:bodyPr wrap="square" rtlCol="0">
+                    <a:spAutoFit/>
+                  </a:bodyPr>
+                  <a:lstStyle/>
+                  <a:p>
+                    <a:pPr/>
+                    <a14:m>
+                      <m:oMathPara xmlns:m="http://schemas.openxmlformats.org/officeDocument/2006/math">
+                        <m:oMathParaPr>
+                          <m:jc m:val="centerGroup"/>
+                        </m:oMathParaPr>
+                        <m:oMath xmlns:m="http://schemas.openxmlformats.org/officeDocument/2006/math">
+                          <m:r>
+                            <a:rPr lang="en-US" altLang="zh-TW" sz="2000" i="1">
+                              <a:latin typeface="Cambria Math" panose="02040503050406030204" pitchFamily="18" charset="0"/>
+                            </a:rPr>
+                            <m:t>𝑀</m:t>
+                          </m:r>
+                        </m:oMath>
+                      </m:oMathPara>
+                    </a14:m>
+                    <a:endParaRPr lang="zh-TW" altLang="en-US" sz="2000" dirty="0">
+                      <a:latin typeface="Times New Roman" panose="02020603050405020304" pitchFamily="18" charset="0"/>
+                      <a:cs typeface="Times New Roman" panose="02020603050405020304" pitchFamily="18" charset="0"/>
+                    </a:endParaRPr>
+                  </a:p>
+                </p:txBody>
+              </p:sp>
+            </mc:Choice>
+            <mc:Fallback xmlns="">
+              <p:sp>
+                <p:nvSpPr>
+                  <p:cNvPr id="25" name="文字方塊 24">
+                    <a:extLst>
+                      <a:ext uri="{FF2B5EF4-FFF2-40B4-BE49-F238E27FC236}">
+                        <a16:creationId xmlns:a16="http://schemas.microsoft.com/office/drawing/2014/main" id="{9889234A-4146-4DFD-A384-1D93E5EBD06B}"/>
+                      </a:ext>
+                    </a:extLst>
+                  </p:cNvPr>
+                  <p:cNvSpPr txBox="1">
+                    <a:spLocks noRot="1" noChangeAspect="1" noMove="1" noResize="1" noEditPoints="1" noAdjustHandles="1" noChangeArrowheads="1" noChangeShapeType="1" noTextEdit="1"/>
+                  </p:cNvSpPr>
+                  <p:nvPr/>
+                </p:nvSpPr>
+                <p:spPr>
+                  <a:xfrm>
+                    <a:off x="5830031" y="479919"/>
+                    <a:ext cx="500693" cy="423283"/>
+                  </a:xfrm>
+                  <a:prstGeom prst="rect">
+                    <a:avLst/>
+                  </a:prstGeom>
+                  <a:blipFill>
+                    <a:blip r:embed="rId8"/>
+                    <a:stretch>
+                      <a:fillRect/>
+                    </a:stretch>
+                  </a:blipFill>
+                </p:spPr>
+                <p:txBody>
+                  <a:bodyPr/>
+                  <a:lstStyle/>
+                  <a:p>
+                    <a:r>
+                      <a:rPr lang="zh-TW" altLang="en-US">
+                        <a:noFill/>
+                      </a:rPr>
+                      <a:t> </a:t>
+                    </a:r>
+                  </a:p>
+                </p:txBody>
+              </p:sp>
+            </mc:Fallback>
+          </mc:AlternateContent>
+          <p:sp>
+            <p:nvSpPr>
+              <p:cNvPr id="26" name="橢圓 25">
+                <a:extLst>
+                  <a:ext uri="{FF2B5EF4-FFF2-40B4-BE49-F238E27FC236}">
+                    <a16:creationId xmlns:a16="http://schemas.microsoft.com/office/drawing/2014/main" id="{123D994E-8905-46CD-8FAE-24B0A3D5508E}"/>
+                  </a:ext>
+                </a:extLst>
+              </p:cNvPr>
+              <p:cNvSpPr/>
+              <p:nvPr/>
+            </p:nvSpPr>
+            <p:spPr>
+              <a:xfrm rot="1800318">
+                <a:off x="5704815" y="395314"/>
+                <a:ext cx="72000" cy="72000"/>
+              </a:xfrm>
+              <a:prstGeom prst="ellipse">
+                <a:avLst/>
+              </a:prstGeom>
+              <a:solidFill>
+                <a:schemeClr val="tx1"/>
+              </a:solidFill>
+              <a:ln w="6350">
+                <a:solidFill>
+                  <a:schemeClr val="tx1"/>
+                </a:solidFill>
+              </a:ln>
+            </p:spPr>
+            <p:style>
+              <a:lnRef idx="2">
+                <a:schemeClr val="dk1">
+                  <a:shade val="50000"/>
+                </a:schemeClr>
+              </a:lnRef>
+              <a:fillRef idx="1">
+                <a:schemeClr val="dk1"/>
+              </a:fillRef>
+              <a:effectRef idx="0">
+                <a:schemeClr val="dk1"/>
+              </a:effectRef>
+              <a:fontRef idx="minor">
+                <a:schemeClr val="lt1"/>
+              </a:fontRef>
+            </p:style>
+            <p:txBody>
+              <a:bodyPr rtlCol="0" anchor="ctr"/>
+              <a:lstStyle/>
+              <a:p>
+                <a:pPr algn="ctr"/>
+                <a:endParaRPr lang="zh-TW" altLang="en-US" sz="2000" dirty="0">
+                  <a:latin typeface="Times New Roman" panose="02020603050405020304" pitchFamily="18" charset="0"/>
+                  <a:cs typeface="Times New Roman" panose="02020603050405020304" pitchFamily="18" charset="0"/>
+                </a:endParaRPr>
+              </a:p>
+            </p:txBody>
+          </p:sp>
+          <p:sp>
+            <p:nvSpPr>
+              <p:cNvPr id="27" name="橢圓 26">
+                <a:extLst>
+                  <a:ext uri="{FF2B5EF4-FFF2-40B4-BE49-F238E27FC236}">
+                    <a16:creationId xmlns:a16="http://schemas.microsoft.com/office/drawing/2014/main" id="{9FDB16D7-52BC-493A-B1B4-54F5D3236A58}"/>
+                  </a:ext>
+                </a:extLst>
+              </p:cNvPr>
+              <p:cNvSpPr/>
+              <p:nvPr/>
+            </p:nvSpPr>
+            <p:spPr>
+              <a:xfrm rot="1800318">
+                <a:off x="6073550" y="1034866"/>
+                <a:ext cx="72000" cy="72000"/>
+              </a:xfrm>
+              <a:prstGeom prst="ellipse">
+                <a:avLst/>
+              </a:prstGeom>
+              <a:solidFill>
+                <a:schemeClr val="tx1"/>
+              </a:solidFill>
+              <a:ln w="6350">
+                <a:solidFill>
+                  <a:schemeClr val="tx1"/>
+                </a:solidFill>
+              </a:ln>
+            </p:spPr>
+            <p:style>
+              <a:lnRef idx="2">
+                <a:schemeClr val="dk1">
+                  <a:shade val="50000"/>
+                </a:schemeClr>
+              </a:lnRef>
+              <a:fillRef idx="1">
+                <a:schemeClr val="dk1"/>
+              </a:fillRef>
+              <a:effectRef idx="0">
+                <a:schemeClr val="dk1"/>
+              </a:effectRef>
+              <a:fontRef idx="minor">
+                <a:schemeClr val="lt1"/>
+              </a:fontRef>
+            </p:style>
+            <p:txBody>
+              <a:bodyPr rtlCol="0" anchor="ctr"/>
+              <a:lstStyle/>
+              <a:p>
+                <a:pPr algn="ctr"/>
+                <a:endParaRPr lang="zh-TW" altLang="en-US" sz="2000" dirty="0">
+                  <a:latin typeface="Times New Roman" panose="02020603050405020304" pitchFamily="18" charset="0"/>
+                  <a:cs typeface="Times New Roman" panose="02020603050405020304" pitchFamily="18" charset="0"/>
+                </a:endParaRPr>
+              </a:p>
+            </p:txBody>
+          </p:sp>
+          <mc:AlternateContent xmlns:mc="http://schemas.openxmlformats.org/markup-compatibility/2006" xmlns:a14="http://schemas.microsoft.com/office/drawing/2010/main">
+            <mc:Choice Requires="a14">
+              <p:sp>
+                <p:nvSpPr>
+                  <p:cNvPr id="28" name="文字方塊 27">
+                    <a:extLst>
+                      <a:ext uri="{FF2B5EF4-FFF2-40B4-BE49-F238E27FC236}">
+                        <a16:creationId xmlns:a16="http://schemas.microsoft.com/office/drawing/2014/main" id="{283E8ED5-0F51-4EE2-9FDC-01B1883EA98B}"/>
+                      </a:ext>
+                    </a:extLst>
+                  </p:cNvPr>
+                  <p:cNvSpPr txBox="1"/>
+                  <p:nvPr/>
+                </p:nvSpPr>
+                <p:spPr>
+                  <a:xfrm>
+                    <a:off x="4942271" y="1044766"/>
+                    <a:ext cx="500693" cy="423283"/>
+                  </a:xfrm>
+                  <a:prstGeom prst="rect">
+                    <a:avLst/>
+                  </a:prstGeom>
+                  <a:noFill/>
+                </p:spPr>
+                <p:txBody>
+                  <a:bodyPr wrap="square" rtlCol="0">
+                    <a:spAutoFit/>
+                  </a:bodyPr>
+                  <a:lstStyle/>
+                  <a:p>
+                    <a:pPr/>
+                    <a14:m>
+                      <m:oMathPara xmlns:m="http://schemas.openxmlformats.org/officeDocument/2006/math">
+                        <m:oMathParaPr>
+                          <m:jc m:val="centerGroup"/>
+                        </m:oMathParaPr>
+                        <m:oMath xmlns:m="http://schemas.openxmlformats.org/officeDocument/2006/math">
+                          <m:r>
+                            <m:rPr>
+                              <m:sty m:val="p"/>
+                            </m:rPr>
+                            <a:rPr lang="en-US" altLang="zh-TW" sz="2000">
+                              <a:latin typeface="Cambria Math" panose="02040503050406030204" pitchFamily="18" charset="0"/>
+                            </a:rPr>
+                            <m:t>Γ</m:t>
+                          </m:r>
+                        </m:oMath>
+                      </m:oMathPara>
+                    </a14:m>
+                    <a:endParaRPr lang="zh-TW" altLang="en-US" sz="2000" dirty="0">
+                      <a:latin typeface="Times New Roman" panose="02020603050405020304" pitchFamily="18" charset="0"/>
+                      <a:cs typeface="Times New Roman" panose="02020603050405020304" pitchFamily="18" charset="0"/>
+                    </a:endParaRPr>
+                  </a:p>
+                </p:txBody>
+              </p:sp>
+            </mc:Choice>
+            <mc:Fallback xmlns="">
+              <p:sp>
+                <p:nvSpPr>
+                  <p:cNvPr id="28" name="文字方塊 27">
+                    <a:extLst>
+                      <a:ext uri="{FF2B5EF4-FFF2-40B4-BE49-F238E27FC236}">
+                        <a16:creationId xmlns:a16="http://schemas.microsoft.com/office/drawing/2014/main" id="{283E8ED5-0F51-4EE2-9FDC-01B1883EA98B}"/>
+                      </a:ext>
+                    </a:extLst>
+                  </p:cNvPr>
+                  <p:cNvSpPr txBox="1">
+                    <a:spLocks noRot="1" noChangeAspect="1" noMove="1" noResize="1" noEditPoints="1" noAdjustHandles="1" noChangeArrowheads="1" noChangeShapeType="1" noTextEdit="1"/>
+                  </p:cNvSpPr>
+                  <p:nvPr/>
+                </p:nvSpPr>
+                <p:spPr>
+                  <a:xfrm>
+                    <a:off x="4942271" y="1044766"/>
+                    <a:ext cx="500693" cy="423283"/>
+                  </a:xfrm>
+                  <a:prstGeom prst="rect">
+                    <a:avLst/>
+                  </a:prstGeom>
+                  <a:blipFill>
+                    <a:blip r:embed="rId9"/>
+                    <a:stretch>
+                      <a:fillRect/>
+                    </a:stretch>
+                  </a:blipFill>
+                </p:spPr>
+                <p:txBody>
+                  <a:bodyPr/>
+                  <a:lstStyle/>
+                  <a:p>
+                    <a:r>
+                      <a:rPr lang="zh-TW" altLang="en-US">
+                        <a:noFill/>
+                      </a:rPr>
+                      <a:t> </a:t>
+                    </a:r>
+                  </a:p>
+                </p:txBody>
+              </p:sp>
+            </mc:Fallback>
+          </mc:AlternateContent>
+          <p:sp>
+            <p:nvSpPr>
+              <p:cNvPr id="29" name="橢圓 28">
+                <a:extLst>
+                  <a:ext uri="{FF2B5EF4-FFF2-40B4-BE49-F238E27FC236}">
+                    <a16:creationId xmlns:a16="http://schemas.microsoft.com/office/drawing/2014/main" id="{4305C0AF-4D0C-479E-BADB-A00EC0C525F7}"/>
+                  </a:ext>
+                </a:extLst>
+              </p:cNvPr>
+              <p:cNvSpPr/>
+              <p:nvPr/>
+            </p:nvSpPr>
+            <p:spPr>
+              <a:xfrm rot="1800318">
+                <a:off x="5889183" y="715090"/>
+                <a:ext cx="72000" cy="72000"/>
+              </a:xfrm>
+              <a:prstGeom prst="ellipse">
+                <a:avLst/>
+              </a:prstGeom>
+              <a:solidFill>
+                <a:schemeClr val="tx1"/>
+              </a:solidFill>
+              <a:ln w="6350">
+                <a:solidFill>
+                  <a:schemeClr val="tx1"/>
+                </a:solidFill>
+              </a:ln>
+            </p:spPr>
+            <p:style>
+              <a:lnRef idx="2">
+                <a:schemeClr val="dk1">
+                  <a:shade val="50000"/>
+                </a:schemeClr>
+              </a:lnRef>
+              <a:fillRef idx="1">
+                <a:schemeClr val="dk1"/>
+              </a:fillRef>
+              <a:effectRef idx="0">
+                <a:schemeClr val="dk1"/>
+              </a:effectRef>
+              <a:fontRef idx="minor">
+                <a:schemeClr val="lt1"/>
+              </a:fontRef>
+            </p:style>
+            <p:txBody>
+              <a:bodyPr rtlCol="0" anchor="ctr"/>
+              <a:lstStyle/>
+              <a:p>
+                <a:pPr algn="ctr"/>
+                <a:endParaRPr lang="zh-TW" altLang="en-US" sz="2000" dirty="0">
+                  <a:latin typeface="Times New Roman" panose="02020603050405020304" pitchFamily="18" charset="0"/>
+                  <a:cs typeface="Times New Roman" panose="02020603050405020304" pitchFamily="18" charset="0"/>
+                </a:endParaRPr>
+              </a:p>
+            </p:txBody>
+          </p:sp>
+          <p:sp>
+            <p:nvSpPr>
+              <p:cNvPr id="30" name="橢圓 29">
+                <a:extLst>
+                  <a:ext uri="{FF2B5EF4-FFF2-40B4-BE49-F238E27FC236}">
+                    <a16:creationId xmlns:a16="http://schemas.microsoft.com/office/drawing/2014/main" id="{83BDADA2-A496-476E-A8BC-AD2B3166E19F}"/>
+                  </a:ext>
+                </a:extLst>
+              </p:cNvPr>
+              <p:cNvSpPr/>
+              <p:nvPr/>
+            </p:nvSpPr>
+            <p:spPr>
+              <a:xfrm rot="1800318">
+                <a:off x="5336079" y="1034866"/>
+                <a:ext cx="72000" cy="72000"/>
+              </a:xfrm>
+              <a:prstGeom prst="ellipse">
+                <a:avLst/>
+              </a:prstGeom>
+              <a:solidFill>
+                <a:schemeClr val="tx1"/>
+              </a:solidFill>
+              <a:ln w="6350">
+                <a:solidFill>
+                  <a:schemeClr val="tx1"/>
+                </a:solidFill>
+              </a:ln>
+            </p:spPr>
+            <p:style>
+              <a:lnRef idx="2">
+                <a:schemeClr val="dk1">
+                  <a:shade val="50000"/>
+                </a:schemeClr>
+              </a:lnRef>
+              <a:fillRef idx="1">
+                <a:schemeClr val="dk1"/>
+              </a:fillRef>
+              <a:effectRef idx="0">
+                <a:schemeClr val="dk1"/>
+              </a:effectRef>
+              <a:fontRef idx="minor">
+                <a:schemeClr val="lt1"/>
+              </a:fontRef>
+            </p:style>
+            <p:txBody>
+              <a:bodyPr rtlCol="0" anchor="ctr"/>
+              <a:lstStyle/>
+              <a:p>
+                <a:pPr algn="ctr"/>
+                <a:endParaRPr lang="zh-TW" altLang="en-US" sz="2000" dirty="0">
+                  <a:latin typeface="Times New Roman" panose="02020603050405020304" pitchFamily="18" charset="0"/>
+                  <a:cs typeface="Times New Roman" panose="02020603050405020304" pitchFamily="18" charset="0"/>
+                </a:endParaRPr>
+              </a:p>
+            </p:txBody>
+          </p:sp>
+          <p:sp>
+            <p:nvSpPr>
+              <p:cNvPr id="31" name="橢圓 30">
+                <a:extLst>
+                  <a:ext uri="{FF2B5EF4-FFF2-40B4-BE49-F238E27FC236}">
+                    <a16:creationId xmlns:a16="http://schemas.microsoft.com/office/drawing/2014/main" id="{439E7B51-CDCD-4B79-8B92-358AA3EAEF51}"/>
+                  </a:ext>
+                </a:extLst>
+              </p:cNvPr>
+              <p:cNvSpPr/>
+              <p:nvPr/>
+            </p:nvSpPr>
+            <p:spPr>
+              <a:xfrm rot="1800318">
+                <a:off x="5520447" y="715905"/>
+                <a:ext cx="72000" cy="72000"/>
+              </a:xfrm>
+              <a:prstGeom prst="ellipse">
+                <a:avLst/>
+              </a:prstGeom>
+              <a:solidFill>
+                <a:schemeClr val="tx1"/>
+              </a:solidFill>
+              <a:ln w="6350">
+                <a:solidFill>
+                  <a:schemeClr val="tx1"/>
+                </a:solidFill>
+              </a:ln>
+            </p:spPr>
+            <p:style>
+              <a:lnRef idx="2">
+                <a:schemeClr val="dk1">
+                  <a:shade val="50000"/>
+                </a:schemeClr>
+              </a:lnRef>
+              <a:fillRef idx="1">
+                <a:schemeClr val="dk1"/>
+              </a:fillRef>
+              <a:effectRef idx="0">
+                <a:schemeClr val="dk1"/>
+              </a:effectRef>
+              <a:fontRef idx="minor">
+                <a:schemeClr val="lt1"/>
+              </a:fontRef>
+            </p:style>
+            <p:txBody>
+              <a:bodyPr rtlCol="0" anchor="ctr"/>
+              <a:lstStyle/>
+              <a:p>
+                <a:pPr algn="ctr"/>
+                <a:endParaRPr lang="zh-TW" altLang="en-US" sz="2000" dirty="0">
+                  <a:latin typeface="Times New Roman" panose="02020603050405020304" pitchFamily="18" charset="0"/>
+                  <a:cs typeface="Times New Roman" panose="02020603050405020304" pitchFamily="18" charset="0"/>
+                </a:endParaRPr>
+              </a:p>
+            </p:txBody>
+          </p:sp>
+          <p:sp>
+            <p:nvSpPr>
+              <p:cNvPr id="32" name="橢圓 31">
+                <a:extLst>
+                  <a:ext uri="{FF2B5EF4-FFF2-40B4-BE49-F238E27FC236}">
+                    <a16:creationId xmlns:a16="http://schemas.microsoft.com/office/drawing/2014/main" id="{14C492AD-7AB9-49BB-A7CA-6E2AAF76DFD2}"/>
+                  </a:ext>
+                </a:extLst>
+              </p:cNvPr>
+              <p:cNvSpPr/>
+              <p:nvPr/>
+            </p:nvSpPr>
+            <p:spPr>
+              <a:xfrm rot="1800318">
+                <a:off x="5704815" y="1034866"/>
+                <a:ext cx="72000" cy="72000"/>
+              </a:xfrm>
+              <a:prstGeom prst="ellipse">
+                <a:avLst/>
+              </a:prstGeom>
+              <a:solidFill>
+                <a:schemeClr val="tx1"/>
+              </a:solidFill>
+              <a:ln w="6350">
+                <a:solidFill>
+                  <a:schemeClr val="tx1"/>
+                </a:solidFill>
+              </a:ln>
+            </p:spPr>
+            <p:style>
+              <a:lnRef idx="2">
+                <a:schemeClr val="dk1">
+                  <a:shade val="50000"/>
+                </a:schemeClr>
+              </a:lnRef>
+              <a:fillRef idx="1">
+                <a:schemeClr val="dk1"/>
+              </a:fillRef>
+              <a:effectRef idx="0">
+                <a:schemeClr val="dk1"/>
+              </a:effectRef>
+              <a:fontRef idx="minor">
+                <a:schemeClr val="lt1"/>
+              </a:fontRef>
+            </p:style>
+            <p:txBody>
+              <a:bodyPr rtlCol="0" anchor="ctr"/>
+              <a:lstStyle/>
+              <a:p>
+                <a:pPr algn="ctr"/>
+                <a:endParaRPr lang="zh-TW" altLang="en-US" sz="2000" dirty="0">
+                  <a:latin typeface="Times New Roman" panose="02020603050405020304" pitchFamily="18" charset="0"/>
+                  <a:cs typeface="Times New Roman" panose="02020603050405020304" pitchFamily="18" charset="0"/>
+                </a:endParaRPr>
+              </a:p>
+            </p:txBody>
+          </p:sp>
+          <mc:AlternateContent xmlns:mc="http://schemas.openxmlformats.org/markup-compatibility/2006" xmlns:a14="http://schemas.microsoft.com/office/drawing/2010/main">
+            <mc:Choice Requires="a14">
+              <p:sp>
+                <p:nvSpPr>
+                  <p:cNvPr id="33" name="文字方塊 32">
+                    <a:extLst>
+                      <a:ext uri="{FF2B5EF4-FFF2-40B4-BE49-F238E27FC236}">
+                        <a16:creationId xmlns:a16="http://schemas.microsoft.com/office/drawing/2014/main" id="{5749DBA2-3861-4B36-B154-DD4BD215C4D4}"/>
+                      </a:ext>
+                    </a:extLst>
+                  </p:cNvPr>
+                  <p:cNvSpPr txBox="1"/>
+                  <p:nvPr/>
+                </p:nvSpPr>
+                <p:spPr>
+                  <a:xfrm>
+                    <a:off x="5177253" y="479919"/>
+                    <a:ext cx="500693" cy="423283"/>
+                  </a:xfrm>
+                  <a:prstGeom prst="rect">
+                    <a:avLst/>
+                  </a:prstGeom>
+                  <a:noFill/>
+                </p:spPr>
+                <p:txBody>
+                  <a:bodyPr wrap="square" rtlCol="0">
+                    <a:spAutoFit/>
+                  </a:bodyPr>
+                  <a:lstStyle/>
+                  <a:p>
+                    <a:pPr/>
+                    <a14:m>
+                      <m:oMathPara xmlns:m="http://schemas.openxmlformats.org/officeDocument/2006/math">
+                        <m:oMathParaPr>
+                          <m:jc m:val="centerGroup"/>
+                        </m:oMathParaPr>
+                        <m:oMath xmlns:m="http://schemas.openxmlformats.org/officeDocument/2006/math">
+                          <m:r>
+                            <a:rPr lang="en-US" altLang="zh-TW" sz="2000" i="1">
+                              <a:latin typeface="Cambria Math" panose="02040503050406030204" pitchFamily="18" charset="0"/>
+                            </a:rPr>
+                            <m:t>𝑄</m:t>
+                          </m:r>
+                          <m:r>
+                            <a:rPr lang="en-US" altLang="zh-TW" sz="2000" i="1">
+                              <a:latin typeface="Cambria Math" panose="02040503050406030204" pitchFamily="18" charset="0"/>
+                            </a:rPr>
+                            <m:t>’</m:t>
+                          </m:r>
+                        </m:oMath>
+                      </m:oMathPara>
+                    </a14:m>
+                    <a:endParaRPr lang="zh-TW" altLang="en-US" sz="2000" dirty="0">
+                      <a:latin typeface="Times New Roman" panose="02020603050405020304" pitchFamily="18" charset="0"/>
+                      <a:cs typeface="Times New Roman" panose="02020603050405020304" pitchFamily="18" charset="0"/>
+                    </a:endParaRPr>
+                  </a:p>
+                </p:txBody>
+              </p:sp>
+            </mc:Choice>
+            <mc:Fallback xmlns="">
+              <p:sp>
+                <p:nvSpPr>
+                  <p:cNvPr id="33" name="文字方塊 32">
+                    <a:extLst>
+                      <a:ext uri="{FF2B5EF4-FFF2-40B4-BE49-F238E27FC236}">
+                        <a16:creationId xmlns:a16="http://schemas.microsoft.com/office/drawing/2014/main" id="{5749DBA2-3861-4B36-B154-DD4BD215C4D4}"/>
+                      </a:ext>
+                    </a:extLst>
+                  </p:cNvPr>
+                  <p:cNvSpPr txBox="1">
+                    <a:spLocks noRot="1" noChangeAspect="1" noMove="1" noResize="1" noEditPoints="1" noAdjustHandles="1" noChangeArrowheads="1" noChangeShapeType="1" noTextEdit="1"/>
+                  </p:cNvSpPr>
+                  <p:nvPr/>
+                </p:nvSpPr>
+                <p:spPr>
+                  <a:xfrm>
+                    <a:off x="5177253" y="479919"/>
+                    <a:ext cx="500693" cy="423283"/>
+                  </a:xfrm>
+                  <a:prstGeom prst="rect">
+                    <a:avLst/>
+                  </a:prstGeom>
+                  <a:blipFill>
+                    <a:blip r:embed="rId10"/>
+                    <a:stretch>
+                      <a:fillRect b="-12308"/>
+                    </a:stretch>
+                  </a:blipFill>
+                </p:spPr>
+                <p:txBody>
+                  <a:bodyPr/>
+                  <a:lstStyle/>
+                  <a:p>
+                    <a:r>
+                      <a:rPr lang="zh-TW" altLang="en-US">
+                        <a:noFill/>
+                      </a:rPr>
+                      <a:t> </a:t>
+                    </a:r>
+                  </a:p>
+                </p:txBody>
+              </p:sp>
+            </mc:Fallback>
+          </mc:AlternateContent>
+          <mc:AlternateContent xmlns:mc="http://schemas.openxmlformats.org/markup-compatibility/2006" xmlns:a14="http://schemas.microsoft.com/office/drawing/2010/main">
+            <mc:Choice Requires="a14">
+              <p:sp>
+                <p:nvSpPr>
+                  <p:cNvPr id="34" name="文字方塊 33">
+                    <a:extLst>
+                      <a:ext uri="{FF2B5EF4-FFF2-40B4-BE49-F238E27FC236}">
+                        <a16:creationId xmlns:a16="http://schemas.microsoft.com/office/drawing/2014/main" id="{174AD440-EBE8-40B0-A2C0-B223506D29B0}"/>
+                      </a:ext>
+                    </a:extLst>
+                  </p:cNvPr>
+                  <p:cNvSpPr txBox="1"/>
+                  <p:nvPr/>
+                </p:nvSpPr>
+                <p:spPr>
+                  <a:xfrm>
+                    <a:off x="5510827" y="1044766"/>
+                    <a:ext cx="500693" cy="423283"/>
+                  </a:xfrm>
+                  <a:prstGeom prst="rect">
+                    <a:avLst/>
+                  </a:prstGeom>
+                  <a:noFill/>
+                </p:spPr>
+                <p:txBody>
+                  <a:bodyPr wrap="square" rtlCol="0">
+                    <a:spAutoFit/>
+                  </a:bodyPr>
+                  <a:lstStyle/>
+                  <a:p>
+                    <a:pPr/>
+                    <a14:m>
+                      <m:oMathPara xmlns:m="http://schemas.openxmlformats.org/officeDocument/2006/math">
+                        <m:oMathParaPr>
+                          <m:jc m:val="centerGroup"/>
+                        </m:oMathParaPr>
+                        <m:oMath xmlns:m="http://schemas.openxmlformats.org/officeDocument/2006/math">
+                          <m:r>
+                            <a:rPr lang="en-US" altLang="zh-TW" sz="2000" i="1">
+                              <a:latin typeface="Cambria Math" panose="02040503050406030204" pitchFamily="18" charset="0"/>
+                            </a:rPr>
+                            <m:t>𝑄</m:t>
+                          </m:r>
+                        </m:oMath>
+                      </m:oMathPara>
+                    </a14:m>
+                    <a:endParaRPr lang="zh-TW" altLang="en-US" sz="2000" dirty="0">
+                      <a:latin typeface="Times New Roman" panose="02020603050405020304" pitchFamily="18" charset="0"/>
+                      <a:cs typeface="Times New Roman" panose="02020603050405020304" pitchFamily="18" charset="0"/>
+                    </a:endParaRPr>
+                  </a:p>
+                </p:txBody>
+              </p:sp>
+            </mc:Choice>
+            <mc:Fallback xmlns="">
+              <p:sp>
+                <p:nvSpPr>
+                  <p:cNvPr id="34" name="文字方塊 33">
+                    <a:extLst>
+                      <a:ext uri="{FF2B5EF4-FFF2-40B4-BE49-F238E27FC236}">
+                        <a16:creationId xmlns:a16="http://schemas.microsoft.com/office/drawing/2014/main" id="{174AD440-EBE8-40B0-A2C0-B223506D29B0}"/>
+                      </a:ext>
+                    </a:extLst>
+                  </p:cNvPr>
+                  <p:cNvSpPr txBox="1">
+                    <a:spLocks noRot="1" noChangeAspect="1" noMove="1" noResize="1" noEditPoints="1" noAdjustHandles="1" noChangeArrowheads="1" noChangeShapeType="1" noTextEdit="1"/>
+                  </p:cNvSpPr>
+                  <p:nvPr/>
+                </p:nvSpPr>
+                <p:spPr>
+                  <a:xfrm>
+                    <a:off x="5510827" y="1044766"/>
+                    <a:ext cx="500693" cy="423283"/>
+                  </a:xfrm>
+                  <a:prstGeom prst="rect">
+                    <a:avLst/>
+                  </a:prstGeom>
+                  <a:blipFill>
+                    <a:blip r:embed="rId11"/>
+                    <a:stretch>
+                      <a:fillRect b="-10606"/>
+                    </a:stretch>
+                  </a:blipFill>
+                </p:spPr>
+                <p:txBody>
+                  <a:bodyPr/>
+                  <a:lstStyle/>
+                  <a:p>
+                    <a:r>
+                      <a:rPr lang="zh-TW" altLang="en-US">
+                        <a:noFill/>
+                      </a:rPr>
+                      <a:t> </a:t>
+                    </a:r>
+                  </a:p>
+                </p:txBody>
+              </p:sp>
+            </mc:Fallback>
+          </mc:AlternateContent>
+        </p:grpSp>
+        <p:grpSp>
+          <p:nvGrpSpPr>
+            <p:cNvPr id="79" name="群組 78">
+              <a:extLst>
+                <a:ext uri="{FF2B5EF4-FFF2-40B4-BE49-F238E27FC236}">
+                  <a16:creationId xmlns:a16="http://schemas.microsoft.com/office/drawing/2014/main" id="{E588A180-2FB7-4D06-B54F-8C8BE4B436B6}"/>
+                </a:ext>
+              </a:extLst>
+            </p:cNvPr>
+            <p:cNvGrpSpPr/>
+            <p:nvPr/>
+          </p:nvGrpSpPr>
+          <p:grpSpPr>
+            <a:xfrm>
+              <a:off x="6935613" y="4146186"/>
+              <a:ext cx="814086" cy="930772"/>
+              <a:chOff x="6095200" y="-97298"/>
+              <a:chExt cx="1153156" cy="1318443"/>
+            </a:xfrm>
+          </p:grpSpPr>
+          <mc:AlternateContent xmlns:mc="http://schemas.openxmlformats.org/markup-compatibility/2006" xmlns:a14="http://schemas.microsoft.com/office/drawing/2010/main">
+            <mc:Choice Requires="a14">
+              <p:sp>
+                <p:nvSpPr>
+                  <p:cNvPr id="85" name="文字方塊 84">
+                    <a:extLst>
+                      <a:ext uri="{FF2B5EF4-FFF2-40B4-BE49-F238E27FC236}">
+                        <a16:creationId xmlns:a16="http://schemas.microsoft.com/office/drawing/2014/main" id="{7F292124-D26C-4A4D-B471-6E640C42DA47}"/>
+                      </a:ext>
+                    </a:extLst>
+                  </p:cNvPr>
+                  <p:cNvSpPr txBox="1"/>
+                  <p:nvPr/>
+                </p:nvSpPr>
+                <p:spPr>
+                  <a:xfrm>
+                    <a:off x="6095200" y="654387"/>
+                    <a:ext cx="500693" cy="566758"/>
+                  </a:xfrm>
+                  <a:prstGeom prst="rect">
+                    <a:avLst/>
+                  </a:prstGeom>
+                  <a:noFill/>
+                </p:spPr>
+                <p:txBody>
+                  <a:bodyPr wrap="square" rtlCol="0">
+                    <a:spAutoFit/>
+                  </a:bodyPr>
+                  <a:lstStyle/>
+                  <a:p>
+                    <a:pPr/>
+                    <a14:m>
+                      <m:oMathPara xmlns:m="http://schemas.openxmlformats.org/officeDocument/2006/math">
+                        <m:oMathParaPr>
+                          <m:jc m:val="centerGroup"/>
+                        </m:oMathParaPr>
+                        <m:oMath xmlns:m="http://schemas.openxmlformats.org/officeDocument/2006/math">
+                          <m:sSub>
+                            <m:sSubPr>
+                              <m:ctrlPr>
+                                <a:rPr lang="en-US" altLang="zh-TW" sz="2000" i="1">
+                                  <a:latin typeface="Cambria Math" panose="02040503050406030204" pitchFamily="18" charset="0"/>
+                                </a:rPr>
+                              </m:ctrlPr>
+                            </m:sSubPr>
+                            <m:e>
+                              <m:r>
+                                <a:rPr lang="en-US" altLang="zh-TW" sz="2000" i="1">
+                                  <a:latin typeface="Cambria Math" panose="02040503050406030204" pitchFamily="18" charset="0"/>
+                                </a:rPr>
+                                <m:t>𝑘</m:t>
+                              </m:r>
+                            </m:e>
+                            <m:sub>
+                              <m:r>
+                                <a:rPr lang="en-US" altLang="zh-TW" sz="2000" i="1">
+                                  <a:latin typeface="Cambria Math" panose="02040503050406030204" pitchFamily="18" charset="0"/>
+                                </a:rPr>
+                                <m:t>𝑧</m:t>
+                              </m:r>
+                            </m:sub>
+                          </m:sSub>
+                        </m:oMath>
+                      </m:oMathPara>
+                    </a14:m>
+                    <a:endParaRPr lang="zh-TW" altLang="en-US" sz="2000" dirty="0">
+                      <a:latin typeface="Times New Roman" panose="02020603050405020304" pitchFamily="18" charset="0"/>
+                      <a:cs typeface="Times New Roman" panose="02020603050405020304" pitchFamily="18" charset="0"/>
+                    </a:endParaRPr>
+                  </a:p>
+                </p:txBody>
+              </p:sp>
+            </mc:Choice>
+            <mc:Fallback xmlns="">
+              <p:sp>
+                <p:nvSpPr>
+                  <p:cNvPr id="85" name="文字方塊 84">
+                    <a:extLst>
+                      <a:ext uri="{FF2B5EF4-FFF2-40B4-BE49-F238E27FC236}">
+                        <a16:creationId xmlns:a16="http://schemas.microsoft.com/office/drawing/2014/main" id="{7F292124-D26C-4A4D-B471-6E640C42DA47}"/>
+                      </a:ext>
+                    </a:extLst>
+                  </p:cNvPr>
+                  <p:cNvSpPr txBox="1">
+                    <a:spLocks noRot="1" noChangeAspect="1" noMove="1" noResize="1" noEditPoints="1" noAdjustHandles="1" noChangeArrowheads="1" noChangeShapeType="1" noTextEdit="1"/>
+                  </p:cNvSpPr>
+                  <p:nvPr/>
+                </p:nvSpPr>
+                <p:spPr>
+                  <a:xfrm>
+                    <a:off x="6095200" y="654387"/>
+                    <a:ext cx="500693" cy="566758"/>
+                  </a:xfrm>
+                  <a:prstGeom prst="rect">
+                    <a:avLst/>
+                  </a:prstGeom>
+                  <a:blipFill>
+                    <a:blip r:embed="rId12"/>
+                    <a:stretch>
+                      <a:fillRect r="-6897"/>
+                    </a:stretch>
+                  </a:blipFill>
+                </p:spPr>
+                <p:txBody>
+                  <a:bodyPr/>
+                  <a:lstStyle/>
+                  <a:p>
+                    <a:r>
+                      <a:rPr lang="zh-TW" altLang="en-US">
+                        <a:noFill/>
+                      </a:rPr>
+                      <a:t> </a:t>
+                    </a:r>
+                  </a:p>
+                </p:txBody>
+              </p:sp>
+            </mc:Fallback>
+          </mc:AlternateContent>
+          <p:cxnSp>
+            <p:nvCxnSpPr>
+              <p:cNvPr id="80" name="直線單箭頭接點 79">
+                <a:extLst>
+                  <a:ext uri="{FF2B5EF4-FFF2-40B4-BE49-F238E27FC236}">
+                    <a16:creationId xmlns:a16="http://schemas.microsoft.com/office/drawing/2014/main" id="{80C7D949-C218-4433-B52A-F2DE23D67403}"/>
+                  </a:ext>
+                </a:extLst>
+              </p:cNvPr>
+              <p:cNvCxnSpPr>
+                <a:cxnSpLocks/>
+              </p:cNvCxnSpPr>
+              <p:nvPr/>
+            </p:nvCxnSpPr>
+            <p:spPr>
+              <a:xfrm>
+                <a:off x="6502870" y="782175"/>
+                <a:ext cx="363442" cy="0"/>
+              </a:xfrm>
+              <a:prstGeom prst="straightConnector1">
+                <a:avLst/>
+              </a:prstGeom>
+              <a:solidFill>
+                <a:schemeClr val="bg1"/>
+              </a:solidFill>
+              <a:ln>
+                <a:tailEnd type="triangle"/>
+              </a:ln>
+            </p:spPr>
+            <p:style>
+              <a:lnRef idx="2">
+                <a:schemeClr val="dk1"/>
+              </a:lnRef>
+              <a:fillRef idx="0">
+                <a:schemeClr val="dk1"/>
+              </a:fillRef>
+              <a:effectRef idx="1">
+                <a:schemeClr val="dk1"/>
+              </a:effectRef>
+              <a:fontRef idx="minor">
+                <a:schemeClr val="tx1"/>
+              </a:fontRef>
+            </p:style>
+          </p:cxnSp>
+          <p:cxnSp>
+            <p:nvCxnSpPr>
+              <p:cNvPr id="81" name="直線單箭頭接點 80">
+                <a:extLst>
+                  <a:ext uri="{FF2B5EF4-FFF2-40B4-BE49-F238E27FC236}">
+                    <a16:creationId xmlns:a16="http://schemas.microsoft.com/office/drawing/2014/main" id="{DFD5C945-0593-467A-B538-CF53EC4B4390}"/>
+                  </a:ext>
+                </a:extLst>
+              </p:cNvPr>
+              <p:cNvCxnSpPr>
+                <a:cxnSpLocks/>
+              </p:cNvCxnSpPr>
+              <p:nvPr/>
+            </p:nvCxnSpPr>
+            <p:spPr>
+              <a:xfrm flipV="1">
+                <a:off x="6508390" y="432919"/>
+                <a:ext cx="0" cy="355792"/>
+              </a:xfrm>
+              <a:prstGeom prst="straightConnector1">
+                <a:avLst/>
+              </a:prstGeom>
+              <a:solidFill>
+                <a:schemeClr val="bg1"/>
+              </a:solidFill>
+              <a:ln>
+                <a:tailEnd type="triangle"/>
+              </a:ln>
+            </p:spPr>
+            <p:style>
+              <a:lnRef idx="2">
+                <a:schemeClr val="dk1"/>
+              </a:lnRef>
+              <a:fillRef idx="0">
+                <a:schemeClr val="dk1"/>
+              </a:fillRef>
+              <a:effectRef idx="1">
+                <a:schemeClr val="dk1"/>
+              </a:effectRef>
+              <a:fontRef idx="minor">
+                <a:schemeClr val="tx1"/>
+              </a:fontRef>
+            </p:style>
+          </p:cxnSp>
+          <mc:AlternateContent xmlns:mc="http://schemas.openxmlformats.org/markup-compatibility/2006" xmlns:a14="http://schemas.microsoft.com/office/drawing/2010/main">
+            <mc:Choice Requires="a14">
+              <p:sp>
+                <p:nvSpPr>
+                  <p:cNvPr id="82" name="文字方塊 81">
+                    <a:extLst>
+                      <a:ext uri="{FF2B5EF4-FFF2-40B4-BE49-F238E27FC236}">
+                        <a16:creationId xmlns:a16="http://schemas.microsoft.com/office/drawing/2014/main" id="{A85838C4-7CEB-42A7-9F9D-8F4611F3AD3B}"/>
+                      </a:ext>
+                    </a:extLst>
+                  </p:cNvPr>
+                  <p:cNvSpPr txBox="1"/>
+                  <p:nvPr/>
+                </p:nvSpPr>
+                <p:spPr>
+                  <a:xfrm>
+                    <a:off x="6747663" y="592474"/>
+                    <a:ext cx="500693" cy="566757"/>
+                  </a:xfrm>
+                  <a:prstGeom prst="rect">
+                    <a:avLst/>
+                  </a:prstGeom>
+                  <a:noFill/>
+                </p:spPr>
+                <p:txBody>
+                  <a:bodyPr wrap="square" rtlCol="0">
+                    <a:spAutoFit/>
+                  </a:bodyPr>
+                  <a:lstStyle/>
+                  <a:p>
+                    <a:pPr/>
+                    <a14:m>
+                      <m:oMathPara xmlns:m="http://schemas.openxmlformats.org/officeDocument/2006/math">
+                        <m:oMathParaPr>
+                          <m:jc m:val="centerGroup"/>
+                        </m:oMathParaPr>
+                        <m:oMath xmlns:m="http://schemas.openxmlformats.org/officeDocument/2006/math">
+                          <m:sSub>
+                            <m:sSubPr>
+                              <m:ctrlPr>
+                                <a:rPr lang="en-US" altLang="zh-TW" sz="2000" i="1">
+                                  <a:latin typeface="Cambria Math" panose="02040503050406030204" pitchFamily="18" charset="0"/>
+                                </a:rPr>
+                              </m:ctrlPr>
+                            </m:sSubPr>
+                            <m:e>
+                              <m:r>
+                                <a:rPr lang="en-US" altLang="zh-TW" sz="2000" i="1">
+                                  <a:latin typeface="Cambria Math" panose="02040503050406030204" pitchFamily="18" charset="0"/>
+                                </a:rPr>
+                                <m:t>𝑘</m:t>
+                              </m:r>
+                            </m:e>
+                            <m:sub>
+                              <m:r>
+                                <a:rPr lang="en-US" altLang="zh-TW" sz="2000" i="1">
+                                  <a:latin typeface="Cambria Math" panose="02040503050406030204" pitchFamily="18" charset="0"/>
+                                </a:rPr>
+                                <m:t>𝑥</m:t>
+                              </m:r>
+                            </m:sub>
+                          </m:sSub>
+                        </m:oMath>
+                      </m:oMathPara>
+                    </a14:m>
+                    <a:endParaRPr lang="zh-TW" altLang="en-US" sz="2000" dirty="0">
+                      <a:latin typeface="Times New Roman" panose="02020603050405020304" pitchFamily="18" charset="0"/>
+                      <a:cs typeface="Times New Roman" panose="02020603050405020304" pitchFamily="18" charset="0"/>
+                    </a:endParaRPr>
+                  </a:p>
+                </p:txBody>
+              </p:sp>
+            </mc:Choice>
+            <mc:Fallback xmlns="">
+              <p:sp>
+                <p:nvSpPr>
+                  <p:cNvPr id="82" name="文字方塊 81">
+                    <a:extLst>
+                      <a:ext uri="{FF2B5EF4-FFF2-40B4-BE49-F238E27FC236}">
+                        <a16:creationId xmlns:a16="http://schemas.microsoft.com/office/drawing/2014/main" id="{A85838C4-7CEB-42A7-9F9D-8F4611F3AD3B}"/>
+                      </a:ext>
+                    </a:extLst>
+                  </p:cNvPr>
+                  <p:cNvSpPr txBox="1">
+                    <a:spLocks noRot="1" noChangeAspect="1" noMove="1" noResize="1" noEditPoints="1" noAdjustHandles="1" noChangeArrowheads="1" noChangeShapeType="1" noTextEdit="1"/>
+                  </p:cNvSpPr>
+                  <p:nvPr/>
+                </p:nvSpPr>
+                <p:spPr>
+                  <a:xfrm>
+                    <a:off x="6747663" y="592474"/>
+                    <a:ext cx="500693" cy="566757"/>
+                  </a:xfrm>
+                  <a:prstGeom prst="rect">
+                    <a:avLst/>
+                  </a:prstGeom>
+                  <a:blipFill>
+                    <a:blip r:embed="rId13"/>
+                    <a:stretch>
+                      <a:fillRect r="-10345"/>
+                    </a:stretch>
+                  </a:blipFill>
+                </p:spPr>
+                <p:txBody>
+                  <a:bodyPr/>
+                  <a:lstStyle/>
+                  <a:p>
+                    <a:r>
+                      <a:rPr lang="zh-TW" altLang="en-US">
+                        <a:noFill/>
+                      </a:rPr>
+                      <a:t> </a:t>
+                    </a:r>
+                  </a:p>
+                </p:txBody>
+              </p:sp>
+            </mc:Fallback>
+          </mc:AlternateContent>
+          <mc:AlternateContent xmlns:mc="http://schemas.openxmlformats.org/markup-compatibility/2006" xmlns:a14="http://schemas.microsoft.com/office/drawing/2010/main">
+            <mc:Choice Requires="a14">
+              <p:sp>
+                <p:nvSpPr>
+                  <p:cNvPr id="83" name="文字方塊 82">
+                    <a:extLst>
+                      <a:ext uri="{FF2B5EF4-FFF2-40B4-BE49-F238E27FC236}">
+                        <a16:creationId xmlns:a16="http://schemas.microsoft.com/office/drawing/2014/main" id="{3519F496-065B-4C4E-8ED7-71C585DD926B}"/>
+                      </a:ext>
+                    </a:extLst>
+                  </p:cNvPr>
+                  <p:cNvSpPr txBox="1"/>
+                  <p:nvPr/>
+                </p:nvSpPr>
+                <p:spPr>
+                  <a:xfrm>
+                    <a:off x="6281528" y="-97298"/>
+                    <a:ext cx="500693" cy="600999"/>
+                  </a:xfrm>
+                  <a:prstGeom prst="rect">
+                    <a:avLst/>
+                  </a:prstGeom>
+                  <a:noFill/>
+                </p:spPr>
+                <p:txBody>
+                  <a:bodyPr wrap="square" rtlCol="0">
+                    <a:spAutoFit/>
+                  </a:bodyPr>
+                  <a:lstStyle/>
+                  <a:p>
+                    <a:pPr/>
+                    <a14:m>
+                      <m:oMathPara xmlns:m="http://schemas.openxmlformats.org/officeDocument/2006/math">
+                        <m:oMathParaPr>
+                          <m:jc m:val="centerGroup"/>
+                        </m:oMathParaPr>
+                        <m:oMath xmlns:m="http://schemas.openxmlformats.org/officeDocument/2006/math">
+                          <m:sSub>
+                            <m:sSubPr>
+                              <m:ctrlPr>
+                                <a:rPr lang="en-US" altLang="zh-TW" sz="2000" i="1">
+                                  <a:latin typeface="Cambria Math" panose="02040503050406030204" pitchFamily="18" charset="0"/>
+                                </a:rPr>
+                              </m:ctrlPr>
+                            </m:sSubPr>
+                            <m:e>
+                              <m:r>
+                                <a:rPr lang="en-US" altLang="zh-TW" sz="2000" i="1">
+                                  <a:latin typeface="Cambria Math" panose="02040503050406030204" pitchFamily="18" charset="0"/>
+                                </a:rPr>
+                                <m:t>𝑘</m:t>
+                              </m:r>
+                            </m:e>
+                            <m:sub>
+                              <m:r>
+                                <a:rPr lang="en-US" altLang="zh-TW" sz="2000" i="1">
+                                  <a:latin typeface="Cambria Math" panose="02040503050406030204" pitchFamily="18" charset="0"/>
+                                </a:rPr>
+                                <m:t>𝑦</m:t>
+                              </m:r>
+                            </m:sub>
+                          </m:sSub>
+                        </m:oMath>
+                      </m:oMathPara>
+                    </a14:m>
+                    <a:endParaRPr lang="zh-TW" altLang="en-US" sz="2000" dirty="0">
+                      <a:latin typeface="Times New Roman" panose="02020603050405020304" pitchFamily="18" charset="0"/>
+                      <a:cs typeface="Times New Roman" panose="02020603050405020304" pitchFamily="18" charset="0"/>
+                    </a:endParaRPr>
+                  </a:p>
+                </p:txBody>
+              </p:sp>
+            </mc:Choice>
+            <mc:Fallback xmlns="">
+              <p:sp>
+                <p:nvSpPr>
+                  <p:cNvPr id="83" name="文字方塊 82">
+                    <a:extLst>
+                      <a:ext uri="{FF2B5EF4-FFF2-40B4-BE49-F238E27FC236}">
+                        <a16:creationId xmlns:a16="http://schemas.microsoft.com/office/drawing/2014/main" id="{3519F496-065B-4C4E-8ED7-71C585DD926B}"/>
+                      </a:ext>
+                    </a:extLst>
+                  </p:cNvPr>
+                  <p:cNvSpPr txBox="1">
+                    <a:spLocks noRot="1" noChangeAspect="1" noMove="1" noResize="1" noEditPoints="1" noAdjustHandles="1" noChangeArrowheads="1" noChangeShapeType="1" noTextEdit="1"/>
+                  </p:cNvSpPr>
+                  <p:nvPr/>
+                </p:nvSpPr>
+                <p:spPr>
+                  <a:xfrm>
+                    <a:off x="6281528" y="-97298"/>
+                    <a:ext cx="500693" cy="600999"/>
+                  </a:xfrm>
+                  <a:prstGeom prst="rect">
+                    <a:avLst/>
+                  </a:prstGeom>
+                  <a:blipFill>
+                    <a:blip r:embed="rId14"/>
+                    <a:stretch>
+                      <a:fillRect r="-18966" b="-5714"/>
+                    </a:stretch>
+                  </a:blipFill>
+                </p:spPr>
+                <p:txBody>
+                  <a:bodyPr/>
+                  <a:lstStyle/>
+                  <a:p>
+                    <a:r>
+                      <a:rPr lang="zh-TW" altLang="en-US">
+                        <a:noFill/>
+                      </a:rPr>
+                      <a:t> </a:t>
+                    </a:r>
+                  </a:p>
+                </p:txBody>
+              </p:sp>
+            </mc:Fallback>
+          </mc:AlternateContent>
+          <p:grpSp>
+            <p:nvGrpSpPr>
+              <p:cNvPr id="84" name="群組 83">
+                <a:extLst>
+                  <a:ext uri="{FF2B5EF4-FFF2-40B4-BE49-F238E27FC236}">
+                    <a16:creationId xmlns:a16="http://schemas.microsoft.com/office/drawing/2014/main" id="{495DF09D-1858-4C50-8BC1-76A72A31389C}"/>
+                  </a:ext>
+                </a:extLst>
+              </p:cNvPr>
+              <p:cNvGrpSpPr/>
+              <p:nvPr/>
+            </p:nvGrpSpPr>
+            <p:grpSpPr>
+              <a:xfrm>
+                <a:off x="6436095" y="705414"/>
+                <a:ext cx="152982" cy="152983"/>
+                <a:chOff x="5737446" y="632449"/>
+                <a:chExt cx="1065551" cy="1065563"/>
+              </a:xfrm>
+            </p:grpSpPr>
+            <p:sp>
+              <p:nvSpPr>
+                <p:cNvPr id="86" name="圓形: 空心 85">
+                  <a:extLst>
+                    <a:ext uri="{FF2B5EF4-FFF2-40B4-BE49-F238E27FC236}">
+                      <a16:creationId xmlns:a16="http://schemas.microsoft.com/office/drawing/2014/main" id="{ACE52A13-FB9D-4060-9C97-8A67AFE54A4A}"/>
+                    </a:ext>
+                  </a:extLst>
+                </p:cNvPr>
+                <p:cNvSpPr/>
+                <p:nvPr/>
+              </p:nvSpPr>
+              <p:spPr>
+                <a:xfrm>
+                  <a:off x="5737446" y="632449"/>
+                  <a:ext cx="1065551" cy="1065563"/>
+                </a:xfrm>
+                <a:prstGeom prst="donut">
+                  <a:avLst>
+                    <a:gd name="adj" fmla="val 38442"/>
+                  </a:avLst>
+                </a:prstGeom>
+                <a:solidFill>
+                  <a:schemeClr val="bg1"/>
+                </a:solidFill>
+                <a:ln>
+                  <a:solidFill>
+                    <a:schemeClr val="tx1"/>
+                  </a:solidFill>
+                </a:ln>
+              </p:spPr>
+              <p:style>
+                <a:lnRef idx="2">
+                  <a:schemeClr val="accent1">
+                    <a:shade val="50000"/>
+                  </a:schemeClr>
+                </a:lnRef>
+                <a:fillRef idx="1">
+                  <a:schemeClr val="accent1"/>
+                </a:fillRef>
+                <a:effectRef idx="0">
+                  <a:schemeClr val="accent1"/>
+                </a:effectRef>
+                <a:fontRef idx="minor">
+                  <a:schemeClr val="lt1"/>
+                </a:fontRef>
+              </p:style>
+              <p:txBody>
+                <a:bodyPr rot="0" spcFirstLastPara="0" vertOverflow="overflow" horzOverflow="overflow" vert="horz" wrap="square" lIns="74295" tIns="37148" rIns="74295" bIns="37148" numCol="1" spcCol="0" rtlCol="0" fromWordArt="0" anchor="ctr" anchorCtr="0" forceAA="0" compatLnSpc="1">
+                  <a:prstTxWarp prst="textNoShape">
+                    <a:avLst/>
+                  </a:prstTxWarp>
+                  <a:noAutofit/>
+                </a:bodyPr>
+                <a:lstStyle/>
+                <a:p>
+                  <a:pPr algn="ctr"/>
+                  <a:endParaRPr lang="zh-TW" altLang="en-US" sz="2000" dirty="0">
+                    <a:solidFill>
+                      <a:schemeClr val="tx1"/>
+                    </a:solidFill>
+                    <a:latin typeface="Times New Roman" panose="02020603050405020304" pitchFamily="18" charset="0"/>
+                    <a:cs typeface="Times New Roman" panose="02020603050405020304" pitchFamily="18" charset="0"/>
+                  </a:endParaRPr>
+                </a:p>
+              </p:txBody>
+            </p:sp>
+            <p:sp>
+              <p:nvSpPr>
+                <p:cNvPr id="87" name="橢圓 86">
+                  <a:extLst>
+                    <a:ext uri="{FF2B5EF4-FFF2-40B4-BE49-F238E27FC236}">
+                      <a16:creationId xmlns:a16="http://schemas.microsoft.com/office/drawing/2014/main" id="{149EA94D-64FC-4D0B-8973-99184378A3FF}"/>
+                    </a:ext>
+                  </a:extLst>
+                </p:cNvPr>
+                <p:cNvSpPr/>
+                <p:nvPr/>
+              </p:nvSpPr>
+              <p:spPr>
+                <a:xfrm>
+                  <a:off x="6200578" y="1119065"/>
+                  <a:ext cx="131269" cy="131269"/>
+                </a:xfrm>
+                <a:prstGeom prst="ellipse">
+                  <a:avLst/>
+                </a:prstGeom>
+                <a:solidFill>
+                  <a:schemeClr val="tx1"/>
+                </a:solidFill>
+                <a:ln>
+                  <a:noFill/>
+                </a:ln>
+              </p:spPr>
+              <p:style>
+                <a:lnRef idx="2">
+                  <a:schemeClr val="accent1">
+                    <a:shade val="50000"/>
+                  </a:schemeClr>
+                </a:lnRef>
+                <a:fillRef idx="1">
+                  <a:schemeClr val="accent1"/>
+                </a:fillRef>
+                <a:effectRef idx="0">
+                  <a:schemeClr val="accent1"/>
+                </a:effectRef>
+                <a:fontRef idx="minor">
+                  <a:schemeClr val="lt1"/>
+                </a:fontRef>
+              </p:style>
+              <p:txBody>
+                <a:bodyPr rot="0" spcFirstLastPara="0" vertOverflow="overflow" horzOverflow="overflow" vert="horz" wrap="square" lIns="74295" tIns="37148" rIns="74295" bIns="37148" numCol="1" spcCol="0" rtlCol="0" fromWordArt="0" anchor="ctr" anchorCtr="0" forceAA="0" compatLnSpc="1">
+                  <a:prstTxWarp prst="textNoShape">
+                    <a:avLst/>
+                  </a:prstTxWarp>
+                  <a:noAutofit/>
+                </a:bodyPr>
+                <a:lstStyle/>
+                <a:p>
+                  <a:pPr algn="ctr"/>
+                  <a:endParaRPr lang="zh-TW" altLang="en-US" sz="2000">
+                    <a:latin typeface="Times New Roman" panose="02020603050405020304" pitchFamily="18" charset="0"/>
+                    <a:cs typeface="Times New Roman" panose="02020603050405020304" pitchFamily="18" charset="0"/>
+                  </a:endParaRPr>
+                </a:p>
+              </p:txBody>
+            </p:sp>
+          </p:grpSp>
+        </p:grpSp>
+        <p:grpSp>
+          <p:nvGrpSpPr>
+            <p:cNvPr id="66" name="群組 65">
+              <a:extLst>
+                <a:ext uri="{FF2B5EF4-FFF2-40B4-BE49-F238E27FC236}">
+                  <a16:creationId xmlns:a16="http://schemas.microsoft.com/office/drawing/2014/main" id="{D3C30B12-C841-478A-8023-FFA4E768F38A}"/>
+                </a:ext>
+              </a:extLst>
+            </p:cNvPr>
+            <p:cNvGrpSpPr/>
+            <p:nvPr/>
+          </p:nvGrpSpPr>
+          <p:grpSpPr>
+            <a:xfrm>
+              <a:off x="6935615" y="644199"/>
+              <a:ext cx="814087" cy="891542"/>
+              <a:chOff x="6095200" y="-41730"/>
+              <a:chExt cx="1153156" cy="1262874"/>
+            </a:xfrm>
+          </p:grpSpPr>
+          <mc:AlternateContent xmlns:mc="http://schemas.openxmlformats.org/markup-compatibility/2006" xmlns:a14="http://schemas.microsoft.com/office/drawing/2010/main">
+            <mc:Choice Requires="a14">
+              <p:sp>
+                <p:nvSpPr>
+                  <p:cNvPr id="72" name="文字方塊 71">
+                    <a:extLst>
+                      <a:ext uri="{FF2B5EF4-FFF2-40B4-BE49-F238E27FC236}">
+                        <a16:creationId xmlns:a16="http://schemas.microsoft.com/office/drawing/2014/main" id="{79885C87-960B-4533-8B78-16664E820A61}"/>
+                      </a:ext>
+                    </a:extLst>
+                  </p:cNvPr>
+                  <p:cNvSpPr txBox="1"/>
+                  <p:nvPr/>
+                </p:nvSpPr>
+                <p:spPr>
+                  <a:xfrm>
+                    <a:off x="6095200" y="654386"/>
+                    <a:ext cx="500693" cy="566758"/>
+                  </a:xfrm>
+                  <a:prstGeom prst="rect">
+                    <a:avLst/>
+                  </a:prstGeom>
+                  <a:noFill/>
+                </p:spPr>
+                <p:txBody>
+                  <a:bodyPr wrap="square" rtlCol="0">
+                    <a:spAutoFit/>
+                  </a:bodyPr>
+                  <a:lstStyle/>
+                  <a:p>
+                    <a:pPr/>
+                    <a14:m>
+                      <m:oMathPara xmlns:m="http://schemas.openxmlformats.org/officeDocument/2006/math">
+                        <m:oMathParaPr>
+                          <m:jc m:val="centerGroup"/>
+                        </m:oMathParaPr>
+                        <m:oMath xmlns:m="http://schemas.openxmlformats.org/officeDocument/2006/math">
+                          <m:r>
+                            <a:rPr lang="en-US" altLang="zh-TW" sz="2000" i="1">
+                              <a:latin typeface="Cambria Math" panose="02040503050406030204" pitchFamily="18" charset="0"/>
+                            </a:rPr>
+                            <m:t>𝑦</m:t>
+                          </m:r>
+                        </m:oMath>
+                      </m:oMathPara>
+                    </a14:m>
+                    <a:endParaRPr lang="zh-TW" altLang="en-US" sz="2000" dirty="0">
+                      <a:latin typeface="Times New Roman" panose="02020603050405020304" pitchFamily="18" charset="0"/>
+                      <a:cs typeface="Times New Roman" panose="02020603050405020304" pitchFamily="18" charset="0"/>
+                    </a:endParaRPr>
+                  </a:p>
+                </p:txBody>
+              </p:sp>
+            </mc:Choice>
+            <mc:Fallback xmlns="">
+              <p:sp>
+                <p:nvSpPr>
+                  <p:cNvPr id="72" name="文字方塊 71">
+                    <a:extLst>
+                      <a:ext uri="{FF2B5EF4-FFF2-40B4-BE49-F238E27FC236}">
+                        <a16:creationId xmlns:a16="http://schemas.microsoft.com/office/drawing/2014/main" id="{79885C87-960B-4533-8B78-16664E820A61}"/>
+                      </a:ext>
+                    </a:extLst>
+                  </p:cNvPr>
+                  <p:cNvSpPr txBox="1">
+                    <a:spLocks noRot="1" noChangeAspect="1" noMove="1" noResize="1" noEditPoints="1" noAdjustHandles="1" noChangeArrowheads="1" noChangeShapeType="1" noTextEdit="1"/>
+                  </p:cNvSpPr>
+                  <p:nvPr/>
+                </p:nvSpPr>
+                <p:spPr>
+                  <a:xfrm>
+                    <a:off x="6095200" y="654386"/>
+                    <a:ext cx="500693" cy="566758"/>
+                  </a:xfrm>
+                  <a:prstGeom prst="rect">
+                    <a:avLst/>
+                  </a:prstGeom>
+                  <a:blipFill>
+                    <a:blip r:embed="rId15"/>
+                    <a:stretch>
+                      <a:fillRect b="-9231"/>
+                    </a:stretch>
+                  </a:blipFill>
+                </p:spPr>
+                <p:txBody>
+                  <a:bodyPr/>
+                  <a:lstStyle/>
+                  <a:p>
+                    <a:r>
+                      <a:rPr lang="zh-TW" altLang="en-US">
+                        <a:noFill/>
+                      </a:rPr>
+                      <a:t> </a:t>
+                    </a:r>
+                  </a:p>
+                </p:txBody>
+              </p:sp>
+            </mc:Fallback>
+          </mc:AlternateContent>
+          <p:cxnSp>
+            <p:nvCxnSpPr>
+              <p:cNvPr id="67" name="直線單箭頭接點 66">
+                <a:extLst>
+                  <a:ext uri="{FF2B5EF4-FFF2-40B4-BE49-F238E27FC236}">
+                    <a16:creationId xmlns:a16="http://schemas.microsoft.com/office/drawing/2014/main" id="{89E15BBF-7670-4A3F-BADB-C7EFDDB3224E}"/>
+                  </a:ext>
+                </a:extLst>
+              </p:cNvPr>
+              <p:cNvCxnSpPr>
+                <a:cxnSpLocks/>
+              </p:cNvCxnSpPr>
+              <p:nvPr/>
+            </p:nvCxnSpPr>
+            <p:spPr>
+              <a:xfrm>
+                <a:off x="6502870" y="782175"/>
+                <a:ext cx="363442" cy="0"/>
+              </a:xfrm>
+              <a:prstGeom prst="straightConnector1">
+                <a:avLst/>
+              </a:prstGeom>
+              <a:solidFill>
+                <a:schemeClr val="bg1"/>
+              </a:solidFill>
+              <a:ln>
+                <a:tailEnd type="triangle"/>
+              </a:ln>
+            </p:spPr>
+            <p:style>
+              <a:lnRef idx="2">
+                <a:schemeClr val="dk1"/>
+              </a:lnRef>
+              <a:fillRef idx="0">
+                <a:schemeClr val="dk1"/>
+              </a:fillRef>
+              <a:effectRef idx="1">
+                <a:schemeClr val="dk1"/>
+              </a:effectRef>
+              <a:fontRef idx="minor">
+                <a:schemeClr val="tx1"/>
+              </a:fontRef>
+            </p:style>
+          </p:cxnSp>
+          <p:cxnSp>
+            <p:nvCxnSpPr>
+              <p:cNvPr id="68" name="直線單箭頭接點 67">
+                <a:extLst>
+                  <a:ext uri="{FF2B5EF4-FFF2-40B4-BE49-F238E27FC236}">
+                    <a16:creationId xmlns:a16="http://schemas.microsoft.com/office/drawing/2014/main" id="{C471E3AC-049E-4231-A4DD-08949586D145}"/>
+                  </a:ext>
+                </a:extLst>
+              </p:cNvPr>
+              <p:cNvCxnSpPr>
+                <a:cxnSpLocks/>
+              </p:cNvCxnSpPr>
+              <p:nvPr/>
+            </p:nvCxnSpPr>
+            <p:spPr>
+              <a:xfrm flipV="1">
+                <a:off x="6508390" y="432919"/>
+                <a:ext cx="0" cy="355792"/>
+              </a:xfrm>
+              <a:prstGeom prst="straightConnector1">
+                <a:avLst/>
+              </a:prstGeom>
+              <a:solidFill>
+                <a:schemeClr val="bg1"/>
+              </a:solidFill>
+              <a:ln>
+                <a:tailEnd type="triangle"/>
+              </a:ln>
+            </p:spPr>
+            <p:style>
+              <a:lnRef idx="2">
+                <a:schemeClr val="dk1"/>
+              </a:lnRef>
+              <a:fillRef idx="0">
+                <a:schemeClr val="dk1"/>
+              </a:fillRef>
+              <a:effectRef idx="1">
+                <a:schemeClr val="dk1"/>
+              </a:effectRef>
+              <a:fontRef idx="minor">
+                <a:schemeClr val="tx1"/>
+              </a:fontRef>
+            </p:style>
+          </p:cxnSp>
+          <mc:AlternateContent xmlns:mc="http://schemas.openxmlformats.org/markup-compatibility/2006" xmlns:a14="http://schemas.microsoft.com/office/drawing/2010/main">
+            <mc:Choice Requires="a14">
+              <p:sp>
+                <p:nvSpPr>
+                  <p:cNvPr id="69" name="文字方塊 68">
+                    <a:extLst>
+                      <a:ext uri="{FF2B5EF4-FFF2-40B4-BE49-F238E27FC236}">
+                        <a16:creationId xmlns:a16="http://schemas.microsoft.com/office/drawing/2014/main" id="{E065E39B-4A55-4C1C-9725-9C09934398BF}"/>
+                      </a:ext>
+                    </a:extLst>
+                  </p:cNvPr>
+                  <p:cNvSpPr txBox="1"/>
+                  <p:nvPr/>
+                </p:nvSpPr>
+                <p:spPr>
+                  <a:xfrm>
+                    <a:off x="6747663" y="592473"/>
+                    <a:ext cx="500693" cy="566758"/>
+                  </a:xfrm>
+                  <a:prstGeom prst="rect">
+                    <a:avLst/>
+                  </a:prstGeom>
+                  <a:noFill/>
+                </p:spPr>
+                <p:txBody>
+                  <a:bodyPr wrap="square" rtlCol="0">
+                    <a:spAutoFit/>
+                  </a:bodyPr>
+                  <a:lstStyle/>
+                  <a:p>
+                    <a:pPr/>
+                    <a14:m>
+                      <m:oMathPara xmlns:m="http://schemas.openxmlformats.org/officeDocument/2006/math">
+                        <m:oMathParaPr>
+                          <m:jc m:val="centerGroup"/>
+                        </m:oMathParaPr>
+                        <m:oMath xmlns:m="http://schemas.openxmlformats.org/officeDocument/2006/math">
+                          <m:r>
+                            <a:rPr lang="en-US" altLang="zh-TW" sz="2000" i="1">
+                              <a:latin typeface="Cambria Math" panose="02040503050406030204" pitchFamily="18" charset="0"/>
+                            </a:rPr>
+                            <m:t>𝑥</m:t>
+                          </m:r>
+                        </m:oMath>
+                      </m:oMathPara>
+                    </a14:m>
+                    <a:endParaRPr lang="zh-TW" altLang="en-US" sz="2000" dirty="0">
+                      <a:latin typeface="Times New Roman" panose="02020603050405020304" pitchFamily="18" charset="0"/>
+                      <a:cs typeface="Times New Roman" panose="02020603050405020304" pitchFamily="18" charset="0"/>
+                    </a:endParaRPr>
+                  </a:p>
+                </p:txBody>
+              </p:sp>
+            </mc:Choice>
+            <mc:Fallback xmlns="">
+              <p:sp>
+                <p:nvSpPr>
+                  <p:cNvPr id="69" name="文字方塊 68">
+                    <a:extLst>
+                      <a:ext uri="{FF2B5EF4-FFF2-40B4-BE49-F238E27FC236}">
+                        <a16:creationId xmlns:a16="http://schemas.microsoft.com/office/drawing/2014/main" id="{E065E39B-4A55-4C1C-9725-9C09934398BF}"/>
+                      </a:ext>
+                    </a:extLst>
+                  </p:cNvPr>
+                  <p:cNvSpPr txBox="1">
+                    <a:spLocks noRot="1" noChangeAspect="1" noMove="1" noResize="1" noEditPoints="1" noAdjustHandles="1" noChangeArrowheads="1" noChangeShapeType="1" noTextEdit="1"/>
+                  </p:cNvSpPr>
+                  <p:nvPr/>
+                </p:nvSpPr>
+                <p:spPr>
+                  <a:xfrm>
+                    <a:off x="6747663" y="592473"/>
+                    <a:ext cx="500693" cy="566758"/>
+                  </a:xfrm>
+                  <a:prstGeom prst="rect">
+                    <a:avLst/>
+                  </a:prstGeom>
+                  <a:blipFill>
+                    <a:blip r:embed="rId16"/>
+                    <a:stretch>
+                      <a:fillRect/>
+                    </a:stretch>
+                  </a:blipFill>
+                </p:spPr>
+                <p:txBody>
+                  <a:bodyPr/>
+                  <a:lstStyle/>
+                  <a:p>
+                    <a:r>
+                      <a:rPr lang="zh-TW" altLang="en-US">
+                        <a:noFill/>
+                      </a:rPr>
+                      <a:t> </a:t>
+                    </a:r>
+                  </a:p>
+                </p:txBody>
+              </p:sp>
+            </mc:Fallback>
+          </mc:AlternateContent>
+          <mc:AlternateContent xmlns:mc="http://schemas.openxmlformats.org/markup-compatibility/2006" xmlns:a14="http://schemas.microsoft.com/office/drawing/2010/main">
+            <mc:Choice Requires="a14">
+              <p:sp>
+                <p:nvSpPr>
+                  <p:cNvPr id="70" name="文字方塊 69">
+                    <a:extLst>
+                      <a:ext uri="{FF2B5EF4-FFF2-40B4-BE49-F238E27FC236}">
+                        <a16:creationId xmlns:a16="http://schemas.microsoft.com/office/drawing/2014/main" id="{7E55DF81-5B1D-470B-98DF-CE680CB1E8EE}"/>
+                      </a:ext>
+                    </a:extLst>
+                  </p:cNvPr>
+                  <p:cNvSpPr txBox="1"/>
+                  <p:nvPr/>
+                </p:nvSpPr>
+                <p:spPr>
+                  <a:xfrm>
+                    <a:off x="6281528" y="-41730"/>
+                    <a:ext cx="500693" cy="566758"/>
+                  </a:xfrm>
+                  <a:prstGeom prst="rect">
+                    <a:avLst/>
+                  </a:prstGeom>
+                  <a:noFill/>
+                </p:spPr>
+                <p:txBody>
+                  <a:bodyPr wrap="square" rtlCol="0">
+                    <a:spAutoFit/>
+                  </a:bodyPr>
+                  <a:lstStyle/>
+                  <a:p>
+                    <a:pPr/>
+                    <a14:m>
+                      <m:oMathPara xmlns:m="http://schemas.openxmlformats.org/officeDocument/2006/math">
+                        <m:oMathParaPr>
+                          <m:jc m:val="centerGroup"/>
+                        </m:oMathParaPr>
+                        <m:oMath xmlns:m="http://schemas.openxmlformats.org/officeDocument/2006/math">
+                          <m:r>
+                            <a:rPr lang="en-US" altLang="zh-TW" sz="2000" i="1">
+                              <a:latin typeface="Cambria Math" panose="02040503050406030204" pitchFamily="18" charset="0"/>
+                            </a:rPr>
+                            <m:t>𝑧</m:t>
+                          </m:r>
+                        </m:oMath>
+                      </m:oMathPara>
+                    </a14:m>
+                    <a:endParaRPr lang="zh-TW" altLang="en-US" sz="2000" dirty="0">
+                      <a:latin typeface="Times New Roman" panose="02020603050405020304" pitchFamily="18" charset="0"/>
+                      <a:cs typeface="Times New Roman" panose="02020603050405020304" pitchFamily="18" charset="0"/>
+                    </a:endParaRPr>
+                  </a:p>
+                </p:txBody>
+              </p:sp>
+            </mc:Choice>
+            <mc:Fallback xmlns="">
+              <p:sp>
+                <p:nvSpPr>
+                  <p:cNvPr id="70" name="文字方塊 69">
+                    <a:extLst>
+                      <a:ext uri="{FF2B5EF4-FFF2-40B4-BE49-F238E27FC236}">
+                        <a16:creationId xmlns:a16="http://schemas.microsoft.com/office/drawing/2014/main" id="{7E55DF81-5B1D-470B-98DF-CE680CB1E8EE}"/>
+                      </a:ext>
+                    </a:extLst>
+                  </p:cNvPr>
+                  <p:cNvSpPr txBox="1">
+                    <a:spLocks noRot="1" noChangeAspect="1" noMove="1" noResize="1" noEditPoints="1" noAdjustHandles="1" noChangeArrowheads="1" noChangeShapeType="1" noTextEdit="1"/>
+                  </p:cNvSpPr>
+                  <p:nvPr/>
+                </p:nvSpPr>
+                <p:spPr>
+                  <a:xfrm>
+                    <a:off x="6281528" y="-41730"/>
+                    <a:ext cx="500693" cy="566758"/>
+                  </a:xfrm>
+                  <a:prstGeom prst="rect">
+                    <a:avLst/>
+                  </a:prstGeom>
+                  <a:blipFill>
+                    <a:blip r:embed="rId17"/>
+                    <a:stretch>
+                      <a:fillRect/>
+                    </a:stretch>
+                  </a:blipFill>
+                </p:spPr>
+                <p:txBody>
+                  <a:bodyPr/>
+                  <a:lstStyle/>
+                  <a:p>
+                    <a:r>
+                      <a:rPr lang="zh-TW" altLang="en-US">
+                        <a:noFill/>
+                      </a:rPr>
+                      <a:t> </a:t>
+                    </a:r>
+                  </a:p>
+                </p:txBody>
+              </p:sp>
+            </mc:Fallback>
+          </mc:AlternateContent>
+        </p:grpSp>
+        <p:sp>
+          <p:nvSpPr>
+            <p:cNvPr id="76" name="橢圓 75">
+              <a:extLst>
+                <a:ext uri="{FF2B5EF4-FFF2-40B4-BE49-F238E27FC236}">
+                  <a16:creationId xmlns:a16="http://schemas.microsoft.com/office/drawing/2014/main" id="{99874BD5-0A9D-4A6D-80FA-8D320A783253}"/>
+                </a:ext>
+              </a:extLst>
+            </p:cNvPr>
+            <p:cNvSpPr/>
+            <p:nvPr/>
+          </p:nvSpPr>
+          <p:spPr>
+            <a:xfrm>
+              <a:off x="7180174" y="1172372"/>
+              <a:ext cx="108001" cy="108001"/>
+            </a:xfrm>
+            <a:prstGeom prst="ellipse">
+              <a:avLst/>
+            </a:prstGeom>
+            <a:solidFill>
+              <a:schemeClr val="bg1"/>
+            </a:solidFill>
+            <a:ln w="9525">
+              <a:solidFill>
+                <a:schemeClr val="tx1"/>
+              </a:solidFill>
+            </a:ln>
+          </p:spPr>
+          <p:style>
+            <a:lnRef idx="2">
+              <a:schemeClr val="accent1">
+                <a:shade val="50000"/>
+              </a:schemeClr>
+            </a:lnRef>
+            <a:fillRef idx="1">
+              <a:schemeClr val="accent1"/>
+            </a:fillRef>
+            <a:effectRef idx="0">
+              <a:schemeClr val="accent1"/>
+            </a:effectRef>
+            <a:fontRef idx="minor">
+              <a:schemeClr val="lt1"/>
+            </a:fontRef>
+          </p:style>
+          <p:txBody>
+            <a:bodyPr rot="0" spcFirstLastPara="0" vertOverflow="overflow" horzOverflow="overflow" vert="horz" wrap="square" lIns="74295" tIns="37148" rIns="74295" bIns="37148" numCol="1" spcCol="0" rtlCol="0" fromWordArt="0" anchor="ctr" anchorCtr="0" forceAA="0" compatLnSpc="1">
+              <a:prstTxWarp prst="textNoShape">
+                <a:avLst/>
+              </a:prstTxWarp>
+              <a:noAutofit/>
+            </a:bodyPr>
+            <a:lstStyle/>
+            <a:p>
+              <a:pPr algn="ctr"/>
+              <a:endParaRPr lang="zh-TW" altLang="en-US" sz="2000" dirty="0">
+                <a:latin typeface="Times New Roman" panose="02020603050405020304" pitchFamily="18" charset="0"/>
+                <a:cs typeface="Times New Roman" panose="02020603050405020304" pitchFamily="18" charset="0"/>
+              </a:endParaRPr>
+            </a:p>
+          </p:txBody>
+        </p:sp>
+        <p:sp>
+          <p:nvSpPr>
+            <p:cNvPr id="77" name="乘號 76">
+              <a:extLst>
+                <a:ext uri="{FF2B5EF4-FFF2-40B4-BE49-F238E27FC236}">
+                  <a16:creationId xmlns:a16="http://schemas.microsoft.com/office/drawing/2014/main" id="{FD21A3C2-4C45-4FF7-926A-5DE21AAFEF4F}"/>
+                </a:ext>
+              </a:extLst>
+            </p:cNvPr>
+            <p:cNvSpPr/>
+            <p:nvPr/>
+          </p:nvSpPr>
+          <p:spPr>
+            <a:xfrm>
+              <a:off x="7165846" y="1164431"/>
+              <a:ext cx="136654" cy="123880"/>
+            </a:xfrm>
+            <a:prstGeom prst="mathMultiply">
+              <a:avLst>
+                <a:gd name="adj1" fmla="val 376"/>
+              </a:avLst>
+            </a:prstGeom>
+            <a:solidFill>
+              <a:schemeClr val="tx1"/>
+            </a:solidFill>
+            <a:ln w="6350">
+              <a:solidFill>
+                <a:schemeClr val="tx1"/>
+              </a:solidFill>
+            </a:ln>
+          </p:spPr>
+          <p:style>
+            <a:lnRef idx="2">
+              <a:schemeClr val="accent1">
+                <a:shade val="50000"/>
+              </a:schemeClr>
+            </a:lnRef>
+            <a:fillRef idx="1">
+              <a:schemeClr val="accent1"/>
+            </a:fillRef>
+            <a:effectRef idx="0">
+              <a:schemeClr val="accent1"/>
+            </a:effectRef>
+            <a:fontRef idx="minor">
+              <a:schemeClr val="lt1"/>
+            </a:fontRef>
+          </p:style>
+          <p:txBody>
+            <a:bodyPr rot="0" spcFirstLastPara="0" vertOverflow="overflow" horzOverflow="overflow" vert="horz" wrap="square" lIns="74295" tIns="37148" rIns="74295" bIns="37148" numCol="1" spcCol="0" rtlCol="0" fromWordArt="0" anchor="ctr" anchorCtr="0" forceAA="0" compatLnSpc="1">
+              <a:prstTxWarp prst="textNoShape">
+                <a:avLst/>
+              </a:prstTxWarp>
+              <a:noAutofit/>
+            </a:bodyPr>
+            <a:lstStyle/>
+            <a:p>
+              <a:pPr algn="ctr"/>
+              <a:endParaRPr lang="zh-TW" altLang="en-US" sz="2000" dirty="0">
+                <a:latin typeface="Times New Roman" panose="02020603050405020304" pitchFamily="18" charset="0"/>
+                <a:cs typeface="Times New Roman" panose="02020603050405020304" pitchFamily="18" charset="0"/>
+              </a:endParaRPr>
+            </a:p>
+          </p:txBody>
+        </p:sp>
+        <p:grpSp>
+          <p:nvGrpSpPr>
+            <p:cNvPr id="13" name="群組 12">
+              <a:extLst>
+                <a:ext uri="{FF2B5EF4-FFF2-40B4-BE49-F238E27FC236}">
+                  <a16:creationId xmlns:a16="http://schemas.microsoft.com/office/drawing/2014/main" id="{F50863B7-43C0-41E1-BDE4-A077FED16DAB}"/>
+                </a:ext>
+              </a:extLst>
+            </p:cNvPr>
+            <p:cNvGrpSpPr/>
+            <p:nvPr/>
+          </p:nvGrpSpPr>
+          <p:grpSpPr>
+            <a:xfrm>
+              <a:off x="-43434" y="780429"/>
+              <a:ext cx="6596081" cy="4300514"/>
+              <a:chOff x="1211211" y="524630"/>
+              <a:chExt cx="9984532" cy="6509717"/>
+            </a:xfrm>
+          </p:grpSpPr>
+          <p:sp>
+            <p:nvSpPr>
+              <p:cNvPr id="12" name="矩形 11">
+                <a:extLst>
+                  <a:ext uri="{FF2B5EF4-FFF2-40B4-BE49-F238E27FC236}">
+                    <a16:creationId xmlns:a16="http://schemas.microsoft.com/office/drawing/2014/main" id="{92880606-AA17-462B-82D0-1F146FA2C58A}"/>
+                  </a:ext>
+                </a:extLst>
+              </p:cNvPr>
+              <p:cNvSpPr/>
+              <p:nvPr/>
+            </p:nvSpPr>
+            <p:spPr>
+              <a:xfrm>
+                <a:off x="1535502" y="655608"/>
+                <a:ext cx="9161253" cy="6038490"/>
+              </a:xfrm>
+              <a:prstGeom prst="rect">
+                <a:avLst/>
+              </a:prstGeom>
+              <a:solidFill>
+                <a:schemeClr val="bg1"/>
+              </a:solidFill>
+              <a:ln>
+                <a:noFill/>
+              </a:ln>
+            </p:spPr>
+            <p:style>
+              <a:lnRef idx="2">
+                <a:schemeClr val="accent1">
+                  <a:shade val="50000"/>
+                </a:schemeClr>
+              </a:lnRef>
+              <a:fillRef idx="1">
+                <a:schemeClr val="accent1"/>
+              </a:fillRef>
+              <a:effectRef idx="0">
+                <a:schemeClr val="accent1"/>
+              </a:effectRef>
+              <a:fontRef idx="minor">
+                <a:schemeClr val="lt1"/>
+              </a:fontRef>
+            </p:style>
+            <p:txBody>
+              <a:bodyPr rtlCol="0" anchor="ctr"/>
+              <a:lstStyle/>
+              <a:p>
+                <a:pPr algn="ctr"/>
+                <a:endParaRPr lang="zh-TW" altLang="en-US" sz="2000">
+                  <a:latin typeface="Times New Roman" panose="02020603050405020304" pitchFamily="18" charset="0"/>
+                  <a:cs typeface="Times New Roman" panose="02020603050405020304" pitchFamily="18" charset="0"/>
+                </a:endParaRPr>
+              </a:p>
+            </p:txBody>
+          </p:sp>
+          <p:pic>
+            <p:nvPicPr>
+              <p:cNvPr id="6" name="圖片 5">
+                <a:extLst>
+                  <a:ext uri="{FF2B5EF4-FFF2-40B4-BE49-F238E27FC236}">
+                    <a16:creationId xmlns:a16="http://schemas.microsoft.com/office/drawing/2014/main" id="{C19DBC62-3059-4DD9-BB31-B2E00EBCC63F}"/>
+                  </a:ext>
+                </a:extLst>
+              </p:cNvPr>
+              <p:cNvPicPr>
+                <a:picLocks noChangeAspect="1"/>
+              </p:cNvPicPr>
+              <p:nvPr/>
+            </p:nvPicPr>
+            <p:blipFill rotWithShape="1">
+              <a:blip r:embed="rId18">
+                <a:extLst>
+                  <a:ext uri="{28A0092B-C50C-407E-A947-70E740481C1C}">
+                    <a14:useLocalDpi xmlns:a14="http://schemas.microsoft.com/office/drawing/2010/main" val="0"/>
+                  </a:ext>
+                </a:extLst>
+              </a:blip>
+              <a:srcRect l="3293" t="7368"/>
+              <a:stretch/>
+            </p:blipFill>
+            <p:spPr>
+              <a:xfrm>
+                <a:off x="1915063" y="1053110"/>
+                <a:ext cx="9089276" cy="5981237"/>
+              </a:xfrm>
+              <a:prstGeom prst="rect">
+                <a:avLst/>
+              </a:prstGeom>
+            </p:spPr>
+          </p:pic>
+          <p:sp>
+            <p:nvSpPr>
+              <p:cNvPr id="7" name="文字方塊 6">
+                <a:extLst>
+                  <a:ext uri="{FF2B5EF4-FFF2-40B4-BE49-F238E27FC236}">
+                    <a16:creationId xmlns:a16="http://schemas.microsoft.com/office/drawing/2014/main" id="{D73DE3EC-6A51-412D-B4BF-FC0F69DF4AB8}"/>
+                  </a:ext>
+                </a:extLst>
+              </p:cNvPr>
+              <p:cNvSpPr txBox="1"/>
+              <p:nvPr/>
+            </p:nvSpPr>
+            <p:spPr>
+              <a:xfrm>
+                <a:off x="2238161" y="524630"/>
+                <a:ext cx="1477932" cy="768707"/>
+              </a:xfrm>
+              <a:prstGeom prst="rect">
+                <a:avLst/>
+              </a:prstGeom>
+              <a:noFill/>
+            </p:spPr>
+            <p:txBody>
+              <a:bodyPr wrap="square" rtlCol="0">
+                <a:spAutoFit/>
+              </a:bodyPr>
+              <a:lstStyle/>
+              <a:p>
+                <a:pPr algn="ctr"/>
+                <a:r>
+                  <a:rPr lang="en-US" altLang="zh-TW" sz="2700" dirty="0">
+                    <a:latin typeface="Times New Roman" panose="02020603050405020304" pitchFamily="18" charset="0"/>
+                    <a:cs typeface="Times New Roman" panose="02020603050405020304" pitchFamily="18" charset="0"/>
+                  </a:rPr>
+                  <a:t>Bulk</a:t>
+                </a:r>
+                <a:endParaRPr lang="zh-TW" altLang="en-US" sz="2700" dirty="0">
+                  <a:latin typeface="Times New Roman" panose="02020603050405020304" pitchFamily="18" charset="0"/>
+                  <a:cs typeface="Times New Roman" panose="02020603050405020304" pitchFamily="18" charset="0"/>
+                </a:endParaRPr>
+              </a:p>
+            </p:txBody>
+          </p:sp>
+          <p:sp>
+            <p:nvSpPr>
+              <p:cNvPr id="8" name="文字方塊 7">
+                <a:extLst>
+                  <a:ext uri="{FF2B5EF4-FFF2-40B4-BE49-F238E27FC236}">
+                    <a16:creationId xmlns:a16="http://schemas.microsoft.com/office/drawing/2014/main" id="{59692366-D237-4840-90EC-D60BC3D25066}"/>
+                  </a:ext>
+                </a:extLst>
+              </p:cNvPr>
+              <p:cNvSpPr txBox="1"/>
+              <p:nvPr/>
+            </p:nvSpPr>
+            <p:spPr>
+              <a:xfrm>
+                <a:off x="3861478" y="524630"/>
+                <a:ext cx="2814223" cy="768707"/>
+              </a:xfrm>
+              <a:prstGeom prst="rect">
+                <a:avLst/>
+              </a:prstGeom>
+              <a:noFill/>
+            </p:spPr>
+            <p:txBody>
+              <a:bodyPr wrap="square" rtlCol="0">
+                <a:spAutoFit/>
+              </a:bodyPr>
+              <a:lstStyle/>
+              <a:p>
+                <a:pPr algn="ctr"/>
+                <a:r>
+                  <a:rPr lang="en-US" altLang="zh-TW" sz="2700" dirty="0" err="1">
+                    <a:latin typeface="Times New Roman" panose="02020603050405020304" pitchFamily="18" charset="0"/>
+                    <a:cs typeface="Times New Roman" panose="02020603050405020304" pitchFamily="18" charset="0"/>
+                  </a:rPr>
+                  <a:t>Quadrilayer</a:t>
+                </a:r>
+                <a:endParaRPr lang="zh-TW" altLang="en-US" sz="2700" dirty="0">
+                  <a:latin typeface="Times New Roman" panose="02020603050405020304" pitchFamily="18" charset="0"/>
+                  <a:cs typeface="Times New Roman" panose="02020603050405020304" pitchFamily="18" charset="0"/>
+                </a:endParaRPr>
+              </a:p>
+            </p:txBody>
+          </p:sp>
+          <p:sp>
+            <p:nvSpPr>
+              <p:cNvPr id="9" name="文字方塊 8">
+                <a:extLst>
+                  <a:ext uri="{FF2B5EF4-FFF2-40B4-BE49-F238E27FC236}">
+                    <a16:creationId xmlns:a16="http://schemas.microsoft.com/office/drawing/2014/main" id="{0BDB668E-1E46-40E1-BDD6-8ED8D59CBC1E}"/>
+                  </a:ext>
+                </a:extLst>
+              </p:cNvPr>
+              <p:cNvSpPr txBox="1"/>
+              <p:nvPr/>
+            </p:nvSpPr>
+            <p:spPr>
+              <a:xfrm>
+                <a:off x="6568991" y="524630"/>
+                <a:ext cx="2214108" cy="768707"/>
+              </a:xfrm>
+              <a:prstGeom prst="rect">
+                <a:avLst/>
+              </a:prstGeom>
+              <a:noFill/>
+            </p:spPr>
+            <p:txBody>
+              <a:bodyPr wrap="square" rtlCol="0">
+                <a:spAutoFit/>
+              </a:bodyPr>
+              <a:lstStyle/>
+              <a:p>
+                <a:pPr algn="ctr"/>
+                <a:r>
+                  <a:rPr lang="en-US" altLang="zh-TW" sz="2700" dirty="0">
+                    <a:latin typeface="Times New Roman" panose="02020603050405020304" pitchFamily="18" charset="0"/>
+                    <a:cs typeface="Times New Roman" panose="02020603050405020304" pitchFamily="18" charset="0"/>
+                  </a:rPr>
+                  <a:t>Bilayer</a:t>
+                </a:r>
+                <a:endParaRPr lang="zh-TW" altLang="en-US" sz="2700" dirty="0">
+                  <a:latin typeface="Times New Roman" panose="02020603050405020304" pitchFamily="18" charset="0"/>
+                  <a:cs typeface="Times New Roman" panose="02020603050405020304" pitchFamily="18" charset="0"/>
+                </a:endParaRPr>
+              </a:p>
+            </p:txBody>
+          </p:sp>
+          <p:sp>
+            <p:nvSpPr>
+              <p:cNvPr id="10" name="文字方塊 9">
+                <a:extLst>
+                  <a:ext uri="{FF2B5EF4-FFF2-40B4-BE49-F238E27FC236}">
+                    <a16:creationId xmlns:a16="http://schemas.microsoft.com/office/drawing/2014/main" id="{D9E8E7A6-99BD-4EDE-B9AC-66C93843D161}"/>
+                  </a:ext>
+                </a:extLst>
+              </p:cNvPr>
+              <p:cNvSpPr txBox="1"/>
+              <p:nvPr/>
+            </p:nvSpPr>
+            <p:spPr>
+              <a:xfrm>
+                <a:off x="8530360" y="524630"/>
+                <a:ext cx="2665383" cy="768707"/>
+              </a:xfrm>
+              <a:prstGeom prst="rect">
+                <a:avLst/>
+              </a:prstGeom>
+              <a:noFill/>
+            </p:spPr>
+            <p:txBody>
+              <a:bodyPr wrap="square" rtlCol="0">
+                <a:spAutoFit/>
+              </a:bodyPr>
+              <a:lstStyle/>
+              <a:p>
+                <a:pPr algn="ctr"/>
+                <a:r>
+                  <a:rPr lang="en-US" altLang="zh-TW" sz="2700" dirty="0">
+                    <a:latin typeface="Times New Roman" panose="02020603050405020304" pitchFamily="18" charset="0"/>
+                    <a:cs typeface="Times New Roman" panose="02020603050405020304" pitchFamily="18" charset="0"/>
+                  </a:rPr>
+                  <a:t>Monolayer</a:t>
+                </a:r>
+                <a:endParaRPr lang="zh-TW" altLang="en-US" sz="2700" dirty="0">
+                  <a:latin typeface="Times New Roman" panose="02020603050405020304" pitchFamily="18" charset="0"/>
+                  <a:cs typeface="Times New Roman" panose="02020603050405020304" pitchFamily="18" charset="0"/>
+                </a:endParaRPr>
+              </a:p>
+            </p:txBody>
+          </p:sp>
+          <p:sp>
+            <p:nvSpPr>
+              <p:cNvPr id="11" name="文字方塊 10">
+                <a:extLst>
+                  <a:ext uri="{FF2B5EF4-FFF2-40B4-BE49-F238E27FC236}">
+                    <a16:creationId xmlns:a16="http://schemas.microsoft.com/office/drawing/2014/main" id="{CC849950-3412-4CFB-83BE-CD1FDB918AD8}"/>
+                  </a:ext>
+                </a:extLst>
+              </p:cNvPr>
+              <p:cNvSpPr txBox="1"/>
+              <p:nvPr/>
+            </p:nvSpPr>
+            <p:spPr>
+              <a:xfrm rot="16200000">
+                <a:off x="555653" y="2836802"/>
+                <a:ext cx="2079824" cy="768707"/>
+              </a:xfrm>
+              <a:prstGeom prst="rect">
+                <a:avLst/>
+              </a:prstGeom>
+              <a:noFill/>
+            </p:spPr>
+            <p:txBody>
+              <a:bodyPr wrap="square" rtlCol="0">
+                <a:spAutoFit/>
+              </a:bodyPr>
+              <a:lstStyle/>
+              <a:p>
+                <a:r>
+                  <a:rPr lang="en-US" altLang="zh-TW" sz="2700" dirty="0">
+                    <a:latin typeface="Times New Roman" panose="02020603050405020304" pitchFamily="18" charset="0"/>
+                    <a:cs typeface="Times New Roman" panose="02020603050405020304" pitchFamily="18" charset="0"/>
+                  </a:rPr>
+                  <a:t>Energy</a:t>
+                </a:r>
+                <a:endParaRPr lang="zh-TW" altLang="en-US" sz="2700" dirty="0">
+                  <a:latin typeface="Times New Roman" panose="02020603050405020304" pitchFamily="18" charset="0"/>
+                  <a:cs typeface="Times New Roman" panose="02020603050405020304" pitchFamily="18" charset="0"/>
+                </a:endParaRPr>
+              </a:p>
+            </p:txBody>
+          </p:sp>
+        </p:grpSp>
+      </p:grpSp>
+    </p:spTree>
+    <p:extLst>
+      <p:ext uri="{BB962C8B-B14F-4D97-AF65-F5344CB8AC3E}">
+        <p14:creationId xmlns:p14="http://schemas.microsoft.com/office/powerpoint/2010/main" val="815942946"/>
+      </p:ext>
+    </p:extLst>
+  </p:cSld>
+  <p:clrMapOvr>
+    <a:masterClrMapping/>
+  </p:clrMapOvr>
+</p:sld>
+</file>
+
 <file path=ppt/theme/theme1.xml><?xml version="1.0" encoding="utf-8"?>
 <a:theme xmlns:a="http://schemas.openxmlformats.org/drawingml/2006/main" name="Office 佈景主題">
   <a:themeElements>
